--- a/presentations/commercial/fr/commercial.fr.pptx
+++ b/presentations/commercial/fr/commercial.fr.pptx
@@ -2895,7 +2895,7 @@
                 <a:ea typeface="IBM Plex Mono" pitchFamily="34" charset="-122"/>
                 <a:cs typeface="IBM Plex Mono" pitchFamily="34" charset="-120"/>
               </a:rPr>
-              <a:t>OFFRES</a:t>
+              <a:t>VERDICT — OFFRE PREMIUM</a:t>
             </a:r>
             <a:endParaRPr lang="en-US" sz="1000" dirty="0"/>
           </a:p>
@@ -2937,7 +2937,7 @@
                 <a:ea typeface="Fraunces" pitchFamily="34" charset="-122"/>
                 <a:cs typeface="Fraunces" pitchFamily="34" charset="-120"/>
               </a:rPr>
-              <a:t>Trois niveaux de lecture</a:t>
+              <a:t>Passer du diagnostic à l’arbitrage</a:t>
             </a:r>
             <a:endParaRPr lang="en-US" sz="3400" dirty="0"/>
           </a:p>
@@ -2945,39 +2945,14 @@
       </p:sp>
       <p:sp>
         <p:nvSpPr>
-          <p:cNvPr id="4" name="Shape 2"/>
-          <p:cNvSpPr/>
-          <p:nvPr/>
-        </p:nvSpPr>
-        <p:spPr>
-          <a:xfrm>
-            <a:off x="658368" y="2446020"/>
-            <a:ext cx="3404616" cy="3063240"/>
-          </a:xfrm>
-          <a:prstGeom prst="rect">
-            <a:avLst/>
-          </a:prstGeom>
-          <a:solidFill>
-            <a:srgbClr val="F4F6F8"/>
-          </a:solidFill>
-          <a:ln w="12700">
-            <a:solidFill>
-              <a:srgbClr val="D3DBE1"/>
-            </a:solidFill>
-            <a:prstDash val="solid"/>
-          </a:ln>
-        </p:spPr>
-      </p:sp>
-      <p:sp>
-        <p:nvSpPr>
-          <p:cNvPr id="5" name="Text 3"/>
-          <p:cNvSpPr/>
-          <p:nvPr/>
-        </p:nvSpPr>
-        <p:spPr>
-          <a:xfrm>
-            <a:off x="969264" y="2756916"/>
-            <a:ext cx="2782824" cy="237744"/>
+          <p:cNvPr id="4" name="Text 2"/>
+          <p:cNvSpPr/>
+          <p:nvPr/>
+        </p:nvSpPr>
+        <p:spPr>
+          <a:xfrm>
+            <a:off x="658368" y="2194560"/>
+            <a:ext cx="8778240" cy="3566160"/>
           </a:xfrm>
           <a:prstGeom prst="rect">
             <a:avLst/>
@@ -2986,525 +2961,104 @@
           <a:ln/>
         </p:spPr>
         <p:txBody>
-          <a:bodyPr wrap="square" lIns="0" tIns="0" rIns="0" bIns="0" rtlCol="0" anchor="ctr"/>
-          <a:lstStyle/>
-          <a:p>
-            <a:pPr indent="0" marL="0">
-              <a:buNone/>
+          <a:bodyPr wrap="square" lIns="0" tIns="0" rIns="0" bIns="0" rtlCol="0" anchor="t"/>
+          <a:lstStyle/>
+          <a:p>
+            <a:pPr marL="279400" indent="-279400">
+              <a:spcAft>
+                <a:spcPts val="1100"/>
+              </a:spcAft>
+              <a:buSzPct val="100000"/>
+              <a:buChar char="◊"/>
             </a:pPr>
             <a:r>
-              <a:rPr lang="en-US" sz="1000" spc="140" kern="0" dirty="0">
-                <a:solidFill>
-                  <a:srgbClr val="5C6875"/>
-                </a:solidFill>
-                <a:latin typeface="IBM Plex Mono" pitchFamily="34" charset="0"/>
-                <a:ea typeface="IBM Plex Mono" pitchFamily="34" charset="-122"/>
-                <a:cs typeface="IBM Plex Mono" pitchFamily="34" charset="-120"/>
-              </a:rPr>
-              <a:t>INFORMER</a:t>
-            </a:r>
-            <a:endParaRPr lang="en-US" sz="1000" dirty="0"/>
-          </a:p>
-        </p:txBody>
-      </p:sp>
-      <p:sp>
-        <p:nvSpPr>
-          <p:cNvPr id="6" name="Text 4"/>
-          <p:cNvSpPr/>
-          <p:nvPr/>
-        </p:nvSpPr>
-        <p:spPr>
-          <a:xfrm>
-            <a:off x="969264" y="3086100"/>
-            <a:ext cx="2782824" cy="548640"/>
-          </a:xfrm>
-          <a:prstGeom prst="rect">
-            <a:avLst/>
-          </a:prstGeom>
-          <a:noFill/>
-          <a:ln/>
-        </p:spPr>
-        <p:txBody>
-          <a:bodyPr wrap="square" lIns="0" tIns="0" rIns="0" bIns="0" rtlCol="0" anchor="t"/>
-          <a:lstStyle/>
-          <a:p>
-            <a:pPr indent="0" marL="0">
-              <a:buNone/>
-            </a:pPr>
-            <a:r>
-              <a:rPr lang="en-US" sz="2600" b="1" dirty="0">
+              <a:rPr lang="en-US" sz="1500" dirty="0">
                 <a:solidFill>
                   <a:srgbClr val="141C26"/>
-                </a:solidFill>
-                <a:latin typeface="Fraunces" pitchFamily="34" charset="0"/>
-                <a:ea typeface="Fraunces" pitchFamily="34" charset="-122"/>
-                <a:cs typeface="Fraunces" pitchFamily="34" charset="-120"/>
-              </a:rPr>
-              <a:t>Basic</a:t>
-            </a:r>
-            <a:endParaRPr lang="en-US" sz="2600" dirty="0"/>
-          </a:p>
-        </p:txBody>
-      </p:sp>
-      <p:sp>
-        <p:nvSpPr>
-          <p:cNvPr id="7" name="Text 5"/>
-          <p:cNvSpPr/>
-          <p:nvPr/>
-        </p:nvSpPr>
-        <p:spPr>
-          <a:xfrm>
-            <a:off x="969264" y="3762756"/>
-            <a:ext cx="2782824" cy="365760"/>
-          </a:xfrm>
-          <a:prstGeom prst="rect">
-            <a:avLst/>
-          </a:prstGeom>
-          <a:noFill/>
-          <a:ln/>
-        </p:spPr>
-        <p:txBody>
-          <a:bodyPr wrap="square" lIns="0" tIns="0" rIns="0" bIns="0" rtlCol="0" anchor="ctr"/>
-          <a:lstStyle/>
-          <a:p>
-            <a:pPr indent="0" marL="0">
-              <a:buNone/>
-            </a:pPr>
-            <a:r>
-              <a:rPr lang="en-US" sz="1500" b="1" dirty="0">
-                <a:solidFill>
-                  <a:srgbClr val="0F3C4E"/>
-                </a:solidFill>
-                <a:latin typeface="IBM Plex Mono" pitchFamily="34" charset="0"/>
-                <a:ea typeface="IBM Plex Mono" pitchFamily="34" charset="-122"/>
-                <a:cs typeface="IBM Plex Mono" pitchFamily="34" charset="-120"/>
-              </a:rPr>
-              <a:t>19–49 €/mois</a:t>
-            </a:r>
-            <a:endParaRPr lang="en-US" sz="1500" dirty="0"/>
-          </a:p>
-        </p:txBody>
-      </p:sp>
-      <p:sp>
-        <p:nvSpPr>
-          <p:cNvPr id="8" name="Text 6"/>
-          <p:cNvSpPr/>
-          <p:nvPr/>
-        </p:nvSpPr>
-        <p:spPr>
-          <a:xfrm>
-            <a:off x="969264" y="4274820"/>
-            <a:ext cx="2782824" cy="914400"/>
-          </a:xfrm>
-          <a:prstGeom prst="rect">
-            <a:avLst/>
-          </a:prstGeom>
-          <a:noFill/>
-          <a:ln/>
-        </p:spPr>
-        <p:txBody>
-          <a:bodyPr wrap="square" lIns="0" tIns="0" rIns="0" bIns="0" rtlCol="0" anchor="t"/>
-          <a:lstStyle/>
-          <a:p>
-            <a:pPr indent="0" marL="0">
-              <a:lnSpc>
-                <a:spcPct val="125000"/>
-              </a:lnSpc>
-              <a:buNone/>
-            </a:pPr>
-            <a:r>
-              <a:rPr lang="en-US" sz="1300" dirty="0">
-                <a:solidFill>
-                  <a:srgbClr val="5C6875"/>
                 </a:solidFill>
                 <a:latin typeface="Inter" pitchFamily="34" charset="0"/>
                 <a:ea typeface="Inter" pitchFamily="34" charset="-122"/>
                 <a:cs typeface="Inter" pitchFamily="34" charset="-120"/>
               </a:rPr>
-              <a:t>Comprendre les corridors, les flux et les vulnérabilités.</a:t>
-            </a:r>
-            <a:endParaRPr lang="en-US" sz="1300" dirty="0"/>
-          </a:p>
-        </p:txBody>
-      </p:sp>
-      <p:sp>
-        <p:nvSpPr>
-          <p:cNvPr id="9" name="Shape 7"/>
-          <p:cNvSpPr/>
-          <p:nvPr/>
-        </p:nvSpPr>
-        <p:spPr>
-          <a:xfrm>
-            <a:off x="4392168" y="2446020"/>
-            <a:ext cx="3404616" cy="3063240"/>
-          </a:xfrm>
-          <a:prstGeom prst="rect">
-            <a:avLst/>
-          </a:prstGeom>
-          <a:solidFill>
-            <a:srgbClr val="FCFDFE"/>
-          </a:solidFill>
-          <a:ln w="22225">
-            <a:solidFill>
-              <a:srgbClr val="0F3C4E"/>
-            </a:solidFill>
-            <a:prstDash val="solid"/>
-          </a:ln>
-        </p:spPr>
-      </p:sp>
-      <p:sp>
-        <p:nvSpPr>
-          <p:cNvPr id="10" name="Text 8"/>
-          <p:cNvSpPr/>
-          <p:nvPr/>
-        </p:nvSpPr>
-        <p:spPr>
-          <a:xfrm>
-            <a:off x="4703064" y="2756916"/>
-            <a:ext cx="2782824" cy="237744"/>
-          </a:xfrm>
-          <a:prstGeom prst="rect">
-            <a:avLst/>
-          </a:prstGeom>
-          <a:noFill/>
-          <a:ln/>
-        </p:spPr>
-        <p:txBody>
-          <a:bodyPr wrap="square" lIns="0" tIns="0" rIns="0" bIns="0" rtlCol="0" anchor="ctr"/>
-          <a:lstStyle/>
-          <a:p>
-            <a:pPr indent="0" marL="0">
-              <a:buNone/>
+              <a:t>Sept temps V·E·R·D·I·C·T, de « voir la situation réelle » à la décision tenue.</a:t>
+            </a:r>
+            <a:endParaRPr lang="en-US" sz="1500" dirty="0"/>
+          </a:p>
+          <a:p>
+            <a:pPr marL="279400" indent="-279400">
+              <a:spcAft>
+                <a:spcPts val="1100"/>
+              </a:spcAft>
+              <a:buSzPct val="100000"/>
+              <a:buChar char="◊"/>
             </a:pPr>
             <a:r>
-              <a:rPr lang="en-US" sz="1000" spc="140" kern="0" dirty="0">
-                <a:solidFill>
-                  <a:srgbClr val="C8282C"/>
-                </a:solidFill>
-                <a:latin typeface="IBM Plex Mono" pitchFamily="34" charset="0"/>
-                <a:ea typeface="IBM Plex Mono" pitchFamily="34" charset="-122"/>
-                <a:cs typeface="IBM Plex Mono" pitchFamily="34" charset="-120"/>
-              </a:rPr>
-              <a:t>SURVEILLER</a:t>
-            </a:r>
-            <a:endParaRPr lang="en-US" sz="1000" dirty="0"/>
-          </a:p>
-        </p:txBody>
-      </p:sp>
-      <p:sp>
-        <p:nvSpPr>
-          <p:cNvPr id="11" name="Text 9"/>
-          <p:cNvSpPr/>
-          <p:nvPr/>
-        </p:nvSpPr>
-        <p:spPr>
-          <a:xfrm>
-            <a:off x="4703064" y="3086100"/>
-            <a:ext cx="2782824" cy="548640"/>
-          </a:xfrm>
-          <a:prstGeom prst="rect">
-            <a:avLst/>
-          </a:prstGeom>
-          <a:noFill/>
-          <a:ln/>
-        </p:spPr>
-        <p:txBody>
-          <a:bodyPr wrap="square" lIns="0" tIns="0" rIns="0" bIns="0" rtlCol="0" anchor="t"/>
-          <a:lstStyle/>
-          <a:p>
-            <a:pPr indent="0" marL="0">
-              <a:buNone/>
-            </a:pPr>
-            <a:r>
-              <a:rPr lang="en-US" sz="2600" b="1" dirty="0">
+              <a:rPr lang="en-US" sz="1500" dirty="0">
                 <a:solidFill>
                   <a:srgbClr val="141C26"/>
-                </a:solidFill>
-                <a:latin typeface="Fraunces" pitchFamily="34" charset="0"/>
-                <a:ea typeface="Fraunces" pitchFamily="34" charset="-122"/>
-                <a:cs typeface="Fraunces" pitchFamily="34" charset="-120"/>
-              </a:rPr>
-              <a:t>Standard</a:t>
-            </a:r>
-            <a:endParaRPr lang="en-US" sz="2600" dirty="0"/>
-          </a:p>
-        </p:txBody>
-      </p:sp>
-      <p:sp>
-        <p:nvSpPr>
-          <p:cNvPr id="12" name="Text 10"/>
-          <p:cNvSpPr/>
-          <p:nvPr/>
-        </p:nvSpPr>
-        <p:spPr>
-          <a:xfrm>
-            <a:off x="4703064" y="3762756"/>
-            <a:ext cx="2782824" cy="365760"/>
-          </a:xfrm>
-          <a:prstGeom prst="rect">
-            <a:avLst/>
-          </a:prstGeom>
-          <a:noFill/>
-          <a:ln/>
-        </p:spPr>
-        <p:txBody>
-          <a:bodyPr wrap="square" lIns="0" tIns="0" rIns="0" bIns="0" rtlCol="0" anchor="ctr"/>
-          <a:lstStyle/>
-          <a:p>
-            <a:pPr indent="0" marL="0">
-              <a:buNone/>
-            </a:pPr>
-            <a:r>
-              <a:rPr lang="en-US" sz="1500" b="1" dirty="0">
-                <a:solidFill>
-                  <a:srgbClr val="0F3C4E"/>
-                </a:solidFill>
-                <a:latin typeface="IBM Plex Mono" pitchFamily="34" charset="0"/>
-                <a:ea typeface="IBM Plex Mono" pitchFamily="34" charset="-122"/>
-                <a:cs typeface="IBM Plex Mono" pitchFamily="34" charset="-120"/>
-              </a:rPr>
-              <a:t>199–799 €/mois</a:t>
-            </a:r>
-            <a:endParaRPr lang="en-US" sz="1500" dirty="0"/>
-          </a:p>
-        </p:txBody>
-      </p:sp>
-      <p:sp>
-        <p:nvSpPr>
-          <p:cNvPr id="13" name="Text 11"/>
-          <p:cNvSpPr/>
-          <p:nvPr/>
-        </p:nvSpPr>
-        <p:spPr>
-          <a:xfrm>
-            <a:off x="4703064" y="4274820"/>
-            <a:ext cx="2782824" cy="914400"/>
-          </a:xfrm>
-          <a:prstGeom prst="rect">
-            <a:avLst/>
-          </a:prstGeom>
-          <a:noFill/>
-          <a:ln/>
-        </p:spPr>
-        <p:txBody>
-          <a:bodyPr wrap="square" lIns="0" tIns="0" rIns="0" bIns="0" rtlCol="0" anchor="t"/>
-          <a:lstStyle/>
-          <a:p>
-            <a:pPr indent="0" marL="0">
-              <a:lnSpc>
-                <a:spcPct val="125000"/>
-              </a:lnSpc>
-              <a:buNone/>
-            </a:pPr>
-            <a:r>
-              <a:rPr lang="en-US" sz="1300" dirty="0">
-                <a:solidFill>
-                  <a:srgbClr val="5C6875"/>
                 </a:solidFill>
                 <a:latin typeface="Inter" pitchFamily="34" charset="0"/>
                 <a:ea typeface="Inter" pitchFamily="34" charset="-122"/>
                 <a:cs typeface="Inter" pitchFamily="34" charset="-120"/>
               </a:rPr>
-              <a:t>Suivre les signaux, les scores et les évolutions.</a:t>
-            </a:r>
-            <a:endParaRPr lang="en-US" sz="1300" dirty="0"/>
-          </a:p>
-        </p:txBody>
-      </p:sp>
-      <p:sp>
-        <p:nvSpPr>
-          <p:cNvPr id="14" name="Shape 12"/>
-          <p:cNvSpPr/>
-          <p:nvPr/>
-        </p:nvSpPr>
-        <p:spPr>
-          <a:xfrm>
-            <a:off x="8125968" y="2446020"/>
-            <a:ext cx="3404616" cy="3063240"/>
-          </a:xfrm>
-          <a:prstGeom prst="rect">
-            <a:avLst/>
-          </a:prstGeom>
-          <a:solidFill>
-            <a:srgbClr val="F4F6F8"/>
-          </a:solidFill>
-          <a:ln w="12700">
-            <a:solidFill>
-              <a:srgbClr val="D3DBE1"/>
-            </a:solidFill>
-            <a:prstDash val="solid"/>
-          </a:ln>
-        </p:spPr>
-      </p:sp>
-      <p:sp>
-        <p:nvSpPr>
-          <p:cNvPr id="15" name="Text 13"/>
-          <p:cNvSpPr/>
-          <p:nvPr/>
-        </p:nvSpPr>
-        <p:spPr>
-          <a:xfrm>
-            <a:off x="8436864" y="2756916"/>
-            <a:ext cx="2782824" cy="237744"/>
-          </a:xfrm>
-          <a:prstGeom prst="rect">
-            <a:avLst/>
-          </a:prstGeom>
-          <a:noFill/>
-          <a:ln/>
-        </p:spPr>
-        <p:txBody>
-          <a:bodyPr wrap="square" lIns="0" tIns="0" rIns="0" bIns="0" rtlCol="0" anchor="ctr"/>
-          <a:lstStyle/>
-          <a:p>
-            <a:pPr indent="0" marL="0">
-              <a:buNone/>
+              <a:t>Au moins trois options obligatoires : la principale, une alternative minimale, et l’opposée ou la non-action.</a:t>
+            </a:r>
+            <a:endParaRPr lang="en-US" sz="1500" dirty="0"/>
+          </a:p>
+          <a:p>
+            <a:pPr marL="279400" indent="-279400">
+              <a:spcAft>
+                <a:spcPts val="1100"/>
+              </a:spcAft>
+              <a:buSzPct val="100000"/>
+              <a:buChar char="◊"/>
             </a:pPr>
             <a:r>
-              <a:rPr lang="en-US" sz="1000" spc="140" kern="0" dirty="0">
-                <a:solidFill>
-                  <a:srgbClr val="5C6875"/>
-                </a:solidFill>
-                <a:latin typeface="IBM Plex Mono" pitchFamily="34" charset="0"/>
-                <a:ea typeface="IBM Plex Mono" pitchFamily="34" charset="-122"/>
-                <a:cs typeface="IBM Plex Mono" pitchFamily="34" charset="-120"/>
-              </a:rPr>
-              <a:t>ARBITRER</a:t>
-            </a:r>
-            <a:endParaRPr lang="en-US" sz="1000" dirty="0"/>
-          </a:p>
-        </p:txBody>
-      </p:sp>
-      <p:sp>
-        <p:nvSpPr>
-          <p:cNvPr id="16" name="Text 14"/>
-          <p:cNvSpPr/>
-          <p:nvPr/>
-        </p:nvSpPr>
-        <p:spPr>
-          <a:xfrm>
-            <a:off x="8436864" y="3086100"/>
-            <a:ext cx="2782824" cy="548640"/>
-          </a:xfrm>
-          <a:prstGeom prst="rect">
-            <a:avLst/>
-          </a:prstGeom>
-          <a:noFill/>
-          <a:ln/>
-        </p:spPr>
-        <p:txBody>
-          <a:bodyPr wrap="square" lIns="0" tIns="0" rIns="0" bIns="0" rtlCol="0" anchor="t"/>
-          <a:lstStyle/>
-          <a:p>
-            <a:pPr indent="0" marL="0">
-              <a:buNone/>
-            </a:pPr>
-            <a:r>
-              <a:rPr lang="en-US" sz="2600" b="1" dirty="0">
+              <a:rPr lang="en-US" sz="1500" dirty="0">
                 <a:solidFill>
                   <a:srgbClr val="141C26"/>
-                </a:solidFill>
-                <a:latin typeface="Fraunces" pitchFamily="34" charset="0"/>
-                <a:ea typeface="Fraunces" pitchFamily="34" charset="-122"/>
-                <a:cs typeface="Fraunces" pitchFamily="34" charset="-120"/>
-              </a:rPr>
-              <a:t>Premium</a:t>
-            </a:r>
-            <a:endParaRPr lang="en-US" sz="2600" dirty="0"/>
-          </a:p>
-        </p:txBody>
-      </p:sp>
-      <p:sp>
-        <p:nvSpPr>
-          <p:cNvPr id="17" name="Text 15"/>
-          <p:cNvSpPr/>
-          <p:nvPr/>
-        </p:nvSpPr>
-        <p:spPr>
-          <a:xfrm>
-            <a:off x="8436864" y="3762756"/>
-            <a:ext cx="2782824" cy="365760"/>
-          </a:xfrm>
-          <a:prstGeom prst="rect">
-            <a:avLst/>
-          </a:prstGeom>
-          <a:noFill/>
-          <a:ln/>
-        </p:spPr>
-        <p:txBody>
-          <a:bodyPr wrap="square" lIns="0" tIns="0" rIns="0" bIns="0" rtlCol="0" anchor="ctr"/>
-          <a:lstStyle/>
-          <a:p>
-            <a:pPr indent="0" marL="0">
-              <a:buNone/>
-            </a:pPr>
-            <a:r>
-              <a:rPr lang="en-US" sz="1500" b="1" dirty="0">
-                <a:solidFill>
-                  <a:srgbClr val="0F3C4E"/>
-                </a:solidFill>
-                <a:latin typeface="IBM Plex Mono" pitchFamily="34" charset="0"/>
-                <a:ea typeface="IBM Plex Mono" pitchFamily="34" charset="-122"/>
-                <a:cs typeface="IBM Plex Mono" pitchFamily="34" charset="-120"/>
-              </a:rPr>
-              <a:t>3 000–15 000 €+</a:t>
-            </a:r>
-            <a:endParaRPr lang="en-US" sz="1500" dirty="0"/>
-          </a:p>
-        </p:txBody>
-      </p:sp>
-      <p:sp>
-        <p:nvSpPr>
-          <p:cNvPr id="18" name="Text 16"/>
-          <p:cNvSpPr/>
-          <p:nvPr/>
-        </p:nvSpPr>
-        <p:spPr>
-          <a:xfrm>
-            <a:off x="8436864" y="4274820"/>
-            <a:ext cx="2782824" cy="914400"/>
-          </a:xfrm>
-          <a:prstGeom prst="rect">
-            <a:avLst/>
-          </a:prstGeom>
-          <a:noFill/>
-          <a:ln/>
-        </p:spPr>
-        <p:txBody>
-          <a:bodyPr wrap="square" lIns="0" tIns="0" rIns="0" bIns="0" rtlCol="0" anchor="t"/>
-          <a:lstStyle/>
-          <a:p>
-            <a:pPr indent="0" marL="0">
-              <a:lnSpc>
-                <a:spcPct val="125000"/>
-              </a:lnSpc>
-              <a:buNone/>
-            </a:pPr>
-            <a:r>
-              <a:rPr lang="en-US" sz="1300" dirty="0">
-                <a:solidFill>
-                  <a:srgbClr val="5C6875"/>
                 </a:solidFill>
                 <a:latin typeface="Inter" pitchFamily="34" charset="0"/>
                 <a:ea typeface="Inter" pitchFamily="34" charset="-122"/>
                 <a:cs typeface="Inter" pitchFamily="34" charset="-120"/>
               </a:rPr>
-              <a:t>Scénarios, seuils de bascule et arbitrage contextualisé.</a:t>
-            </a:r>
-            <a:endParaRPr lang="en-US" sz="1300" dirty="0"/>
-          </a:p>
-        </p:txBody>
-      </p:sp>
-      <p:sp>
-        <p:nvSpPr>
-          <p:cNvPr id="19" name="Text 17"/>
-          <p:cNvSpPr/>
-          <p:nvPr/>
-        </p:nvSpPr>
-        <p:spPr>
-          <a:xfrm>
-            <a:off x="658368" y="5888736"/>
-            <a:ext cx="9774936" cy="457200"/>
+              <a:t>Sept critères pondérés sur 100, échelle de preuve 0–5, audit des vetos durs.</a:t>
+            </a:r>
+            <a:endParaRPr lang="en-US" sz="1500" dirty="0"/>
+          </a:p>
+          <a:p>
+            <a:pPr marL="279400" indent="-279400">
+              <a:spcAft>
+                <a:spcPts val="1100"/>
+              </a:spcAft>
+              <a:buSzPct val="100000"/>
+              <a:buChar char="◊"/>
+            </a:pPr>
+            <a:r>
+              <a:rPr lang="en-US" sz="1500" dirty="0">
+                <a:solidFill>
+                  <a:srgbClr val="141C26"/>
+                </a:solidFill>
+                <a:latin typeface="Inter" pitchFamily="34" charset="0"/>
+                <a:ea typeface="Inter" pitchFamily="34" charset="-122"/>
+                <a:cs typeface="Inter" pitchFamily="34" charset="-120"/>
+              </a:rPr>
+              <a:t>Quatre verdicts possibles : FAIRE, TESTER, DIFFÉRER, ABANDONNER.</a:t>
+            </a:r>
+            <a:endParaRPr lang="en-US" sz="1500" dirty="0"/>
+          </a:p>
+        </p:txBody>
+      </p:sp>
+      <p:sp>
+        <p:nvSpPr>
+          <p:cNvPr id="5" name="Text 3"/>
+          <p:cNvSpPr/>
+          <p:nvPr/>
+        </p:nvSpPr>
+        <p:spPr>
+          <a:xfrm>
+            <a:off x="658368" y="5815584"/>
+            <a:ext cx="9774936" cy="548640"/>
           </a:xfrm>
           <a:prstGeom prst="rect">
             <a:avLst/>
@@ -3528,7 +3082,7 @@
                 <a:ea typeface="Inter" pitchFamily="34" charset="-122"/>
                 <a:cs typeface="Inter" pitchFamily="34" charset="-120"/>
               </a:rPr>
-              <a:t>Basic informe. Standard surveille. Premium aide à arbitrer.</a:t>
+              <a:t>PESTEL, SWOT et Business Model Canvas y sont transformés pour la décision, pas juxtaposés. Le score n’est pas la décision.</a:t>
             </a:r>
             <a:endParaRPr lang="en-US" sz="1000" dirty="0"/>
           </a:p>
@@ -3536,7 +3090,7 @@
       </p:sp>
       <p:sp>
         <p:nvSpPr>
-          <p:cNvPr id="20" name="Text 18"/>
+          <p:cNvPr id="6" name="Text 4"/>
           <p:cNvSpPr/>
           <p:nvPr/>
         </p:nvSpPr>
@@ -3632,13 +3186,13 @@
             <a:r>
               <a:rPr lang="en-US" sz="1000" spc="160" kern="0" dirty="0">
                 <a:solidFill>
-                  <a:srgbClr val="5C6875"/>
+                  <a:srgbClr val="C8282C"/>
                 </a:solidFill>
                 <a:latin typeface="IBM Plex Mono" pitchFamily="34" charset="0"/>
                 <a:ea typeface="IBM Plex Mono" pitchFamily="34" charset="-122"/>
                 <a:cs typeface="IBM Plex Mono" pitchFamily="34" charset="-120"/>
               </a:rPr>
-              <a:t>OFFRES · BASIC</a:t>
+              <a:t>COUVERTURE</a:t>
             </a:r>
             <a:endParaRPr lang="en-US" sz="1000" dirty="0"/>
           </a:p>
@@ -3646,14 +3200,64 @@
       </p:sp>
       <p:sp>
         <p:nvSpPr>
-          <p:cNvPr id="3" name="Text 1"/>
-          <p:cNvSpPr/>
-          <p:nvPr/>
-        </p:nvSpPr>
-        <p:spPr>
-          <a:xfrm>
-            <a:off x="658368" y="786384"/>
-            <a:ext cx="10872216" cy="1207008"/>
+          <p:cNvPr id="3" name="Shape 1"/>
+          <p:cNvSpPr/>
+          <p:nvPr/>
+        </p:nvSpPr>
+        <p:spPr>
+          <a:xfrm>
+            <a:off x="658368" y="1371600"/>
+            <a:ext cx="10872216" cy="3200400"/>
+          </a:xfrm>
+          <a:prstGeom prst="rect">
+            <a:avLst/>
+          </a:prstGeom>
+          <a:solidFill>
+            <a:srgbClr val="FCFDFE"/>
+          </a:solidFill>
+          <a:ln w="12700">
+            <a:solidFill>
+              <a:srgbClr val="D3DBE1"/>
+            </a:solidFill>
+            <a:prstDash val="solid"/>
+          </a:ln>
+        </p:spPr>
+      </p:sp>
+      <p:sp>
+        <p:nvSpPr>
+          <p:cNvPr id="4" name="Shape 2"/>
+          <p:cNvSpPr/>
+          <p:nvPr/>
+        </p:nvSpPr>
+        <p:spPr>
+          <a:xfrm>
+            <a:off x="1133856" y="1828800"/>
+            <a:ext cx="155448" cy="155448"/>
+          </a:xfrm>
+          <a:prstGeom prst="diamond">
+            <a:avLst/>
+          </a:prstGeom>
+          <a:solidFill>
+            <a:srgbClr val="0F3C4E"/>
+          </a:solidFill>
+          <a:ln w="12700">
+            <a:solidFill>
+              <a:srgbClr val="0F3C4E"/>
+            </a:solidFill>
+            <a:prstDash val="solid"/>
+          </a:ln>
+        </p:spPr>
+      </p:sp>
+      <p:sp>
+        <p:nvSpPr>
+          <p:cNvPr id="5" name="Text 3"/>
+          <p:cNvSpPr/>
+          <p:nvPr/>
+        </p:nvSpPr>
+        <p:spPr>
+          <a:xfrm>
+            <a:off x="1133856" y="2212848"/>
+            <a:ext cx="9409176" cy="1371600"/>
           </a:xfrm>
           <a:prstGeom prst="rect">
             <a:avLst/>
@@ -3667,12 +3271,12 @@
           <a:p>
             <a:pPr indent="0" marL="0">
               <a:lnSpc>
-                <a:spcPct val="105000"/>
+                <a:spcPct val="112000"/>
               </a:lnSpc>
               <a:buNone/>
             </a:pPr>
             <a:r>
-              <a:rPr lang="en-US" sz="3400" b="1" dirty="0">
+              <a:rPr lang="en-US" sz="2800" b="1" dirty="0">
                 <a:solidFill>
                   <a:srgbClr val="141C26"/>
                 </a:solidFill>
@@ -3680,22 +3284,22 @@
                 <a:ea typeface="Fraunces" pitchFamily="34" charset="-122"/>
                 <a:cs typeface="Fraunces" pitchFamily="34" charset="-120"/>
               </a:rPr>
-              <a:t>Informer — 19–49 €/mois</a:t>
-            </a:r>
-            <a:endParaRPr lang="en-US" sz="3400" dirty="0"/>
-          </a:p>
-        </p:txBody>
-      </p:sp>
-      <p:sp>
-        <p:nvSpPr>
-          <p:cNvPr id="4" name="Text 2"/>
-          <p:cNvSpPr/>
-          <p:nvPr/>
-        </p:nvSpPr>
-        <p:spPr>
-          <a:xfrm>
-            <a:off x="658368" y="2194560"/>
-            <a:ext cx="8778240" cy="3566160"/>
+              <a:t>Trois corridors fondateurs sont instruits : Malacca, Mer Rouge–Suez, Taïwan.</a:t>
+            </a:r>
+            <a:endParaRPr lang="en-US" sz="2800" dirty="0"/>
+          </a:p>
+        </p:txBody>
+      </p:sp>
+      <p:sp>
+        <p:nvSpPr>
+          <p:cNvPr id="6" name="Text 4"/>
+          <p:cNvSpPr/>
+          <p:nvPr/>
+        </p:nvSpPr>
+        <p:spPr>
+          <a:xfrm>
+            <a:off x="1133856" y="3602736"/>
+            <a:ext cx="9409176" cy="786384"/>
           </a:xfrm>
           <a:prstGeom prst="rect">
             <a:avLst/>
@@ -3707,120 +3311,14 @@
           <a:bodyPr wrap="square" lIns="0" tIns="0" rIns="0" bIns="0" rtlCol="0" anchor="t"/>
           <a:lstStyle/>
           <a:p>
-            <a:pPr marL="279400" indent="-279400">
-              <a:spcAft>
-                <a:spcPts val="1100"/>
-              </a:spcAft>
-              <a:buSzPct val="100000"/>
-              <a:buChar char="◊"/>
+            <a:pPr indent="0" marL="0">
+              <a:lnSpc>
+                <a:spcPct val="125000"/>
+              </a:lnSpc>
+              <a:buNone/>
             </a:pPr>
             <a:r>
               <a:rPr lang="en-US" sz="1500" dirty="0">
-                <a:solidFill>
-                  <a:srgbClr val="141C26"/>
-                </a:solidFill>
-                <a:latin typeface="Inter" pitchFamily="34" charset="0"/>
-                <a:ea typeface="Inter" pitchFamily="34" charset="-122"/>
-                <a:cs typeface="Inter" pitchFamily="34" charset="-120"/>
-              </a:rPr>
-              <a:t>Notes structurées</a:t>
-            </a:r>
-            <a:endParaRPr lang="en-US" sz="1500" dirty="0"/>
-          </a:p>
-          <a:p>
-            <a:pPr marL="279400" indent="-279400">
-              <a:spcAft>
-                <a:spcPts val="1100"/>
-              </a:spcAft>
-              <a:buSzPct val="100000"/>
-              <a:buChar char="◊"/>
-            </a:pPr>
-            <a:r>
-              <a:rPr lang="en-US" sz="1500" dirty="0">
-                <a:solidFill>
-                  <a:srgbClr val="141C26"/>
-                </a:solidFill>
-                <a:latin typeface="Inter" pitchFamily="34" charset="0"/>
-                <a:ea typeface="Inter" pitchFamily="34" charset="-122"/>
-                <a:cs typeface="Inter" pitchFamily="34" charset="-120"/>
-              </a:rPr>
-              <a:t>Fiches Atlas Basic</a:t>
-            </a:r>
-            <a:endParaRPr lang="en-US" sz="1500" dirty="0"/>
-          </a:p>
-          <a:p>
-            <a:pPr marL="279400" indent="-279400">
-              <a:spcAft>
-                <a:spcPts val="1100"/>
-              </a:spcAft>
-              <a:buSzPct val="100000"/>
-              <a:buChar char="◊"/>
-            </a:pPr>
-            <a:r>
-              <a:rPr lang="en-US" sz="1500" dirty="0">
-                <a:solidFill>
-                  <a:srgbClr val="141C26"/>
-                </a:solidFill>
-                <a:latin typeface="Inter" pitchFamily="34" charset="0"/>
-                <a:ea typeface="Inter" pitchFamily="34" charset="-122"/>
-                <a:cs typeface="Inter" pitchFamily="34" charset="-120"/>
-              </a:rPr>
-              <a:t>Diagnostics qualitatifs (bas → critique)</a:t>
-            </a:r>
-            <a:endParaRPr lang="en-US" sz="1500" dirty="0"/>
-          </a:p>
-          <a:p>
-            <a:pPr marL="279400" indent="-279400">
-              <a:spcAft>
-                <a:spcPts val="1100"/>
-              </a:spcAft>
-              <a:buSzPct val="100000"/>
-              <a:buChar char="◊"/>
-            </a:pPr>
-            <a:r>
-              <a:rPr lang="en-US" sz="1500" dirty="0">
-                <a:solidFill>
-                  <a:srgbClr val="141C26"/>
-                </a:solidFill>
-                <a:latin typeface="Inter" pitchFamily="34" charset="0"/>
-                <a:ea typeface="Inter" pitchFamily="34" charset="-122"/>
-                <a:cs typeface="Inter" pitchFamily="34" charset="-120"/>
-              </a:rPr>
-              <a:t>Résumés exécutifs de dossiers</a:t>
-            </a:r>
-            <a:endParaRPr lang="en-US" sz="1500" dirty="0"/>
-          </a:p>
-          <a:p>
-            <a:pPr marL="279400" indent="-279400">
-              <a:spcAft>
-                <a:spcPts val="1100"/>
-              </a:spcAft>
-              <a:buSzPct val="100000"/>
-              <a:buChar char="◊"/>
-            </a:pPr>
-            <a:r>
-              <a:rPr lang="en-US" sz="1500" dirty="0">
-                <a:solidFill>
-                  <a:srgbClr val="141C26"/>
-                </a:solidFill>
-                <a:latin typeface="Inter" pitchFamily="34" charset="0"/>
-                <a:ea typeface="Inter" pitchFamily="34" charset="-122"/>
-                <a:cs typeface="Inter" pitchFamily="34" charset="-120"/>
-              </a:rPr>
-              <a:t>Newsletter de synthèse</a:t>
-            </a:r>
-            <a:endParaRPr lang="en-US" sz="1500" dirty="0"/>
-          </a:p>
-          <a:p>
-            <a:pPr marL="279400" indent="-279400">
-              <a:spcAft>
-                <a:spcPts val="800"/>
-              </a:spcAft>
-              <a:buSzPct val="100000"/>
-              <a:buChar char="—"/>
-            </a:pPr>
-            <a:r>
-              <a:rPr lang="en-US" sz="1200" dirty="0">
                 <a:solidFill>
                   <a:srgbClr val="5C6875"/>
                 </a:solidFill>
@@ -3828,96 +3326,15 @@
                 <a:ea typeface="Inter" pitchFamily="34" charset="-122"/>
                 <a:cs typeface="Inter" pitchFamily="34" charset="-120"/>
               </a:rPr>
-              <a:t>Scoring CVI 0–5</a:t>
+              <a:t>Fiches rédigées et sourcées, en cours de validation humaine — elles ne sont pas encore publiées. L’Atlas s’ouvre corridor par corridor, jamais avant que les gates soient tenues.</a:t>
             </a:r>
             <a:endParaRPr lang="en-US" sz="1500" dirty="0"/>
           </a:p>
-          <a:p>
-            <a:pPr marL="279400" indent="-279400">
-              <a:spcAft>
-                <a:spcPts val="800"/>
-              </a:spcAft>
-              <a:buSzPct val="100000"/>
-              <a:buChar char="—"/>
-            </a:pPr>
-            <a:r>
-              <a:rPr lang="en-US" sz="1200" dirty="0">
-                <a:solidFill>
-                  <a:srgbClr val="5C6875"/>
-                </a:solidFill>
-                <a:latin typeface="Inter" pitchFamily="34" charset="0"/>
-                <a:ea typeface="Inter" pitchFamily="34" charset="-122"/>
-                <a:cs typeface="Inter" pitchFamily="34" charset="-120"/>
-              </a:rPr>
-              <a:t>Alertes thématiques</a:t>
-            </a:r>
-            <a:endParaRPr lang="en-US" sz="1500" dirty="0"/>
-          </a:p>
-          <a:p>
-            <a:pPr marL="279400" indent="-279400">
-              <a:spcAft>
-                <a:spcPts val="800"/>
-              </a:spcAft>
-              <a:buSzPct val="100000"/>
-              <a:buChar char="—"/>
-            </a:pPr>
-            <a:r>
-              <a:rPr lang="en-US" sz="1200" dirty="0">
-                <a:solidFill>
-                  <a:srgbClr val="5C6875"/>
-                </a:solidFill>
-                <a:latin typeface="Inter" pitchFamily="34" charset="0"/>
-                <a:ea typeface="Inter" pitchFamily="34" charset="-122"/>
-                <a:cs typeface="Inter" pitchFamily="34" charset="-120"/>
-              </a:rPr>
-              <a:t>Historique d’évolution</a:t>
-            </a:r>
-            <a:endParaRPr lang="en-US" sz="1500" dirty="0"/>
-          </a:p>
-        </p:txBody>
-      </p:sp>
-      <p:sp>
-        <p:nvSpPr>
-          <p:cNvPr id="5" name="Text 3"/>
-          <p:cNvSpPr/>
-          <p:nvPr/>
-        </p:nvSpPr>
-        <p:spPr>
-          <a:xfrm>
-            <a:off x="658368" y="5888736"/>
-            <a:ext cx="9774936" cy="457200"/>
-          </a:xfrm>
-          <a:prstGeom prst="rect">
-            <a:avLst/>
-          </a:prstGeom>
-          <a:noFill/>
-          <a:ln/>
-        </p:spPr>
-        <p:txBody>
-          <a:bodyPr wrap="square" lIns="0" tIns="0" rIns="0" bIns="0" rtlCol="0" anchor="b"/>
-          <a:lstStyle/>
-          <a:p>
-            <a:pPr indent="0" marL="0">
-              <a:buNone/>
-            </a:pPr>
-            <a:r>
-              <a:rPr lang="en-US" sz="1000" i="1" dirty="0">
-                <a:solidFill>
-                  <a:srgbClr val="5C6875"/>
-                </a:solidFill>
-                <a:latin typeface="Inter" pitchFamily="34" charset="0"/>
-                <a:ea typeface="Inter" pitchFamily="34" charset="-122"/>
-                <a:cs typeface="Inter" pitchFamily="34" charset="-120"/>
-              </a:rPr>
-              <a:t>Comprendre les corridors, les flux et les vulnérabilités.</a:t>
-            </a:r>
-            <a:endParaRPr lang="en-US" sz="1000" dirty="0"/>
-          </a:p>
-        </p:txBody>
-      </p:sp>
-      <p:sp>
-        <p:nvSpPr>
-          <p:cNvPr id="6" name="Text 4"/>
+        </p:txBody>
+      </p:sp>
+      <p:sp>
+        <p:nvSpPr>
+          <p:cNvPr id="7" name="Text 5"/>
           <p:cNvSpPr/>
           <p:nvPr/>
         </p:nvSpPr>
@@ -3968,7 +3385,7 @@
     <p:bg>
       <p:bgPr>
         <a:solidFill>
-          <a:srgbClr val="F4F6F8"/>
+          <a:srgbClr val="0F3C4E"/>
         </a:solidFill>
       </p:bgPr>
     </p:bg>
@@ -3988,14 +3405,489 @@
       </p:grpSpPr>
       <p:sp>
         <p:nvSpPr>
-          <p:cNvPr id="2" name="Text 0"/>
-          <p:cNvSpPr/>
-          <p:nvPr/>
-        </p:nvSpPr>
-        <p:spPr>
-          <a:xfrm>
-            <a:off x="658368" y="475488"/>
-            <a:ext cx="10872216" cy="237744"/>
+          <p:cNvPr id="2" name="Shape 0"/>
+          <p:cNvSpPr/>
+          <p:nvPr/>
+        </p:nvSpPr>
+        <p:spPr>
+          <a:xfrm>
+            <a:off x="914400" y="0"/>
+            <a:ext cx="0" cy="6858000"/>
+          </a:xfrm>
+          <a:prstGeom prst="line">
+            <a:avLst/>
+          </a:prstGeom>
+          <a:noFill/>
+          <a:ln w="6350">
+            <a:solidFill>
+              <a:srgbClr val="F4F6F8">
+                <a:alpha val="22000"/>
+              </a:srgbClr>
+            </a:solidFill>
+            <a:prstDash val="solid"/>
+          </a:ln>
+        </p:spPr>
+      </p:sp>
+      <p:sp>
+        <p:nvSpPr>
+          <p:cNvPr id="3" name="Shape 1"/>
+          <p:cNvSpPr/>
+          <p:nvPr/>
+        </p:nvSpPr>
+        <p:spPr>
+          <a:xfrm>
+            <a:off x="1828800" y="0"/>
+            <a:ext cx="0" cy="6858000"/>
+          </a:xfrm>
+          <a:prstGeom prst="line">
+            <a:avLst/>
+          </a:prstGeom>
+          <a:noFill/>
+          <a:ln w="6350">
+            <a:solidFill>
+              <a:srgbClr val="F4F6F8">
+                <a:alpha val="22000"/>
+              </a:srgbClr>
+            </a:solidFill>
+            <a:prstDash val="solid"/>
+          </a:ln>
+        </p:spPr>
+      </p:sp>
+      <p:sp>
+        <p:nvSpPr>
+          <p:cNvPr id="4" name="Shape 2"/>
+          <p:cNvSpPr/>
+          <p:nvPr/>
+        </p:nvSpPr>
+        <p:spPr>
+          <a:xfrm>
+            <a:off x="2743200" y="0"/>
+            <a:ext cx="0" cy="6858000"/>
+          </a:xfrm>
+          <a:prstGeom prst="line">
+            <a:avLst/>
+          </a:prstGeom>
+          <a:noFill/>
+          <a:ln w="6350">
+            <a:solidFill>
+              <a:srgbClr val="F4F6F8">
+                <a:alpha val="22000"/>
+              </a:srgbClr>
+            </a:solidFill>
+            <a:prstDash val="solid"/>
+          </a:ln>
+        </p:spPr>
+      </p:sp>
+      <p:sp>
+        <p:nvSpPr>
+          <p:cNvPr id="5" name="Shape 3"/>
+          <p:cNvSpPr/>
+          <p:nvPr/>
+        </p:nvSpPr>
+        <p:spPr>
+          <a:xfrm>
+            <a:off x="3657600" y="0"/>
+            <a:ext cx="0" cy="6858000"/>
+          </a:xfrm>
+          <a:prstGeom prst="line">
+            <a:avLst/>
+          </a:prstGeom>
+          <a:noFill/>
+          <a:ln w="6350">
+            <a:solidFill>
+              <a:srgbClr val="F4F6F8">
+                <a:alpha val="22000"/>
+              </a:srgbClr>
+            </a:solidFill>
+            <a:prstDash val="solid"/>
+          </a:ln>
+        </p:spPr>
+      </p:sp>
+      <p:sp>
+        <p:nvSpPr>
+          <p:cNvPr id="6" name="Shape 4"/>
+          <p:cNvSpPr/>
+          <p:nvPr/>
+        </p:nvSpPr>
+        <p:spPr>
+          <a:xfrm>
+            <a:off x="4572000" y="0"/>
+            <a:ext cx="0" cy="6858000"/>
+          </a:xfrm>
+          <a:prstGeom prst="line">
+            <a:avLst/>
+          </a:prstGeom>
+          <a:noFill/>
+          <a:ln w="6350">
+            <a:solidFill>
+              <a:srgbClr val="F4F6F8">
+                <a:alpha val="22000"/>
+              </a:srgbClr>
+            </a:solidFill>
+            <a:prstDash val="solid"/>
+          </a:ln>
+        </p:spPr>
+      </p:sp>
+      <p:sp>
+        <p:nvSpPr>
+          <p:cNvPr id="7" name="Shape 5"/>
+          <p:cNvSpPr/>
+          <p:nvPr/>
+        </p:nvSpPr>
+        <p:spPr>
+          <a:xfrm>
+            <a:off x="5486400" y="0"/>
+            <a:ext cx="0" cy="6858000"/>
+          </a:xfrm>
+          <a:prstGeom prst="line">
+            <a:avLst/>
+          </a:prstGeom>
+          <a:noFill/>
+          <a:ln w="6350">
+            <a:solidFill>
+              <a:srgbClr val="F4F6F8">
+                <a:alpha val="22000"/>
+              </a:srgbClr>
+            </a:solidFill>
+            <a:prstDash val="solid"/>
+          </a:ln>
+        </p:spPr>
+      </p:sp>
+      <p:sp>
+        <p:nvSpPr>
+          <p:cNvPr id="8" name="Shape 6"/>
+          <p:cNvSpPr/>
+          <p:nvPr/>
+        </p:nvSpPr>
+        <p:spPr>
+          <a:xfrm>
+            <a:off x="6400800" y="0"/>
+            <a:ext cx="0" cy="6858000"/>
+          </a:xfrm>
+          <a:prstGeom prst="line">
+            <a:avLst/>
+          </a:prstGeom>
+          <a:noFill/>
+          <a:ln w="6350">
+            <a:solidFill>
+              <a:srgbClr val="F4F6F8">
+                <a:alpha val="22000"/>
+              </a:srgbClr>
+            </a:solidFill>
+            <a:prstDash val="solid"/>
+          </a:ln>
+        </p:spPr>
+      </p:sp>
+      <p:sp>
+        <p:nvSpPr>
+          <p:cNvPr id="9" name="Shape 7"/>
+          <p:cNvSpPr/>
+          <p:nvPr/>
+        </p:nvSpPr>
+        <p:spPr>
+          <a:xfrm>
+            <a:off x="7315200" y="0"/>
+            <a:ext cx="0" cy="6858000"/>
+          </a:xfrm>
+          <a:prstGeom prst="line">
+            <a:avLst/>
+          </a:prstGeom>
+          <a:noFill/>
+          <a:ln w="6350">
+            <a:solidFill>
+              <a:srgbClr val="F4F6F8">
+                <a:alpha val="22000"/>
+              </a:srgbClr>
+            </a:solidFill>
+            <a:prstDash val="solid"/>
+          </a:ln>
+        </p:spPr>
+      </p:sp>
+      <p:sp>
+        <p:nvSpPr>
+          <p:cNvPr id="10" name="Shape 8"/>
+          <p:cNvSpPr/>
+          <p:nvPr/>
+        </p:nvSpPr>
+        <p:spPr>
+          <a:xfrm>
+            <a:off x="8229600" y="0"/>
+            <a:ext cx="0" cy="6858000"/>
+          </a:xfrm>
+          <a:prstGeom prst="line">
+            <a:avLst/>
+          </a:prstGeom>
+          <a:noFill/>
+          <a:ln w="6350">
+            <a:solidFill>
+              <a:srgbClr val="F4F6F8">
+                <a:alpha val="22000"/>
+              </a:srgbClr>
+            </a:solidFill>
+            <a:prstDash val="solid"/>
+          </a:ln>
+        </p:spPr>
+      </p:sp>
+      <p:sp>
+        <p:nvSpPr>
+          <p:cNvPr id="11" name="Shape 9"/>
+          <p:cNvSpPr/>
+          <p:nvPr/>
+        </p:nvSpPr>
+        <p:spPr>
+          <a:xfrm>
+            <a:off x="9144000" y="0"/>
+            <a:ext cx="0" cy="6858000"/>
+          </a:xfrm>
+          <a:prstGeom prst="line">
+            <a:avLst/>
+          </a:prstGeom>
+          <a:noFill/>
+          <a:ln w="6350">
+            <a:solidFill>
+              <a:srgbClr val="F4F6F8">
+                <a:alpha val="22000"/>
+              </a:srgbClr>
+            </a:solidFill>
+            <a:prstDash val="solid"/>
+          </a:ln>
+        </p:spPr>
+      </p:sp>
+      <p:sp>
+        <p:nvSpPr>
+          <p:cNvPr id="12" name="Shape 10"/>
+          <p:cNvSpPr/>
+          <p:nvPr/>
+        </p:nvSpPr>
+        <p:spPr>
+          <a:xfrm>
+            <a:off x="10058400" y="0"/>
+            <a:ext cx="0" cy="6858000"/>
+          </a:xfrm>
+          <a:prstGeom prst="line">
+            <a:avLst/>
+          </a:prstGeom>
+          <a:noFill/>
+          <a:ln w="6350">
+            <a:solidFill>
+              <a:srgbClr val="F4F6F8">
+                <a:alpha val="22000"/>
+              </a:srgbClr>
+            </a:solidFill>
+            <a:prstDash val="solid"/>
+          </a:ln>
+        </p:spPr>
+      </p:sp>
+      <p:sp>
+        <p:nvSpPr>
+          <p:cNvPr id="13" name="Shape 11"/>
+          <p:cNvSpPr/>
+          <p:nvPr/>
+        </p:nvSpPr>
+        <p:spPr>
+          <a:xfrm>
+            <a:off x="10972800" y="0"/>
+            <a:ext cx="0" cy="6858000"/>
+          </a:xfrm>
+          <a:prstGeom prst="line">
+            <a:avLst/>
+          </a:prstGeom>
+          <a:noFill/>
+          <a:ln w="6350">
+            <a:solidFill>
+              <a:srgbClr val="F4F6F8">
+                <a:alpha val="22000"/>
+              </a:srgbClr>
+            </a:solidFill>
+            <a:prstDash val="solid"/>
+          </a:ln>
+        </p:spPr>
+      </p:sp>
+      <p:sp>
+        <p:nvSpPr>
+          <p:cNvPr id="14" name="Shape 12"/>
+          <p:cNvSpPr/>
+          <p:nvPr/>
+        </p:nvSpPr>
+        <p:spPr>
+          <a:xfrm>
+            <a:off x="0" y="914400"/>
+            <a:ext cx="12188952" cy="0"/>
+          </a:xfrm>
+          <a:prstGeom prst="line">
+            <a:avLst/>
+          </a:prstGeom>
+          <a:noFill/>
+          <a:ln w="6350">
+            <a:solidFill>
+              <a:srgbClr val="F4F6F8">
+                <a:alpha val="22000"/>
+              </a:srgbClr>
+            </a:solidFill>
+            <a:prstDash val="solid"/>
+          </a:ln>
+        </p:spPr>
+      </p:sp>
+      <p:sp>
+        <p:nvSpPr>
+          <p:cNvPr id="15" name="Shape 13"/>
+          <p:cNvSpPr/>
+          <p:nvPr/>
+        </p:nvSpPr>
+        <p:spPr>
+          <a:xfrm>
+            <a:off x="0" y="1828800"/>
+            <a:ext cx="12188952" cy="0"/>
+          </a:xfrm>
+          <a:prstGeom prst="line">
+            <a:avLst/>
+          </a:prstGeom>
+          <a:noFill/>
+          <a:ln w="6350">
+            <a:solidFill>
+              <a:srgbClr val="F4F6F8">
+                <a:alpha val="22000"/>
+              </a:srgbClr>
+            </a:solidFill>
+            <a:prstDash val="solid"/>
+          </a:ln>
+        </p:spPr>
+      </p:sp>
+      <p:sp>
+        <p:nvSpPr>
+          <p:cNvPr id="16" name="Shape 14"/>
+          <p:cNvSpPr/>
+          <p:nvPr/>
+        </p:nvSpPr>
+        <p:spPr>
+          <a:xfrm>
+            <a:off x="0" y="2743200"/>
+            <a:ext cx="12188952" cy="0"/>
+          </a:xfrm>
+          <a:prstGeom prst="line">
+            <a:avLst/>
+          </a:prstGeom>
+          <a:noFill/>
+          <a:ln w="6350">
+            <a:solidFill>
+              <a:srgbClr val="F4F6F8">
+                <a:alpha val="22000"/>
+              </a:srgbClr>
+            </a:solidFill>
+            <a:prstDash val="solid"/>
+          </a:ln>
+        </p:spPr>
+      </p:sp>
+      <p:sp>
+        <p:nvSpPr>
+          <p:cNvPr id="17" name="Shape 15"/>
+          <p:cNvSpPr/>
+          <p:nvPr/>
+        </p:nvSpPr>
+        <p:spPr>
+          <a:xfrm>
+            <a:off x="0" y="3657600"/>
+            <a:ext cx="12188952" cy="0"/>
+          </a:xfrm>
+          <a:prstGeom prst="line">
+            <a:avLst/>
+          </a:prstGeom>
+          <a:noFill/>
+          <a:ln w="6350">
+            <a:solidFill>
+              <a:srgbClr val="F4F6F8">
+                <a:alpha val="22000"/>
+              </a:srgbClr>
+            </a:solidFill>
+            <a:prstDash val="solid"/>
+          </a:ln>
+        </p:spPr>
+      </p:sp>
+      <p:sp>
+        <p:nvSpPr>
+          <p:cNvPr id="18" name="Shape 16"/>
+          <p:cNvSpPr/>
+          <p:nvPr/>
+        </p:nvSpPr>
+        <p:spPr>
+          <a:xfrm>
+            <a:off x="0" y="4572000"/>
+            <a:ext cx="12188952" cy="0"/>
+          </a:xfrm>
+          <a:prstGeom prst="line">
+            <a:avLst/>
+          </a:prstGeom>
+          <a:noFill/>
+          <a:ln w="6350">
+            <a:solidFill>
+              <a:srgbClr val="F4F6F8">
+                <a:alpha val="22000"/>
+              </a:srgbClr>
+            </a:solidFill>
+            <a:prstDash val="solid"/>
+          </a:ln>
+        </p:spPr>
+      </p:sp>
+      <p:sp>
+        <p:nvSpPr>
+          <p:cNvPr id="19" name="Shape 17"/>
+          <p:cNvSpPr/>
+          <p:nvPr/>
+        </p:nvSpPr>
+        <p:spPr>
+          <a:xfrm>
+            <a:off x="0" y="5486400"/>
+            <a:ext cx="12188952" cy="0"/>
+          </a:xfrm>
+          <a:prstGeom prst="line">
+            <a:avLst/>
+          </a:prstGeom>
+          <a:noFill/>
+          <a:ln w="6350">
+            <a:solidFill>
+              <a:srgbClr val="F4F6F8">
+                <a:alpha val="22000"/>
+              </a:srgbClr>
+            </a:solidFill>
+            <a:prstDash val="solid"/>
+          </a:ln>
+        </p:spPr>
+      </p:sp>
+      <p:sp>
+        <p:nvSpPr>
+          <p:cNvPr id="20" name="Shape 18"/>
+          <p:cNvSpPr/>
+          <p:nvPr/>
+        </p:nvSpPr>
+        <p:spPr>
+          <a:xfrm>
+            <a:off x="0" y="6400800"/>
+            <a:ext cx="12188952" cy="0"/>
+          </a:xfrm>
+          <a:prstGeom prst="line">
+            <a:avLst/>
+          </a:prstGeom>
+          <a:noFill/>
+          <a:ln w="6350">
+            <a:solidFill>
+              <a:srgbClr val="F4F6F8">
+                <a:alpha val="22000"/>
+              </a:srgbClr>
+            </a:solidFill>
+            <a:prstDash val="solid"/>
+          </a:ln>
+        </p:spPr>
+      </p:sp>
+      <p:sp>
+        <p:nvSpPr>
+          <p:cNvPr id="21" name="Text 19"/>
+          <p:cNvSpPr/>
+          <p:nvPr/>
+        </p:nvSpPr>
+        <p:spPr>
+          <a:xfrm>
+            <a:off x="658368" y="2121408"/>
+            <a:ext cx="1828800" cy="365760"/>
           </a:xfrm>
           <a:prstGeom prst="rect">
             <a:avLst/>
@@ -4011,30 +3903,30 @@
               <a:buNone/>
             </a:pPr>
             <a:r>
-              <a:rPr lang="en-US" sz="1000" spc="160" kern="0" dirty="0">
+              <a:rPr lang="en-US" sz="1300" spc="300" kern="0" dirty="0">
                 <a:solidFill>
-                  <a:srgbClr val="5C6875"/>
+                  <a:srgbClr val="C8282C"/>
                 </a:solidFill>
                 <a:latin typeface="IBM Plex Mono" pitchFamily="34" charset="0"/>
                 <a:ea typeface="IBM Plex Mono" pitchFamily="34" charset="-122"/>
                 <a:cs typeface="IBM Plex Mono" pitchFamily="34" charset="-120"/>
               </a:rPr>
-              <a:t>OFFRES · STANDARD</a:t>
-            </a:r>
-            <a:endParaRPr lang="en-US" sz="1000" dirty="0"/>
-          </a:p>
-        </p:txBody>
-      </p:sp>
-      <p:sp>
-        <p:nvSpPr>
-          <p:cNvPr id="3" name="Text 1"/>
-          <p:cNvSpPr/>
-          <p:nvPr/>
-        </p:nvSpPr>
-        <p:spPr>
-          <a:xfrm>
-            <a:off x="658368" y="786384"/>
-            <a:ext cx="10872216" cy="1207008"/>
+              <a:t>II</a:t>
+            </a:r>
+            <a:endParaRPr lang="en-US" sz="1300" dirty="0"/>
+          </a:p>
+        </p:txBody>
+      </p:sp>
+      <p:sp>
+        <p:nvSpPr>
+          <p:cNvPr id="22" name="Text 20"/>
+          <p:cNvSpPr/>
+          <p:nvPr/>
+        </p:nvSpPr>
+        <p:spPr>
+          <a:xfrm>
+            <a:off x="658368" y="2615184"/>
+            <a:ext cx="8778240" cy="1097280"/>
           </a:xfrm>
           <a:prstGeom prst="rect">
             <a:avLst/>
@@ -4047,36 +3939,33 @@
           <a:lstStyle/>
           <a:p>
             <a:pPr indent="0" marL="0">
-              <a:lnSpc>
-                <a:spcPct val="105000"/>
-              </a:lnSpc>
               <a:buNone/>
             </a:pPr>
             <a:r>
-              <a:rPr lang="en-US" sz="3400" b="1" dirty="0">
+              <a:rPr lang="en-US" sz="4000" b="1" dirty="0">
                 <a:solidFill>
-                  <a:srgbClr val="141C26"/>
+                  <a:srgbClr val="F4F6F8"/>
                 </a:solidFill>
                 <a:latin typeface="Fraunces" pitchFamily="34" charset="0"/>
                 <a:ea typeface="Fraunces" pitchFamily="34" charset="-122"/>
                 <a:cs typeface="Fraunces" pitchFamily="34" charset="-120"/>
               </a:rPr>
-              <a:t>Surveiller — 199–799 €/mois</a:t>
-            </a:r>
-            <a:endParaRPr lang="en-US" sz="3400" dirty="0"/>
-          </a:p>
-        </p:txBody>
-      </p:sp>
-      <p:sp>
-        <p:nvSpPr>
-          <p:cNvPr id="4" name="Text 2"/>
-          <p:cNvSpPr/>
-          <p:nvPr/>
-        </p:nvSpPr>
-        <p:spPr>
-          <a:xfrm>
-            <a:off x="658368" y="2194560"/>
-            <a:ext cx="8778240" cy="3566160"/>
+              <a:t>Trois niveaux de lecture</a:t>
+            </a:r>
+            <a:endParaRPr lang="en-US" sz="4000" dirty="0"/>
+          </a:p>
+        </p:txBody>
+      </p:sp>
+      <p:sp>
+        <p:nvSpPr>
+          <p:cNvPr id="23" name="Text 21"/>
+          <p:cNvSpPr/>
+          <p:nvPr/>
+        </p:nvSpPr>
+        <p:spPr>
+          <a:xfrm>
+            <a:off x="658368" y="3822192"/>
+            <a:ext cx="7680960" cy="1097280"/>
           </a:xfrm>
           <a:prstGeom prst="rect">
             <a:avLst/>
@@ -4088,238 +3977,30 @@
           <a:bodyPr wrap="square" lIns="0" tIns="0" rIns="0" bIns="0" rtlCol="0" anchor="t"/>
           <a:lstStyle/>
           <a:p>
-            <a:pPr marL="279400" indent="-279400">
-              <a:spcAft>
-                <a:spcPts val="1100"/>
-              </a:spcAft>
-              <a:buSzPct val="100000"/>
-              <a:buChar char="◊"/>
+            <a:pPr indent="0" marL="0">
+              <a:lnSpc>
+                <a:spcPct val="130000"/>
+              </a:lnSpc>
+              <a:buNone/>
             </a:pPr>
             <a:r>
-              <a:rPr lang="en-US" sz="1500" dirty="0">
+              <a:rPr lang="en-US" sz="1600" dirty="0">
                 <a:solidFill>
-                  <a:srgbClr val="141C26"/>
+                  <a:srgbClr val="D3DBE1"/>
                 </a:solidFill>
                 <a:latin typeface="Inter" pitchFamily="34" charset="0"/>
                 <a:ea typeface="Inter" pitchFamily="34" charset="-122"/>
                 <a:cs typeface="Inter" pitchFamily="34" charset="-120"/>
               </a:rPr>
-              <a:t>Tout Basic, plus :</a:t>
-            </a:r>
-            <a:endParaRPr lang="en-US" sz="1500" dirty="0"/>
-          </a:p>
-          <a:p>
-            <a:pPr marL="279400" indent="-279400">
-              <a:spcAft>
-                <a:spcPts val="1100"/>
-              </a:spcAft>
-              <a:buSzPct val="100000"/>
-              <a:buChar char="◊"/>
-            </a:pPr>
-            <a:r>
-              <a:rPr lang="en-US" sz="1500" dirty="0">
-                <a:solidFill>
-                  <a:srgbClr val="141C26"/>
-                </a:solidFill>
-                <a:latin typeface="Inter" pitchFamily="34" charset="0"/>
-                <a:ea typeface="Inter" pitchFamily="34" charset="-122"/>
-                <a:cs typeface="Inter" pitchFamily="34" charset="-120"/>
-              </a:rPr>
-              <a:t>Fiches Atlas complètes</a:t>
-            </a:r>
-            <a:endParaRPr lang="en-US" sz="1500" dirty="0"/>
-          </a:p>
-          <a:p>
-            <a:pPr marL="279400" indent="-279400">
-              <a:spcAft>
-                <a:spcPts val="1100"/>
-              </a:spcAft>
-              <a:buSzPct val="100000"/>
-              <a:buChar char="◊"/>
-            </a:pPr>
-            <a:r>
-              <a:rPr lang="en-US" sz="1500" dirty="0">
-                <a:solidFill>
-                  <a:srgbClr val="141C26"/>
-                </a:solidFill>
-                <a:latin typeface="Inter" pitchFamily="34" charset="0"/>
-                <a:ea typeface="Inter" pitchFamily="34" charset="-122"/>
-                <a:cs typeface="Inter" pitchFamily="34" charset="-120"/>
-              </a:rPr>
-              <a:t>Scoring CVI 0–5 par dimension</a:t>
-            </a:r>
-            <a:endParaRPr lang="en-US" sz="1500" dirty="0"/>
-          </a:p>
-          <a:p>
-            <a:pPr marL="279400" indent="-279400">
-              <a:spcAft>
-                <a:spcPts val="1100"/>
-              </a:spcAft>
-              <a:buSzPct val="100000"/>
-              <a:buChar char="◊"/>
-            </a:pPr>
-            <a:r>
-              <a:rPr lang="en-US" sz="1500" dirty="0">
-                <a:solidFill>
-                  <a:srgbClr val="141C26"/>
-                </a:solidFill>
-                <a:latin typeface="Inter" pitchFamily="34" charset="0"/>
-                <a:ea typeface="Inter" pitchFamily="34" charset="-122"/>
-                <a:cs typeface="Inter" pitchFamily="34" charset="-120"/>
-              </a:rPr>
-              <a:t>Alertes thématiques</a:t>
-            </a:r>
-            <a:endParaRPr lang="en-US" sz="1500" dirty="0"/>
-          </a:p>
-          <a:p>
-            <a:pPr marL="279400" indent="-279400">
-              <a:spcAft>
-                <a:spcPts val="1100"/>
-              </a:spcAft>
-              <a:buSzPct val="100000"/>
-              <a:buChar char="◊"/>
-            </a:pPr>
-            <a:r>
-              <a:rPr lang="en-US" sz="1500" dirty="0">
-                <a:solidFill>
-                  <a:srgbClr val="141C26"/>
-                </a:solidFill>
-                <a:latin typeface="Inter" pitchFamily="34" charset="0"/>
-                <a:ea typeface="Inter" pitchFamily="34" charset="-122"/>
-                <a:cs typeface="Inter" pitchFamily="34" charset="-120"/>
-              </a:rPr>
-              <a:t>3 à 5 signaux suivis par corridor</a:t>
-            </a:r>
-            <a:endParaRPr lang="en-US" sz="1500" dirty="0"/>
-          </a:p>
-          <a:p>
-            <a:pPr marL="279400" indent="-279400">
-              <a:spcAft>
-                <a:spcPts val="1100"/>
-              </a:spcAft>
-              <a:buSzPct val="100000"/>
-              <a:buChar char="◊"/>
-            </a:pPr>
-            <a:r>
-              <a:rPr lang="en-US" sz="1500" dirty="0">
-                <a:solidFill>
-                  <a:srgbClr val="141C26"/>
-                </a:solidFill>
-                <a:latin typeface="Inter" pitchFamily="34" charset="0"/>
-                <a:ea typeface="Inter" pitchFamily="34" charset="-122"/>
-                <a:cs typeface="Inter" pitchFamily="34" charset="-120"/>
-              </a:rPr>
-              <a:t>Comparaisons entre corridors</a:t>
-            </a:r>
-            <a:endParaRPr lang="en-US" sz="1500" dirty="0"/>
-          </a:p>
-          <a:p>
-            <a:pPr marL="279400" indent="-279400">
-              <a:spcAft>
-                <a:spcPts val="800"/>
-              </a:spcAft>
-              <a:buSzPct val="100000"/>
-              <a:buChar char="—"/>
-            </a:pPr>
-            <a:r>
-              <a:rPr lang="en-US" sz="1200" dirty="0">
-                <a:solidFill>
-                  <a:srgbClr val="5C6875"/>
-                </a:solidFill>
-                <a:latin typeface="Inter" pitchFamily="34" charset="0"/>
-                <a:ea typeface="Inter" pitchFamily="34" charset="-122"/>
-                <a:cs typeface="Inter" pitchFamily="34" charset="-120"/>
-              </a:rPr>
-              <a:t>Contextualisation client</a:t>
-            </a:r>
-            <a:endParaRPr lang="en-US" sz="1500" dirty="0"/>
-          </a:p>
-          <a:p>
-            <a:pPr marL="279400" indent="-279400">
-              <a:spcAft>
-                <a:spcPts val="800"/>
-              </a:spcAft>
-              <a:buSzPct val="100000"/>
-              <a:buChar char="—"/>
-            </a:pPr>
-            <a:r>
-              <a:rPr lang="en-US" sz="1200" dirty="0">
-                <a:solidFill>
-                  <a:srgbClr val="5C6875"/>
-                </a:solidFill>
-                <a:latin typeface="Inter" pitchFamily="34" charset="0"/>
-                <a:ea typeface="Inter" pitchFamily="34" charset="-122"/>
-                <a:cs typeface="Inter" pitchFamily="34" charset="-120"/>
-              </a:rPr>
-              <a:t>Pondérations CVI sur mesure</a:t>
-            </a:r>
-            <a:endParaRPr lang="en-US" sz="1500" dirty="0"/>
-          </a:p>
-          <a:p>
-            <a:pPr marL="279400" indent="-279400">
-              <a:spcAft>
-                <a:spcPts val="800"/>
-              </a:spcAft>
-              <a:buSzPct val="100000"/>
-              <a:buChar char="—"/>
-            </a:pPr>
-            <a:r>
-              <a:rPr lang="en-US" sz="1200" dirty="0">
-                <a:solidFill>
-                  <a:srgbClr val="5C6875"/>
-                </a:solidFill>
-                <a:latin typeface="Inter" pitchFamily="34" charset="0"/>
-                <a:ea typeface="Inter" pitchFamily="34" charset="-122"/>
-                <a:cs typeface="Inter" pitchFamily="34" charset="-120"/>
-              </a:rPr>
-              <a:t>Restitution personnalisée</a:t>
-            </a:r>
-            <a:endParaRPr lang="en-US" sz="1500" dirty="0"/>
-          </a:p>
-        </p:txBody>
-      </p:sp>
-      <p:sp>
-        <p:nvSpPr>
-          <p:cNvPr id="5" name="Text 3"/>
-          <p:cNvSpPr/>
-          <p:nvPr/>
-        </p:nvSpPr>
-        <p:spPr>
-          <a:xfrm>
-            <a:off x="658368" y="5888736"/>
-            <a:ext cx="9774936" cy="457200"/>
-          </a:xfrm>
-          <a:prstGeom prst="rect">
-            <a:avLst/>
-          </a:prstGeom>
-          <a:noFill/>
-          <a:ln/>
-        </p:spPr>
-        <p:txBody>
-          <a:bodyPr wrap="square" lIns="0" tIns="0" rIns="0" bIns="0" rtlCol="0" anchor="b"/>
-          <a:lstStyle/>
-          <a:p>
-            <a:pPr indent="0" marL="0">
-              <a:buNone/>
-            </a:pPr>
-            <a:r>
-              <a:rPr lang="en-US" sz="1000" i="1" dirty="0">
-                <a:solidFill>
-                  <a:srgbClr val="5C6875"/>
-                </a:solidFill>
-                <a:latin typeface="Inter" pitchFamily="34" charset="0"/>
-                <a:ea typeface="Inter" pitchFamily="34" charset="-122"/>
-                <a:cs typeface="Inter" pitchFamily="34" charset="-120"/>
-              </a:rPr>
-              <a:t>Suivre les signaux, les scores et les évolutions.</a:t>
-            </a:r>
-            <a:endParaRPr lang="en-US" sz="1000" dirty="0"/>
-          </a:p>
-        </p:txBody>
-      </p:sp>
-      <p:sp>
-        <p:nvSpPr>
-          <p:cNvPr id="6" name="Text 4"/>
+              <a:t>Informer, surveiller, arbitrer. Trois engagements différents, annoncés avec leurs plafonds.</a:t>
+            </a:r>
+            <a:endParaRPr lang="en-US" sz="1600" dirty="0"/>
+          </a:p>
+        </p:txBody>
+      </p:sp>
+      <p:sp>
+        <p:nvSpPr>
+          <p:cNvPr id="24" name="Text 22"/>
           <p:cNvSpPr/>
           <p:nvPr/>
         </p:nvSpPr>
@@ -4344,7 +4025,7 @@
             <a:r>
               <a:rPr lang="en-US" sz="1000" dirty="0">
                 <a:solidFill>
-                  <a:srgbClr val="5C6875"/>
+                  <a:srgbClr val="BFCAD3"/>
                 </a:solidFill>
                 <a:latin typeface="IBM Plex Mono" pitchFamily="34" charset="0"/>
                 <a:ea typeface="IBM Plex Mono" pitchFamily="34" charset="-122"/>
@@ -4421,7 +4102,7 @@
                 <a:ea typeface="IBM Plex Mono" pitchFamily="34" charset="-122"/>
                 <a:cs typeface="IBM Plex Mono" pitchFamily="34" charset="-120"/>
               </a:rPr>
-              <a:t>OFFRES · PREMIUM</a:t>
+              <a:t>OFFRES</a:t>
             </a:r>
             <a:endParaRPr lang="en-US" sz="1000" dirty="0"/>
           </a:p>
@@ -4463,7 +4144,7 @@
                 <a:ea typeface="Fraunces" pitchFamily="34" charset="-122"/>
                 <a:cs typeface="Fraunces" pitchFamily="34" charset="-120"/>
               </a:rPr>
-              <a:t>Arbitrer — 3 000–15 000 €+</a:t>
+              <a:t>Trois niveaux de lecture</a:t>
             </a:r>
             <a:endParaRPr lang="en-US" sz="3400" dirty="0"/>
           </a:p>
@@ -4471,14 +4152,39 @@
       </p:sp>
       <p:sp>
         <p:nvSpPr>
-          <p:cNvPr id="4" name="Text 2"/>
-          <p:cNvSpPr/>
-          <p:nvPr/>
-        </p:nvSpPr>
-        <p:spPr>
-          <a:xfrm>
-            <a:off x="658368" y="2194560"/>
-            <a:ext cx="8778240" cy="3566160"/>
+          <p:cNvPr id="4" name="Shape 2"/>
+          <p:cNvSpPr/>
+          <p:nvPr/>
+        </p:nvSpPr>
+        <p:spPr>
+          <a:xfrm>
+            <a:off x="658368" y="2446020"/>
+            <a:ext cx="3404616" cy="3063240"/>
+          </a:xfrm>
+          <a:prstGeom prst="rect">
+            <a:avLst/>
+          </a:prstGeom>
+          <a:solidFill>
+            <a:srgbClr val="F4F6F8"/>
+          </a:solidFill>
+          <a:ln w="12700">
+            <a:solidFill>
+              <a:srgbClr val="D3DBE1"/>
+            </a:solidFill>
+            <a:prstDash val="solid"/>
+          </a:ln>
+        </p:spPr>
+      </p:sp>
+      <p:sp>
+        <p:nvSpPr>
+          <p:cNvPr id="5" name="Text 3"/>
+          <p:cNvSpPr/>
+          <p:nvPr/>
+        </p:nvSpPr>
+        <p:spPr>
+          <a:xfrm>
+            <a:off x="969264" y="2756916"/>
+            <a:ext cx="2782824" cy="237744"/>
           </a:xfrm>
           <a:prstGeom prst="rect">
             <a:avLst/>
@@ -4487,144 +4193,134 @@
           <a:ln/>
         </p:spPr>
         <p:txBody>
+          <a:bodyPr wrap="square" lIns="0" tIns="0" rIns="0" bIns="0" rtlCol="0" anchor="ctr"/>
+          <a:lstStyle/>
+          <a:p>
+            <a:pPr indent="0" marL="0">
+              <a:buNone/>
+            </a:pPr>
+            <a:r>
+              <a:rPr lang="en-US" sz="1000" spc="140" kern="0" dirty="0">
+                <a:solidFill>
+                  <a:srgbClr val="5C6875"/>
+                </a:solidFill>
+                <a:latin typeface="IBM Plex Mono" pitchFamily="34" charset="0"/>
+                <a:ea typeface="IBM Plex Mono" pitchFamily="34" charset="-122"/>
+                <a:cs typeface="IBM Plex Mono" pitchFamily="34" charset="-120"/>
+              </a:rPr>
+              <a:t>INFORMER</a:t>
+            </a:r>
+            <a:endParaRPr lang="en-US" sz="1000" dirty="0"/>
+          </a:p>
+        </p:txBody>
+      </p:sp>
+      <p:sp>
+        <p:nvSpPr>
+          <p:cNvPr id="6" name="Text 4"/>
+          <p:cNvSpPr/>
+          <p:nvPr/>
+        </p:nvSpPr>
+        <p:spPr>
+          <a:xfrm>
+            <a:off x="969264" y="3086100"/>
+            <a:ext cx="2782824" cy="548640"/>
+          </a:xfrm>
+          <a:prstGeom prst="rect">
+            <a:avLst/>
+          </a:prstGeom>
+          <a:noFill/>
+          <a:ln/>
+        </p:spPr>
+        <p:txBody>
           <a:bodyPr wrap="square" lIns="0" tIns="0" rIns="0" bIns="0" rtlCol="0" anchor="t"/>
           <a:lstStyle/>
           <a:p>
-            <a:pPr marL="279400" indent="-279400">
-              <a:spcAft>
-                <a:spcPts val="1100"/>
-              </a:spcAft>
-              <a:buSzPct val="100000"/>
-              <a:buChar char="◊"/>
+            <a:pPr indent="0" marL="0">
+              <a:buNone/>
             </a:pPr>
             <a:r>
-              <a:rPr lang="en-US" sz="1500" dirty="0">
+              <a:rPr lang="en-US" sz="2600" b="1" dirty="0">
                 <a:solidFill>
                   <a:srgbClr val="141C26"/>
                 </a:solidFill>
-                <a:latin typeface="Inter" pitchFamily="34" charset="0"/>
-                <a:ea typeface="Inter" pitchFamily="34" charset="-122"/>
-                <a:cs typeface="Inter" pitchFamily="34" charset="-120"/>
+                <a:latin typeface="Fraunces" pitchFamily="34" charset="0"/>
+                <a:ea typeface="Fraunces" pitchFamily="34" charset="-122"/>
+                <a:cs typeface="Fraunces" pitchFamily="34" charset="-120"/>
               </a:rPr>
-              <a:t>Tout Standard, plus :</a:t>
+              <a:t>Basic</a:t>
+            </a:r>
+            <a:endParaRPr lang="en-US" sz="2600" dirty="0"/>
+          </a:p>
+        </p:txBody>
+      </p:sp>
+      <p:sp>
+        <p:nvSpPr>
+          <p:cNvPr id="7" name="Text 5"/>
+          <p:cNvSpPr/>
+          <p:nvPr/>
+        </p:nvSpPr>
+        <p:spPr>
+          <a:xfrm>
+            <a:off x="969264" y="3762756"/>
+            <a:ext cx="2782824" cy="365760"/>
+          </a:xfrm>
+          <a:prstGeom prst="rect">
+            <a:avLst/>
+          </a:prstGeom>
+          <a:noFill/>
+          <a:ln/>
+        </p:spPr>
+        <p:txBody>
+          <a:bodyPr wrap="square" lIns="0" tIns="0" rIns="0" bIns="0" rtlCol="0" anchor="ctr"/>
+          <a:lstStyle/>
+          <a:p>
+            <a:pPr indent="0" marL="0">
+              <a:buNone/>
+            </a:pPr>
+            <a:r>
+              <a:rPr lang="en-US" sz="1500" b="1" dirty="0">
+                <a:solidFill>
+                  <a:srgbClr val="0F3C4E"/>
+                </a:solidFill>
+                <a:latin typeface="IBM Plex Mono" pitchFamily="34" charset="0"/>
+                <a:ea typeface="IBM Plex Mono" pitchFamily="34" charset="-122"/>
+                <a:cs typeface="IBM Plex Mono" pitchFamily="34" charset="-120"/>
+              </a:rPr>
+              <a:t>19–49 €/mois</a:t>
             </a:r>
             <a:endParaRPr lang="en-US" sz="1500" dirty="0"/>
           </a:p>
-          <a:p>
-            <a:pPr marL="279400" indent="-279400">
-              <a:spcAft>
-                <a:spcPts val="1100"/>
-              </a:spcAft>
-              <a:buSzPct val="100000"/>
-              <a:buChar char="◊"/>
+        </p:txBody>
+      </p:sp>
+      <p:sp>
+        <p:nvSpPr>
+          <p:cNvPr id="8" name="Text 6"/>
+          <p:cNvSpPr/>
+          <p:nvPr/>
+        </p:nvSpPr>
+        <p:spPr>
+          <a:xfrm>
+            <a:off x="969264" y="4274820"/>
+            <a:ext cx="2782824" cy="914400"/>
+          </a:xfrm>
+          <a:prstGeom prst="rect">
+            <a:avLst/>
+          </a:prstGeom>
+          <a:noFill/>
+          <a:ln/>
+        </p:spPr>
+        <p:txBody>
+          <a:bodyPr wrap="square" lIns="0" tIns="0" rIns="0" bIns="0" rtlCol="0" anchor="t"/>
+          <a:lstStyle/>
+          <a:p>
+            <a:pPr indent="0" marL="0">
+              <a:lnSpc>
+                <a:spcPct val="125000"/>
+              </a:lnSpc>
+              <a:buNone/>
             </a:pPr>
             <a:r>
-              <a:rPr lang="en-US" sz="1500" dirty="0">
-                <a:solidFill>
-                  <a:srgbClr val="141C26"/>
-                </a:solidFill>
-                <a:latin typeface="Inter" pitchFamily="34" charset="0"/>
-                <a:ea typeface="Inter" pitchFamily="34" charset="-122"/>
-                <a:cs typeface="Inter" pitchFamily="34" charset="-120"/>
-              </a:rPr>
-              <a:t>Entretien de cadrage</a:t>
-            </a:r>
-            <a:endParaRPr lang="en-US" sz="1500" dirty="0"/>
-          </a:p>
-          <a:p>
-            <a:pPr marL="279400" indent="-279400">
-              <a:spcAft>
-                <a:spcPts val="1100"/>
-              </a:spcAft>
-              <a:buSzPct val="100000"/>
-              <a:buChar char="◊"/>
-            </a:pPr>
-            <a:r>
-              <a:rPr lang="en-US" sz="1500" dirty="0">
-                <a:solidFill>
-                  <a:srgbClr val="141C26"/>
-                </a:solidFill>
-                <a:latin typeface="Inter" pitchFamily="34" charset="0"/>
-                <a:ea typeface="Inter" pitchFamily="34" charset="-122"/>
-                <a:cs typeface="Inter" pitchFamily="34" charset="-120"/>
-              </a:rPr>
-              <a:t>Diagnostic d’exposition client</a:t>
-            </a:r>
-            <a:endParaRPr lang="en-US" sz="1500" dirty="0"/>
-          </a:p>
-          <a:p>
-            <a:pPr marL="279400" indent="-279400">
-              <a:spcAft>
-                <a:spcPts val="1100"/>
-              </a:spcAft>
-              <a:buSzPct val="100000"/>
-              <a:buChar char="◊"/>
-            </a:pPr>
-            <a:r>
-              <a:rPr lang="en-US" sz="1500" dirty="0">
-                <a:solidFill>
-                  <a:srgbClr val="141C26"/>
-                </a:solidFill>
-                <a:latin typeface="Inter" pitchFamily="34" charset="0"/>
-                <a:ea typeface="Inter" pitchFamily="34" charset="-122"/>
-                <a:cs typeface="Inter" pitchFamily="34" charset="-120"/>
-              </a:rPr>
-              <a:t>Scénarios et seuils de bascule adaptés</a:t>
-            </a:r>
-            <a:endParaRPr lang="en-US" sz="1500" dirty="0"/>
-          </a:p>
-          <a:p>
-            <a:pPr marL="279400" indent="-279400">
-              <a:spcAft>
-                <a:spcPts val="1100"/>
-              </a:spcAft>
-              <a:buSzPct val="100000"/>
-              <a:buChar char="◊"/>
-            </a:pPr>
-            <a:r>
-              <a:rPr lang="en-US" sz="1500" dirty="0">
-                <a:solidFill>
-                  <a:srgbClr val="141C26"/>
-                </a:solidFill>
-                <a:latin typeface="Inter" pitchFamily="34" charset="0"/>
-                <a:ea typeface="Inter" pitchFamily="34" charset="-122"/>
-                <a:cs typeface="Inter" pitchFamily="34" charset="-120"/>
-              </a:rPr>
-              <a:t>Options de mitigation</a:t>
-            </a:r>
-            <a:endParaRPr lang="en-US" sz="1500" dirty="0"/>
-          </a:p>
-          <a:p>
-            <a:pPr marL="279400" indent="-279400">
-              <a:spcAft>
-                <a:spcPts val="1100"/>
-              </a:spcAft>
-              <a:buSzPct val="100000"/>
-              <a:buChar char="◊"/>
-            </a:pPr>
-            <a:r>
-              <a:rPr lang="en-US" sz="1500" dirty="0">
-                <a:solidFill>
-                  <a:srgbClr val="141C26"/>
-                </a:solidFill>
-                <a:latin typeface="Inter" pitchFamily="34" charset="0"/>
-                <a:ea typeface="Inter" pitchFamily="34" charset="-122"/>
-                <a:cs typeface="Inter" pitchFamily="34" charset="-120"/>
-              </a:rPr>
-              <a:t>Restitution 45–60 min + note de décision</a:t>
-            </a:r>
-            <a:endParaRPr lang="en-US" sz="1500" dirty="0"/>
-          </a:p>
-          <a:p>
-            <a:pPr marL="279400" indent="-279400">
-              <a:spcAft>
-                <a:spcPts val="800"/>
-              </a:spcAft>
-              <a:buSzPct val="100000"/>
-              <a:buChar char="—"/>
-            </a:pPr>
-            <a:r>
-              <a:rPr lang="en-US" sz="1200" dirty="0">
+              <a:rPr lang="en-US" sz="1300" dirty="0">
                 <a:solidFill>
                   <a:srgbClr val="5C6875"/>
                 </a:solidFill>
@@ -4632,20 +4328,183 @@
                 <a:ea typeface="Inter" pitchFamily="34" charset="-122"/>
                 <a:cs typeface="Inter" pitchFamily="34" charset="-120"/>
               </a:rPr>
-              <a:t>Audit complet de supply chain</a:t>
+              <a:t>Comprendre les corridors, les flux et les vulnérabilités.</a:t>
+            </a:r>
+            <a:endParaRPr lang="en-US" sz="1300" dirty="0"/>
+          </a:p>
+        </p:txBody>
+      </p:sp>
+      <p:sp>
+        <p:nvSpPr>
+          <p:cNvPr id="9" name="Shape 7"/>
+          <p:cNvSpPr/>
+          <p:nvPr/>
+        </p:nvSpPr>
+        <p:spPr>
+          <a:xfrm>
+            <a:off x="4392168" y="2446020"/>
+            <a:ext cx="3404616" cy="3063240"/>
+          </a:xfrm>
+          <a:prstGeom prst="rect">
+            <a:avLst/>
+          </a:prstGeom>
+          <a:solidFill>
+            <a:srgbClr val="FCFDFE"/>
+          </a:solidFill>
+          <a:ln w="22225">
+            <a:solidFill>
+              <a:srgbClr val="0F3C4E"/>
+            </a:solidFill>
+            <a:prstDash val="solid"/>
+          </a:ln>
+        </p:spPr>
+      </p:sp>
+      <p:sp>
+        <p:nvSpPr>
+          <p:cNvPr id="10" name="Text 8"/>
+          <p:cNvSpPr/>
+          <p:nvPr/>
+        </p:nvSpPr>
+        <p:spPr>
+          <a:xfrm>
+            <a:off x="4703064" y="2756916"/>
+            <a:ext cx="2782824" cy="237744"/>
+          </a:xfrm>
+          <a:prstGeom prst="rect">
+            <a:avLst/>
+          </a:prstGeom>
+          <a:noFill/>
+          <a:ln/>
+        </p:spPr>
+        <p:txBody>
+          <a:bodyPr wrap="square" lIns="0" tIns="0" rIns="0" bIns="0" rtlCol="0" anchor="ctr"/>
+          <a:lstStyle/>
+          <a:p>
+            <a:pPr indent="0" marL="0">
+              <a:buNone/>
+            </a:pPr>
+            <a:r>
+              <a:rPr lang="en-US" sz="1000" spc="140" kern="0" dirty="0">
+                <a:solidFill>
+                  <a:srgbClr val="C8282C"/>
+                </a:solidFill>
+                <a:latin typeface="IBM Plex Mono" pitchFamily="34" charset="0"/>
+                <a:ea typeface="IBM Plex Mono" pitchFamily="34" charset="-122"/>
+                <a:cs typeface="IBM Plex Mono" pitchFamily="34" charset="-120"/>
+              </a:rPr>
+              <a:t>SURVEILLER</a:t>
+            </a:r>
+            <a:endParaRPr lang="en-US" sz="1000" dirty="0"/>
+          </a:p>
+        </p:txBody>
+      </p:sp>
+      <p:sp>
+        <p:nvSpPr>
+          <p:cNvPr id="11" name="Text 9"/>
+          <p:cNvSpPr/>
+          <p:nvPr/>
+        </p:nvSpPr>
+        <p:spPr>
+          <a:xfrm>
+            <a:off x="4703064" y="3086100"/>
+            <a:ext cx="2782824" cy="548640"/>
+          </a:xfrm>
+          <a:prstGeom prst="rect">
+            <a:avLst/>
+          </a:prstGeom>
+          <a:noFill/>
+          <a:ln/>
+        </p:spPr>
+        <p:txBody>
+          <a:bodyPr wrap="square" lIns="0" tIns="0" rIns="0" bIns="0" rtlCol="0" anchor="t"/>
+          <a:lstStyle/>
+          <a:p>
+            <a:pPr indent="0" marL="0">
+              <a:buNone/>
+            </a:pPr>
+            <a:r>
+              <a:rPr lang="en-US" sz="2600" b="1" dirty="0">
+                <a:solidFill>
+                  <a:srgbClr val="141C26"/>
+                </a:solidFill>
+                <a:latin typeface="Fraunces" pitchFamily="34" charset="0"/>
+                <a:ea typeface="Fraunces" pitchFamily="34" charset="-122"/>
+                <a:cs typeface="Fraunces" pitchFamily="34" charset="-120"/>
+              </a:rPr>
+              <a:t>Standard</a:t>
+            </a:r>
+            <a:endParaRPr lang="en-US" sz="2600" dirty="0"/>
+          </a:p>
+        </p:txBody>
+      </p:sp>
+      <p:sp>
+        <p:nvSpPr>
+          <p:cNvPr id="12" name="Text 10"/>
+          <p:cNvSpPr/>
+          <p:nvPr/>
+        </p:nvSpPr>
+        <p:spPr>
+          <a:xfrm>
+            <a:off x="4703064" y="3762756"/>
+            <a:ext cx="2782824" cy="365760"/>
+          </a:xfrm>
+          <a:prstGeom prst="rect">
+            <a:avLst/>
+          </a:prstGeom>
+          <a:noFill/>
+          <a:ln/>
+        </p:spPr>
+        <p:txBody>
+          <a:bodyPr wrap="square" lIns="0" tIns="0" rIns="0" bIns="0" rtlCol="0" anchor="ctr"/>
+          <a:lstStyle/>
+          <a:p>
+            <a:pPr indent="0" marL="0">
+              <a:buNone/>
+            </a:pPr>
+            <a:r>
+              <a:rPr lang="en-US" sz="1500" b="1" dirty="0">
+                <a:solidFill>
+                  <a:srgbClr val="0F3C4E"/>
+                </a:solidFill>
+                <a:latin typeface="IBM Plex Mono" pitchFamily="34" charset="0"/>
+                <a:ea typeface="IBM Plex Mono" pitchFamily="34" charset="-122"/>
+                <a:cs typeface="IBM Plex Mono" pitchFamily="34" charset="-120"/>
+              </a:rPr>
+              <a:t>199–799 €/mois</a:t>
             </a:r>
             <a:endParaRPr lang="en-US" sz="1500" dirty="0"/>
           </a:p>
-          <a:p>
-            <a:pPr marL="279400" indent="-279400">
-              <a:spcAft>
-                <a:spcPts val="800"/>
-              </a:spcAft>
-              <a:buSzPct val="100000"/>
-              <a:buChar char="—"/>
+        </p:txBody>
+      </p:sp>
+      <p:sp>
+        <p:nvSpPr>
+          <p:cNvPr id="13" name="Text 11"/>
+          <p:cNvSpPr/>
+          <p:nvPr/>
+        </p:nvSpPr>
+        <p:spPr>
+          <a:xfrm>
+            <a:off x="4703064" y="4274820"/>
+            <a:ext cx="2782824" cy="914400"/>
+          </a:xfrm>
+          <a:prstGeom prst="rect">
+            <a:avLst/>
+          </a:prstGeom>
+          <a:noFill/>
+          <a:ln/>
+        </p:spPr>
+        <p:txBody>
+          <a:bodyPr wrap="square" lIns="0" tIns="0" rIns="0" bIns="0" rtlCol="0" anchor="t"/>
+          <a:lstStyle/>
+          <a:p>
+            <a:pPr indent="0" marL="0">
+              <a:lnSpc>
+                <a:spcPct val="125000"/>
+              </a:lnSpc>
+              <a:buNone/>
             </a:pPr>
             <a:r>
-              <a:rPr lang="en-US" sz="1200" dirty="0">
+              <a:rPr lang="en-US" sz="1300" dirty="0">
                 <a:solidFill>
                   <a:srgbClr val="5C6875"/>
                 </a:solidFill>
@@ -4653,20 +4512,183 @@
                 <a:ea typeface="Inter" pitchFamily="34" charset="-122"/>
                 <a:cs typeface="Inter" pitchFamily="34" charset="-120"/>
               </a:rPr>
-              <a:t>Conseil juridique</a:t>
+              <a:t>Suivre les signaux, les scores et les évolutions.</a:t>
+            </a:r>
+            <a:endParaRPr lang="en-US" sz="1300" dirty="0"/>
+          </a:p>
+        </p:txBody>
+      </p:sp>
+      <p:sp>
+        <p:nvSpPr>
+          <p:cNvPr id="14" name="Shape 12"/>
+          <p:cNvSpPr/>
+          <p:nvPr/>
+        </p:nvSpPr>
+        <p:spPr>
+          <a:xfrm>
+            <a:off x="8125968" y="2446020"/>
+            <a:ext cx="3404616" cy="3063240"/>
+          </a:xfrm>
+          <a:prstGeom prst="rect">
+            <a:avLst/>
+          </a:prstGeom>
+          <a:solidFill>
+            <a:srgbClr val="F4F6F8"/>
+          </a:solidFill>
+          <a:ln w="12700">
+            <a:solidFill>
+              <a:srgbClr val="D3DBE1"/>
+            </a:solidFill>
+            <a:prstDash val="solid"/>
+          </a:ln>
+        </p:spPr>
+      </p:sp>
+      <p:sp>
+        <p:nvSpPr>
+          <p:cNvPr id="15" name="Text 13"/>
+          <p:cNvSpPr/>
+          <p:nvPr/>
+        </p:nvSpPr>
+        <p:spPr>
+          <a:xfrm>
+            <a:off x="8436864" y="2756916"/>
+            <a:ext cx="2782824" cy="237744"/>
+          </a:xfrm>
+          <a:prstGeom prst="rect">
+            <a:avLst/>
+          </a:prstGeom>
+          <a:noFill/>
+          <a:ln/>
+        </p:spPr>
+        <p:txBody>
+          <a:bodyPr wrap="square" lIns="0" tIns="0" rIns="0" bIns="0" rtlCol="0" anchor="ctr"/>
+          <a:lstStyle/>
+          <a:p>
+            <a:pPr indent="0" marL="0">
+              <a:buNone/>
+            </a:pPr>
+            <a:r>
+              <a:rPr lang="en-US" sz="1000" spc="140" kern="0" dirty="0">
+                <a:solidFill>
+                  <a:srgbClr val="5C6875"/>
+                </a:solidFill>
+                <a:latin typeface="IBM Plex Mono" pitchFamily="34" charset="0"/>
+                <a:ea typeface="IBM Plex Mono" pitchFamily="34" charset="-122"/>
+                <a:cs typeface="IBM Plex Mono" pitchFamily="34" charset="-120"/>
+              </a:rPr>
+              <a:t>ARBITRER</a:t>
+            </a:r>
+            <a:endParaRPr lang="en-US" sz="1000" dirty="0"/>
+          </a:p>
+        </p:txBody>
+      </p:sp>
+      <p:sp>
+        <p:nvSpPr>
+          <p:cNvPr id="16" name="Text 14"/>
+          <p:cNvSpPr/>
+          <p:nvPr/>
+        </p:nvSpPr>
+        <p:spPr>
+          <a:xfrm>
+            <a:off x="8436864" y="3086100"/>
+            <a:ext cx="2782824" cy="548640"/>
+          </a:xfrm>
+          <a:prstGeom prst="rect">
+            <a:avLst/>
+          </a:prstGeom>
+          <a:noFill/>
+          <a:ln/>
+        </p:spPr>
+        <p:txBody>
+          <a:bodyPr wrap="square" lIns="0" tIns="0" rIns="0" bIns="0" rtlCol="0" anchor="t"/>
+          <a:lstStyle/>
+          <a:p>
+            <a:pPr indent="0" marL="0">
+              <a:buNone/>
+            </a:pPr>
+            <a:r>
+              <a:rPr lang="en-US" sz="2600" b="1" dirty="0">
+                <a:solidFill>
+                  <a:srgbClr val="141C26"/>
+                </a:solidFill>
+                <a:latin typeface="Fraunces" pitchFamily="34" charset="0"/>
+                <a:ea typeface="Fraunces" pitchFamily="34" charset="-122"/>
+                <a:cs typeface="Fraunces" pitchFamily="34" charset="-120"/>
+              </a:rPr>
+              <a:t>Premium</a:t>
+            </a:r>
+            <a:endParaRPr lang="en-US" sz="2600" dirty="0"/>
+          </a:p>
+        </p:txBody>
+      </p:sp>
+      <p:sp>
+        <p:nvSpPr>
+          <p:cNvPr id="17" name="Text 15"/>
+          <p:cNvSpPr/>
+          <p:nvPr/>
+        </p:nvSpPr>
+        <p:spPr>
+          <a:xfrm>
+            <a:off x="8436864" y="3762756"/>
+            <a:ext cx="2782824" cy="365760"/>
+          </a:xfrm>
+          <a:prstGeom prst="rect">
+            <a:avLst/>
+          </a:prstGeom>
+          <a:noFill/>
+          <a:ln/>
+        </p:spPr>
+        <p:txBody>
+          <a:bodyPr wrap="square" lIns="0" tIns="0" rIns="0" bIns="0" rtlCol="0" anchor="ctr"/>
+          <a:lstStyle/>
+          <a:p>
+            <a:pPr indent="0" marL="0">
+              <a:buNone/>
+            </a:pPr>
+            <a:r>
+              <a:rPr lang="en-US" sz="1500" b="1" dirty="0">
+                <a:solidFill>
+                  <a:srgbClr val="0F3C4E"/>
+                </a:solidFill>
+                <a:latin typeface="IBM Plex Mono" pitchFamily="34" charset="0"/>
+                <a:ea typeface="IBM Plex Mono" pitchFamily="34" charset="-122"/>
+                <a:cs typeface="IBM Plex Mono" pitchFamily="34" charset="-120"/>
+              </a:rPr>
+              <a:t>3 000–15 000 €+</a:t>
             </a:r>
             <a:endParaRPr lang="en-US" sz="1500" dirty="0"/>
           </a:p>
-          <a:p>
-            <a:pPr marL="279400" indent="-279400">
-              <a:spcAft>
-                <a:spcPts val="800"/>
-              </a:spcAft>
-              <a:buSzPct val="100000"/>
-              <a:buChar char="—"/>
+        </p:txBody>
+      </p:sp>
+      <p:sp>
+        <p:nvSpPr>
+          <p:cNvPr id="18" name="Text 16"/>
+          <p:cNvSpPr/>
+          <p:nvPr/>
+        </p:nvSpPr>
+        <p:spPr>
+          <a:xfrm>
+            <a:off x="8436864" y="4274820"/>
+            <a:ext cx="2782824" cy="914400"/>
+          </a:xfrm>
+          <a:prstGeom prst="rect">
+            <a:avLst/>
+          </a:prstGeom>
+          <a:noFill/>
+          <a:ln/>
+        </p:spPr>
+        <p:txBody>
+          <a:bodyPr wrap="square" lIns="0" tIns="0" rIns="0" bIns="0" rtlCol="0" anchor="t"/>
+          <a:lstStyle/>
+          <a:p>
+            <a:pPr indent="0" marL="0">
+              <a:lnSpc>
+                <a:spcPct val="125000"/>
+              </a:lnSpc>
+              <a:buNone/>
             </a:pPr>
             <a:r>
-              <a:rPr lang="en-US" sz="1200" dirty="0">
+              <a:rPr lang="en-US" sz="1300" dirty="0">
                 <a:solidFill>
                   <a:srgbClr val="5C6875"/>
                 </a:solidFill>
@@ -4674,22 +4696,22 @@
                 <a:ea typeface="Inter" pitchFamily="34" charset="-122"/>
                 <a:cs typeface="Inter" pitchFamily="34" charset="-120"/>
               </a:rPr>
-              <a:t>Garantie de prédiction</a:t>
-            </a:r>
-            <a:endParaRPr lang="en-US" sz="1500" dirty="0"/>
-          </a:p>
-        </p:txBody>
-      </p:sp>
-      <p:sp>
-        <p:nvSpPr>
-          <p:cNvPr id="5" name="Text 3"/>
-          <p:cNvSpPr/>
-          <p:nvPr/>
-        </p:nvSpPr>
-        <p:spPr>
-          <a:xfrm>
-            <a:off x="658368" y="5888736"/>
-            <a:ext cx="9774936" cy="457200"/>
+              <a:t>Scénarios, seuils de bascule et arbitrage contextualisé.</a:t>
+            </a:r>
+            <a:endParaRPr lang="en-US" sz="1300" dirty="0"/>
+          </a:p>
+        </p:txBody>
+      </p:sp>
+      <p:sp>
+        <p:nvSpPr>
+          <p:cNvPr id="19" name="Text 17"/>
+          <p:cNvSpPr/>
+          <p:nvPr/>
+        </p:nvSpPr>
+        <p:spPr>
+          <a:xfrm>
+            <a:off x="658368" y="5815584"/>
+            <a:ext cx="9774936" cy="548640"/>
           </a:xfrm>
           <a:prstGeom prst="rect">
             <a:avLst/>
@@ -4713,7 +4735,7 @@
                 <a:ea typeface="Inter" pitchFamily="34" charset="-122"/>
                 <a:cs typeface="Inter" pitchFamily="34" charset="-120"/>
               </a:rPr>
-              <a:t>Scénarios, seuils de bascule et arbitrage contextualisé.</a:t>
+              <a:t>Basic informe. Standard surveille. Premium aide à arbitrer.</a:t>
             </a:r>
             <a:endParaRPr lang="en-US" sz="1000" dirty="0"/>
           </a:p>
@@ -4721,7 +4743,7 @@
       </p:sp>
       <p:sp>
         <p:nvSpPr>
-          <p:cNvPr id="6" name="Text 4"/>
+          <p:cNvPr id="20" name="Text 18"/>
           <p:cNvSpPr/>
           <p:nvPr/>
         </p:nvSpPr>
@@ -7366,8 +7388,8 @@
         </p:nvSpPr>
         <p:spPr>
           <a:xfrm>
-            <a:off x="658368" y="5888736"/>
-            <a:ext cx="9774936" cy="457200"/>
+            <a:off x="658368" y="5815584"/>
+            <a:ext cx="9774936" cy="548640"/>
           </a:xfrm>
           <a:prstGeom prst="rect">
             <a:avLst/>
@@ -7684,8 +7706,8 @@
         </p:nvSpPr>
         <p:spPr>
           <a:xfrm>
-            <a:off x="658368" y="5888736"/>
-            <a:ext cx="9774936" cy="457200"/>
+            <a:off x="658368" y="5815584"/>
+            <a:ext cx="9774936" cy="548640"/>
           </a:xfrm>
           <a:prstGeom prst="rect">
             <a:avLst/>
@@ -9608,8 +9630,8 @@
         </p:nvSpPr>
         <p:spPr>
           <a:xfrm>
-            <a:off x="658368" y="5888736"/>
-            <a:ext cx="9774936" cy="457200"/>
+            <a:off x="658368" y="5815584"/>
+            <a:ext cx="9774936" cy="548640"/>
           </a:xfrm>
           <a:prstGeom prst="rect">
             <a:avLst/>
@@ -9936,7 +9958,7 @@
     <p:bg>
       <p:bgPr>
         <a:solidFill>
-          <a:srgbClr val="F4F6F8"/>
+          <a:srgbClr val="0F3C4E"/>
         </a:solidFill>
       </p:bgPr>
     </p:bg>
@@ -9956,14 +9978,489 @@
       </p:grpSpPr>
       <p:sp>
         <p:nvSpPr>
-          <p:cNvPr id="2" name="Text 0"/>
-          <p:cNvSpPr/>
-          <p:nvPr/>
-        </p:nvSpPr>
-        <p:spPr>
-          <a:xfrm>
-            <a:off x="658368" y="475488"/>
-            <a:ext cx="10872216" cy="237744"/>
+          <p:cNvPr id="2" name="Shape 0"/>
+          <p:cNvSpPr/>
+          <p:nvPr/>
+        </p:nvSpPr>
+        <p:spPr>
+          <a:xfrm>
+            <a:off x="914400" y="0"/>
+            <a:ext cx="0" cy="6858000"/>
+          </a:xfrm>
+          <a:prstGeom prst="line">
+            <a:avLst/>
+          </a:prstGeom>
+          <a:noFill/>
+          <a:ln w="6350">
+            <a:solidFill>
+              <a:srgbClr val="F4F6F8">
+                <a:alpha val="22000"/>
+              </a:srgbClr>
+            </a:solidFill>
+            <a:prstDash val="solid"/>
+          </a:ln>
+        </p:spPr>
+      </p:sp>
+      <p:sp>
+        <p:nvSpPr>
+          <p:cNvPr id="3" name="Shape 1"/>
+          <p:cNvSpPr/>
+          <p:nvPr/>
+        </p:nvSpPr>
+        <p:spPr>
+          <a:xfrm>
+            <a:off x="1828800" y="0"/>
+            <a:ext cx="0" cy="6858000"/>
+          </a:xfrm>
+          <a:prstGeom prst="line">
+            <a:avLst/>
+          </a:prstGeom>
+          <a:noFill/>
+          <a:ln w="6350">
+            <a:solidFill>
+              <a:srgbClr val="F4F6F8">
+                <a:alpha val="22000"/>
+              </a:srgbClr>
+            </a:solidFill>
+            <a:prstDash val="solid"/>
+          </a:ln>
+        </p:spPr>
+      </p:sp>
+      <p:sp>
+        <p:nvSpPr>
+          <p:cNvPr id="4" name="Shape 2"/>
+          <p:cNvSpPr/>
+          <p:nvPr/>
+        </p:nvSpPr>
+        <p:spPr>
+          <a:xfrm>
+            <a:off x="2743200" y="0"/>
+            <a:ext cx="0" cy="6858000"/>
+          </a:xfrm>
+          <a:prstGeom prst="line">
+            <a:avLst/>
+          </a:prstGeom>
+          <a:noFill/>
+          <a:ln w="6350">
+            <a:solidFill>
+              <a:srgbClr val="F4F6F8">
+                <a:alpha val="22000"/>
+              </a:srgbClr>
+            </a:solidFill>
+            <a:prstDash val="solid"/>
+          </a:ln>
+        </p:spPr>
+      </p:sp>
+      <p:sp>
+        <p:nvSpPr>
+          <p:cNvPr id="5" name="Shape 3"/>
+          <p:cNvSpPr/>
+          <p:nvPr/>
+        </p:nvSpPr>
+        <p:spPr>
+          <a:xfrm>
+            <a:off x="3657600" y="0"/>
+            <a:ext cx="0" cy="6858000"/>
+          </a:xfrm>
+          <a:prstGeom prst="line">
+            <a:avLst/>
+          </a:prstGeom>
+          <a:noFill/>
+          <a:ln w="6350">
+            <a:solidFill>
+              <a:srgbClr val="F4F6F8">
+                <a:alpha val="22000"/>
+              </a:srgbClr>
+            </a:solidFill>
+            <a:prstDash val="solid"/>
+          </a:ln>
+        </p:spPr>
+      </p:sp>
+      <p:sp>
+        <p:nvSpPr>
+          <p:cNvPr id="6" name="Shape 4"/>
+          <p:cNvSpPr/>
+          <p:nvPr/>
+        </p:nvSpPr>
+        <p:spPr>
+          <a:xfrm>
+            <a:off x="4572000" y="0"/>
+            <a:ext cx="0" cy="6858000"/>
+          </a:xfrm>
+          <a:prstGeom prst="line">
+            <a:avLst/>
+          </a:prstGeom>
+          <a:noFill/>
+          <a:ln w="6350">
+            <a:solidFill>
+              <a:srgbClr val="F4F6F8">
+                <a:alpha val="22000"/>
+              </a:srgbClr>
+            </a:solidFill>
+            <a:prstDash val="solid"/>
+          </a:ln>
+        </p:spPr>
+      </p:sp>
+      <p:sp>
+        <p:nvSpPr>
+          <p:cNvPr id="7" name="Shape 5"/>
+          <p:cNvSpPr/>
+          <p:nvPr/>
+        </p:nvSpPr>
+        <p:spPr>
+          <a:xfrm>
+            <a:off x="5486400" y="0"/>
+            <a:ext cx="0" cy="6858000"/>
+          </a:xfrm>
+          <a:prstGeom prst="line">
+            <a:avLst/>
+          </a:prstGeom>
+          <a:noFill/>
+          <a:ln w="6350">
+            <a:solidFill>
+              <a:srgbClr val="F4F6F8">
+                <a:alpha val="22000"/>
+              </a:srgbClr>
+            </a:solidFill>
+            <a:prstDash val="solid"/>
+          </a:ln>
+        </p:spPr>
+      </p:sp>
+      <p:sp>
+        <p:nvSpPr>
+          <p:cNvPr id="8" name="Shape 6"/>
+          <p:cNvSpPr/>
+          <p:nvPr/>
+        </p:nvSpPr>
+        <p:spPr>
+          <a:xfrm>
+            <a:off x="6400800" y="0"/>
+            <a:ext cx="0" cy="6858000"/>
+          </a:xfrm>
+          <a:prstGeom prst="line">
+            <a:avLst/>
+          </a:prstGeom>
+          <a:noFill/>
+          <a:ln w="6350">
+            <a:solidFill>
+              <a:srgbClr val="F4F6F8">
+                <a:alpha val="22000"/>
+              </a:srgbClr>
+            </a:solidFill>
+            <a:prstDash val="solid"/>
+          </a:ln>
+        </p:spPr>
+      </p:sp>
+      <p:sp>
+        <p:nvSpPr>
+          <p:cNvPr id="9" name="Shape 7"/>
+          <p:cNvSpPr/>
+          <p:nvPr/>
+        </p:nvSpPr>
+        <p:spPr>
+          <a:xfrm>
+            <a:off x="7315200" y="0"/>
+            <a:ext cx="0" cy="6858000"/>
+          </a:xfrm>
+          <a:prstGeom prst="line">
+            <a:avLst/>
+          </a:prstGeom>
+          <a:noFill/>
+          <a:ln w="6350">
+            <a:solidFill>
+              <a:srgbClr val="F4F6F8">
+                <a:alpha val="22000"/>
+              </a:srgbClr>
+            </a:solidFill>
+            <a:prstDash val="solid"/>
+          </a:ln>
+        </p:spPr>
+      </p:sp>
+      <p:sp>
+        <p:nvSpPr>
+          <p:cNvPr id="10" name="Shape 8"/>
+          <p:cNvSpPr/>
+          <p:nvPr/>
+        </p:nvSpPr>
+        <p:spPr>
+          <a:xfrm>
+            <a:off x="8229600" y="0"/>
+            <a:ext cx="0" cy="6858000"/>
+          </a:xfrm>
+          <a:prstGeom prst="line">
+            <a:avLst/>
+          </a:prstGeom>
+          <a:noFill/>
+          <a:ln w="6350">
+            <a:solidFill>
+              <a:srgbClr val="F4F6F8">
+                <a:alpha val="22000"/>
+              </a:srgbClr>
+            </a:solidFill>
+            <a:prstDash val="solid"/>
+          </a:ln>
+        </p:spPr>
+      </p:sp>
+      <p:sp>
+        <p:nvSpPr>
+          <p:cNvPr id="11" name="Shape 9"/>
+          <p:cNvSpPr/>
+          <p:nvPr/>
+        </p:nvSpPr>
+        <p:spPr>
+          <a:xfrm>
+            <a:off x="9144000" y="0"/>
+            <a:ext cx="0" cy="6858000"/>
+          </a:xfrm>
+          <a:prstGeom prst="line">
+            <a:avLst/>
+          </a:prstGeom>
+          <a:noFill/>
+          <a:ln w="6350">
+            <a:solidFill>
+              <a:srgbClr val="F4F6F8">
+                <a:alpha val="22000"/>
+              </a:srgbClr>
+            </a:solidFill>
+            <a:prstDash val="solid"/>
+          </a:ln>
+        </p:spPr>
+      </p:sp>
+      <p:sp>
+        <p:nvSpPr>
+          <p:cNvPr id="12" name="Shape 10"/>
+          <p:cNvSpPr/>
+          <p:nvPr/>
+        </p:nvSpPr>
+        <p:spPr>
+          <a:xfrm>
+            <a:off x="10058400" y="0"/>
+            <a:ext cx="0" cy="6858000"/>
+          </a:xfrm>
+          <a:prstGeom prst="line">
+            <a:avLst/>
+          </a:prstGeom>
+          <a:noFill/>
+          <a:ln w="6350">
+            <a:solidFill>
+              <a:srgbClr val="F4F6F8">
+                <a:alpha val="22000"/>
+              </a:srgbClr>
+            </a:solidFill>
+            <a:prstDash val="solid"/>
+          </a:ln>
+        </p:spPr>
+      </p:sp>
+      <p:sp>
+        <p:nvSpPr>
+          <p:cNvPr id="13" name="Shape 11"/>
+          <p:cNvSpPr/>
+          <p:nvPr/>
+        </p:nvSpPr>
+        <p:spPr>
+          <a:xfrm>
+            <a:off x="10972800" y="0"/>
+            <a:ext cx="0" cy="6858000"/>
+          </a:xfrm>
+          <a:prstGeom prst="line">
+            <a:avLst/>
+          </a:prstGeom>
+          <a:noFill/>
+          <a:ln w="6350">
+            <a:solidFill>
+              <a:srgbClr val="F4F6F8">
+                <a:alpha val="22000"/>
+              </a:srgbClr>
+            </a:solidFill>
+            <a:prstDash val="solid"/>
+          </a:ln>
+        </p:spPr>
+      </p:sp>
+      <p:sp>
+        <p:nvSpPr>
+          <p:cNvPr id="14" name="Shape 12"/>
+          <p:cNvSpPr/>
+          <p:nvPr/>
+        </p:nvSpPr>
+        <p:spPr>
+          <a:xfrm>
+            <a:off x="0" y="914400"/>
+            <a:ext cx="12188952" cy="0"/>
+          </a:xfrm>
+          <a:prstGeom prst="line">
+            <a:avLst/>
+          </a:prstGeom>
+          <a:noFill/>
+          <a:ln w="6350">
+            <a:solidFill>
+              <a:srgbClr val="F4F6F8">
+                <a:alpha val="22000"/>
+              </a:srgbClr>
+            </a:solidFill>
+            <a:prstDash val="solid"/>
+          </a:ln>
+        </p:spPr>
+      </p:sp>
+      <p:sp>
+        <p:nvSpPr>
+          <p:cNvPr id="15" name="Shape 13"/>
+          <p:cNvSpPr/>
+          <p:nvPr/>
+        </p:nvSpPr>
+        <p:spPr>
+          <a:xfrm>
+            <a:off x="0" y="1828800"/>
+            <a:ext cx="12188952" cy="0"/>
+          </a:xfrm>
+          <a:prstGeom prst="line">
+            <a:avLst/>
+          </a:prstGeom>
+          <a:noFill/>
+          <a:ln w="6350">
+            <a:solidFill>
+              <a:srgbClr val="F4F6F8">
+                <a:alpha val="22000"/>
+              </a:srgbClr>
+            </a:solidFill>
+            <a:prstDash val="solid"/>
+          </a:ln>
+        </p:spPr>
+      </p:sp>
+      <p:sp>
+        <p:nvSpPr>
+          <p:cNvPr id="16" name="Shape 14"/>
+          <p:cNvSpPr/>
+          <p:nvPr/>
+        </p:nvSpPr>
+        <p:spPr>
+          <a:xfrm>
+            <a:off x="0" y="2743200"/>
+            <a:ext cx="12188952" cy="0"/>
+          </a:xfrm>
+          <a:prstGeom prst="line">
+            <a:avLst/>
+          </a:prstGeom>
+          <a:noFill/>
+          <a:ln w="6350">
+            <a:solidFill>
+              <a:srgbClr val="F4F6F8">
+                <a:alpha val="22000"/>
+              </a:srgbClr>
+            </a:solidFill>
+            <a:prstDash val="solid"/>
+          </a:ln>
+        </p:spPr>
+      </p:sp>
+      <p:sp>
+        <p:nvSpPr>
+          <p:cNvPr id="17" name="Shape 15"/>
+          <p:cNvSpPr/>
+          <p:nvPr/>
+        </p:nvSpPr>
+        <p:spPr>
+          <a:xfrm>
+            <a:off x="0" y="3657600"/>
+            <a:ext cx="12188952" cy="0"/>
+          </a:xfrm>
+          <a:prstGeom prst="line">
+            <a:avLst/>
+          </a:prstGeom>
+          <a:noFill/>
+          <a:ln w="6350">
+            <a:solidFill>
+              <a:srgbClr val="F4F6F8">
+                <a:alpha val="22000"/>
+              </a:srgbClr>
+            </a:solidFill>
+            <a:prstDash val="solid"/>
+          </a:ln>
+        </p:spPr>
+      </p:sp>
+      <p:sp>
+        <p:nvSpPr>
+          <p:cNvPr id="18" name="Shape 16"/>
+          <p:cNvSpPr/>
+          <p:nvPr/>
+        </p:nvSpPr>
+        <p:spPr>
+          <a:xfrm>
+            <a:off x="0" y="4572000"/>
+            <a:ext cx="12188952" cy="0"/>
+          </a:xfrm>
+          <a:prstGeom prst="line">
+            <a:avLst/>
+          </a:prstGeom>
+          <a:noFill/>
+          <a:ln w="6350">
+            <a:solidFill>
+              <a:srgbClr val="F4F6F8">
+                <a:alpha val="22000"/>
+              </a:srgbClr>
+            </a:solidFill>
+            <a:prstDash val="solid"/>
+          </a:ln>
+        </p:spPr>
+      </p:sp>
+      <p:sp>
+        <p:nvSpPr>
+          <p:cNvPr id="19" name="Shape 17"/>
+          <p:cNvSpPr/>
+          <p:nvPr/>
+        </p:nvSpPr>
+        <p:spPr>
+          <a:xfrm>
+            <a:off x="0" y="5486400"/>
+            <a:ext cx="12188952" cy="0"/>
+          </a:xfrm>
+          <a:prstGeom prst="line">
+            <a:avLst/>
+          </a:prstGeom>
+          <a:noFill/>
+          <a:ln w="6350">
+            <a:solidFill>
+              <a:srgbClr val="F4F6F8">
+                <a:alpha val="22000"/>
+              </a:srgbClr>
+            </a:solidFill>
+            <a:prstDash val="solid"/>
+          </a:ln>
+        </p:spPr>
+      </p:sp>
+      <p:sp>
+        <p:nvSpPr>
+          <p:cNvPr id="20" name="Shape 18"/>
+          <p:cNvSpPr/>
+          <p:nvPr/>
+        </p:nvSpPr>
+        <p:spPr>
+          <a:xfrm>
+            <a:off x="0" y="6400800"/>
+            <a:ext cx="12188952" cy="0"/>
+          </a:xfrm>
+          <a:prstGeom prst="line">
+            <a:avLst/>
+          </a:prstGeom>
+          <a:noFill/>
+          <a:ln w="6350">
+            <a:solidFill>
+              <a:srgbClr val="F4F6F8">
+                <a:alpha val="22000"/>
+              </a:srgbClr>
+            </a:solidFill>
+            <a:prstDash val="solid"/>
+          </a:ln>
+        </p:spPr>
+      </p:sp>
+      <p:sp>
+        <p:nvSpPr>
+          <p:cNvPr id="21" name="Text 19"/>
+          <p:cNvSpPr/>
+          <p:nvPr/>
+        </p:nvSpPr>
+        <p:spPr>
+          <a:xfrm>
+            <a:off x="658368" y="2121408"/>
+            <a:ext cx="1828800" cy="365760"/>
           </a:xfrm>
           <a:prstGeom prst="rect">
             <a:avLst/>
@@ -9979,30 +10476,30 @@
               <a:buNone/>
             </a:pPr>
             <a:r>
-              <a:rPr lang="en-US" sz="1000" spc="160" kern="0" dirty="0">
+              <a:rPr lang="en-US" sz="1300" spc="300" kern="0" dirty="0">
                 <a:solidFill>
-                  <a:srgbClr val="5C6875"/>
+                  <a:srgbClr val="C8282C"/>
                 </a:solidFill>
                 <a:latin typeface="IBM Plex Mono" pitchFamily="34" charset="0"/>
                 <a:ea typeface="IBM Plex Mono" pitchFamily="34" charset="-122"/>
                 <a:cs typeface="IBM Plex Mono" pitchFamily="34" charset="-120"/>
               </a:rPr>
-              <a:t>MÉTHODE CVI</a:t>
-            </a:r>
-            <a:endParaRPr lang="en-US" sz="1000" dirty="0"/>
-          </a:p>
-        </p:txBody>
-      </p:sp>
-      <p:sp>
-        <p:nvSpPr>
-          <p:cNvPr id="3" name="Text 1"/>
-          <p:cNvSpPr/>
-          <p:nvPr/>
-        </p:nvSpPr>
-        <p:spPr>
-          <a:xfrm>
-            <a:off x="658368" y="786384"/>
-            <a:ext cx="10872216" cy="1207008"/>
+              <a:t>I</a:t>
+            </a:r>
+            <a:endParaRPr lang="en-US" sz="1300" dirty="0"/>
+          </a:p>
+        </p:txBody>
+      </p:sp>
+      <p:sp>
+        <p:nvSpPr>
+          <p:cNvPr id="22" name="Text 20"/>
+          <p:cNvSpPr/>
+          <p:nvPr/>
+        </p:nvSpPr>
+        <p:spPr>
+          <a:xfrm>
+            <a:off x="658368" y="2615184"/>
+            <a:ext cx="8778240" cy="1097280"/>
           </a:xfrm>
           <a:prstGeom prst="rect">
             <a:avLst/>
@@ -10015,136 +10512,33 @@
           <a:lstStyle/>
           <a:p>
             <a:pPr indent="0" marL="0">
-              <a:lnSpc>
-                <a:spcPct val="105000"/>
-              </a:lnSpc>
               <a:buNone/>
             </a:pPr>
             <a:r>
-              <a:rPr lang="en-US" sz="3400" b="1" dirty="0">
+              <a:rPr lang="en-US" sz="4000" b="1" dirty="0">
                 <a:solidFill>
-                  <a:srgbClr val="141C26"/>
+                  <a:srgbClr val="F4F6F8"/>
                 </a:solidFill>
                 <a:latin typeface="Fraunces" pitchFamily="34" charset="0"/>
                 <a:ea typeface="Fraunces" pitchFamily="34" charset="-122"/>
                 <a:cs typeface="Fraunces" pitchFamily="34" charset="-120"/>
               </a:rPr>
-              <a:t>Mesurer une vulnérabilité, sans illusion de précision</a:t>
-            </a:r>
-            <a:endParaRPr lang="en-US" sz="3400" dirty="0"/>
-          </a:p>
-        </p:txBody>
-      </p:sp>
-      <p:sp>
-        <p:nvSpPr>
-          <p:cNvPr id="4" name="Shape 2"/>
-          <p:cNvSpPr/>
-          <p:nvPr/>
-        </p:nvSpPr>
-        <p:spPr>
-          <a:xfrm>
-            <a:off x="658368" y="2478024"/>
-            <a:ext cx="384048" cy="274320"/>
-          </a:xfrm>
-          <a:prstGeom prst="rect">
-            <a:avLst/>
-          </a:prstGeom>
-          <a:solidFill>
-            <a:srgbClr val="167858"/>
-          </a:solidFill>
-          <a:ln w="9525">
-            <a:solidFill>
-              <a:srgbClr val="BFCAD3"/>
-            </a:solidFill>
-            <a:prstDash val="solid"/>
-          </a:ln>
-        </p:spPr>
-      </p:sp>
-      <p:sp>
-        <p:nvSpPr>
-          <p:cNvPr id="5" name="Shape 3"/>
-          <p:cNvSpPr/>
-          <p:nvPr/>
-        </p:nvSpPr>
-        <p:spPr>
-          <a:xfrm>
-            <a:off x="1042416" y="2478024"/>
-            <a:ext cx="384048" cy="274320"/>
-          </a:xfrm>
-          <a:prstGeom prst="rect">
-            <a:avLst/>
-          </a:prstGeom>
-          <a:solidFill>
-            <a:srgbClr val="EAEEF2"/>
-          </a:solidFill>
-          <a:ln w="9525">
-            <a:solidFill>
-              <a:srgbClr val="BFCAD3"/>
-            </a:solidFill>
-            <a:prstDash val="solid"/>
-          </a:ln>
-        </p:spPr>
-      </p:sp>
-      <p:sp>
-        <p:nvSpPr>
-          <p:cNvPr id="6" name="Shape 4"/>
-          <p:cNvSpPr/>
-          <p:nvPr/>
-        </p:nvSpPr>
-        <p:spPr>
-          <a:xfrm>
-            <a:off x="1426464" y="2478024"/>
-            <a:ext cx="384048" cy="274320"/>
-          </a:xfrm>
-          <a:prstGeom prst="rect">
-            <a:avLst/>
-          </a:prstGeom>
-          <a:solidFill>
-            <a:srgbClr val="EAEEF2"/>
-          </a:solidFill>
-          <a:ln w="9525">
-            <a:solidFill>
-              <a:srgbClr val="BFCAD3"/>
-            </a:solidFill>
-            <a:prstDash val="solid"/>
-          </a:ln>
-        </p:spPr>
-      </p:sp>
-      <p:sp>
-        <p:nvSpPr>
-          <p:cNvPr id="7" name="Shape 5"/>
-          <p:cNvSpPr/>
-          <p:nvPr/>
-        </p:nvSpPr>
-        <p:spPr>
-          <a:xfrm>
-            <a:off x="1810512" y="2478024"/>
-            <a:ext cx="384048" cy="274320"/>
-          </a:xfrm>
-          <a:prstGeom prst="rect">
-            <a:avLst/>
-          </a:prstGeom>
-          <a:solidFill>
-            <a:srgbClr val="EAEEF2"/>
-          </a:solidFill>
-          <a:ln w="9525">
-            <a:solidFill>
-              <a:srgbClr val="BFCAD3"/>
-            </a:solidFill>
-            <a:prstDash val="solid"/>
-          </a:ln>
-        </p:spPr>
-      </p:sp>
-      <p:sp>
-        <p:nvSpPr>
-          <p:cNvPr id="8" name="Text 6"/>
-          <p:cNvSpPr/>
-          <p:nvPr/>
-        </p:nvSpPr>
-        <p:spPr>
-          <a:xfrm>
-            <a:off x="2505456" y="2478024"/>
-            <a:ext cx="1554480" cy="274320"/>
+              <a:t>Ce sur quoi cela repose</a:t>
+            </a:r>
+            <a:endParaRPr lang="en-US" sz="4000" dirty="0"/>
+          </a:p>
+        </p:txBody>
+      </p:sp>
+      <p:sp>
+        <p:nvSpPr>
+          <p:cNvPr id="23" name="Text 21"/>
+          <p:cNvSpPr/>
+          <p:nvPr/>
+        </p:nvSpPr>
+        <p:spPr>
+          <a:xfrm>
+            <a:off x="658368" y="3822192"/>
+            <a:ext cx="7680960" cy="1097280"/>
           </a:xfrm>
           <a:prstGeom prst="rect">
             <a:avLst/>
@@ -10153,642 +10547,33 @@
           <a:ln/>
         </p:spPr>
         <p:txBody>
-          <a:bodyPr wrap="square" lIns="0" tIns="0" rIns="0" bIns="0" rtlCol="0" anchor="ctr"/>
+          <a:bodyPr wrap="square" lIns="0" tIns="0" rIns="0" bIns="0" rtlCol="0" anchor="t"/>
           <a:lstStyle/>
           <a:p>
             <a:pPr indent="0" marL="0">
+              <a:lnSpc>
+                <a:spcPct val="130000"/>
+              </a:lnSpc>
               <a:buNone/>
             </a:pPr>
             <a:r>
-              <a:rPr lang="en-US" sz="1200" b="1" spc="100" kern="0" dirty="0">
+              <a:rPr lang="en-US" sz="1600" dirty="0">
                 <a:solidFill>
-                  <a:srgbClr val="167858"/>
-                </a:solidFill>
-                <a:latin typeface="IBM Plex Mono" pitchFamily="34" charset="0"/>
-                <a:ea typeface="IBM Plex Mono" pitchFamily="34" charset="-122"/>
-                <a:cs typeface="IBM Plex Mono" pitchFamily="34" charset="-120"/>
-              </a:rPr>
-              <a:t>BAS</a:t>
-            </a:r>
-            <a:endParaRPr lang="en-US" sz="1200" dirty="0"/>
-          </a:p>
-        </p:txBody>
-      </p:sp>
-      <p:sp>
-        <p:nvSpPr>
-          <p:cNvPr id="9" name="Text 7"/>
-          <p:cNvSpPr/>
-          <p:nvPr/>
-        </p:nvSpPr>
-        <p:spPr>
-          <a:xfrm>
-            <a:off x="4169664" y="2478024"/>
-            <a:ext cx="7360920" cy="274320"/>
-          </a:xfrm>
-          <a:prstGeom prst="rect">
-            <a:avLst/>
-          </a:prstGeom>
-          <a:noFill/>
-          <a:ln/>
-        </p:spPr>
-        <p:txBody>
-          <a:bodyPr wrap="square" lIns="0" tIns="0" rIns="0" bIns="0" rtlCol="0" anchor="ctr"/>
-          <a:lstStyle/>
-          <a:p>
-            <a:pPr indent="0" marL="0">
-              <a:buNone/>
-            </a:pPr>
-            <a:r>
-              <a:rPr lang="en-US" sz="1500" dirty="0">
-                <a:solidFill>
-                  <a:srgbClr val="141C26"/>
+                  <a:srgbClr val="D3DBE1"/>
                 </a:solidFill>
                 <a:latin typeface="Inter" pitchFamily="34" charset="0"/>
                 <a:ea typeface="Inter" pitchFamily="34" charset="-122"/>
                 <a:cs typeface="Inter" pitchFamily="34" charset="-120"/>
               </a:rPr>
-              <a:t>Alternatives crédibles, faible exposition.</a:t>
-            </a:r>
-            <a:endParaRPr lang="en-US" sz="1500" dirty="0"/>
-          </a:p>
-        </p:txBody>
-      </p:sp>
-      <p:sp>
-        <p:nvSpPr>
-          <p:cNvPr id="10" name="Shape 8"/>
-          <p:cNvSpPr/>
-          <p:nvPr/>
-        </p:nvSpPr>
-        <p:spPr>
-          <a:xfrm>
-            <a:off x="658368" y="3227832"/>
-            <a:ext cx="384048" cy="274320"/>
-          </a:xfrm>
-          <a:prstGeom prst="rect">
-            <a:avLst/>
-          </a:prstGeom>
-          <a:solidFill>
-            <a:srgbClr val="167858"/>
-          </a:solidFill>
-          <a:ln w="9525">
-            <a:solidFill>
-              <a:srgbClr val="BFCAD3"/>
-            </a:solidFill>
-            <a:prstDash val="solid"/>
-          </a:ln>
-        </p:spPr>
-      </p:sp>
-      <p:sp>
-        <p:nvSpPr>
-          <p:cNvPr id="11" name="Shape 9"/>
-          <p:cNvSpPr/>
-          <p:nvPr/>
-        </p:nvSpPr>
-        <p:spPr>
-          <a:xfrm>
-            <a:off x="1042416" y="3227832"/>
-            <a:ext cx="384048" cy="274320"/>
-          </a:xfrm>
-          <a:prstGeom prst="rect">
-            <a:avLst/>
-          </a:prstGeom>
-          <a:solidFill>
-            <a:srgbClr val="A8740E"/>
-          </a:solidFill>
-          <a:ln w="9525">
-            <a:solidFill>
-              <a:srgbClr val="BFCAD3"/>
-            </a:solidFill>
-            <a:prstDash val="solid"/>
-          </a:ln>
-        </p:spPr>
-      </p:sp>
-      <p:sp>
-        <p:nvSpPr>
-          <p:cNvPr id="12" name="Shape 10"/>
-          <p:cNvSpPr/>
-          <p:nvPr/>
-        </p:nvSpPr>
-        <p:spPr>
-          <a:xfrm>
-            <a:off x="1426464" y="3227832"/>
-            <a:ext cx="384048" cy="274320"/>
-          </a:xfrm>
-          <a:prstGeom prst="rect">
-            <a:avLst/>
-          </a:prstGeom>
-          <a:solidFill>
-            <a:srgbClr val="EAEEF2"/>
-          </a:solidFill>
-          <a:ln w="9525">
-            <a:solidFill>
-              <a:srgbClr val="BFCAD3"/>
-            </a:solidFill>
-            <a:prstDash val="solid"/>
-          </a:ln>
-        </p:spPr>
-      </p:sp>
-      <p:sp>
-        <p:nvSpPr>
-          <p:cNvPr id="13" name="Shape 11"/>
-          <p:cNvSpPr/>
-          <p:nvPr/>
-        </p:nvSpPr>
-        <p:spPr>
-          <a:xfrm>
-            <a:off x="1810512" y="3227832"/>
-            <a:ext cx="384048" cy="274320"/>
-          </a:xfrm>
-          <a:prstGeom prst="rect">
-            <a:avLst/>
-          </a:prstGeom>
-          <a:solidFill>
-            <a:srgbClr val="EAEEF2"/>
-          </a:solidFill>
-          <a:ln w="9525">
-            <a:solidFill>
-              <a:srgbClr val="BFCAD3"/>
-            </a:solidFill>
-            <a:prstDash val="solid"/>
-          </a:ln>
-        </p:spPr>
-      </p:sp>
-      <p:sp>
-        <p:nvSpPr>
-          <p:cNvPr id="14" name="Text 12"/>
-          <p:cNvSpPr/>
-          <p:nvPr/>
-        </p:nvSpPr>
-        <p:spPr>
-          <a:xfrm>
-            <a:off x="2505456" y="3227832"/>
-            <a:ext cx="1554480" cy="274320"/>
-          </a:xfrm>
-          <a:prstGeom prst="rect">
-            <a:avLst/>
-          </a:prstGeom>
-          <a:noFill/>
-          <a:ln/>
-        </p:spPr>
-        <p:txBody>
-          <a:bodyPr wrap="square" lIns="0" tIns="0" rIns="0" bIns="0" rtlCol="0" anchor="ctr"/>
-          <a:lstStyle/>
-          <a:p>
-            <a:pPr indent="0" marL="0">
-              <a:buNone/>
-            </a:pPr>
-            <a:r>
-              <a:rPr lang="en-US" sz="1200" b="1" spc="100" kern="0" dirty="0">
-                <a:solidFill>
-                  <a:srgbClr val="A8740E"/>
-                </a:solidFill>
-                <a:latin typeface="IBM Plex Mono" pitchFamily="34" charset="0"/>
-                <a:ea typeface="IBM Plex Mono" pitchFamily="34" charset="-122"/>
-                <a:cs typeface="IBM Plex Mono" pitchFamily="34" charset="-120"/>
-              </a:rPr>
-              <a:t>MODÉRÉ</a:t>
-            </a:r>
-            <a:endParaRPr lang="en-US" sz="1200" dirty="0"/>
-          </a:p>
-        </p:txBody>
-      </p:sp>
-      <p:sp>
-        <p:nvSpPr>
-          <p:cNvPr id="15" name="Text 13"/>
-          <p:cNvSpPr/>
-          <p:nvPr/>
-        </p:nvSpPr>
-        <p:spPr>
-          <a:xfrm>
-            <a:off x="4169664" y="3227832"/>
-            <a:ext cx="7360920" cy="274320"/>
-          </a:xfrm>
-          <a:prstGeom prst="rect">
-            <a:avLst/>
-          </a:prstGeom>
-          <a:noFill/>
-          <a:ln/>
-        </p:spPr>
-        <p:txBody>
-          <a:bodyPr wrap="square" lIns="0" tIns="0" rIns="0" bIns="0" rtlCol="0" anchor="ctr"/>
-          <a:lstStyle/>
-          <a:p>
-            <a:pPr indent="0" marL="0">
-              <a:buNone/>
-            </a:pPr>
-            <a:r>
-              <a:rPr lang="en-US" sz="1500" dirty="0">
-                <a:solidFill>
-                  <a:srgbClr val="141C26"/>
-                </a:solidFill>
-                <a:latin typeface="Inter" pitchFamily="34" charset="0"/>
-                <a:ea typeface="Inter" pitchFamily="34" charset="-122"/>
-                <a:cs typeface="Inter" pitchFamily="34" charset="-120"/>
-              </a:rPr>
-              <a:t>Dépendance réelle, contournement coûteux.</a:t>
-            </a:r>
-            <a:endParaRPr lang="en-US" sz="1500" dirty="0"/>
-          </a:p>
-        </p:txBody>
-      </p:sp>
-      <p:sp>
-        <p:nvSpPr>
-          <p:cNvPr id="16" name="Shape 14"/>
-          <p:cNvSpPr/>
-          <p:nvPr/>
-        </p:nvSpPr>
-        <p:spPr>
-          <a:xfrm>
-            <a:off x="658368" y="3977640"/>
-            <a:ext cx="384048" cy="274320"/>
-          </a:xfrm>
-          <a:prstGeom prst="rect">
-            <a:avLst/>
-          </a:prstGeom>
-          <a:solidFill>
-            <a:srgbClr val="167858"/>
-          </a:solidFill>
-          <a:ln w="9525">
-            <a:solidFill>
-              <a:srgbClr val="BFCAD3"/>
-            </a:solidFill>
-            <a:prstDash val="solid"/>
-          </a:ln>
-        </p:spPr>
-      </p:sp>
-      <p:sp>
-        <p:nvSpPr>
-          <p:cNvPr id="17" name="Shape 15"/>
-          <p:cNvSpPr/>
-          <p:nvPr/>
-        </p:nvSpPr>
-        <p:spPr>
-          <a:xfrm>
-            <a:off x="1042416" y="3977640"/>
-            <a:ext cx="384048" cy="274320"/>
-          </a:xfrm>
-          <a:prstGeom prst="rect">
-            <a:avLst/>
-          </a:prstGeom>
-          <a:solidFill>
-            <a:srgbClr val="A8740E"/>
-          </a:solidFill>
-          <a:ln w="9525">
-            <a:solidFill>
-              <a:srgbClr val="BFCAD3"/>
-            </a:solidFill>
-            <a:prstDash val="solid"/>
-          </a:ln>
-        </p:spPr>
-      </p:sp>
-      <p:sp>
-        <p:nvSpPr>
-          <p:cNvPr id="18" name="Shape 16"/>
-          <p:cNvSpPr/>
-          <p:nvPr/>
-        </p:nvSpPr>
-        <p:spPr>
-          <a:xfrm>
-            <a:off x="1426464" y="3977640"/>
-            <a:ext cx="384048" cy="274320"/>
-          </a:xfrm>
-          <a:prstGeom prst="rect">
-            <a:avLst/>
-          </a:prstGeom>
-          <a:solidFill>
-            <a:srgbClr val="C24E12"/>
-          </a:solidFill>
-          <a:ln w="9525">
-            <a:solidFill>
-              <a:srgbClr val="BFCAD3"/>
-            </a:solidFill>
-            <a:prstDash val="solid"/>
-          </a:ln>
-        </p:spPr>
-      </p:sp>
-      <p:sp>
-        <p:nvSpPr>
-          <p:cNvPr id="19" name="Shape 17"/>
-          <p:cNvSpPr/>
-          <p:nvPr/>
-        </p:nvSpPr>
-        <p:spPr>
-          <a:xfrm>
-            <a:off x="1810512" y="3977640"/>
-            <a:ext cx="384048" cy="274320"/>
-          </a:xfrm>
-          <a:prstGeom prst="rect">
-            <a:avLst/>
-          </a:prstGeom>
-          <a:solidFill>
-            <a:srgbClr val="EAEEF2"/>
-          </a:solidFill>
-          <a:ln w="9525">
-            <a:solidFill>
-              <a:srgbClr val="BFCAD3"/>
-            </a:solidFill>
-            <a:prstDash val="solid"/>
-          </a:ln>
-        </p:spPr>
-      </p:sp>
-      <p:sp>
-        <p:nvSpPr>
-          <p:cNvPr id="20" name="Text 18"/>
-          <p:cNvSpPr/>
-          <p:nvPr/>
-        </p:nvSpPr>
-        <p:spPr>
-          <a:xfrm>
-            <a:off x="2505456" y="3977640"/>
-            <a:ext cx="1554480" cy="274320"/>
-          </a:xfrm>
-          <a:prstGeom prst="rect">
-            <a:avLst/>
-          </a:prstGeom>
-          <a:noFill/>
-          <a:ln/>
-        </p:spPr>
-        <p:txBody>
-          <a:bodyPr wrap="square" lIns="0" tIns="0" rIns="0" bIns="0" rtlCol="0" anchor="ctr"/>
-          <a:lstStyle/>
-          <a:p>
-            <a:pPr indent="0" marL="0">
-              <a:buNone/>
-            </a:pPr>
-            <a:r>
-              <a:rPr lang="en-US" sz="1200" b="1" spc="100" kern="0" dirty="0">
-                <a:solidFill>
-                  <a:srgbClr val="C24E12"/>
-                </a:solidFill>
-                <a:latin typeface="IBM Plex Mono" pitchFamily="34" charset="0"/>
-                <a:ea typeface="IBM Plex Mono" pitchFamily="34" charset="-122"/>
-                <a:cs typeface="IBM Plex Mono" pitchFamily="34" charset="-120"/>
-              </a:rPr>
-              <a:t>ÉLEVÉ</a:t>
-            </a:r>
-            <a:endParaRPr lang="en-US" sz="1200" dirty="0"/>
-          </a:p>
-        </p:txBody>
-      </p:sp>
-      <p:sp>
-        <p:nvSpPr>
-          <p:cNvPr id="21" name="Text 19"/>
-          <p:cNvSpPr/>
-          <p:nvPr/>
-        </p:nvSpPr>
-        <p:spPr>
-          <a:xfrm>
-            <a:off x="4169664" y="3977640"/>
-            <a:ext cx="7360920" cy="274320"/>
-          </a:xfrm>
-          <a:prstGeom prst="rect">
-            <a:avLst/>
-          </a:prstGeom>
-          <a:noFill/>
-          <a:ln/>
-        </p:spPr>
-        <p:txBody>
-          <a:bodyPr wrap="square" lIns="0" tIns="0" rIns="0" bIns="0" rtlCol="0" anchor="ctr"/>
-          <a:lstStyle/>
-          <a:p>
-            <a:pPr indent="0" marL="0">
-              <a:buNone/>
-            </a:pPr>
-            <a:r>
-              <a:rPr lang="en-US" sz="1500" dirty="0">
-                <a:solidFill>
-                  <a:srgbClr val="141C26"/>
-                </a:solidFill>
-                <a:latin typeface="Inter" pitchFamily="34" charset="0"/>
-                <a:ea typeface="Inter" pitchFamily="34" charset="-122"/>
-                <a:cs typeface="Inter" pitchFamily="34" charset="-120"/>
-              </a:rPr>
-              <a:t>Peu d’alternatives, seuils proches.</a:t>
-            </a:r>
-            <a:endParaRPr lang="en-US" sz="1500" dirty="0"/>
-          </a:p>
-        </p:txBody>
-      </p:sp>
-      <p:sp>
-        <p:nvSpPr>
-          <p:cNvPr id="22" name="Shape 20"/>
-          <p:cNvSpPr/>
-          <p:nvPr/>
-        </p:nvSpPr>
-        <p:spPr>
-          <a:xfrm>
-            <a:off x="658368" y="4727448"/>
-            <a:ext cx="384048" cy="274320"/>
-          </a:xfrm>
-          <a:prstGeom prst="rect">
-            <a:avLst/>
-          </a:prstGeom>
-          <a:solidFill>
-            <a:srgbClr val="167858"/>
-          </a:solidFill>
-          <a:ln w="9525">
-            <a:solidFill>
-              <a:srgbClr val="BFCAD3"/>
-            </a:solidFill>
-            <a:prstDash val="solid"/>
-          </a:ln>
-        </p:spPr>
-      </p:sp>
-      <p:sp>
-        <p:nvSpPr>
-          <p:cNvPr id="23" name="Shape 21"/>
-          <p:cNvSpPr/>
-          <p:nvPr/>
-        </p:nvSpPr>
-        <p:spPr>
-          <a:xfrm>
-            <a:off x="1042416" y="4727448"/>
-            <a:ext cx="384048" cy="274320"/>
-          </a:xfrm>
-          <a:prstGeom prst="rect">
-            <a:avLst/>
-          </a:prstGeom>
-          <a:solidFill>
-            <a:srgbClr val="A8740E"/>
-          </a:solidFill>
-          <a:ln w="9525">
-            <a:solidFill>
-              <a:srgbClr val="BFCAD3"/>
-            </a:solidFill>
-            <a:prstDash val="solid"/>
-          </a:ln>
-        </p:spPr>
-      </p:sp>
-      <p:sp>
-        <p:nvSpPr>
-          <p:cNvPr id="24" name="Shape 22"/>
-          <p:cNvSpPr/>
-          <p:nvPr/>
-        </p:nvSpPr>
-        <p:spPr>
-          <a:xfrm>
-            <a:off x="1426464" y="4727448"/>
-            <a:ext cx="384048" cy="274320"/>
-          </a:xfrm>
-          <a:prstGeom prst="rect">
-            <a:avLst/>
-          </a:prstGeom>
-          <a:solidFill>
-            <a:srgbClr val="C24E12"/>
-          </a:solidFill>
-          <a:ln w="9525">
-            <a:solidFill>
-              <a:srgbClr val="BFCAD3"/>
-            </a:solidFill>
-            <a:prstDash val="solid"/>
-          </a:ln>
-        </p:spPr>
-      </p:sp>
-      <p:sp>
-        <p:nvSpPr>
-          <p:cNvPr id="25" name="Shape 23"/>
-          <p:cNvSpPr/>
-          <p:nvPr/>
-        </p:nvSpPr>
-        <p:spPr>
-          <a:xfrm>
-            <a:off x="1810512" y="4727448"/>
-            <a:ext cx="384048" cy="274320"/>
-          </a:xfrm>
-          <a:prstGeom prst="rect">
-            <a:avLst/>
-          </a:prstGeom>
-          <a:solidFill>
-            <a:srgbClr val="B82622"/>
-          </a:solidFill>
-          <a:ln w="9525">
-            <a:solidFill>
-              <a:srgbClr val="BFCAD3"/>
-            </a:solidFill>
-            <a:prstDash val="solid"/>
-          </a:ln>
-        </p:spPr>
-      </p:sp>
-      <p:sp>
-        <p:nvSpPr>
-          <p:cNvPr id="26" name="Text 24"/>
-          <p:cNvSpPr/>
-          <p:nvPr/>
-        </p:nvSpPr>
-        <p:spPr>
-          <a:xfrm>
-            <a:off x="2505456" y="4727448"/>
-            <a:ext cx="1554480" cy="274320"/>
-          </a:xfrm>
-          <a:prstGeom prst="rect">
-            <a:avLst/>
-          </a:prstGeom>
-          <a:noFill/>
-          <a:ln/>
-        </p:spPr>
-        <p:txBody>
-          <a:bodyPr wrap="square" lIns="0" tIns="0" rIns="0" bIns="0" rtlCol="0" anchor="ctr"/>
-          <a:lstStyle/>
-          <a:p>
-            <a:pPr indent="0" marL="0">
-              <a:buNone/>
-            </a:pPr>
-            <a:r>
-              <a:rPr lang="en-US" sz="1200" b="1" spc="100" kern="0" dirty="0">
-                <a:solidFill>
-                  <a:srgbClr val="B82622"/>
-                </a:solidFill>
-                <a:latin typeface="IBM Plex Mono" pitchFamily="34" charset="0"/>
-                <a:ea typeface="IBM Plex Mono" pitchFamily="34" charset="-122"/>
-                <a:cs typeface="IBM Plex Mono" pitchFamily="34" charset="-120"/>
-              </a:rPr>
-              <a:t>CRITIQUE</a:t>
-            </a:r>
-            <a:endParaRPr lang="en-US" sz="1200" dirty="0"/>
-          </a:p>
-        </p:txBody>
-      </p:sp>
-      <p:sp>
-        <p:nvSpPr>
-          <p:cNvPr id="27" name="Text 25"/>
-          <p:cNvSpPr/>
-          <p:nvPr/>
-        </p:nvSpPr>
-        <p:spPr>
-          <a:xfrm>
-            <a:off x="4169664" y="4727448"/>
-            <a:ext cx="7360920" cy="274320"/>
-          </a:xfrm>
-          <a:prstGeom prst="rect">
-            <a:avLst/>
-          </a:prstGeom>
-          <a:noFill/>
-          <a:ln/>
-        </p:spPr>
-        <p:txBody>
-          <a:bodyPr wrap="square" lIns="0" tIns="0" rIns="0" bIns="0" rtlCol="0" anchor="ctr"/>
-          <a:lstStyle/>
-          <a:p>
-            <a:pPr indent="0" marL="0">
-              <a:buNone/>
-            </a:pPr>
-            <a:r>
-              <a:rPr lang="en-US" sz="1500" dirty="0">
-                <a:solidFill>
-                  <a:srgbClr val="141C26"/>
-                </a:solidFill>
-                <a:latin typeface="Inter" pitchFamily="34" charset="0"/>
-                <a:ea typeface="Inter" pitchFamily="34" charset="-122"/>
-                <a:cs typeface="Inter" pitchFamily="34" charset="-120"/>
-              </a:rPr>
-              <a:t>Concentration extrême, perturbation systémique.</a:t>
-            </a:r>
-            <a:endParaRPr lang="en-US" sz="1500" dirty="0"/>
-          </a:p>
-        </p:txBody>
-      </p:sp>
-      <p:sp>
-        <p:nvSpPr>
-          <p:cNvPr id="28" name="Text 26"/>
-          <p:cNvSpPr/>
-          <p:nvPr/>
-        </p:nvSpPr>
-        <p:spPr>
-          <a:xfrm>
-            <a:off x="658368" y="5888736"/>
-            <a:ext cx="9774936" cy="457200"/>
-          </a:xfrm>
-          <a:prstGeom prst="rect">
-            <a:avLst/>
-          </a:prstGeom>
-          <a:noFill/>
-          <a:ln/>
-        </p:spPr>
-        <p:txBody>
-          <a:bodyPr wrap="square" lIns="0" tIns="0" rIns="0" bIns="0" rtlCol="0" anchor="b"/>
-          <a:lstStyle/>
-          <a:p>
-            <a:pPr indent="0" marL="0">
-              <a:buNone/>
-            </a:pPr>
-            <a:r>
-              <a:rPr lang="en-US" sz="1000" i="1" dirty="0">
-                <a:solidFill>
-                  <a:srgbClr val="5C6875"/>
-                </a:solidFill>
-                <a:latin typeface="Inter" pitchFamily="34" charset="0"/>
-                <a:ea typeface="Inter" pitchFamily="34" charset="-122"/>
-                <a:cs typeface="Inter" pitchFamily="34" charset="-120"/>
-              </a:rPr>
-              <a:t>Huit dimensions. Chaque score affiche ses sources, sa date, son niveau de confiance et ses incertitudes.</a:t>
-            </a:r>
-            <a:endParaRPr lang="en-US" sz="1000" dirty="0"/>
-          </a:p>
-        </p:txBody>
-      </p:sp>
-      <p:sp>
-        <p:nvSpPr>
-          <p:cNvPr id="29" name="Text 27"/>
+              <a:t>Pas un cabinet qui recommence sa recherche à chaque dossier : une base de corridors que nous tenons, et des méthodes qui s’y appliquent.</a:t>
+            </a:r>
+            <a:endParaRPr lang="en-US" sz="1600" dirty="0"/>
+          </a:p>
+        </p:txBody>
+      </p:sp>
+      <p:sp>
+        <p:nvSpPr>
+          <p:cNvPr id="24" name="Text 22"/>
           <p:cNvSpPr/>
           <p:nvPr/>
         </p:nvSpPr>
@@ -10813,7 +10598,7 @@
             <a:r>
               <a:rPr lang="en-US" sz="1000" dirty="0">
                 <a:solidFill>
-                  <a:srgbClr val="5C6875"/>
+                  <a:srgbClr val="BFCAD3"/>
                 </a:solidFill>
                 <a:latin typeface="IBM Plex Mono" pitchFamily="34" charset="0"/>
                 <a:ea typeface="IBM Plex Mono" pitchFamily="34" charset="-122"/>
@@ -10890,7 +10675,7 @@
                 <a:ea typeface="IBM Plex Mono" pitchFamily="34" charset="-122"/>
                 <a:cs typeface="IBM Plex Mono" pitchFamily="34" charset="-120"/>
               </a:rPr>
-              <a:t>MÉTHODE CVI</a:t>
+              <a:t>LE SOCLE</a:t>
             </a:r>
             <a:endParaRPr lang="en-US" sz="1000" dirty="0"/>
           </a:p>
@@ -10932,7 +10717,7 @@
                 <a:ea typeface="Fraunces" pitchFamily="34" charset="-122"/>
                 <a:cs typeface="Fraunces" pitchFamily="34" charset="-120"/>
               </a:rPr>
-              <a:t>Ce que le CVI ne prétend pas être</a:t>
+              <a:t>Une base de données, pas une veille</a:t>
             </a:r>
             <a:endParaRPr lang="en-US" sz="3400" dirty="0"/>
           </a:p>
@@ -10940,14 +10725,37 @@
       </p:sp>
       <p:sp>
         <p:nvSpPr>
-          <p:cNvPr id="4" name="Text 2"/>
-          <p:cNvSpPr/>
-          <p:nvPr/>
-        </p:nvSpPr>
-        <p:spPr>
-          <a:xfrm>
-            <a:off x="658368" y="2194560"/>
-            <a:ext cx="8778240" cy="3566160"/>
+          <p:cNvPr id="4" name="Shape 2"/>
+          <p:cNvSpPr/>
+          <p:nvPr/>
+        </p:nvSpPr>
+        <p:spPr>
+          <a:xfrm>
+            <a:off x="658368" y="2926080"/>
+            <a:ext cx="3380232" cy="0"/>
+          </a:xfrm>
+          <a:prstGeom prst="line">
+            <a:avLst/>
+          </a:prstGeom>
+          <a:noFill/>
+          <a:ln w="12700">
+            <a:solidFill>
+              <a:srgbClr val="BFCAD3"/>
+            </a:solidFill>
+            <a:prstDash val="solid"/>
+          </a:ln>
+        </p:spPr>
+      </p:sp>
+      <p:sp>
+        <p:nvSpPr>
+          <p:cNvPr id="5" name="Text 3"/>
+          <p:cNvSpPr/>
+          <p:nvPr/>
+        </p:nvSpPr>
+        <p:spPr>
+          <a:xfrm>
+            <a:off x="658368" y="3145536"/>
+            <a:ext cx="3380232" cy="1051560"/>
           </a:xfrm>
           <a:prstGeom prst="rect">
             <a:avLst/>
@@ -10959,143 +10767,275 @@
           <a:bodyPr wrap="square" lIns="0" tIns="0" rIns="0" bIns="0" rtlCol="0" anchor="t"/>
           <a:lstStyle/>
           <a:p>
-            <a:pPr marL="279400" indent="-279400">
-              <a:spcAft>
-                <a:spcPts val="1100"/>
-              </a:spcAft>
-              <a:buSzPct val="100000"/>
-              <a:buChar char="◊"/>
+            <a:pPr indent="0" marL="0">
+              <a:buNone/>
             </a:pPr>
             <a:r>
-              <a:rPr lang="en-US" sz="1500" dirty="0">
+              <a:rPr lang="en-US" sz="5400" b="1" dirty="0">
                 <a:solidFill>
-                  <a:srgbClr val="141C26"/>
+                  <a:srgbClr val="0F3C4E"/>
                 </a:solidFill>
-                <a:latin typeface="Inter" pitchFamily="34" charset="0"/>
-                <a:ea typeface="Inter" pitchFamily="34" charset="-122"/>
-                <a:cs typeface="Inter" pitchFamily="34" charset="-120"/>
+                <a:latin typeface="Fraunces" pitchFamily="34" charset="0"/>
+                <a:ea typeface="Fraunces" pitchFamily="34" charset="-122"/>
+                <a:cs typeface="Fraunces" pitchFamily="34" charset="-120"/>
               </a:rPr>
-              <a:t>Règle dure : pas de score global 0–100 sans documentation méthodologique publiée.</a:t>
-            </a:r>
-            <a:endParaRPr lang="en-US" sz="1500" dirty="0"/>
-          </a:p>
-          <a:p>
-            <a:pPr marL="279400" indent="-279400">
-              <a:spcAft>
-                <a:spcPts val="1100"/>
-              </a:spcAft>
-              <a:buSzPct val="100000"/>
-              <a:buChar char="◊"/>
+              <a:t>313</a:t>
+            </a:r>
+            <a:endParaRPr lang="en-US" sz="5400" dirty="0"/>
+          </a:p>
+        </p:txBody>
+      </p:sp>
+      <p:sp>
+        <p:nvSpPr>
+          <p:cNvPr id="6" name="Text 4"/>
+          <p:cNvSpPr/>
+          <p:nvPr/>
+        </p:nvSpPr>
+        <p:spPr>
+          <a:xfrm>
+            <a:off x="658368" y="4242816"/>
+            <a:ext cx="3380232" cy="274320"/>
+          </a:xfrm>
+          <a:prstGeom prst="rect">
+            <a:avLst/>
+          </a:prstGeom>
+          <a:noFill/>
+          <a:ln/>
+        </p:spPr>
+        <p:txBody>
+          <a:bodyPr wrap="square" lIns="0" tIns="0" rIns="0" bIns="0" rtlCol="0" anchor="ctr"/>
+          <a:lstStyle/>
+          <a:p>
+            <a:pPr indent="0" marL="0">
+              <a:buNone/>
             </a:pPr>
             <a:r>
-              <a:rPr lang="en-US" sz="1500" dirty="0">
+              <a:rPr lang="en-US" sz="1000" spc="140" kern="0" dirty="0">
                 <a:solidFill>
-                  <a:srgbClr val="141C26"/>
+                  <a:srgbClr val="C8282C"/>
                 </a:solidFill>
-                <a:latin typeface="Inter" pitchFamily="34" charset="0"/>
-                <a:ea typeface="Inter" pitchFamily="34" charset="-122"/>
-                <a:cs typeface="Inter" pitchFamily="34" charset="-120"/>
+                <a:latin typeface="IBM Plex Mono" pitchFamily="34" charset="0"/>
+                <a:ea typeface="IBM Plex Mono" pitchFamily="34" charset="-122"/>
+                <a:cs typeface="IBM Plex Mono" pitchFamily="34" charset="-120"/>
               </a:rPr>
-              <a:t>L’échelle suit l’offre — qualitatif en Basic, 0–5 par dimension en Standard, agrégé en Premium.</a:t>
-            </a:r>
-            <a:endParaRPr lang="en-US" sz="1500" dirty="0"/>
-          </a:p>
-          <a:p>
-            <a:pPr marL="279400" indent="-279400">
-              <a:spcAft>
-                <a:spcPts val="1100"/>
-              </a:spcAft>
-              <a:buSzPct val="100000"/>
-              <a:buChar char="◊"/>
+              <a:t>OBJETS RECENSÉS</a:t>
+            </a:r>
+            <a:endParaRPr lang="en-US" sz="1000" dirty="0"/>
+          </a:p>
+        </p:txBody>
+      </p:sp>
+      <p:sp>
+        <p:nvSpPr>
+          <p:cNvPr id="7" name="Shape 5"/>
+          <p:cNvSpPr/>
+          <p:nvPr/>
+        </p:nvSpPr>
+        <p:spPr>
+          <a:xfrm>
+            <a:off x="4404360" y="2926080"/>
+            <a:ext cx="3380232" cy="0"/>
+          </a:xfrm>
+          <a:prstGeom prst="line">
+            <a:avLst/>
+          </a:prstGeom>
+          <a:noFill/>
+          <a:ln w="12700">
+            <a:solidFill>
+              <a:srgbClr val="BFCAD3"/>
+            </a:solidFill>
+            <a:prstDash val="solid"/>
+          </a:ln>
+        </p:spPr>
+      </p:sp>
+      <p:sp>
+        <p:nvSpPr>
+          <p:cNvPr id="8" name="Text 6"/>
+          <p:cNvSpPr/>
+          <p:nvPr/>
+        </p:nvSpPr>
+        <p:spPr>
+          <a:xfrm>
+            <a:off x="4404360" y="3145536"/>
+            <a:ext cx="3380232" cy="1051560"/>
+          </a:xfrm>
+          <a:prstGeom prst="rect">
+            <a:avLst/>
+          </a:prstGeom>
+          <a:noFill/>
+          <a:ln/>
+        </p:spPr>
+        <p:txBody>
+          <a:bodyPr wrap="square" lIns="0" tIns="0" rIns="0" bIns="0" rtlCol="0" anchor="t"/>
+          <a:lstStyle/>
+          <a:p>
+            <a:pPr indent="0" marL="0">
+              <a:buNone/>
             </a:pPr>
             <a:r>
-              <a:rPr lang="en-US" sz="1500" dirty="0">
+              <a:rPr lang="en-US" sz="5400" b="1" dirty="0">
                 <a:solidFill>
-                  <a:srgbClr val="141C26"/>
+                  <a:srgbClr val="0F3C4E"/>
                 </a:solidFill>
-                <a:latin typeface="Inter" pitchFamily="34" charset="0"/>
-                <a:ea typeface="Inter" pitchFamily="34" charset="-122"/>
-                <a:cs typeface="Inter" pitchFamily="34" charset="-120"/>
+                <a:latin typeface="Fraunces" pitchFamily="34" charset="0"/>
+                <a:ea typeface="Fraunces" pitchFamily="34" charset="-122"/>
+                <a:cs typeface="Fraunces" pitchFamily="34" charset="-120"/>
               </a:rPr>
-              <a:t>La géométrie des cartes est schématique : aucune valeur navigationnelle ni juridique.</a:t>
-            </a:r>
-            <a:endParaRPr lang="en-US" sz="1500" dirty="0"/>
-          </a:p>
-          <a:p>
-            <a:pPr marL="279400" indent="-279400">
-              <a:spcAft>
-                <a:spcPts val="800"/>
-              </a:spcAft>
-              <a:buSzPct val="100000"/>
-              <a:buChar char="—"/>
+              <a:t>190</a:t>
+            </a:r>
+            <a:endParaRPr lang="en-US" sz="5400" dirty="0"/>
+          </a:p>
+        </p:txBody>
+      </p:sp>
+      <p:sp>
+        <p:nvSpPr>
+          <p:cNvPr id="9" name="Text 7"/>
+          <p:cNvSpPr/>
+          <p:nvPr/>
+        </p:nvSpPr>
+        <p:spPr>
+          <a:xfrm>
+            <a:off x="4404360" y="4242816"/>
+            <a:ext cx="3380232" cy="274320"/>
+          </a:xfrm>
+          <a:prstGeom prst="rect">
+            <a:avLst/>
+          </a:prstGeom>
+          <a:noFill/>
+          <a:ln/>
+        </p:spPr>
+        <p:txBody>
+          <a:bodyPr wrap="square" lIns="0" tIns="0" rIns="0" bIns="0" rtlCol="0" anchor="ctr"/>
+          <a:lstStyle/>
+          <a:p>
+            <a:pPr indent="0" marL="0">
+              <a:buNone/>
             </a:pPr>
             <a:r>
-              <a:rPr lang="en-US" sz="1200" dirty="0">
+              <a:rPr lang="en-US" sz="1000" spc="140" kern="0" dirty="0">
                 <a:solidFill>
-                  <a:srgbClr val="5C6875"/>
+                  <a:srgbClr val="C8282C"/>
                 </a:solidFill>
-                <a:latin typeface="Inter" pitchFamily="34" charset="0"/>
-                <a:ea typeface="Inter" pitchFamily="34" charset="-122"/>
-                <a:cs typeface="Inter" pitchFamily="34" charset="-120"/>
+                <a:latin typeface="IBM Plex Mono" pitchFamily="34" charset="0"/>
+                <a:ea typeface="IBM Plex Mono" pitchFamily="34" charset="-122"/>
+                <a:cs typeface="IBM Plex Mono" pitchFamily="34" charset="-120"/>
               </a:rPr>
-              <a:t>Ce n’est pas une prédiction, ni une probabilité de rupture.</a:t>
-            </a:r>
-            <a:endParaRPr lang="en-US" sz="1500" dirty="0"/>
-          </a:p>
-          <a:p>
-            <a:pPr marL="279400" indent="-279400">
-              <a:spcAft>
-                <a:spcPts val="800"/>
-              </a:spcAft>
-              <a:buSzPct val="100000"/>
-              <a:buChar char="—"/>
+              <a:t>SOURCES AU REGISTRE</a:t>
+            </a:r>
+            <a:endParaRPr lang="en-US" sz="1000" dirty="0"/>
+          </a:p>
+        </p:txBody>
+      </p:sp>
+      <p:sp>
+        <p:nvSpPr>
+          <p:cNvPr id="10" name="Shape 8"/>
+          <p:cNvSpPr/>
+          <p:nvPr/>
+        </p:nvSpPr>
+        <p:spPr>
+          <a:xfrm>
+            <a:off x="8150352" y="2926080"/>
+            <a:ext cx="3380232" cy="0"/>
+          </a:xfrm>
+          <a:prstGeom prst="line">
+            <a:avLst/>
+          </a:prstGeom>
+          <a:noFill/>
+          <a:ln w="12700">
+            <a:solidFill>
+              <a:srgbClr val="BFCAD3"/>
+            </a:solidFill>
+            <a:prstDash val="solid"/>
+          </a:ln>
+        </p:spPr>
+      </p:sp>
+      <p:sp>
+        <p:nvSpPr>
+          <p:cNvPr id="11" name="Text 9"/>
+          <p:cNvSpPr/>
+          <p:nvPr/>
+        </p:nvSpPr>
+        <p:spPr>
+          <a:xfrm>
+            <a:off x="8150352" y="3145536"/>
+            <a:ext cx="3380232" cy="1051560"/>
+          </a:xfrm>
+          <a:prstGeom prst="rect">
+            <a:avLst/>
+          </a:prstGeom>
+          <a:noFill/>
+          <a:ln/>
+        </p:spPr>
+        <p:txBody>
+          <a:bodyPr wrap="square" lIns="0" tIns="0" rIns="0" bIns="0" rtlCol="0" anchor="t"/>
+          <a:lstStyle/>
+          <a:p>
+            <a:pPr indent="0" marL="0">
+              <a:buNone/>
             </a:pPr>
             <a:r>
-              <a:rPr lang="en-US" sz="1200" dirty="0">
+              <a:rPr lang="en-US" sz="5400" b="1" dirty="0">
                 <a:solidFill>
-                  <a:srgbClr val="5C6875"/>
+                  <a:srgbClr val="0F3C4E"/>
                 </a:solidFill>
-                <a:latin typeface="Inter" pitchFamily="34" charset="0"/>
-                <a:ea typeface="Inter" pitchFamily="34" charset="-122"/>
-                <a:cs typeface="Inter" pitchFamily="34" charset="-120"/>
+                <a:latin typeface="Fraunces" pitchFamily="34" charset="0"/>
+                <a:ea typeface="Fraunces" pitchFamily="34" charset="-122"/>
+                <a:cs typeface="Fraunces" pitchFamily="34" charset="-120"/>
               </a:rPr>
-              <a:t>Ce n’est pas un conseil juridique, financier ou assurantiel engageant.</a:t>
-            </a:r>
-            <a:endParaRPr lang="en-US" sz="1500" dirty="0"/>
-          </a:p>
-          <a:p>
-            <a:pPr marL="279400" indent="-279400">
-              <a:spcAft>
-                <a:spcPts val="800"/>
-              </a:spcAft>
-              <a:buSzPct val="100000"/>
-              <a:buChar char="—"/>
+              <a:t>15</a:t>
+            </a:r>
+            <a:endParaRPr lang="en-US" sz="5400" dirty="0"/>
+          </a:p>
+        </p:txBody>
+      </p:sp>
+      <p:sp>
+        <p:nvSpPr>
+          <p:cNvPr id="12" name="Text 10"/>
+          <p:cNvSpPr/>
+          <p:nvPr/>
+        </p:nvSpPr>
+        <p:spPr>
+          <a:xfrm>
+            <a:off x="8150352" y="4242816"/>
+            <a:ext cx="3380232" cy="274320"/>
+          </a:xfrm>
+          <a:prstGeom prst="rect">
+            <a:avLst/>
+          </a:prstGeom>
+          <a:noFill/>
+          <a:ln/>
+        </p:spPr>
+        <p:txBody>
+          <a:bodyPr wrap="square" lIns="0" tIns="0" rIns="0" bIns="0" rtlCol="0" anchor="ctr"/>
+          <a:lstStyle/>
+          <a:p>
+            <a:pPr indent="0" marL="0">
+              <a:buNone/>
             </a:pPr>
             <a:r>
-              <a:rPr lang="en-US" sz="1200" dirty="0">
+              <a:rPr lang="en-US" sz="1000" spc="140" kern="0" dirty="0">
                 <a:solidFill>
-                  <a:srgbClr val="5C6875"/>
+                  <a:srgbClr val="C8282C"/>
                 </a:solidFill>
-                <a:latin typeface="Inter" pitchFamily="34" charset="0"/>
-                <a:ea typeface="Inter" pitchFamily="34" charset="-122"/>
-                <a:cs typeface="Inter" pitchFamily="34" charset="-120"/>
+                <a:latin typeface="IBM Plex Mono" pitchFamily="34" charset="0"/>
+                <a:ea typeface="IBM Plex Mono" pitchFamily="34" charset="-122"/>
+                <a:cs typeface="IBM Plex Mono" pitchFamily="34" charset="-120"/>
               </a:rPr>
-              <a:t>Cela ne se substitue jamais au jugement interne du client.</a:t>
-            </a:r>
-            <a:endParaRPr lang="en-US" sz="1500" dirty="0"/>
-          </a:p>
-        </p:txBody>
-      </p:sp>
-      <p:sp>
-        <p:nvSpPr>
-          <p:cNvPr id="5" name="Text 3"/>
-          <p:cNvSpPr/>
-          <p:nvPr/>
-        </p:nvSpPr>
-        <p:spPr>
-          <a:xfrm>
-            <a:off x="658368" y="5888736"/>
-            <a:ext cx="9774936" cy="457200"/>
+              <a:t>MOTEURS DÉRIVÉS</a:t>
+            </a:r>
+            <a:endParaRPr lang="en-US" sz="1000" dirty="0"/>
+          </a:p>
+        </p:txBody>
+      </p:sp>
+      <p:sp>
+        <p:nvSpPr>
+          <p:cNvPr id="13" name="Text 11"/>
+          <p:cNvSpPr/>
+          <p:nvPr/>
+        </p:nvSpPr>
+        <p:spPr>
+          <a:xfrm>
+            <a:off x="658368" y="5815584"/>
+            <a:ext cx="9774936" cy="548640"/>
           </a:xfrm>
           <a:prstGeom prst="rect">
             <a:avLst/>
@@ -11119,7 +11059,7 @@
                 <a:ea typeface="Inter" pitchFamily="34" charset="-122"/>
                 <a:cs typeface="Inter" pitchFamily="34" charset="-120"/>
               </a:rPr>
-              <a:t>Un indice qui ne dit pas ses limites n’est pas un indice, c’est une opinion chiffrée.</a:t>
+              <a:t>Recensé n’est pas validé : la promotion en priorité P0 exige des preuves sourcées et une validation humaine. Le détail de la méthode fait l’objet d’une plaquette dédiée.</a:t>
             </a:r>
             <a:endParaRPr lang="en-US" sz="1000" dirty="0"/>
           </a:p>
@@ -11127,7 +11067,7 @@
       </p:sp>
       <p:sp>
         <p:nvSpPr>
-          <p:cNvPr id="6" name="Text 4"/>
+          <p:cNvPr id="14" name="Text 12"/>
           <p:cNvSpPr/>
           <p:nvPr/>
         </p:nvSpPr>
@@ -11229,7 +11169,7 @@
                 <a:ea typeface="IBM Plex Mono" pitchFamily="34" charset="-122"/>
                 <a:cs typeface="IBM Plex Mono" pitchFamily="34" charset="-120"/>
               </a:rPr>
-              <a:t>HDDE</a:t>
+              <a:t>MÉTHODE CVI</a:t>
             </a:r>
             <a:endParaRPr lang="en-US" sz="1000" dirty="0"/>
           </a:p>
@@ -11271,7 +11211,7 @@
                 <a:ea typeface="Fraunces" pitchFamily="34" charset="-122"/>
                 <a:cs typeface="Fraunces" pitchFamily="34" charset="-120"/>
               </a:rPr>
-              <a:t>Révéler les dépendances cachées d’une entreprise</a:t>
+              <a:t>Mesurer une vulnérabilité, sans illusion de précision</a:t>
             </a:r>
             <a:endParaRPr lang="en-US" sz="3400" dirty="0"/>
           </a:p>
@@ -11279,14 +11219,114 @@
       </p:sp>
       <p:sp>
         <p:nvSpPr>
-          <p:cNvPr id="4" name="Text 2"/>
-          <p:cNvSpPr/>
-          <p:nvPr/>
-        </p:nvSpPr>
-        <p:spPr>
-          <a:xfrm>
-            <a:off x="658368" y="2194560"/>
-            <a:ext cx="8778240" cy="3566160"/>
+          <p:cNvPr id="4" name="Shape 2"/>
+          <p:cNvSpPr/>
+          <p:nvPr/>
+        </p:nvSpPr>
+        <p:spPr>
+          <a:xfrm>
+            <a:off x="658368" y="2478024"/>
+            <a:ext cx="384048" cy="274320"/>
+          </a:xfrm>
+          <a:prstGeom prst="rect">
+            <a:avLst/>
+          </a:prstGeom>
+          <a:solidFill>
+            <a:srgbClr val="167858"/>
+          </a:solidFill>
+          <a:ln w="9525">
+            <a:solidFill>
+              <a:srgbClr val="BFCAD3"/>
+            </a:solidFill>
+            <a:prstDash val="solid"/>
+          </a:ln>
+        </p:spPr>
+      </p:sp>
+      <p:sp>
+        <p:nvSpPr>
+          <p:cNvPr id="5" name="Shape 3"/>
+          <p:cNvSpPr/>
+          <p:nvPr/>
+        </p:nvSpPr>
+        <p:spPr>
+          <a:xfrm>
+            <a:off x="1042416" y="2478024"/>
+            <a:ext cx="384048" cy="274320"/>
+          </a:xfrm>
+          <a:prstGeom prst="rect">
+            <a:avLst/>
+          </a:prstGeom>
+          <a:solidFill>
+            <a:srgbClr val="EAEEF2"/>
+          </a:solidFill>
+          <a:ln w="9525">
+            <a:solidFill>
+              <a:srgbClr val="BFCAD3"/>
+            </a:solidFill>
+            <a:prstDash val="solid"/>
+          </a:ln>
+        </p:spPr>
+      </p:sp>
+      <p:sp>
+        <p:nvSpPr>
+          <p:cNvPr id="6" name="Shape 4"/>
+          <p:cNvSpPr/>
+          <p:nvPr/>
+        </p:nvSpPr>
+        <p:spPr>
+          <a:xfrm>
+            <a:off x="1426464" y="2478024"/>
+            <a:ext cx="384048" cy="274320"/>
+          </a:xfrm>
+          <a:prstGeom prst="rect">
+            <a:avLst/>
+          </a:prstGeom>
+          <a:solidFill>
+            <a:srgbClr val="EAEEF2"/>
+          </a:solidFill>
+          <a:ln w="9525">
+            <a:solidFill>
+              <a:srgbClr val="BFCAD3"/>
+            </a:solidFill>
+            <a:prstDash val="solid"/>
+          </a:ln>
+        </p:spPr>
+      </p:sp>
+      <p:sp>
+        <p:nvSpPr>
+          <p:cNvPr id="7" name="Shape 5"/>
+          <p:cNvSpPr/>
+          <p:nvPr/>
+        </p:nvSpPr>
+        <p:spPr>
+          <a:xfrm>
+            <a:off x="1810512" y="2478024"/>
+            <a:ext cx="384048" cy="274320"/>
+          </a:xfrm>
+          <a:prstGeom prst="rect">
+            <a:avLst/>
+          </a:prstGeom>
+          <a:solidFill>
+            <a:srgbClr val="EAEEF2"/>
+          </a:solidFill>
+          <a:ln w="9525">
+            <a:solidFill>
+              <a:srgbClr val="BFCAD3"/>
+            </a:solidFill>
+            <a:prstDash val="solid"/>
+          </a:ln>
+        </p:spPr>
+      </p:sp>
+      <p:sp>
+        <p:nvSpPr>
+          <p:cNvPr id="8" name="Text 6"/>
+          <p:cNvSpPr/>
+          <p:nvPr/>
+        </p:nvSpPr>
+        <p:spPr>
+          <a:xfrm>
+            <a:off x="2505456" y="2478024"/>
+            <a:ext cx="1554480" cy="274320"/>
           </a:xfrm>
           <a:prstGeom prst="rect">
             <a:avLst/>
@@ -11295,15 +11335,50 @@
           <a:ln/>
         </p:spPr>
         <p:txBody>
-          <a:bodyPr wrap="square" lIns="0" tIns="0" rIns="0" bIns="0" rtlCol="0" anchor="t"/>
-          <a:lstStyle/>
-          <a:p>
-            <a:pPr marL="279400" indent="-279400">
-              <a:spcAft>
-                <a:spcPts val="1100"/>
-              </a:spcAft>
-              <a:buSzPct val="100000"/>
-              <a:buChar char="◊"/>
+          <a:bodyPr wrap="square" lIns="0" tIns="0" rIns="0" bIns="0" rtlCol="0" anchor="ctr"/>
+          <a:lstStyle/>
+          <a:p>
+            <a:pPr indent="0" marL="0">
+              <a:buNone/>
+            </a:pPr>
+            <a:r>
+              <a:rPr lang="en-US" sz="1200" b="1" spc="100" kern="0" dirty="0">
+                <a:solidFill>
+                  <a:srgbClr val="167858"/>
+                </a:solidFill>
+                <a:latin typeface="IBM Plex Mono" pitchFamily="34" charset="0"/>
+                <a:ea typeface="IBM Plex Mono" pitchFamily="34" charset="-122"/>
+                <a:cs typeface="IBM Plex Mono" pitchFamily="34" charset="-120"/>
+              </a:rPr>
+              <a:t>BAS</a:t>
+            </a:r>
+            <a:endParaRPr lang="en-US" sz="1200" dirty="0"/>
+          </a:p>
+        </p:txBody>
+      </p:sp>
+      <p:sp>
+        <p:nvSpPr>
+          <p:cNvPr id="9" name="Text 7"/>
+          <p:cNvSpPr/>
+          <p:nvPr/>
+        </p:nvSpPr>
+        <p:spPr>
+          <a:xfrm>
+            <a:off x="4169664" y="2478024"/>
+            <a:ext cx="7360920" cy="274320"/>
+          </a:xfrm>
+          <a:prstGeom prst="rect">
+            <a:avLst/>
+          </a:prstGeom>
+          <a:noFill/>
+          <a:ln/>
+        </p:spPr>
+        <p:txBody>
+          <a:bodyPr wrap="square" lIns="0" tIns="0" rIns="0" bIns="0" rtlCol="0" anchor="ctr"/>
+          <a:lstStyle/>
+          <a:p>
+            <a:pPr indent="0" marL="0">
+              <a:buNone/>
             </a:pPr>
             <a:r>
               <a:rPr lang="en-US" sz="1500" dirty="0">
@@ -11314,17 +11389,174 @@
                 <a:ea typeface="Inter" pitchFamily="34" charset="-122"/>
                 <a:cs typeface="Inter" pitchFamily="34" charset="-120"/>
               </a:rPr>
-              <a:t>Entretien guidé en onze temps, du cadrage du cas à la synthèse traçable.</a:t>
+              <a:t>Alternatives crédibles, faible exposition.</a:t>
             </a:r>
             <a:endParaRPr lang="en-US" sz="1500" dirty="0"/>
           </a:p>
-          <a:p>
-            <a:pPr marL="279400" indent="-279400">
-              <a:spcAft>
-                <a:spcPts val="1100"/>
-              </a:spcAft>
-              <a:buSzPct val="100000"/>
-              <a:buChar char="◊"/>
+        </p:txBody>
+      </p:sp>
+      <p:sp>
+        <p:nvSpPr>
+          <p:cNvPr id="10" name="Shape 8"/>
+          <p:cNvSpPr/>
+          <p:nvPr/>
+        </p:nvSpPr>
+        <p:spPr>
+          <a:xfrm>
+            <a:off x="658368" y="3227832"/>
+            <a:ext cx="384048" cy="274320"/>
+          </a:xfrm>
+          <a:prstGeom prst="rect">
+            <a:avLst/>
+          </a:prstGeom>
+          <a:solidFill>
+            <a:srgbClr val="167858"/>
+          </a:solidFill>
+          <a:ln w="9525">
+            <a:solidFill>
+              <a:srgbClr val="BFCAD3"/>
+            </a:solidFill>
+            <a:prstDash val="solid"/>
+          </a:ln>
+        </p:spPr>
+      </p:sp>
+      <p:sp>
+        <p:nvSpPr>
+          <p:cNvPr id="11" name="Shape 9"/>
+          <p:cNvSpPr/>
+          <p:nvPr/>
+        </p:nvSpPr>
+        <p:spPr>
+          <a:xfrm>
+            <a:off x="1042416" y="3227832"/>
+            <a:ext cx="384048" cy="274320"/>
+          </a:xfrm>
+          <a:prstGeom prst="rect">
+            <a:avLst/>
+          </a:prstGeom>
+          <a:solidFill>
+            <a:srgbClr val="A8740E"/>
+          </a:solidFill>
+          <a:ln w="9525">
+            <a:solidFill>
+              <a:srgbClr val="BFCAD3"/>
+            </a:solidFill>
+            <a:prstDash val="solid"/>
+          </a:ln>
+        </p:spPr>
+      </p:sp>
+      <p:sp>
+        <p:nvSpPr>
+          <p:cNvPr id="12" name="Shape 10"/>
+          <p:cNvSpPr/>
+          <p:nvPr/>
+        </p:nvSpPr>
+        <p:spPr>
+          <a:xfrm>
+            <a:off x="1426464" y="3227832"/>
+            <a:ext cx="384048" cy="274320"/>
+          </a:xfrm>
+          <a:prstGeom prst="rect">
+            <a:avLst/>
+          </a:prstGeom>
+          <a:solidFill>
+            <a:srgbClr val="EAEEF2"/>
+          </a:solidFill>
+          <a:ln w="9525">
+            <a:solidFill>
+              <a:srgbClr val="BFCAD3"/>
+            </a:solidFill>
+            <a:prstDash val="solid"/>
+          </a:ln>
+        </p:spPr>
+      </p:sp>
+      <p:sp>
+        <p:nvSpPr>
+          <p:cNvPr id="13" name="Shape 11"/>
+          <p:cNvSpPr/>
+          <p:nvPr/>
+        </p:nvSpPr>
+        <p:spPr>
+          <a:xfrm>
+            <a:off x="1810512" y="3227832"/>
+            <a:ext cx="384048" cy="274320"/>
+          </a:xfrm>
+          <a:prstGeom prst="rect">
+            <a:avLst/>
+          </a:prstGeom>
+          <a:solidFill>
+            <a:srgbClr val="EAEEF2"/>
+          </a:solidFill>
+          <a:ln w="9525">
+            <a:solidFill>
+              <a:srgbClr val="BFCAD3"/>
+            </a:solidFill>
+            <a:prstDash val="solid"/>
+          </a:ln>
+        </p:spPr>
+      </p:sp>
+      <p:sp>
+        <p:nvSpPr>
+          <p:cNvPr id="14" name="Text 12"/>
+          <p:cNvSpPr/>
+          <p:nvPr/>
+        </p:nvSpPr>
+        <p:spPr>
+          <a:xfrm>
+            <a:off x="2505456" y="3227832"/>
+            <a:ext cx="1554480" cy="274320"/>
+          </a:xfrm>
+          <a:prstGeom prst="rect">
+            <a:avLst/>
+          </a:prstGeom>
+          <a:noFill/>
+          <a:ln/>
+        </p:spPr>
+        <p:txBody>
+          <a:bodyPr wrap="square" lIns="0" tIns="0" rIns="0" bIns="0" rtlCol="0" anchor="ctr"/>
+          <a:lstStyle/>
+          <a:p>
+            <a:pPr indent="0" marL="0">
+              <a:buNone/>
+            </a:pPr>
+            <a:r>
+              <a:rPr lang="en-US" sz="1200" b="1" spc="100" kern="0" dirty="0">
+                <a:solidFill>
+                  <a:srgbClr val="A8740E"/>
+                </a:solidFill>
+                <a:latin typeface="IBM Plex Mono" pitchFamily="34" charset="0"/>
+                <a:ea typeface="IBM Plex Mono" pitchFamily="34" charset="-122"/>
+                <a:cs typeface="IBM Plex Mono" pitchFamily="34" charset="-120"/>
+              </a:rPr>
+              <a:t>MODÉRÉ</a:t>
+            </a:r>
+            <a:endParaRPr lang="en-US" sz="1200" dirty="0"/>
+          </a:p>
+        </p:txBody>
+      </p:sp>
+      <p:sp>
+        <p:nvSpPr>
+          <p:cNvPr id="15" name="Text 13"/>
+          <p:cNvSpPr/>
+          <p:nvPr/>
+        </p:nvSpPr>
+        <p:spPr>
+          <a:xfrm>
+            <a:off x="4169664" y="3227832"/>
+            <a:ext cx="7360920" cy="274320"/>
+          </a:xfrm>
+          <a:prstGeom prst="rect">
+            <a:avLst/>
+          </a:prstGeom>
+          <a:noFill/>
+          <a:ln/>
+        </p:spPr>
+        <p:txBody>
+          <a:bodyPr wrap="square" lIns="0" tIns="0" rIns="0" bIns="0" rtlCol="0" anchor="ctr"/>
+          <a:lstStyle/>
+          <a:p>
+            <a:pPr indent="0" marL="0">
+              <a:buNone/>
             </a:pPr>
             <a:r>
               <a:rPr lang="en-US" sz="1500" dirty="0">
@@ -11335,17 +11567,174 @@
                 <a:ea typeface="Inter" pitchFamily="34" charset="-122"/>
                 <a:cs typeface="Inter" pitchFamily="34" charset="-120"/>
               </a:rPr>
-              <a:t>Neuf dimensions de diagnostic notées 0–5, de la dépendance cachée à la préparation décisionnelle.</a:t>
+              <a:t>Dépendance réelle, contournement coûteux.</a:t>
             </a:r>
             <a:endParaRPr lang="en-US" sz="1500" dirty="0"/>
           </a:p>
-          <a:p>
-            <a:pPr marL="279400" indent="-279400">
-              <a:spcAft>
-                <a:spcPts val="1100"/>
-              </a:spcAft>
-              <a:buSzPct val="100000"/>
-              <a:buChar char="◊"/>
+        </p:txBody>
+      </p:sp>
+      <p:sp>
+        <p:nvSpPr>
+          <p:cNvPr id="16" name="Shape 14"/>
+          <p:cNvSpPr/>
+          <p:nvPr/>
+        </p:nvSpPr>
+        <p:spPr>
+          <a:xfrm>
+            <a:off x="658368" y="3977640"/>
+            <a:ext cx="384048" cy="274320"/>
+          </a:xfrm>
+          <a:prstGeom prst="rect">
+            <a:avLst/>
+          </a:prstGeom>
+          <a:solidFill>
+            <a:srgbClr val="167858"/>
+          </a:solidFill>
+          <a:ln w="9525">
+            <a:solidFill>
+              <a:srgbClr val="BFCAD3"/>
+            </a:solidFill>
+            <a:prstDash val="solid"/>
+          </a:ln>
+        </p:spPr>
+      </p:sp>
+      <p:sp>
+        <p:nvSpPr>
+          <p:cNvPr id="17" name="Shape 15"/>
+          <p:cNvSpPr/>
+          <p:nvPr/>
+        </p:nvSpPr>
+        <p:spPr>
+          <a:xfrm>
+            <a:off x="1042416" y="3977640"/>
+            <a:ext cx="384048" cy="274320"/>
+          </a:xfrm>
+          <a:prstGeom prst="rect">
+            <a:avLst/>
+          </a:prstGeom>
+          <a:solidFill>
+            <a:srgbClr val="A8740E"/>
+          </a:solidFill>
+          <a:ln w="9525">
+            <a:solidFill>
+              <a:srgbClr val="BFCAD3"/>
+            </a:solidFill>
+            <a:prstDash val="solid"/>
+          </a:ln>
+        </p:spPr>
+      </p:sp>
+      <p:sp>
+        <p:nvSpPr>
+          <p:cNvPr id="18" name="Shape 16"/>
+          <p:cNvSpPr/>
+          <p:nvPr/>
+        </p:nvSpPr>
+        <p:spPr>
+          <a:xfrm>
+            <a:off x="1426464" y="3977640"/>
+            <a:ext cx="384048" cy="274320"/>
+          </a:xfrm>
+          <a:prstGeom prst="rect">
+            <a:avLst/>
+          </a:prstGeom>
+          <a:solidFill>
+            <a:srgbClr val="C24E12"/>
+          </a:solidFill>
+          <a:ln w="9525">
+            <a:solidFill>
+              <a:srgbClr val="BFCAD3"/>
+            </a:solidFill>
+            <a:prstDash val="solid"/>
+          </a:ln>
+        </p:spPr>
+      </p:sp>
+      <p:sp>
+        <p:nvSpPr>
+          <p:cNvPr id="19" name="Shape 17"/>
+          <p:cNvSpPr/>
+          <p:nvPr/>
+        </p:nvSpPr>
+        <p:spPr>
+          <a:xfrm>
+            <a:off x="1810512" y="3977640"/>
+            <a:ext cx="384048" cy="274320"/>
+          </a:xfrm>
+          <a:prstGeom prst="rect">
+            <a:avLst/>
+          </a:prstGeom>
+          <a:solidFill>
+            <a:srgbClr val="EAEEF2"/>
+          </a:solidFill>
+          <a:ln w="9525">
+            <a:solidFill>
+              <a:srgbClr val="BFCAD3"/>
+            </a:solidFill>
+            <a:prstDash val="solid"/>
+          </a:ln>
+        </p:spPr>
+      </p:sp>
+      <p:sp>
+        <p:nvSpPr>
+          <p:cNvPr id="20" name="Text 18"/>
+          <p:cNvSpPr/>
+          <p:nvPr/>
+        </p:nvSpPr>
+        <p:spPr>
+          <a:xfrm>
+            <a:off x="2505456" y="3977640"/>
+            <a:ext cx="1554480" cy="274320"/>
+          </a:xfrm>
+          <a:prstGeom prst="rect">
+            <a:avLst/>
+          </a:prstGeom>
+          <a:noFill/>
+          <a:ln/>
+        </p:spPr>
+        <p:txBody>
+          <a:bodyPr wrap="square" lIns="0" tIns="0" rIns="0" bIns="0" rtlCol="0" anchor="ctr"/>
+          <a:lstStyle/>
+          <a:p>
+            <a:pPr indent="0" marL="0">
+              <a:buNone/>
+            </a:pPr>
+            <a:r>
+              <a:rPr lang="en-US" sz="1200" b="1" spc="100" kern="0" dirty="0">
+                <a:solidFill>
+                  <a:srgbClr val="C24E12"/>
+                </a:solidFill>
+                <a:latin typeface="IBM Plex Mono" pitchFamily="34" charset="0"/>
+                <a:ea typeface="IBM Plex Mono" pitchFamily="34" charset="-122"/>
+                <a:cs typeface="IBM Plex Mono" pitchFamily="34" charset="-120"/>
+              </a:rPr>
+              <a:t>ÉLEVÉ</a:t>
+            </a:r>
+            <a:endParaRPr lang="en-US" sz="1200" dirty="0"/>
+          </a:p>
+        </p:txBody>
+      </p:sp>
+      <p:sp>
+        <p:nvSpPr>
+          <p:cNvPr id="21" name="Text 19"/>
+          <p:cNvSpPr/>
+          <p:nvPr/>
+        </p:nvSpPr>
+        <p:spPr>
+          <a:xfrm>
+            <a:off x="4169664" y="3977640"/>
+            <a:ext cx="7360920" cy="274320"/>
+          </a:xfrm>
+          <a:prstGeom prst="rect">
+            <a:avLst/>
+          </a:prstGeom>
+          <a:noFill/>
+          <a:ln/>
+        </p:spPr>
+        <p:txBody>
+          <a:bodyPr wrap="square" lIns="0" tIns="0" rIns="0" bIns="0" rtlCol="0" anchor="ctr"/>
+          <a:lstStyle/>
+          <a:p>
+            <a:pPr indent="0" marL="0">
+              <a:buNone/>
             </a:pPr>
             <a:r>
               <a:rPr lang="en-US" sz="1500" dirty="0">
@@ -11356,17 +11745,174 @@
                 <a:ea typeface="Inter" pitchFamily="34" charset="-122"/>
                 <a:cs typeface="Inter" pitchFamily="34" charset="-120"/>
               </a:rPr>
-              <a:t>Échelle de preuve 0–5 : une source officielle vaut 5, une suggestion LLM vaut 1 et n’est pas recevable.</a:t>
+              <a:t>Peu d’alternatives, seuils proches.</a:t>
             </a:r>
             <a:endParaRPr lang="en-US" sz="1500" dirty="0"/>
           </a:p>
-          <a:p>
-            <a:pPr marL="279400" indent="-279400">
-              <a:spcAft>
-                <a:spcPts val="1100"/>
-              </a:spcAft>
-              <a:buSzPct val="100000"/>
-              <a:buChar char="◊"/>
+        </p:txBody>
+      </p:sp>
+      <p:sp>
+        <p:nvSpPr>
+          <p:cNvPr id="22" name="Shape 20"/>
+          <p:cNvSpPr/>
+          <p:nvPr/>
+        </p:nvSpPr>
+        <p:spPr>
+          <a:xfrm>
+            <a:off x="658368" y="4727448"/>
+            <a:ext cx="384048" cy="274320"/>
+          </a:xfrm>
+          <a:prstGeom prst="rect">
+            <a:avLst/>
+          </a:prstGeom>
+          <a:solidFill>
+            <a:srgbClr val="167858"/>
+          </a:solidFill>
+          <a:ln w="9525">
+            <a:solidFill>
+              <a:srgbClr val="BFCAD3"/>
+            </a:solidFill>
+            <a:prstDash val="solid"/>
+          </a:ln>
+        </p:spPr>
+      </p:sp>
+      <p:sp>
+        <p:nvSpPr>
+          <p:cNvPr id="23" name="Shape 21"/>
+          <p:cNvSpPr/>
+          <p:nvPr/>
+        </p:nvSpPr>
+        <p:spPr>
+          <a:xfrm>
+            <a:off x="1042416" y="4727448"/>
+            <a:ext cx="384048" cy="274320"/>
+          </a:xfrm>
+          <a:prstGeom prst="rect">
+            <a:avLst/>
+          </a:prstGeom>
+          <a:solidFill>
+            <a:srgbClr val="A8740E"/>
+          </a:solidFill>
+          <a:ln w="9525">
+            <a:solidFill>
+              <a:srgbClr val="BFCAD3"/>
+            </a:solidFill>
+            <a:prstDash val="solid"/>
+          </a:ln>
+        </p:spPr>
+      </p:sp>
+      <p:sp>
+        <p:nvSpPr>
+          <p:cNvPr id="24" name="Shape 22"/>
+          <p:cNvSpPr/>
+          <p:nvPr/>
+        </p:nvSpPr>
+        <p:spPr>
+          <a:xfrm>
+            <a:off x="1426464" y="4727448"/>
+            <a:ext cx="384048" cy="274320"/>
+          </a:xfrm>
+          <a:prstGeom prst="rect">
+            <a:avLst/>
+          </a:prstGeom>
+          <a:solidFill>
+            <a:srgbClr val="C24E12"/>
+          </a:solidFill>
+          <a:ln w="9525">
+            <a:solidFill>
+              <a:srgbClr val="BFCAD3"/>
+            </a:solidFill>
+            <a:prstDash val="solid"/>
+          </a:ln>
+        </p:spPr>
+      </p:sp>
+      <p:sp>
+        <p:nvSpPr>
+          <p:cNvPr id="25" name="Shape 23"/>
+          <p:cNvSpPr/>
+          <p:nvPr/>
+        </p:nvSpPr>
+        <p:spPr>
+          <a:xfrm>
+            <a:off x="1810512" y="4727448"/>
+            <a:ext cx="384048" cy="274320"/>
+          </a:xfrm>
+          <a:prstGeom prst="rect">
+            <a:avLst/>
+          </a:prstGeom>
+          <a:solidFill>
+            <a:srgbClr val="B82622"/>
+          </a:solidFill>
+          <a:ln w="9525">
+            <a:solidFill>
+              <a:srgbClr val="BFCAD3"/>
+            </a:solidFill>
+            <a:prstDash val="solid"/>
+          </a:ln>
+        </p:spPr>
+      </p:sp>
+      <p:sp>
+        <p:nvSpPr>
+          <p:cNvPr id="26" name="Text 24"/>
+          <p:cNvSpPr/>
+          <p:nvPr/>
+        </p:nvSpPr>
+        <p:spPr>
+          <a:xfrm>
+            <a:off x="2505456" y="4727448"/>
+            <a:ext cx="1554480" cy="274320"/>
+          </a:xfrm>
+          <a:prstGeom prst="rect">
+            <a:avLst/>
+          </a:prstGeom>
+          <a:noFill/>
+          <a:ln/>
+        </p:spPr>
+        <p:txBody>
+          <a:bodyPr wrap="square" lIns="0" tIns="0" rIns="0" bIns="0" rtlCol="0" anchor="ctr"/>
+          <a:lstStyle/>
+          <a:p>
+            <a:pPr indent="0" marL="0">
+              <a:buNone/>
+            </a:pPr>
+            <a:r>
+              <a:rPr lang="en-US" sz="1200" b="1" spc="100" kern="0" dirty="0">
+                <a:solidFill>
+                  <a:srgbClr val="B82622"/>
+                </a:solidFill>
+                <a:latin typeface="IBM Plex Mono" pitchFamily="34" charset="0"/>
+                <a:ea typeface="IBM Plex Mono" pitchFamily="34" charset="-122"/>
+                <a:cs typeface="IBM Plex Mono" pitchFamily="34" charset="-120"/>
+              </a:rPr>
+              <a:t>CRITIQUE</a:t>
+            </a:r>
+            <a:endParaRPr lang="en-US" sz="1200" dirty="0"/>
+          </a:p>
+        </p:txBody>
+      </p:sp>
+      <p:sp>
+        <p:nvSpPr>
+          <p:cNvPr id="27" name="Text 25"/>
+          <p:cNvSpPr/>
+          <p:nvPr/>
+        </p:nvSpPr>
+        <p:spPr>
+          <a:xfrm>
+            <a:off x="4169664" y="4727448"/>
+            <a:ext cx="7360920" cy="274320"/>
+          </a:xfrm>
+          <a:prstGeom prst="rect">
+            <a:avLst/>
+          </a:prstGeom>
+          <a:noFill/>
+          <a:ln/>
+        </p:spPr>
+        <p:txBody>
+          <a:bodyPr wrap="square" lIns="0" tIns="0" rIns="0" bIns="0" rtlCol="0" anchor="ctr"/>
+          <a:lstStyle/>
+          <a:p>
+            <a:pPr indent="0" marL="0">
+              <a:buNone/>
             </a:pPr>
             <a:r>
               <a:rPr lang="en-US" sz="1500" dirty="0">
@@ -11377,7 +11923,7 @@
                 <a:ea typeface="Inter" pitchFamily="34" charset="-122"/>
                 <a:cs typeface="Inter" pitchFamily="34" charset="-120"/>
               </a:rPr>
-              <a:t>Red team contradictoire avant conclusion, puis packet de diagnostic, source par source.</a:t>
+              <a:t>Concentration extrême, perturbation systémique.</a:t>
             </a:r>
             <a:endParaRPr lang="en-US" sz="1500" dirty="0"/>
           </a:p>
@@ -11385,14 +11931,14 @@
       </p:sp>
       <p:sp>
         <p:nvSpPr>
-          <p:cNvPr id="5" name="Text 3"/>
-          <p:cNvSpPr/>
-          <p:nvPr/>
-        </p:nvSpPr>
-        <p:spPr>
-          <a:xfrm>
-            <a:off x="658368" y="5888736"/>
-            <a:ext cx="9774936" cy="457200"/>
+          <p:cNvPr id="28" name="Text 26"/>
+          <p:cNvSpPr/>
+          <p:nvPr/>
+        </p:nvSpPr>
+        <p:spPr>
+          <a:xfrm>
+            <a:off x="658368" y="5815584"/>
+            <a:ext cx="9774936" cy="548640"/>
           </a:xfrm>
           <a:prstGeom prst="rect">
             <a:avLst/>
@@ -11416,7 +11962,7 @@
                 <a:ea typeface="Inter" pitchFamily="34" charset="-122"/>
                 <a:cs typeface="Inter" pitchFamily="34" charset="-120"/>
               </a:rPr>
-              <a:t>Cockpit d’entretien accessible par compte analyste, exports FR/EN.</a:t>
+              <a:t>Huit dimensions. Chaque score affiche ses sources, sa date, son niveau de confiance et ses incertitudes.</a:t>
             </a:r>
             <a:endParaRPr lang="en-US" sz="1000" dirty="0"/>
           </a:p>
@@ -11424,7 +11970,7 @@
       </p:sp>
       <p:sp>
         <p:nvSpPr>
-          <p:cNvPr id="6" name="Text 4"/>
+          <p:cNvPr id="29" name="Text 27"/>
           <p:cNvSpPr/>
           <p:nvPr/>
         </p:nvSpPr>
@@ -11526,7 +12072,7 @@
                 <a:ea typeface="IBM Plex Mono" pitchFamily="34" charset="-122"/>
                 <a:cs typeface="IBM Plex Mono" pitchFamily="34" charset="-120"/>
               </a:rPr>
-              <a:t>VERDICT — OFFRE PREMIUM</a:t>
+              <a:t>MÉTHODE CVI</a:t>
             </a:r>
             <a:endParaRPr lang="en-US" sz="1000" dirty="0"/>
           </a:p>
@@ -11568,7 +12114,7 @@
                 <a:ea typeface="Fraunces" pitchFamily="34" charset="-122"/>
                 <a:cs typeface="Fraunces" pitchFamily="34" charset="-120"/>
               </a:rPr>
-              <a:t>Passer du diagnostic à l’arbitrage</a:t>
+              <a:t>Ce que le CVI ne prétend pas être</a:t>
             </a:r>
             <a:endParaRPr lang="en-US" sz="3400" dirty="0"/>
           </a:p>
@@ -11611,7 +12157,7 @@
                 <a:ea typeface="Inter" pitchFamily="34" charset="-122"/>
                 <a:cs typeface="Inter" pitchFamily="34" charset="-120"/>
               </a:rPr>
-              <a:t>Sept temps V·E·R·D·I·C·T, de « voir la situation réelle » à la décision tenue.</a:t>
+              <a:t>Règle dure : pas de score global 0–100 sans documentation méthodologique publiée.</a:t>
             </a:r>
             <a:endParaRPr lang="en-US" sz="1500" dirty="0"/>
           </a:p>
@@ -11632,7 +12178,7 @@
                 <a:ea typeface="Inter" pitchFamily="34" charset="-122"/>
                 <a:cs typeface="Inter" pitchFamily="34" charset="-120"/>
               </a:rPr>
-              <a:t>Au moins trois options obligatoires : la principale, une alternative minimale, et l’opposée ou la non-action.</a:t>
+              <a:t>L’échelle suit l’offre — qualitatif en Basic, 0–5 par dimension en Standard, agrégé en Premium.</a:t>
             </a:r>
             <a:endParaRPr lang="en-US" sz="1500" dirty="0"/>
           </a:p>
@@ -11653,31 +12199,73 @@
                 <a:ea typeface="Inter" pitchFamily="34" charset="-122"/>
                 <a:cs typeface="Inter" pitchFamily="34" charset="-120"/>
               </a:rPr>
-              <a:t>Sept critères pondérés sur 100, échelle de preuve 0–5, audit des vetos durs.</a:t>
+              <a:t>La géométrie des cartes est schématique : aucune valeur navigationnelle ni juridique.</a:t>
             </a:r>
             <a:endParaRPr lang="en-US" sz="1500" dirty="0"/>
           </a:p>
           <a:p>
             <a:pPr marL="279400" indent="-279400">
               <a:spcAft>
-                <a:spcPts val="1100"/>
+                <a:spcPts val="800"/>
               </a:spcAft>
               <a:buSzPct val="100000"/>
-              <a:buChar char="◊"/>
+              <a:buChar char="—"/>
             </a:pPr>
             <a:r>
-              <a:rPr lang="en-US" sz="1500" dirty="0">
+              <a:rPr lang="en-US" sz="1200" dirty="0">
                 <a:solidFill>
-                  <a:srgbClr val="141C26"/>
+                  <a:srgbClr val="5C6875"/>
                 </a:solidFill>
                 <a:latin typeface="Inter" pitchFamily="34" charset="0"/>
                 <a:ea typeface="Inter" pitchFamily="34" charset="-122"/>
                 <a:cs typeface="Inter" pitchFamily="34" charset="-120"/>
               </a:rPr>
-              <a:t>Quatre verdicts possibles : FAIRE, TESTER, DIFFÉRER, ABANDONNER.</a:t>
+              <a:t>Ce n’est pas une prédiction, ni une probabilité de rupture.</a:t>
             </a:r>
             <a:endParaRPr lang="en-US" sz="1500" dirty="0"/>
           </a:p>
+          <a:p>
+            <a:pPr marL="279400" indent="-279400">
+              <a:spcAft>
+                <a:spcPts val="800"/>
+              </a:spcAft>
+              <a:buSzPct val="100000"/>
+              <a:buChar char="—"/>
+            </a:pPr>
+            <a:r>
+              <a:rPr lang="en-US" sz="1200" dirty="0">
+                <a:solidFill>
+                  <a:srgbClr val="5C6875"/>
+                </a:solidFill>
+                <a:latin typeface="Inter" pitchFamily="34" charset="0"/>
+                <a:ea typeface="Inter" pitchFamily="34" charset="-122"/>
+                <a:cs typeface="Inter" pitchFamily="34" charset="-120"/>
+              </a:rPr>
+              <a:t>Ce n’est pas un conseil juridique, financier ou assurantiel engageant.</a:t>
+            </a:r>
+            <a:endParaRPr lang="en-US" sz="1500" dirty="0"/>
+          </a:p>
+          <a:p>
+            <a:pPr marL="279400" indent="-279400">
+              <a:spcAft>
+                <a:spcPts val="800"/>
+              </a:spcAft>
+              <a:buSzPct val="100000"/>
+              <a:buChar char="—"/>
+            </a:pPr>
+            <a:r>
+              <a:rPr lang="en-US" sz="1200" dirty="0">
+                <a:solidFill>
+                  <a:srgbClr val="5C6875"/>
+                </a:solidFill>
+                <a:latin typeface="Inter" pitchFamily="34" charset="0"/>
+                <a:ea typeface="Inter" pitchFamily="34" charset="-122"/>
+                <a:cs typeface="Inter" pitchFamily="34" charset="-120"/>
+              </a:rPr>
+              <a:t>Cela ne se substitue jamais au jugement interne du client.</a:t>
+            </a:r>
+            <a:endParaRPr lang="en-US" sz="1500" dirty="0"/>
+          </a:p>
         </p:txBody>
       </p:sp>
       <p:sp>
@@ -11688,8 +12276,8 @@
         </p:nvSpPr>
         <p:spPr>
           <a:xfrm>
-            <a:off x="658368" y="5888736"/>
-            <a:ext cx="9774936" cy="457200"/>
+            <a:off x="658368" y="5815584"/>
+            <a:ext cx="9774936" cy="548640"/>
           </a:xfrm>
           <a:prstGeom prst="rect">
             <a:avLst/>
@@ -11713,7 +12301,7 @@
                 <a:ea typeface="Inter" pitchFamily="34" charset="-122"/>
                 <a:cs typeface="Inter" pitchFamily="34" charset="-120"/>
               </a:rPr>
-              <a:t>PESTEL, SWOT et Business Model Canvas y sont transformés pour la décision, pas juxtaposés. Le score n’est pas la décision.</a:t>
+              <a:t>Un indice qui ne dit pas ses limites n’est pas un indice, c’est une opinion chiffrée.</a:t>
             </a:r>
             <a:endParaRPr lang="en-US" sz="1000" dirty="0"/>
           </a:p>
@@ -11817,13 +12405,13 @@
             <a:r>
               <a:rPr lang="en-US" sz="1000" spc="160" kern="0" dirty="0">
                 <a:solidFill>
-                  <a:srgbClr val="C8282C"/>
+                  <a:srgbClr val="5C6875"/>
                 </a:solidFill>
                 <a:latin typeface="IBM Plex Mono" pitchFamily="34" charset="0"/>
                 <a:ea typeface="IBM Plex Mono" pitchFamily="34" charset="-122"/>
                 <a:cs typeface="IBM Plex Mono" pitchFamily="34" charset="-120"/>
               </a:rPr>
-              <a:t>COUVERTURE</a:t>
+              <a:t>HDDE</a:t>
             </a:r>
             <a:endParaRPr lang="en-US" sz="1000" dirty="0"/>
           </a:p>
@@ -11831,64 +12419,14 @@
       </p:sp>
       <p:sp>
         <p:nvSpPr>
-          <p:cNvPr id="3" name="Shape 1"/>
-          <p:cNvSpPr/>
-          <p:nvPr/>
-        </p:nvSpPr>
-        <p:spPr>
-          <a:xfrm>
-            <a:off x="658368" y="1371600"/>
-            <a:ext cx="10872216" cy="3200400"/>
-          </a:xfrm>
-          <a:prstGeom prst="rect">
-            <a:avLst/>
-          </a:prstGeom>
-          <a:solidFill>
-            <a:srgbClr val="FCFDFE"/>
-          </a:solidFill>
-          <a:ln w="12700">
-            <a:solidFill>
-              <a:srgbClr val="D3DBE1"/>
-            </a:solidFill>
-            <a:prstDash val="solid"/>
-          </a:ln>
-        </p:spPr>
-      </p:sp>
-      <p:sp>
-        <p:nvSpPr>
-          <p:cNvPr id="4" name="Shape 2"/>
-          <p:cNvSpPr/>
-          <p:nvPr/>
-        </p:nvSpPr>
-        <p:spPr>
-          <a:xfrm>
-            <a:off x="1133856" y="1828800"/>
-            <a:ext cx="155448" cy="155448"/>
-          </a:xfrm>
-          <a:prstGeom prst="diamond">
-            <a:avLst/>
-          </a:prstGeom>
-          <a:solidFill>
-            <a:srgbClr val="0F3C4E"/>
-          </a:solidFill>
-          <a:ln w="12700">
-            <a:solidFill>
-              <a:srgbClr val="0F3C4E"/>
-            </a:solidFill>
-            <a:prstDash val="solid"/>
-          </a:ln>
-        </p:spPr>
-      </p:sp>
-      <p:sp>
-        <p:nvSpPr>
-          <p:cNvPr id="5" name="Text 3"/>
-          <p:cNvSpPr/>
-          <p:nvPr/>
-        </p:nvSpPr>
-        <p:spPr>
-          <a:xfrm>
-            <a:off x="1133856" y="2212848"/>
-            <a:ext cx="9409176" cy="1371600"/>
+          <p:cNvPr id="3" name="Text 1"/>
+          <p:cNvSpPr/>
+          <p:nvPr/>
+        </p:nvSpPr>
+        <p:spPr>
+          <a:xfrm>
+            <a:off x="658368" y="786384"/>
+            <a:ext cx="10872216" cy="1207008"/>
           </a:xfrm>
           <a:prstGeom prst="rect">
             <a:avLst/>
@@ -11902,12 +12440,12 @@
           <a:p>
             <a:pPr indent="0" marL="0">
               <a:lnSpc>
-                <a:spcPct val="112000"/>
+                <a:spcPct val="105000"/>
               </a:lnSpc>
               <a:buNone/>
             </a:pPr>
             <a:r>
-              <a:rPr lang="en-US" sz="2800" b="1" dirty="0">
+              <a:rPr lang="en-US" sz="3400" b="1" dirty="0">
                 <a:solidFill>
                   <a:srgbClr val="141C26"/>
                 </a:solidFill>
@@ -11915,22 +12453,22 @@
                 <a:ea typeface="Fraunces" pitchFamily="34" charset="-122"/>
                 <a:cs typeface="Fraunces" pitchFamily="34" charset="-120"/>
               </a:rPr>
-              <a:t>Trois corridors fondateurs sont instruits : Malacca, Mer Rouge–Suez, Taïwan.</a:t>
-            </a:r>
-            <a:endParaRPr lang="en-US" sz="2800" dirty="0"/>
-          </a:p>
-        </p:txBody>
-      </p:sp>
-      <p:sp>
-        <p:nvSpPr>
-          <p:cNvPr id="6" name="Text 4"/>
-          <p:cNvSpPr/>
-          <p:nvPr/>
-        </p:nvSpPr>
-        <p:spPr>
-          <a:xfrm>
-            <a:off x="1133856" y="3602736"/>
-            <a:ext cx="9409176" cy="786384"/>
+              <a:t>Révéler les dépendances cachées d’une entreprise</a:t>
+            </a:r>
+            <a:endParaRPr lang="en-US" sz="3400" dirty="0"/>
+          </a:p>
+        </p:txBody>
+      </p:sp>
+      <p:sp>
+        <p:nvSpPr>
+          <p:cNvPr id="4" name="Text 2"/>
+          <p:cNvSpPr/>
+          <p:nvPr/>
+        </p:nvSpPr>
+        <p:spPr>
+          <a:xfrm>
+            <a:off x="658368" y="2194560"/>
+            <a:ext cx="8778240" cy="3566160"/>
           </a:xfrm>
           <a:prstGeom prst="rect">
             <a:avLst/>
@@ -11942,14 +12480,117 @@
           <a:bodyPr wrap="square" lIns="0" tIns="0" rIns="0" bIns="0" rtlCol="0" anchor="t"/>
           <a:lstStyle/>
           <a:p>
+            <a:pPr marL="279400" indent="-279400">
+              <a:spcAft>
+                <a:spcPts val="1100"/>
+              </a:spcAft>
+              <a:buSzPct val="100000"/>
+              <a:buChar char="◊"/>
+            </a:pPr>
+            <a:r>
+              <a:rPr lang="en-US" sz="1500" dirty="0">
+                <a:solidFill>
+                  <a:srgbClr val="141C26"/>
+                </a:solidFill>
+                <a:latin typeface="Inter" pitchFamily="34" charset="0"/>
+                <a:ea typeface="Inter" pitchFamily="34" charset="-122"/>
+                <a:cs typeface="Inter" pitchFamily="34" charset="-120"/>
+              </a:rPr>
+              <a:t>Entretien guidé en onze temps, du cadrage du cas à la synthèse traçable.</a:t>
+            </a:r>
+            <a:endParaRPr lang="en-US" sz="1500" dirty="0"/>
+          </a:p>
+          <a:p>
+            <a:pPr marL="279400" indent="-279400">
+              <a:spcAft>
+                <a:spcPts val="1100"/>
+              </a:spcAft>
+              <a:buSzPct val="100000"/>
+              <a:buChar char="◊"/>
+            </a:pPr>
+            <a:r>
+              <a:rPr lang="en-US" sz="1500" dirty="0">
+                <a:solidFill>
+                  <a:srgbClr val="141C26"/>
+                </a:solidFill>
+                <a:latin typeface="Inter" pitchFamily="34" charset="0"/>
+                <a:ea typeface="Inter" pitchFamily="34" charset="-122"/>
+                <a:cs typeface="Inter" pitchFamily="34" charset="-120"/>
+              </a:rPr>
+              <a:t>Neuf dimensions de diagnostic notées 0–5, de la dépendance cachée à la préparation décisionnelle.</a:t>
+            </a:r>
+            <a:endParaRPr lang="en-US" sz="1500" dirty="0"/>
+          </a:p>
+          <a:p>
+            <a:pPr marL="279400" indent="-279400">
+              <a:spcAft>
+                <a:spcPts val="1100"/>
+              </a:spcAft>
+              <a:buSzPct val="100000"/>
+              <a:buChar char="◊"/>
+            </a:pPr>
+            <a:r>
+              <a:rPr lang="en-US" sz="1500" dirty="0">
+                <a:solidFill>
+                  <a:srgbClr val="141C26"/>
+                </a:solidFill>
+                <a:latin typeface="Inter" pitchFamily="34" charset="0"/>
+                <a:ea typeface="Inter" pitchFamily="34" charset="-122"/>
+                <a:cs typeface="Inter" pitchFamily="34" charset="-120"/>
+              </a:rPr>
+              <a:t>Échelle de preuve 0–5 : une source officielle vaut 5, une suggestion LLM vaut 1 et n’est pas recevable.</a:t>
+            </a:r>
+            <a:endParaRPr lang="en-US" sz="1500" dirty="0"/>
+          </a:p>
+          <a:p>
+            <a:pPr marL="279400" indent="-279400">
+              <a:spcAft>
+                <a:spcPts val="1100"/>
+              </a:spcAft>
+              <a:buSzPct val="100000"/>
+              <a:buChar char="◊"/>
+            </a:pPr>
+            <a:r>
+              <a:rPr lang="en-US" sz="1500" dirty="0">
+                <a:solidFill>
+                  <a:srgbClr val="141C26"/>
+                </a:solidFill>
+                <a:latin typeface="Inter" pitchFamily="34" charset="0"/>
+                <a:ea typeface="Inter" pitchFamily="34" charset="-122"/>
+                <a:cs typeface="Inter" pitchFamily="34" charset="-120"/>
+              </a:rPr>
+              <a:t>Red team contradictoire avant conclusion, puis packet de diagnostic, source par source.</a:t>
+            </a:r>
+            <a:endParaRPr lang="en-US" sz="1500" dirty="0"/>
+          </a:p>
+        </p:txBody>
+      </p:sp>
+      <p:sp>
+        <p:nvSpPr>
+          <p:cNvPr id="5" name="Text 3"/>
+          <p:cNvSpPr/>
+          <p:nvPr/>
+        </p:nvSpPr>
+        <p:spPr>
+          <a:xfrm>
+            <a:off x="658368" y="5815584"/>
+            <a:ext cx="9774936" cy="548640"/>
+          </a:xfrm>
+          <a:prstGeom prst="rect">
+            <a:avLst/>
+          </a:prstGeom>
+          <a:noFill/>
+          <a:ln/>
+        </p:spPr>
+        <p:txBody>
+          <a:bodyPr wrap="square" lIns="0" tIns="0" rIns="0" bIns="0" rtlCol="0" anchor="b"/>
+          <a:lstStyle/>
+          <a:p>
             <a:pPr indent="0" marL="0">
-              <a:lnSpc>
-                <a:spcPct val="125000"/>
-              </a:lnSpc>
               <a:buNone/>
             </a:pPr>
             <a:r>
-              <a:rPr lang="en-US" sz="1500" dirty="0">
+              <a:rPr lang="en-US" sz="1000" i="1" dirty="0">
                 <a:solidFill>
                   <a:srgbClr val="5C6875"/>
                 </a:solidFill>
@@ -11957,15 +12598,15 @@
                 <a:ea typeface="Inter" pitchFamily="34" charset="-122"/>
                 <a:cs typeface="Inter" pitchFamily="34" charset="-120"/>
               </a:rPr>
-              <a:t>Fiches rédigées et sourcées, en cours de validation humaine — elles ne sont pas encore publiées. L’Atlas s’ouvre corridor par corridor, jamais avant que les gates soient tenues.</a:t>
-            </a:r>
-            <a:endParaRPr lang="en-US" sz="1500" dirty="0"/>
-          </a:p>
-        </p:txBody>
-      </p:sp>
-      <p:sp>
-        <p:nvSpPr>
-          <p:cNvPr id="7" name="Text 5"/>
+              <a:t>Cockpit d’entretien accessible par compte analyste, exports FR/EN.</a:t>
+            </a:r>
+            <a:endParaRPr lang="en-US" sz="1000" dirty="0"/>
+          </a:p>
+        </p:txBody>
+      </p:sp>
+      <p:sp>
+        <p:nvSpPr>
+          <p:cNvPr id="6" name="Text 4"/>
           <p:cNvSpPr/>
           <p:nvPr/>
         </p:nvSpPr>

--- a/presentations/commercial/fr/commercial.fr.pptx
+++ b/presentations/commercial/fr/commercial.fr.pptx
@@ -12114,7 +12114,7 @@
                 <a:ea typeface="Fraunces" pitchFamily="34" charset="-122"/>
                 <a:cs typeface="Fraunces" pitchFamily="34" charset="-120"/>
               </a:rPr>
-              <a:t>Ce que le CVI ne prétend pas être</a:t>
+              <a:t>Ce que le CVI établit</a:t>
             </a:r>
             <a:endParaRPr lang="en-US" sz="3400" dirty="0"/>
           </a:p>
@@ -12157,7 +12157,7 @@
                 <a:ea typeface="Inter" pitchFamily="34" charset="-122"/>
                 <a:cs typeface="Inter" pitchFamily="34" charset="-120"/>
               </a:rPr>
-              <a:t>Règle dure : pas de score global 0–100 sans documentation méthodologique publiée.</a:t>
+              <a:t>Huit dimensions, chacune adossée à une question précise : exposition, concentration, menace, capacité de perturbation, résilience, coût de contournement, gouvernance, incertitude.</a:t>
             </a:r>
             <a:endParaRPr lang="en-US" sz="1500" dirty="0"/>
           </a:p>
@@ -12178,7 +12178,7 @@
                 <a:ea typeface="Inter" pitchFamily="34" charset="-122"/>
                 <a:cs typeface="Inter" pitchFamily="34" charset="-120"/>
               </a:rPr>
-              <a:t>L’échelle suit l’offre — qualitatif en Basic, 0–5 par dimension en Standard, agrégé en Premium.</a:t>
+              <a:t>La même grille appliquée de la même façon partout — deux corridors deviennent comparables, et un même corridor comparable à lui-même six mois plus tard.</a:t>
             </a:r>
             <a:endParaRPr lang="en-US" sz="1500" dirty="0"/>
           </a:p>
@@ -12199,7 +12199,28 @@
                 <a:ea typeface="Inter" pitchFamily="34" charset="-122"/>
                 <a:cs typeface="Inter" pitchFamily="34" charset="-120"/>
               </a:rPr>
-              <a:t>La géométrie des cartes est schématique : aucune valeur navigationnelle ni juridique.</a:t>
+              <a:t>Une échelle qui suit l’offre : qualitative de bas à critique, puis 0–5 par dimension, puis agrégée.</a:t>
+            </a:r>
+            <a:endParaRPr lang="en-US" sz="1500" dirty="0"/>
+          </a:p>
+          <a:p>
+            <a:pPr marL="279400" indent="-279400">
+              <a:spcAft>
+                <a:spcPts val="1100"/>
+              </a:spcAft>
+              <a:buSzPct val="100000"/>
+              <a:buChar char="◊"/>
+            </a:pPr>
+            <a:r>
+              <a:rPr lang="en-US" sz="1500" dirty="0">
+                <a:solidFill>
+                  <a:srgbClr val="141C26"/>
+                </a:solidFill>
+                <a:latin typeface="Inter" pitchFamily="34" charset="0"/>
+                <a:ea typeface="Inter" pitchFamily="34" charset="-122"/>
+                <a:cs typeface="Inter" pitchFamily="34" charset="-120"/>
+              </a:rPr>
+              <a:t>Chaque score affiche ses sources, sa date, son niveau de confiance et ses incertitudes.</a:t>
             </a:r>
             <a:endParaRPr lang="en-US" sz="1500" dirty="0"/>
           </a:p>
@@ -12220,7 +12241,7 @@
                 <a:ea typeface="Inter" pitchFamily="34" charset="-122"/>
                 <a:cs typeface="Inter" pitchFamily="34" charset="-120"/>
               </a:rPr>
-              <a:t>Ce n’est pas une prédiction, ni une probabilité de rupture.</a:t>
+              <a:t>Pas de score global 0–100 sans documentation méthodologique publiée.</a:t>
             </a:r>
             <a:endParaRPr lang="en-US" sz="1500" dirty="0"/>
           </a:p>
@@ -12241,7 +12262,7 @@
                 <a:ea typeface="Inter" pitchFamily="34" charset="-122"/>
                 <a:cs typeface="Inter" pitchFamily="34" charset="-120"/>
               </a:rPr>
-              <a:t>Ce n’est pas un conseil juridique, financier ou assurantiel engageant.</a:t>
+              <a:t>Ni prédiction, ni probabilité de rupture — nous n’en produisons pas.</a:t>
             </a:r>
             <a:endParaRPr lang="en-US" sz="1500" dirty="0"/>
           </a:p>
@@ -12262,7 +12283,7 @@
                 <a:ea typeface="Inter" pitchFamily="34" charset="-122"/>
                 <a:cs typeface="Inter" pitchFamily="34" charset="-120"/>
               </a:rPr>
-              <a:t>Cela ne se substitue jamais au jugement interne du client.</a:t>
+              <a:t>Aucune valeur navigationnelle ni juridique dans la géométrie des cartes.</a:t>
             </a:r>
             <a:endParaRPr lang="en-US" sz="1500" dirty="0"/>
           </a:p>
@@ -12301,7 +12322,7 @@
                 <a:ea typeface="Inter" pitchFamily="34" charset="-122"/>
                 <a:cs typeface="Inter" pitchFamily="34" charset="-120"/>
               </a:rPr>
-              <a:t>Un indice qui ne dit pas ses limites n’est pas un indice, c’est une opinion chiffrée.</a:t>
+              <a:t>Les trois dernières lignes comptent autant que les quatre premières : un indice qui ne dit pas ses limites n’est pas un indice, c’est une opinion chiffrée.</a:t>
             </a:r>
             <a:endParaRPr lang="en-US" sz="1000" dirty="0"/>
           </a:p>

--- a/presentations/commercial/fr/commercial.fr.pptx
+++ b/presentations/commercial/fr/commercial.fr.pptx
@@ -20,10 +20,9 @@
     <p:sldId id="268" r:id="rId14"/>
     <p:sldId id="269" r:id="rId15"/>
     <p:sldId id="270" r:id="rId16"/>
-    <p:sldId id="271" r:id="rId17"/>
   </p:sldIdLst>
   <p:notesMasterIdLst>
-    <p:notesMasterId r:id="rId18"/>
+    <p:notesMasterId r:id="rId17"/>
   </p:notesMasterIdLst>
   <p:sldSz cx="12192000" cy="6858000"/>
   <p:notesSz cx="6858000" cy="12192000"/>
@@ -1069,94 +1068,6 @@
             <a:fld id="{F7021451-1387-4CA6-816F-3879F97B5CBC}" type="slidenum">
               <a:rPr lang="en-US"/>
               <a:t>15</a:t>
-            </a:fld>
-            <a:endParaRPr lang="en-US"/>
-          </a:p>
-        </p:txBody>
-      </p:sp>
-    </p:spTree>
-    <p:extLst>
-      <p:ext uri="{BB962C8B-B14F-4D97-AF65-F5344CB8AC3E}">
-        <p14:creationId xmlns:p14="http://schemas.microsoft.com/office/powerpoint/2010/main" val="1024086991"/>
-      </p:ext>
-    </p:extLst>
-  </p:cSld>
-  <p:clrMapOvr>
-    <a:masterClrMapping/>
-  </p:clrMapOvr>
-</p:notes>
-</file>
-
-<file path=ppt/notesSlides/notesSlide16.xml><?xml version="1.0" encoding="utf-8"?>
-<p:notes xmlns:a="http://schemas.openxmlformats.org/drawingml/2006/main" xmlns:r="http://schemas.openxmlformats.org/officeDocument/2006/relationships" xmlns:p="http://schemas.openxmlformats.org/presentationml/2006/main">
-  <p:cSld>
-    <p:spTree>
-      <p:nvGrpSpPr>
-        <p:cNvPr id="1" name=""/>
-        <p:cNvGrpSpPr/>
-        <p:nvPr/>
-      </p:nvGrpSpPr>
-      <p:grpSpPr>
-        <a:xfrm>
-          <a:off x="0" y="0"/>
-          <a:ext cx="0" cy="0"/>
-          <a:chOff x="0" y="0"/>
-          <a:chExt cx="0" cy="0"/>
-        </a:xfrm>
-      </p:grpSpPr>
-      <p:sp>
-        <p:nvSpPr>
-          <p:cNvPr id="2" name="Slide Image Placeholder 1"/>
-          <p:cNvSpPr>
-            <a:spLocks noGrp="1" noRot="1" noChangeAspect="1"/>
-          </p:cNvSpPr>
-          <p:nvPr>
-            <p:ph type="sldImg"/>
-          </p:nvPr>
-        </p:nvSpPr>
-        <p:spPr/>
-      </p:sp>
-      <p:sp>
-        <p:nvSpPr>
-          <p:cNvPr id="3" name="Notes Placeholder 2"/>
-          <p:cNvSpPr>
-            <a:spLocks noGrp="1"/>
-          </p:cNvSpPr>
-          <p:nvPr>
-            <p:ph type="body" idx="1"/>
-          </p:nvPr>
-        </p:nvSpPr>
-        <p:spPr/>
-        <p:txBody>
-          <a:bodyPr/>
-          <a:lstStyle/>
-          <a:p>
-            <a:r>
-              <a:rPr lang="en-US" dirty="0"/>
-              <a:t/>
-            </a:r>
-            <a:endParaRPr lang="en-US" dirty="0"/>
-          </a:p>
-        </p:txBody>
-      </p:sp>
-      <p:sp>
-        <p:nvSpPr>
-          <p:cNvPr id="4" name="Slide Number Placeholder 3"/>
-          <p:cNvSpPr>
-            <a:spLocks noGrp="1"/>
-          </p:cNvSpPr>
-          <p:nvPr>
-            <p:ph type="sldNum" sz="quarter" idx="10"/>
-          </p:nvPr>
-        </p:nvSpPr>
-        <p:spPr/>
-        <p:txBody>
-          <a:bodyPr/>
-          <a:lstStyle/>
-          <a:p>
-            <a:fld id="{F7021451-1387-4CA6-816F-3879F97B5CBC}" type="slidenum">
-              <a:rPr lang="en-US"/>
-              <a:t>16</a:t>
             </a:fld>
             <a:endParaRPr lang="en-US"/>
           </a:p>
@@ -2895,7 +2806,7 @@
                 <a:ea typeface="IBM Plex Mono" pitchFamily="34" charset="-122"/>
                 <a:cs typeface="IBM Plex Mono" pitchFamily="34" charset="-120"/>
               </a:rPr>
-              <a:t>VERDICT — OFFRE PREMIUM</a:t>
+              <a:t>COUVERTURE</a:t>
             </a:r>
             <a:endParaRPr lang="en-US" sz="1000" dirty="0"/>
           </a:p>
@@ -2937,7 +2848,7 @@
                 <a:ea typeface="Fraunces" pitchFamily="34" charset="-122"/>
                 <a:cs typeface="Fraunces" pitchFamily="34" charset="-120"/>
               </a:rPr>
-              <a:t>Passer du diagnostic à l’arbitrage</a:t>
+              <a:t>Trois corridors instruits — et ce qu’« instruit » veut dire</a:t>
             </a:r>
             <a:endParaRPr lang="en-US" sz="3400" dirty="0"/>
           </a:p>
@@ -2952,7 +2863,7 @@
         <p:spPr>
           <a:xfrm>
             <a:off x="658368" y="2194560"/>
-            <a:ext cx="8778240" cy="3566160"/>
+            <a:ext cx="6088441" cy="3291840"/>
           </a:xfrm>
           <a:prstGeom prst="rect">
             <a:avLst/>
@@ -2964,15 +2875,17 @@
           <a:bodyPr wrap="square" lIns="0" tIns="0" rIns="0" bIns="0" rtlCol="0" anchor="t"/>
           <a:lstStyle/>
           <a:p>
-            <a:pPr marL="279400" indent="-279400">
+            <a:pPr indent="0" marL="0">
+              <a:lnSpc>
+                <a:spcPct val="128000"/>
+              </a:lnSpc>
               <a:spcAft>
-                <a:spcPts val="1100"/>
+                <a:spcPts val="1000"/>
               </a:spcAft>
-              <a:buSzPct val="100000"/>
-              <a:buChar char="◊"/>
-            </a:pPr>
-            <a:r>
-              <a:rPr lang="en-US" sz="1500" dirty="0">
+              <a:buNone/>
+            </a:pPr>
+            <a:r>
+              <a:rPr lang="en-US" sz="1400" dirty="0">
                 <a:solidFill>
                   <a:srgbClr val="141C26"/>
                 </a:solidFill>
@@ -2980,20 +2893,22 @@
                 <a:ea typeface="Inter" pitchFamily="34" charset="-122"/>
                 <a:cs typeface="Inter" pitchFamily="34" charset="-120"/>
               </a:rPr>
-              <a:t>Sept temps V·E·R·D·I·C·T, de « voir la situation réelle » à la décision tenue.</a:t>
-            </a:r>
-            <a:endParaRPr lang="en-US" sz="1500" dirty="0"/>
-          </a:p>
-          <a:p>
-            <a:pPr marL="279400" indent="-279400">
+              <a:t>Trois corridors fondateurs sont instruits : Malacca, Mer Rouge–Suez, Taïwan. Fiches rédigées et sourcées, en cours de validation humaine — elles ne sont pas encore publiées. L’Atlas s’ouvre corridor par corridor, jamais avant que les gates soient tenues.</a:t>
+            </a:r>
+            <a:endParaRPr lang="en-US" sz="1400" dirty="0"/>
+          </a:p>
+          <a:p>
+            <a:pPr indent="0" marL="0">
+              <a:lnSpc>
+                <a:spcPct val="128000"/>
+              </a:lnSpc>
               <a:spcAft>
-                <a:spcPts val="1100"/>
+                <a:spcPts val="1000"/>
               </a:spcAft>
-              <a:buSzPct val="100000"/>
-              <a:buChar char="◊"/>
-            </a:pPr>
-            <a:r>
-              <a:rPr lang="en-US" sz="1500" dirty="0">
+              <a:buNone/>
+            </a:pPr>
+            <a:r>
+              <a:rPr lang="en-US" sz="1400" dirty="0">
                 <a:solidFill>
                   <a:srgbClr val="141C26"/>
                 </a:solidFill>
@@ -3001,20 +2916,22 @@
                 <a:ea typeface="Inter" pitchFamily="34" charset="-122"/>
                 <a:cs typeface="Inter" pitchFamily="34" charset="-120"/>
               </a:rPr>
-              <a:t>Au moins trois options obligatoires : la principale, une alternative minimale, et l’opposée ou la non-action.</a:t>
-            </a:r>
-            <a:endParaRPr lang="en-US" sz="1500" dirty="0"/>
-          </a:p>
-          <a:p>
-            <a:pPr marL="279400" indent="-279400">
+              <a:t>Instruire un corridor, ce n’est pas en avoir une opinion : c’est d’abord établir ce qui y circule. Voici les quatre mesures de départ pour Malacca — institutionnelles, datées, et vérifiables sans nous.</a:t>
+            </a:r>
+            <a:endParaRPr lang="en-US" sz="1400" dirty="0"/>
+          </a:p>
+          <a:p>
+            <a:pPr indent="0" marL="0">
+              <a:lnSpc>
+                <a:spcPct val="128000"/>
+              </a:lnSpc>
               <a:spcAft>
-                <a:spcPts val="1100"/>
+                <a:spcPts val="1000"/>
               </a:spcAft>
-              <a:buSzPct val="100000"/>
-              <a:buChar char="◊"/>
-            </a:pPr>
-            <a:r>
-              <a:rPr lang="en-US" sz="1500" dirty="0">
+              <a:buNone/>
+            </a:pPr>
+            <a:r>
+              <a:rPr lang="en-US" sz="1400" dirty="0">
                 <a:solidFill>
                   <a:srgbClr val="141C26"/>
                 </a:solidFill>
@@ -3022,43 +2939,125 @@
                 <a:ea typeface="Inter" pitchFamily="34" charset="-122"/>
                 <a:cs typeface="Inter" pitchFamily="34" charset="-120"/>
               </a:rPr>
-              <a:t>Sept critères pondérés sur 100, échelle de preuve 0–5, audit des vetos durs.</a:t>
-            </a:r>
-            <a:endParaRPr lang="en-US" sz="1500" dirty="0"/>
-          </a:p>
-          <a:p>
-            <a:pPr marL="279400" indent="-279400">
-              <a:spcAft>
-                <a:spcPts val="1100"/>
-              </a:spcAft>
-              <a:buSzPct val="100000"/>
-              <a:buChar char="◊"/>
-            </a:pPr>
-            <a:r>
-              <a:rPr lang="en-US" sz="1500" dirty="0">
-                <a:solidFill>
-                  <a:srgbClr val="141C26"/>
+              <a:t>Le reste de la méthode s’applique à ces chiffres-là : substitution réelle, seuils de bascule, décision. Il fait l’objet d’une plaquette dédiée.</a:t>
+            </a:r>
+            <a:endParaRPr lang="en-US" sz="1400" dirty="0"/>
+          </a:p>
+        </p:txBody>
+      </p:sp>
+      <p:sp>
+        <p:nvSpPr>
+          <p:cNvPr id="5" name="Shape 3"/>
+          <p:cNvSpPr/>
+          <p:nvPr/>
+        </p:nvSpPr>
+        <p:spPr>
+          <a:xfrm>
+            <a:off x="7204009" y="2194560"/>
+            <a:ext cx="4326575" cy="2505456"/>
+          </a:xfrm>
+          <a:prstGeom prst="rect">
+            <a:avLst/>
+          </a:prstGeom>
+          <a:solidFill>
+            <a:srgbClr val="FCFDFE"/>
+          </a:solidFill>
+          <a:ln w="12700">
+            <a:solidFill>
+              <a:srgbClr val="D3DBE1"/>
+            </a:solidFill>
+            <a:prstDash val="solid"/>
+          </a:ln>
+        </p:spPr>
+      </p:sp>
+      <p:sp>
+        <p:nvSpPr>
+          <p:cNvPr id="6" name="Text 4"/>
+          <p:cNvSpPr/>
+          <p:nvPr/>
+        </p:nvSpPr>
+        <p:spPr>
+          <a:xfrm>
+            <a:off x="7514905" y="2468880"/>
+            <a:ext cx="3704783" cy="256032"/>
+          </a:xfrm>
+          <a:prstGeom prst="rect">
+            <a:avLst/>
+          </a:prstGeom>
+          <a:noFill/>
+          <a:ln/>
+        </p:spPr>
+        <p:txBody>
+          <a:bodyPr wrap="square" lIns="0" tIns="0" rIns="0" bIns="0" rtlCol="0" anchor="ctr"/>
+          <a:lstStyle/>
+          <a:p>
+            <a:pPr indent="0" marL="0">
+              <a:buNone/>
+            </a:pPr>
+            <a:r>
+              <a:rPr lang="en-US" sz="1000" spc="140" kern="0" dirty="0">
+                <a:solidFill>
+                  <a:srgbClr val="C8282C"/>
+                </a:solidFill>
+                <a:latin typeface="IBM Plex Mono" pitchFamily="34" charset="0"/>
+                <a:ea typeface="IBM Plex Mono" pitchFamily="34" charset="-122"/>
+                <a:cs typeface="IBM Plex Mono" pitchFamily="34" charset="-120"/>
+              </a:rPr>
+              <a:t>MESURÉ, SOURCÉ</a:t>
+            </a:r>
+            <a:endParaRPr lang="en-US" sz="1000" dirty="0"/>
+          </a:p>
+        </p:txBody>
+      </p:sp>
+      <p:sp>
+        <p:nvSpPr>
+          <p:cNvPr id="7" name="Text 5"/>
+          <p:cNvSpPr/>
+          <p:nvPr/>
+        </p:nvSpPr>
+        <p:spPr>
+          <a:xfrm>
+            <a:off x="7514905" y="2889504"/>
+            <a:ext cx="2249819" cy="365760"/>
+          </a:xfrm>
+          <a:prstGeom prst="rect">
+            <a:avLst/>
+          </a:prstGeom>
+          <a:noFill/>
+          <a:ln/>
+        </p:spPr>
+        <p:txBody>
+          <a:bodyPr wrap="square" lIns="0" tIns="0" rIns="0" bIns="0" rtlCol="0" anchor="ctr"/>
+          <a:lstStyle/>
+          <a:p>
+            <a:pPr indent="0" marL="0">
+              <a:buNone/>
+            </a:pPr>
+            <a:r>
+              <a:rPr lang="en-US" sz="1200" dirty="0">
+                <a:solidFill>
+                  <a:srgbClr val="5C6875"/>
                 </a:solidFill>
                 <a:latin typeface="Inter" pitchFamily="34" charset="0"/>
                 <a:ea typeface="Inter" pitchFamily="34" charset="-122"/>
                 <a:cs typeface="Inter" pitchFamily="34" charset="-120"/>
               </a:rPr>
-              <a:t>Quatre verdicts possibles : FAIRE, TESTER, DIFFÉRER, ABANDONNER.</a:t>
-            </a:r>
-            <a:endParaRPr lang="en-US" sz="1500" dirty="0"/>
-          </a:p>
-        </p:txBody>
-      </p:sp>
-      <p:sp>
-        <p:nvSpPr>
-          <p:cNvPr id="5" name="Text 3"/>
-          <p:cNvSpPr/>
-          <p:nvPr/>
-        </p:nvSpPr>
-        <p:spPr>
-          <a:xfrm>
-            <a:off x="658368" y="5815584"/>
-            <a:ext cx="9774936" cy="548640"/>
+              <a:t>Brut transitant</a:t>
+            </a:r>
+            <a:endParaRPr lang="en-US" sz="1200" dirty="0"/>
+          </a:p>
+        </p:txBody>
+      </p:sp>
+      <p:sp>
+        <p:nvSpPr>
+          <p:cNvPr id="8" name="Text 6"/>
+          <p:cNvSpPr/>
+          <p:nvPr/>
+        </p:nvSpPr>
+        <p:spPr>
+          <a:xfrm>
+            <a:off x="9764724" y="2889504"/>
+            <a:ext cx="1454964" cy="365760"/>
           </a:xfrm>
           <a:prstGeom prst="rect">
             <a:avLst/>
@@ -3067,14 +3066,53 @@
           <a:ln/>
         </p:spPr>
         <p:txBody>
-          <a:bodyPr wrap="square" lIns="0" tIns="0" rIns="0" bIns="0" rtlCol="0" anchor="b"/>
+          <a:bodyPr wrap="square" lIns="0" tIns="0" rIns="0" bIns="0" rtlCol="0" anchor="ctr"/>
+          <a:lstStyle/>
+          <a:p>
+            <a:pPr algn="r" indent="0" marL="0">
+              <a:buNone/>
+            </a:pPr>
+            <a:r>
+              <a:rPr lang="en-US" sz="1200" b="1" dirty="0">
+                <a:solidFill>
+                  <a:srgbClr val="141C26"/>
+                </a:solidFill>
+                <a:latin typeface="IBM Plex Mono" pitchFamily="34" charset="0"/>
+                <a:ea typeface="IBM Plex Mono" pitchFamily="34" charset="-122"/>
+                <a:cs typeface="IBM Plex Mono" pitchFamily="34" charset="-120"/>
+              </a:rPr>
+              <a:t>23,2 Mb/j</a:t>
+            </a:r>
+            <a:endParaRPr lang="en-US" sz="1200" dirty="0"/>
+          </a:p>
+        </p:txBody>
+      </p:sp>
+      <p:sp>
+        <p:nvSpPr>
+          <p:cNvPr id="9" name="Text 7"/>
+          <p:cNvSpPr/>
+          <p:nvPr/>
+        </p:nvSpPr>
+        <p:spPr>
+          <a:xfrm>
+            <a:off x="7514905" y="3310128"/>
+            <a:ext cx="2249819" cy="365760"/>
+          </a:xfrm>
+          <a:prstGeom prst="rect">
+            <a:avLst/>
+          </a:prstGeom>
+          <a:noFill/>
+          <a:ln/>
+        </p:spPr>
+        <p:txBody>
+          <a:bodyPr wrap="square" lIns="0" tIns="0" rIns="0" bIns="0" rtlCol="0" anchor="ctr"/>
           <a:lstStyle/>
           <a:p>
             <a:pPr indent="0" marL="0">
               <a:buNone/>
             </a:pPr>
             <a:r>
-              <a:rPr lang="en-US" sz="1000" i="1" dirty="0">
+              <a:rPr lang="en-US" sz="1200" dirty="0">
                 <a:solidFill>
                   <a:srgbClr val="5C6875"/>
                 </a:solidFill>
@@ -3082,22 +3120,22 @@
                 <a:ea typeface="Inter" pitchFamily="34" charset="-122"/>
                 <a:cs typeface="Inter" pitchFamily="34" charset="-120"/>
               </a:rPr>
-              <a:t>PESTEL, SWOT et Business Model Canvas y sont transformés pour la décision, pas juxtaposés. Le score n’est pas la décision.</a:t>
-            </a:r>
-            <a:endParaRPr lang="en-US" sz="1000" dirty="0"/>
-          </a:p>
-        </p:txBody>
-      </p:sp>
-      <p:sp>
-        <p:nvSpPr>
-          <p:cNvPr id="6" name="Text 4"/>
-          <p:cNvSpPr/>
-          <p:nvPr/>
-        </p:nvSpPr>
-        <p:spPr>
-          <a:xfrm>
-            <a:off x="10433304" y="6144768"/>
-            <a:ext cx="1097280" cy="274320"/>
+              <a:t>Part importée par la Chine</a:t>
+            </a:r>
+            <a:endParaRPr lang="en-US" sz="1200" dirty="0"/>
+          </a:p>
+        </p:txBody>
+      </p:sp>
+      <p:sp>
+        <p:nvSpPr>
+          <p:cNvPr id="10" name="Text 8"/>
+          <p:cNvSpPr/>
+          <p:nvPr/>
+        </p:nvSpPr>
+        <p:spPr>
+          <a:xfrm>
+            <a:off x="9764724" y="3310128"/>
+            <a:ext cx="1454964" cy="365760"/>
           </a:xfrm>
           <a:prstGeom prst="rect">
             <a:avLst/>
@@ -3113,15 +3151,249 @@
               <a:buNone/>
             </a:pPr>
             <a:r>
-              <a:rPr lang="en-US" sz="1000" dirty="0">
-                <a:solidFill>
-                  <a:srgbClr val="5C6875"/>
+              <a:rPr lang="en-US" sz="1200" b="1" dirty="0">
+                <a:solidFill>
+                  <a:srgbClr val="141C26"/>
                 </a:solidFill>
                 <a:latin typeface="IBM Plex Mono" pitchFamily="34" charset="0"/>
                 <a:ea typeface="IBM Plex Mono" pitchFamily="34" charset="-122"/>
                 <a:cs typeface="IBM Plex Mono" pitchFamily="34" charset="-120"/>
               </a:rPr>
-              <a:t>10 / 16</a:t>
+              <a:t>48 %</a:t>
+            </a:r>
+            <a:endParaRPr lang="en-US" sz="1200" dirty="0"/>
+          </a:p>
+        </p:txBody>
+      </p:sp>
+      <p:sp>
+        <p:nvSpPr>
+          <p:cNvPr id="11" name="Text 9"/>
+          <p:cNvSpPr/>
+          <p:nvPr/>
+        </p:nvSpPr>
+        <p:spPr>
+          <a:xfrm>
+            <a:off x="7514905" y="3730752"/>
+            <a:ext cx="2249819" cy="365760"/>
+          </a:xfrm>
+          <a:prstGeom prst="rect">
+            <a:avLst/>
+          </a:prstGeom>
+          <a:noFill/>
+          <a:ln/>
+        </p:spPr>
+        <p:txBody>
+          <a:bodyPr wrap="square" lIns="0" tIns="0" rIns="0" bIns="0" rtlCol="0" anchor="ctr"/>
+          <a:lstStyle/>
+          <a:p>
+            <a:pPr indent="0" marL="0">
+              <a:buNone/>
+            </a:pPr>
+            <a:r>
+              <a:rPr lang="en-US" sz="1200" dirty="0">
+                <a:solidFill>
+                  <a:srgbClr val="5C6875"/>
+                </a:solidFill>
+                <a:latin typeface="Inter" pitchFamily="34" charset="0"/>
+                <a:ea typeface="Inter" pitchFamily="34" charset="-122"/>
+                <a:cs typeface="Inter" pitchFamily="34" charset="-120"/>
+              </a:rPr>
+              <a:t>Transits (Malacca + Singapour)</a:t>
+            </a:r>
+            <a:endParaRPr lang="en-US" sz="1200" dirty="0"/>
+          </a:p>
+        </p:txBody>
+      </p:sp>
+      <p:sp>
+        <p:nvSpPr>
+          <p:cNvPr id="12" name="Text 10"/>
+          <p:cNvSpPr/>
+          <p:nvPr/>
+        </p:nvSpPr>
+        <p:spPr>
+          <a:xfrm>
+            <a:off x="9764724" y="3730752"/>
+            <a:ext cx="1454964" cy="365760"/>
+          </a:xfrm>
+          <a:prstGeom prst="rect">
+            <a:avLst/>
+          </a:prstGeom>
+          <a:noFill/>
+          <a:ln/>
+        </p:spPr>
+        <p:txBody>
+          <a:bodyPr wrap="square" lIns="0" tIns="0" rIns="0" bIns="0" rtlCol="0" anchor="ctr"/>
+          <a:lstStyle/>
+          <a:p>
+            <a:pPr algn="r" indent="0" marL="0">
+              <a:buNone/>
+            </a:pPr>
+            <a:r>
+              <a:rPr lang="en-US" sz="1200" b="1" dirty="0">
+                <a:solidFill>
+                  <a:srgbClr val="141C26"/>
+                </a:solidFill>
+                <a:latin typeface="IBM Plex Mono" pitchFamily="34" charset="0"/>
+                <a:ea typeface="IBM Plex Mono" pitchFamily="34" charset="-122"/>
+                <a:cs typeface="IBM Plex Mono" pitchFamily="34" charset="-120"/>
+              </a:rPr>
+              <a:t>94 301 / an</a:t>
+            </a:r>
+            <a:endParaRPr lang="en-US" sz="1200" dirty="0"/>
+          </a:p>
+        </p:txBody>
+      </p:sp>
+      <p:sp>
+        <p:nvSpPr>
+          <p:cNvPr id="13" name="Text 11"/>
+          <p:cNvSpPr/>
+          <p:nvPr/>
+        </p:nvSpPr>
+        <p:spPr>
+          <a:xfrm>
+            <a:off x="7514905" y="4151376"/>
+            <a:ext cx="2249819" cy="365760"/>
+          </a:xfrm>
+          <a:prstGeom prst="rect">
+            <a:avLst/>
+          </a:prstGeom>
+          <a:noFill/>
+          <a:ln/>
+        </p:spPr>
+        <p:txBody>
+          <a:bodyPr wrap="square" lIns="0" tIns="0" rIns="0" bIns="0" rtlCol="0" anchor="ctr"/>
+          <a:lstStyle/>
+          <a:p>
+            <a:pPr indent="0" marL="0">
+              <a:buNone/>
+            </a:pPr>
+            <a:r>
+              <a:rPr lang="en-US" sz="1200" dirty="0">
+                <a:solidFill>
+                  <a:srgbClr val="5C6875"/>
+                </a:solidFill>
+                <a:latin typeface="Inter" pitchFamily="34" charset="0"/>
+                <a:ea typeface="Inter" pitchFamily="34" charset="-122"/>
+                <a:cs typeface="Inter" pitchFamily="34" charset="-120"/>
+              </a:rPr>
+              <a:t>Débit conteneurs du hub</a:t>
+            </a:r>
+            <a:endParaRPr lang="en-US" sz="1200" dirty="0"/>
+          </a:p>
+        </p:txBody>
+      </p:sp>
+      <p:sp>
+        <p:nvSpPr>
+          <p:cNvPr id="14" name="Text 12"/>
+          <p:cNvSpPr/>
+          <p:nvPr/>
+        </p:nvSpPr>
+        <p:spPr>
+          <a:xfrm>
+            <a:off x="9764724" y="4151376"/>
+            <a:ext cx="1454964" cy="365760"/>
+          </a:xfrm>
+          <a:prstGeom prst="rect">
+            <a:avLst/>
+          </a:prstGeom>
+          <a:noFill/>
+          <a:ln/>
+        </p:spPr>
+        <p:txBody>
+          <a:bodyPr wrap="square" lIns="0" tIns="0" rIns="0" bIns="0" rtlCol="0" anchor="ctr"/>
+          <a:lstStyle/>
+          <a:p>
+            <a:pPr algn="r" indent="0" marL="0">
+              <a:buNone/>
+            </a:pPr>
+            <a:r>
+              <a:rPr lang="en-US" sz="1200" b="1" dirty="0">
+                <a:solidFill>
+                  <a:srgbClr val="141C26"/>
+                </a:solidFill>
+                <a:latin typeface="IBM Plex Mono" pitchFamily="34" charset="0"/>
+                <a:ea typeface="IBM Plex Mono" pitchFamily="34" charset="-122"/>
+                <a:cs typeface="IBM Plex Mono" pitchFamily="34" charset="-120"/>
+              </a:rPr>
+              <a:t>41,1 M EVP</a:t>
+            </a:r>
+            <a:endParaRPr lang="en-US" sz="1200" dirty="0"/>
+          </a:p>
+        </p:txBody>
+      </p:sp>
+      <p:sp>
+        <p:nvSpPr>
+          <p:cNvPr id="15" name="Text 13"/>
+          <p:cNvSpPr/>
+          <p:nvPr/>
+        </p:nvSpPr>
+        <p:spPr>
+          <a:xfrm>
+            <a:off x="658368" y="5815584"/>
+            <a:ext cx="9774936" cy="548640"/>
+          </a:xfrm>
+          <a:prstGeom prst="rect">
+            <a:avLst/>
+          </a:prstGeom>
+          <a:noFill/>
+          <a:ln/>
+        </p:spPr>
+        <p:txBody>
+          <a:bodyPr wrap="square" lIns="0" tIns="0" rIns="0" bIns="0" rtlCol="0" anchor="b"/>
+          <a:lstStyle/>
+          <a:p>
+            <a:pPr indent="0" marL="0">
+              <a:buNone/>
+            </a:pPr>
+            <a:r>
+              <a:rPr lang="en-US" sz="1000" i="1" dirty="0">
+                <a:solidFill>
+                  <a:srgbClr val="5C6875"/>
+                </a:solidFill>
+                <a:latin typeface="Inter" pitchFamily="34" charset="0"/>
+                <a:ea typeface="Inter" pitchFamily="34" charset="-122"/>
+                <a:cs typeface="Inter" pitchFamily="34" charset="-120"/>
+              </a:rPr>
+              <a:t>Illustration de méthode sur sources publiques — ce n’est pas un diagnostic publié. La fiche Atlas correspondante est en cours de validation humaine. Sources : US EIA, World Oil Transit Chokepoints (1ᵉʳ semestre 2025) ; MPA Singapore, Annual Report 2024.</a:t>
+            </a:r>
+            <a:endParaRPr lang="en-US" sz="1000" dirty="0"/>
+          </a:p>
+        </p:txBody>
+      </p:sp>
+      <p:sp>
+        <p:nvSpPr>
+          <p:cNvPr id="16" name="Text 14"/>
+          <p:cNvSpPr/>
+          <p:nvPr/>
+        </p:nvSpPr>
+        <p:spPr>
+          <a:xfrm>
+            <a:off x="10433304" y="6144768"/>
+            <a:ext cx="1097280" cy="274320"/>
+          </a:xfrm>
+          <a:prstGeom prst="rect">
+            <a:avLst/>
+          </a:prstGeom>
+          <a:noFill/>
+          <a:ln/>
+        </p:spPr>
+        <p:txBody>
+          <a:bodyPr wrap="square" lIns="0" tIns="0" rIns="0" bIns="0" rtlCol="0" anchor="ctr"/>
+          <a:lstStyle/>
+          <a:p>
+            <a:pPr algn="r" indent="0" marL="0">
+              <a:buNone/>
+            </a:pPr>
+            <a:r>
+              <a:rPr lang="en-US" sz="1000" dirty="0">
+                <a:solidFill>
+                  <a:srgbClr val="5C6875"/>
+                </a:solidFill>
+                <a:latin typeface="IBM Plex Mono" pitchFamily="34" charset="0"/>
+                <a:ea typeface="IBM Plex Mono" pitchFamily="34" charset="-122"/>
+                <a:cs typeface="IBM Plex Mono" pitchFamily="34" charset="-120"/>
+              </a:rPr>
+              <a:t>10 / 15</a:t>
             </a:r>
             <a:endParaRPr lang="en-US" sz="1000" dirty="0"/>
           </a:p>
@@ -3138,6 +3410,672 @@
 <file path=ppt/slides/slide11.xml><?xml version="1.0" encoding="utf-8"?>
 <p:sld xmlns:a="http://schemas.openxmlformats.org/drawingml/2006/main" xmlns:r="http://schemas.openxmlformats.org/officeDocument/2006/relationships" xmlns:p="http://schemas.openxmlformats.org/presentationml/2006/main">
   <p:cSld name="Slide 11">
+    <p:bg>
+      <p:bgPr>
+        <a:solidFill>
+          <a:srgbClr val="0F3C4E"/>
+        </a:solidFill>
+      </p:bgPr>
+    </p:bg>
+    <p:spTree>
+      <p:nvGrpSpPr>
+        <p:cNvPr id="1" name=""/>
+        <p:cNvGrpSpPr/>
+        <p:nvPr/>
+      </p:nvGrpSpPr>
+      <p:grpSpPr>
+        <a:xfrm>
+          <a:off x="0" y="0"/>
+          <a:ext cx="0" cy="0"/>
+          <a:chOff x="0" y="0"/>
+          <a:chExt cx="0" cy="0"/>
+        </a:xfrm>
+      </p:grpSpPr>
+      <p:sp>
+        <p:nvSpPr>
+          <p:cNvPr id="2" name="Shape 0"/>
+          <p:cNvSpPr/>
+          <p:nvPr/>
+        </p:nvSpPr>
+        <p:spPr>
+          <a:xfrm>
+            <a:off x="914400" y="0"/>
+            <a:ext cx="0" cy="6858000"/>
+          </a:xfrm>
+          <a:prstGeom prst="line">
+            <a:avLst/>
+          </a:prstGeom>
+          <a:noFill/>
+          <a:ln w="6350">
+            <a:solidFill>
+              <a:srgbClr val="F4F6F8">
+                <a:alpha val="22000"/>
+              </a:srgbClr>
+            </a:solidFill>
+            <a:prstDash val="solid"/>
+          </a:ln>
+        </p:spPr>
+      </p:sp>
+      <p:sp>
+        <p:nvSpPr>
+          <p:cNvPr id="3" name="Shape 1"/>
+          <p:cNvSpPr/>
+          <p:nvPr/>
+        </p:nvSpPr>
+        <p:spPr>
+          <a:xfrm>
+            <a:off x="1828800" y="0"/>
+            <a:ext cx="0" cy="6858000"/>
+          </a:xfrm>
+          <a:prstGeom prst="line">
+            <a:avLst/>
+          </a:prstGeom>
+          <a:noFill/>
+          <a:ln w="6350">
+            <a:solidFill>
+              <a:srgbClr val="F4F6F8">
+                <a:alpha val="22000"/>
+              </a:srgbClr>
+            </a:solidFill>
+            <a:prstDash val="solid"/>
+          </a:ln>
+        </p:spPr>
+      </p:sp>
+      <p:sp>
+        <p:nvSpPr>
+          <p:cNvPr id="4" name="Shape 2"/>
+          <p:cNvSpPr/>
+          <p:nvPr/>
+        </p:nvSpPr>
+        <p:spPr>
+          <a:xfrm>
+            <a:off x="2743200" y="0"/>
+            <a:ext cx="0" cy="6858000"/>
+          </a:xfrm>
+          <a:prstGeom prst="line">
+            <a:avLst/>
+          </a:prstGeom>
+          <a:noFill/>
+          <a:ln w="6350">
+            <a:solidFill>
+              <a:srgbClr val="F4F6F8">
+                <a:alpha val="22000"/>
+              </a:srgbClr>
+            </a:solidFill>
+            <a:prstDash val="solid"/>
+          </a:ln>
+        </p:spPr>
+      </p:sp>
+      <p:sp>
+        <p:nvSpPr>
+          <p:cNvPr id="5" name="Shape 3"/>
+          <p:cNvSpPr/>
+          <p:nvPr/>
+        </p:nvSpPr>
+        <p:spPr>
+          <a:xfrm>
+            <a:off x="3657600" y="0"/>
+            <a:ext cx="0" cy="6858000"/>
+          </a:xfrm>
+          <a:prstGeom prst="line">
+            <a:avLst/>
+          </a:prstGeom>
+          <a:noFill/>
+          <a:ln w="6350">
+            <a:solidFill>
+              <a:srgbClr val="F4F6F8">
+                <a:alpha val="22000"/>
+              </a:srgbClr>
+            </a:solidFill>
+            <a:prstDash val="solid"/>
+          </a:ln>
+        </p:spPr>
+      </p:sp>
+      <p:sp>
+        <p:nvSpPr>
+          <p:cNvPr id="6" name="Shape 4"/>
+          <p:cNvSpPr/>
+          <p:nvPr/>
+        </p:nvSpPr>
+        <p:spPr>
+          <a:xfrm>
+            <a:off x="4572000" y="0"/>
+            <a:ext cx="0" cy="6858000"/>
+          </a:xfrm>
+          <a:prstGeom prst="line">
+            <a:avLst/>
+          </a:prstGeom>
+          <a:noFill/>
+          <a:ln w="6350">
+            <a:solidFill>
+              <a:srgbClr val="F4F6F8">
+                <a:alpha val="22000"/>
+              </a:srgbClr>
+            </a:solidFill>
+            <a:prstDash val="solid"/>
+          </a:ln>
+        </p:spPr>
+      </p:sp>
+      <p:sp>
+        <p:nvSpPr>
+          <p:cNvPr id="7" name="Shape 5"/>
+          <p:cNvSpPr/>
+          <p:nvPr/>
+        </p:nvSpPr>
+        <p:spPr>
+          <a:xfrm>
+            <a:off x="5486400" y="0"/>
+            <a:ext cx="0" cy="6858000"/>
+          </a:xfrm>
+          <a:prstGeom prst="line">
+            <a:avLst/>
+          </a:prstGeom>
+          <a:noFill/>
+          <a:ln w="6350">
+            <a:solidFill>
+              <a:srgbClr val="F4F6F8">
+                <a:alpha val="22000"/>
+              </a:srgbClr>
+            </a:solidFill>
+            <a:prstDash val="solid"/>
+          </a:ln>
+        </p:spPr>
+      </p:sp>
+      <p:sp>
+        <p:nvSpPr>
+          <p:cNvPr id="8" name="Shape 6"/>
+          <p:cNvSpPr/>
+          <p:nvPr/>
+        </p:nvSpPr>
+        <p:spPr>
+          <a:xfrm>
+            <a:off x="6400800" y="0"/>
+            <a:ext cx="0" cy="6858000"/>
+          </a:xfrm>
+          <a:prstGeom prst="line">
+            <a:avLst/>
+          </a:prstGeom>
+          <a:noFill/>
+          <a:ln w="6350">
+            <a:solidFill>
+              <a:srgbClr val="F4F6F8">
+                <a:alpha val="22000"/>
+              </a:srgbClr>
+            </a:solidFill>
+            <a:prstDash val="solid"/>
+          </a:ln>
+        </p:spPr>
+      </p:sp>
+      <p:sp>
+        <p:nvSpPr>
+          <p:cNvPr id="9" name="Shape 7"/>
+          <p:cNvSpPr/>
+          <p:nvPr/>
+        </p:nvSpPr>
+        <p:spPr>
+          <a:xfrm>
+            <a:off x="7315200" y="0"/>
+            <a:ext cx="0" cy="6858000"/>
+          </a:xfrm>
+          <a:prstGeom prst="line">
+            <a:avLst/>
+          </a:prstGeom>
+          <a:noFill/>
+          <a:ln w="6350">
+            <a:solidFill>
+              <a:srgbClr val="F4F6F8">
+                <a:alpha val="22000"/>
+              </a:srgbClr>
+            </a:solidFill>
+            <a:prstDash val="solid"/>
+          </a:ln>
+        </p:spPr>
+      </p:sp>
+      <p:sp>
+        <p:nvSpPr>
+          <p:cNvPr id="10" name="Shape 8"/>
+          <p:cNvSpPr/>
+          <p:nvPr/>
+        </p:nvSpPr>
+        <p:spPr>
+          <a:xfrm>
+            <a:off x="8229600" y="0"/>
+            <a:ext cx="0" cy="6858000"/>
+          </a:xfrm>
+          <a:prstGeom prst="line">
+            <a:avLst/>
+          </a:prstGeom>
+          <a:noFill/>
+          <a:ln w="6350">
+            <a:solidFill>
+              <a:srgbClr val="F4F6F8">
+                <a:alpha val="22000"/>
+              </a:srgbClr>
+            </a:solidFill>
+            <a:prstDash val="solid"/>
+          </a:ln>
+        </p:spPr>
+      </p:sp>
+      <p:sp>
+        <p:nvSpPr>
+          <p:cNvPr id="11" name="Shape 9"/>
+          <p:cNvSpPr/>
+          <p:nvPr/>
+        </p:nvSpPr>
+        <p:spPr>
+          <a:xfrm>
+            <a:off x="9144000" y="0"/>
+            <a:ext cx="0" cy="6858000"/>
+          </a:xfrm>
+          <a:prstGeom prst="line">
+            <a:avLst/>
+          </a:prstGeom>
+          <a:noFill/>
+          <a:ln w="6350">
+            <a:solidFill>
+              <a:srgbClr val="F4F6F8">
+                <a:alpha val="22000"/>
+              </a:srgbClr>
+            </a:solidFill>
+            <a:prstDash val="solid"/>
+          </a:ln>
+        </p:spPr>
+      </p:sp>
+      <p:sp>
+        <p:nvSpPr>
+          <p:cNvPr id="12" name="Shape 10"/>
+          <p:cNvSpPr/>
+          <p:nvPr/>
+        </p:nvSpPr>
+        <p:spPr>
+          <a:xfrm>
+            <a:off x="10058400" y="0"/>
+            <a:ext cx="0" cy="6858000"/>
+          </a:xfrm>
+          <a:prstGeom prst="line">
+            <a:avLst/>
+          </a:prstGeom>
+          <a:noFill/>
+          <a:ln w="6350">
+            <a:solidFill>
+              <a:srgbClr val="F4F6F8">
+                <a:alpha val="22000"/>
+              </a:srgbClr>
+            </a:solidFill>
+            <a:prstDash val="solid"/>
+          </a:ln>
+        </p:spPr>
+      </p:sp>
+      <p:sp>
+        <p:nvSpPr>
+          <p:cNvPr id="13" name="Shape 11"/>
+          <p:cNvSpPr/>
+          <p:nvPr/>
+        </p:nvSpPr>
+        <p:spPr>
+          <a:xfrm>
+            <a:off x="10972800" y="0"/>
+            <a:ext cx="0" cy="6858000"/>
+          </a:xfrm>
+          <a:prstGeom prst="line">
+            <a:avLst/>
+          </a:prstGeom>
+          <a:noFill/>
+          <a:ln w="6350">
+            <a:solidFill>
+              <a:srgbClr val="F4F6F8">
+                <a:alpha val="22000"/>
+              </a:srgbClr>
+            </a:solidFill>
+            <a:prstDash val="solid"/>
+          </a:ln>
+        </p:spPr>
+      </p:sp>
+      <p:sp>
+        <p:nvSpPr>
+          <p:cNvPr id="14" name="Shape 12"/>
+          <p:cNvSpPr/>
+          <p:nvPr/>
+        </p:nvSpPr>
+        <p:spPr>
+          <a:xfrm>
+            <a:off x="0" y="914400"/>
+            <a:ext cx="12188952" cy="0"/>
+          </a:xfrm>
+          <a:prstGeom prst="line">
+            <a:avLst/>
+          </a:prstGeom>
+          <a:noFill/>
+          <a:ln w="6350">
+            <a:solidFill>
+              <a:srgbClr val="F4F6F8">
+                <a:alpha val="22000"/>
+              </a:srgbClr>
+            </a:solidFill>
+            <a:prstDash val="solid"/>
+          </a:ln>
+        </p:spPr>
+      </p:sp>
+      <p:sp>
+        <p:nvSpPr>
+          <p:cNvPr id="15" name="Shape 13"/>
+          <p:cNvSpPr/>
+          <p:nvPr/>
+        </p:nvSpPr>
+        <p:spPr>
+          <a:xfrm>
+            <a:off x="0" y="1828800"/>
+            <a:ext cx="12188952" cy="0"/>
+          </a:xfrm>
+          <a:prstGeom prst="line">
+            <a:avLst/>
+          </a:prstGeom>
+          <a:noFill/>
+          <a:ln w="6350">
+            <a:solidFill>
+              <a:srgbClr val="F4F6F8">
+                <a:alpha val="22000"/>
+              </a:srgbClr>
+            </a:solidFill>
+            <a:prstDash val="solid"/>
+          </a:ln>
+        </p:spPr>
+      </p:sp>
+      <p:sp>
+        <p:nvSpPr>
+          <p:cNvPr id="16" name="Shape 14"/>
+          <p:cNvSpPr/>
+          <p:nvPr/>
+        </p:nvSpPr>
+        <p:spPr>
+          <a:xfrm>
+            <a:off x="0" y="2743200"/>
+            <a:ext cx="12188952" cy="0"/>
+          </a:xfrm>
+          <a:prstGeom prst="line">
+            <a:avLst/>
+          </a:prstGeom>
+          <a:noFill/>
+          <a:ln w="6350">
+            <a:solidFill>
+              <a:srgbClr val="F4F6F8">
+                <a:alpha val="22000"/>
+              </a:srgbClr>
+            </a:solidFill>
+            <a:prstDash val="solid"/>
+          </a:ln>
+        </p:spPr>
+      </p:sp>
+      <p:sp>
+        <p:nvSpPr>
+          <p:cNvPr id="17" name="Shape 15"/>
+          <p:cNvSpPr/>
+          <p:nvPr/>
+        </p:nvSpPr>
+        <p:spPr>
+          <a:xfrm>
+            <a:off x="0" y="3657600"/>
+            <a:ext cx="12188952" cy="0"/>
+          </a:xfrm>
+          <a:prstGeom prst="line">
+            <a:avLst/>
+          </a:prstGeom>
+          <a:noFill/>
+          <a:ln w="6350">
+            <a:solidFill>
+              <a:srgbClr val="F4F6F8">
+                <a:alpha val="22000"/>
+              </a:srgbClr>
+            </a:solidFill>
+            <a:prstDash val="solid"/>
+          </a:ln>
+        </p:spPr>
+      </p:sp>
+      <p:sp>
+        <p:nvSpPr>
+          <p:cNvPr id="18" name="Shape 16"/>
+          <p:cNvSpPr/>
+          <p:nvPr/>
+        </p:nvSpPr>
+        <p:spPr>
+          <a:xfrm>
+            <a:off x="0" y="4572000"/>
+            <a:ext cx="12188952" cy="0"/>
+          </a:xfrm>
+          <a:prstGeom prst="line">
+            <a:avLst/>
+          </a:prstGeom>
+          <a:noFill/>
+          <a:ln w="6350">
+            <a:solidFill>
+              <a:srgbClr val="F4F6F8">
+                <a:alpha val="22000"/>
+              </a:srgbClr>
+            </a:solidFill>
+            <a:prstDash val="solid"/>
+          </a:ln>
+        </p:spPr>
+      </p:sp>
+      <p:sp>
+        <p:nvSpPr>
+          <p:cNvPr id="19" name="Shape 17"/>
+          <p:cNvSpPr/>
+          <p:nvPr/>
+        </p:nvSpPr>
+        <p:spPr>
+          <a:xfrm>
+            <a:off x="0" y="5486400"/>
+            <a:ext cx="12188952" cy="0"/>
+          </a:xfrm>
+          <a:prstGeom prst="line">
+            <a:avLst/>
+          </a:prstGeom>
+          <a:noFill/>
+          <a:ln w="6350">
+            <a:solidFill>
+              <a:srgbClr val="F4F6F8">
+                <a:alpha val="22000"/>
+              </a:srgbClr>
+            </a:solidFill>
+            <a:prstDash val="solid"/>
+          </a:ln>
+        </p:spPr>
+      </p:sp>
+      <p:sp>
+        <p:nvSpPr>
+          <p:cNvPr id="20" name="Shape 18"/>
+          <p:cNvSpPr/>
+          <p:nvPr/>
+        </p:nvSpPr>
+        <p:spPr>
+          <a:xfrm>
+            <a:off x="0" y="6400800"/>
+            <a:ext cx="12188952" cy="0"/>
+          </a:xfrm>
+          <a:prstGeom prst="line">
+            <a:avLst/>
+          </a:prstGeom>
+          <a:noFill/>
+          <a:ln w="6350">
+            <a:solidFill>
+              <a:srgbClr val="F4F6F8">
+                <a:alpha val="22000"/>
+              </a:srgbClr>
+            </a:solidFill>
+            <a:prstDash val="solid"/>
+          </a:ln>
+        </p:spPr>
+      </p:sp>
+      <p:sp>
+        <p:nvSpPr>
+          <p:cNvPr id="21" name="Text 19"/>
+          <p:cNvSpPr/>
+          <p:nvPr/>
+        </p:nvSpPr>
+        <p:spPr>
+          <a:xfrm>
+            <a:off x="658368" y="2121408"/>
+            <a:ext cx="1828800" cy="365760"/>
+          </a:xfrm>
+          <a:prstGeom prst="rect">
+            <a:avLst/>
+          </a:prstGeom>
+          <a:noFill/>
+          <a:ln/>
+        </p:spPr>
+        <p:txBody>
+          <a:bodyPr wrap="square" lIns="0" tIns="0" rIns="0" bIns="0" rtlCol="0" anchor="ctr"/>
+          <a:lstStyle/>
+          <a:p>
+            <a:pPr indent="0" marL="0">
+              <a:buNone/>
+            </a:pPr>
+            <a:r>
+              <a:rPr lang="en-US" sz="1300" spc="300" kern="0" dirty="0">
+                <a:solidFill>
+                  <a:srgbClr val="C8282C"/>
+                </a:solidFill>
+                <a:latin typeface="IBM Plex Mono" pitchFamily="34" charset="0"/>
+                <a:ea typeface="IBM Plex Mono" pitchFamily="34" charset="-122"/>
+                <a:cs typeface="IBM Plex Mono" pitchFamily="34" charset="-120"/>
+              </a:rPr>
+              <a:t>II</a:t>
+            </a:r>
+            <a:endParaRPr lang="en-US" sz="1300" dirty="0"/>
+          </a:p>
+        </p:txBody>
+      </p:sp>
+      <p:sp>
+        <p:nvSpPr>
+          <p:cNvPr id="22" name="Text 20"/>
+          <p:cNvSpPr/>
+          <p:nvPr/>
+        </p:nvSpPr>
+        <p:spPr>
+          <a:xfrm>
+            <a:off x="658368" y="2615184"/>
+            <a:ext cx="8778240" cy="1097280"/>
+          </a:xfrm>
+          <a:prstGeom prst="rect">
+            <a:avLst/>
+          </a:prstGeom>
+          <a:noFill/>
+          <a:ln/>
+        </p:spPr>
+        <p:txBody>
+          <a:bodyPr wrap="square" lIns="0" tIns="0" rIns="0" bIns="0" rtlCol="0" anchor="t"/>
+          <a:lstStyle/>
+          <a:p>
+            <a:pPr indent="0" marL="0">
+              <a:buNone/>
+            </a:pPr>
+            <a:r>
+              <a:rPr lang="en-US" sz="4000" b="1" dirty="0">
+                <a:solidFill>
+                  <a:srgbClr val="F4F6F8"/>
+                </a:solidFill>
+                <a:latin typeface="Fraunces" pitchFamily="34" charset="0"/>
+                <a:ea typeface="Fraunces" pitchFamily="34" charset="-122"/>
+                <a:cs typeface="Fraunces" pitchFamily="34" charset="-120"/>
+              </a:rPr>
+              <a:t>Trois niveaux de lecture</a:t>
+            </a:r>
+            <a:endParaRPr lang="en-US" sz="4000" dirty="0"/>
+          </a:p>
+        </p:txBody>
+      </p:sp>
+      <p:sp>
+        <p:nvSpPr>
+          <p:cNvPr id="23" name="Text 21"/>
+          <p:cNvSpPr/>
+          <p:nvPr/>
+        </p:nvSpPr>
+        <p:spPr>
+          <a:xfrm>
+            <a:off x="658368" y="3822192"/>
+            <a:ext cx="7680960" cy="1097280"/>
+          </a:xfrm>
+          <a:prstGeom prst="rect">
+            <a:avLst/>
+          </a:prstGeom>
+          <a:noFill/>
+          <a:ln/>
+        </p:spPr>
+        <p:txBody>
+          <a:bodyPr wrap="square" lIns="0" tIns="0" rIns="0" bIns="0" rtlCol="0" anchor="t"/>
+          <a:lstStyle/>
+          <a:p>
+            <a:pPr indent="0" marL="0">
+              <a:lnSpc>
+                <a:spcPct val="130000"/>
+              </a:lnSpc>
+              <a:buNone/>
+            </a:pPr>
+            <a:r>
+              <a:rPr lang="en-US" sz="1600" dirty="0">
+                <a:solidFill>
+                  <a:srgbClr val="D3DBE1"/>
+                </a:solidFill>
+                <a:latin typeface="Inter" pitchFamily="34" charset="0"/>
+                <a:ea typeface="Inter" pitchFamily="34" charset="-122"/>
+                <a:cs typeface="Inter" pitchFamily="34" charset="-120"/>
+              </a:rPr>
+              <a:t>Informer, surveiller, arbitrer. Trois engagements différents, annoncés avec leurs plafonds.</a:t>
+            </a:r>
+            <a:endParaRPr lang="en-US" sz="1600" dirty="0"/>
+          </a:p>
+        </p:txBody>
+      </p:sp>
+      <p:sp>
+        <p:nvSpPr>
+          <p:cNvPr id="24" name="Text 22"/>
+          <p:cNvSpPr/>
+          <p:nvPr/>
+        </p:nvSpPr>
+        <p:spPr>
+          <a:xfrm>
+            <a:off x="10433304" y="6144768"/>
+            <a:ext cx="1097280" cy="274320"/>
+          </a:xfrm>
+          <a:prstGeom prst="rect">
+            <a:avLst/>
+          </a:prstGeom>
+          <a:noFill/>
+          <a:ln/>
+        </p:spPr>
+        <p:txBody>
+          <a:bodyPr wrap="square" lIns="0" tIns="0" rIns="0" bIns="0" rtlCol="0" anchor="ctr"/>
+          <a:lstStyle/>
+          <a:p>
+            <a:pPr algn="r" indent="0" marL="0">
+              <a:buNone/>
+            </a:pPr>
+            <a:r>
+              <a:rPr lang="en-US" sz="1000" dirty="0">
+                <a:solidFill>
+                  <a:srgbClr val="BFCAD3"/>
+                </a:solidFill>
+                <a:latin typeface="IBM Plex Mono" pitchFamily="34" charset="0"/>
+                <a:ea typeface="IBM Plex Mono" pitchFamily="34" charset="-122"/>
+                <a:cs typeface="IBM Plex Mono" pitchFamily="34" charset="-120"/>
+              </a:rPr>
+              <a:t>11 / 15</a:t>
+            </a:r>
+            <a:endParaRPr lang="en-US" sz="1000" dirty="0"/>
+          </a:p>
+        </p:txBody>
+      </p:sp>
+    </p:spTree>
+  </p:cSld>
+  <p:clrMapOvr>
+    <a:masterClrMapping/>
+  </p:clrMapOvr>
+</p:sld>
+</file>
+
+<file path=ppt/slides/slide12.xml><?xml version="1.0" encoding="utf-8"?>
+<p:sld xmlns:a="http://schemas.openxmlformats.org/drawingml/2006/main" xmlns:r="http://schemas.openxmlformats.org/officeDocument/2006/relationships" xmlns:p="http://schemas.openxmlformats.org/presentationml/2006/main">
+  <p:cSld name="Slide 12">
     <p:bg>
       <p:bgPr>
         <a:solidFill>
@@ -3186,13 +4124,13 @@
             <a:r>
               <a:rPr lang="en-US" sz="1000" spc="160" kern="0" dirty="0">
                 <a:solidFill>
-                  <a:srgbClr val="C8282C"/>
+                  <a:srgbClr val="5C6875"/>
                 </a:solidFill>
                 <a:latin typeface="IBM Plex Mono" pitchFamily="34" charset="0"/>
                 <a:ea typeface="IBM Plex Mono" pitchFamily="34" charset="-122"/>
                 <a:cs typeface="IBM Plex Mono" pitchFamily="34" charset="-120"/>
               </a:rPr>
-              <a:t>COUVERTURE</a:t>
+              <a:t>OFFRES</a:t>
             </a:r>
             <a:endParaRPr lang="en-US" sz="1000" dirty="0"/>
           </a:p>
@@ -3200,20 +4138,62 @@
       </p:sp>
       <p:sp>
         <p:nvSpPr>
-          <p:cNvPr id="3" name="Shape 1"/>
-          <p:cNvSpPr/>
-          <p:nvPr/>
-        </p:nvSpPr>
-        <p:spPr>
-          <a:xfrm>
-            <a:off x="658368" y="1371600"/>
-            <a:ext cx="10872216" cy="3200400"/>
+          <p:cNvPr id="3" name="Text 1"/>
+          <p:cNvSpPr/>
+          <p:nvPr/>
+        </p:nvSpPr>
+        <p:spPr>
+          <a:xfrm>
+            <a:off x="658368" y="786384"/>
+            <a:ext cx="10872216" cy="1207008"/>
+          </a:xfrm>
+          <a:prstGeom prst="rect">
+            <a:avLst/>
+          </a:prstGeom>
+          <a:noFill/>
+          <a:ln/>
+        </p:spPr>
+        <p:txBody>
+          <a:bodyPr wrap="square" lIns="0" tIns="0" rIns="0" bIns="0" rtlCol="0" anchor="t"/>
+          <a:lstStyle/>
+          <a:p>
+            <a:pPr indent="0" marL="0">
+              <a:lnSpc>
+                <a:spcPct val="105000"/>
+              </a:lnSpc>
+              <a:buNone/>
+            </a:pPr>
+            <a:r>
+              <a:rPr lang="en-US" sz="3400" b="1" dirty="0">
+                <a:solidFill>
+                  <a:srgbClr val="141C26"/>
+                </a:solidFill>
+                <a:latin typeface="Fraunces" pitchFamily="34" charset="0"/>
+                <a:ea typeface="Fraunces" pitchFamily="34" charset="-122"/>
+                <a:cs typeface="Fraunces" pitchFamily="34" charset="-120"/>
+              </a:rPr>
+              <a:t>Trois niveaux de lecture</a:t>
+            </a:r>
+            <a:endParaRPr lang="en-US" sz="3400" dirty="0"/>
+          </a:p>
+        </p:txBody>
+      </p:sp>
+      <p:sp>
+        <p:nvSpPr>
+          <p:cNvPr id="4" name="Shape 2"/>
+          <p:cNvSpPr/>
+          <p:nvPr/>
+        </p:nvSpPr>
+        <p:spPr>
+          <a:xfrm>
+            <a:off x="658368" y="2446020"/>
+            <a:ext cx="3404616" cy="3063240"/>
           </a:xfrm>
           <a:prstGeom prst="rect">
             <a:avLst/>
           </a:prstGeom>
           <a:solidFill>
-            <a:srgbClr val="FCFDFE"/>
+            <a:srgbClr val="F4F6F8"/>
           </a:solidFill>
           <a:ln w="12700">
             <a:solidFill>
@@ -3225,22 +4205,181 @@
       </p:sp>
       <p:sp>
         <p:nvSpPr>
-          <p:cNvPr id="4" name="Shape 2"/>
-          <p:cNvSpPr/>
-          <p:nvPr/>
-        </p:nvSpPr>
-        <p:spPr>
-          <a:xfrm>
-            <a:off x="1133856" y="1828800"/>
-            <a:ext cx="155448" cy="155448"/>
-          </a:xfrm>
-          <a:prstGeom prst="diamond">
+          <p:cNvPr id="5" name="Text 3"/>
+          <p:cNvSpPr/>
+          <p:nvPr/>
+        </p:nvSpPr>
+        <p:spPr>
+          <a:xfrm>
+            <a:off x="969264" y="2756916"/>
+            <a:ext cx="2782824" cy="237744"/>
+          </a:xfrm>
+          <a:prstGeom prst="rect">
+            <a:avLst/>
+          </a:prstGeom>
+          <a:noFill/>
+          <a:ln/>
+        </p:spPr>
+        <p:txBody>
+          <a:bodyPr wrap="square" lIns="0" tIns="0" rIns="0" bIns="0" rtlCol="0" anchor="ctr"/>
+          <a:lstStyle/>
+          <a:p>
+            <a:pPr indent="0" marL="0">
+              <a:buNone/>
+            </a:pPr>
+            <a:r>
+              <a:rPr lang="en-US" sz="1000" spc="140" kern="0" dirty="0">
+                <a:solidFill>
+                  <a:srgbClr val="5C6875"/>
+                </a:solidFill>
+                <a:latin typeface="IBM Plex Mono" pitchFamily="34" charset="0"/>
+                <a:ea typeface="IBM Plex Mono" pitchFamily="34" charset="-122"/>
+                <a:cs typeface="IBM Plex Mono" pitchFamily="34" charset="-120"/>
+              </a:rPr>
+              <a:t>INFORMER</a:t>
+            </a:r>
+            <a:endParaRPr lang="en-US" sz="1000" dirty="0"/>
+          </a:p>
+        </p:txBody>
+      </p:sp>
+      <p:sp>
+        <p:nvSpPr>
+          <p:cNvPr id="6" name="Text 4"/>
+          <p:cNvSpPr/>
+          <p:nvPr/>
+        </p:nvSpPr>
+        <p:spPr>
+          <a:xfrm>
+            <a:off x="969264" y="3086100"/>
+            <a:ext cx="2782824" cy="548640"/>
+          </a:xfrm>
+          <a:prstGeom prst="rect">
+            <a:avLst/>
+          </a:prstGeom>
+          <a:noFill/>
+          <a:ln/>
+        </p:spPr>
+        <p:txBody>
+          <a:bodyPr wrap="square" lIns="0" tIns="0" rIns="0" bIns="0" rtlCol="0" anchor="t"/>
+          <a:lstStyle/>
+          <a:p>
+            <a:pPr indent="0" marL="0">
+              <a:buNone/>
+            </a:pPr>
+            <a:r>
+              <a:rPr lang="en-US" sz="2600" b="1" dirty="0">
+                <a:solidFill>
+                  <a:srgbClr val="141C26"/>
+                </a:solidFill>
+                <a:latin typeface="Fraunces" pitchFamily="34" charset="0"/>
+                <a:ea typeface="Fraunces" pitchFamily="34" charset="-122"/>
+                <a:cs typeface="Fraunces" pitchFamily="34" charset="-120"/>
+              </a:rPr>
+              <a:t>Basic</a:t>
+            </a:r>
+            <a:endParaRPr lang="en-US" sz="2600" dirty="0"/>
+          </a:p>
+        </p:txBody>
+      </p:sp>
+      <p:sp>
+        <p:nvSpPr>
+          <p:cNvPr id="7" name="Text 5"/>
+          <p:cNvSpPr/>
+          <p:nvPr/>
+        </p:nvSpPr>
+        <p:spPr>
+          <a:xfrm>
+            <a:off x="969264" y="3762756"/>
+            <a:ext cx="2782824" cy="365760"/>
+          </a:xfrm>
+          <a:prstGeom prst="rect">
+            <a:avLst/>
+          </a:prstGeom>
+          <a:noFill/>
+          <a:ln/>
+        </p:spPr>
+        <p:txBody>
+          <a:bodyPr wrap="square" lIns="0" tIns="0" rIns="0" bIns="0" rtlCol="0" anchor="ctr"/>
+          <a:lstStyle/>
+          <a:p>
+            <a:pPr indent="0" marL="0">
+              <a:buNone/>
+            </a:pPr>
+            <a:r>
+              <a:rPr lang="en-US" sz="1500" b="1" dirty="0">
+                <a:solidFill>
+                  <a:srgbClr val="0F3C4E"/>
+                </a:solidFill>
+                <a:latin typeface="IBM Plex Mono" pitchFamily="34" charset="0"/>
+                <a:ea typeface="IBM Plex Mono" pitchFamily="34" charset="-122"/>
+                <a:cs typeface="IBM Plex Mono" pitchFamily="34" charset="-120"/>
+              </a:rPr>
+              <a:t>19–49 €/mois</a:t>
+            </a:r>
+            <a:endParaRPr lang="en-US" sz="1500" dirty="0"/>
+          </a:p>
+        </p:txBody>
+      </p:sp>
+      <p:sp>
+        <p:nvSpPr>
+          <p:cNvPr id="8" name="Text 6"/>
+          <p:cNvSpPr/>
+          <p:nvPr/>
+        </p:nvSpPr>
+        <p:spPr>
+          <a:xfrm>
+            <a:off x="969264" y="4274820"/>
+            <a:ext cx="2782824" cy="914400"/>
+          </a:xfrm>
+          <a:prstGeom prst="rect">
+            <a:avLst/>
+          </a:prstGeom>
+          <a:noFill/>
+          <a:ln/>
+        </p:spPr>
+        <p:txBody>
+          <a:bodyPr wrap="square" lIns="0" tIns="0" rIns="0" bIns="0" rtlCol="0" anchor="t"/>
+          <a:lstStyle/>
+          <a:p>
+            <a:pPr indent="0" marL="0">
+              <a:lnSpc>
+                <a:spcPct val="125000"/>
+              </a:lnSpc>
+              <a:buNone/>
+            </a:pPr>
+            <a:r>
+              <a:rPr lang="en-US" sz="1300" dirty="0">
+                <a:solidFill>
+                  <a:srgbClr val="5C6875"/>
+                </a:solidFill>
+                <a:latin typeface="Inter" pitchFamily="34" charset="0"/>
+                <a:ea typeface="Inter" pitchFamily="34" charset="-122"/>
+                <a:cs typeface="Inter" pitchFamily="34" charset="-120"/>
+              </a:rPr>
+              <a:t>Comprendre les corridors, les flux et les vulnérabilités.</a:t>
+            </a:r>
+            <a:endParaRPr lang="en-US" sz="1300" dirty="0"/>
+          </a:p>
+        </p:txBody>
+      </p:sp>
+      <p:sp>
+        <p:nvSpPr>
+          <p:cNvPr id="9" name="Shape 7"/>
+          <p:cNvSpPr/>
+          <p:nvPr/>
+        </p:nvSpPr>
+        <p:spPr>
+          <a:xfrm>
+            <a:off x="4392168" y="2446020"/>
+            <a:ext cx="3404616" cy="3063240"/>
+          </a:xfrm>
+          <a:prstGeom prst="rect">
             <a:avLst/>
           </a:prstGeom>
           <a:solidFill>
-            <a:srgbClr val="0F3C4E"/>
+            <a:srgbClr val="FCFDFE"/>
           </a:solidFill>
-          <a:ln w="12700">
+          <a:ln w="22225">
             <a:solidFill>
               <a:srgbClr val="0F3C4E"/>
             </a:solidFill>
@@ -3250,14 +4389,14 @@
       </p:sp>
       <p:sp>
         <p:nvSpPr>
-          <p:cNvPr id="5" name="Text 3"/>
-          <p:cNvSpPr/>
-          <p:nvPr/>
-        </p:nvSpPr>
-        <p:spPr>
-          <a:xfrm>
-            <a:off x="1133856" y="2212848"/>
-            <a:ext cx="9409176" cy="1371600"/>
+          <p:cNvPr id="10" name="Text 8"/>
+          <p:cNvSpPr/>
+          <p:nvPr/>
+        </p:nvSpPr>
+        <p:spPr>
+          <a:xfrm>
+            <a:off x="4703064" y="2756916"/>
+            <a:ext cx="2782824" cy="237744"/>
           </a:xfrm>
           <a:prstGeom prst="rect">
             <a:avLst/>
@@ -3266,17 +4405,53 @@
           <a:ln/>
         </p:spPr>
         <p:txBody>
+          <a:bodyPr wrap="square" lIns="0" tIns="0" rIns="0" bIns="0" rtlCol="0" anchor="ctr"/>
+          <a:lstStyle/>
+          <a:p>
+            <a:pPr indent="0" marL="0">
+              <a:buNone/>
+            </a:pPr>
+            <a:r>
+              <a:rPr lang="en-US" sz="1000" spc="140" kern="0" dirty="0">
+                <a:solidFill>
+                  <a:srgbClr val="C8282C"/>
+                </a:solidFill>
+                <a:latin typeface="IBM Plex Mono" pitchFamily="34" charset="0"/>
+                <a:ea typeface="IBM Plex Mono" pitchFamily="34" charset="-122"/>
+                <a:cs typeface="IBM Plex Mono" pitchFamily="34" charset="-120"/>
+              </a:rPr>
+              <a:t>SURVEILLER</a:t>
+            </a:r>
+            <a:endParaRPr lang="en-US" sz="1000" dirty="0"/>
+          </a:p>
+        </p:txBody>
+      </p:sp>
+      <p:sp>
+        <p:nvSpPr>
+          <p:cNvPr id="11" name="Text 9"/>
+          <p:cNvSpPr/>
+          <p:nvPr/>
+        </p:nvSpPr>
+        <p:spPr>
+          <a:xfrm>
+            <a:off x="4703064" y="3086100"/>
+            <a:ext cx="2782824" cy="548640"/>
+          </a:xfrm>
+          <a:prstGeom prst="rect">
+            <a:avLst/>
+          </a:prstGeom>
+          <a:noFill/>
+          <a:ln/>
+        </p:spPr>
+        <p:txBody>
           <a:bodyPr wrap="square" lIns="0" tIns="0" rIns="0" bIns="0" rtlCol="0" anchor="t"/>
           <a:lstStyle/>
           <a:p>
             <a:pPr indent="0" marL="0">
-              <a:lnSpc>
-                <a:spcPct val="112000"/>
-              </a:lnSpc>
               <a:buNone/>
             </a:pPr>
             <a:r>
-              <a:rPr lang="en-US" sz="2800" b="1" dirty="0">
+              <a:rPr lang="en-US" sz="2600" b="1" dirty="0">
                 <a:solidFill>
                   <a:srgbClr val="141C26"/>
                 </a:solidFill>
@@ -3284,22 +4459,61 @@
                 <a:ea typeface="Fraunces" pitchFamily="34" charset="-122"/>
                 <a:cs typeface="Fraunces" pitchFamily="34" charset="-120"/>
               </a:rPr>
-              <a:t>Trois corridors fondateurs sont instruits : Malacca, Mer Rouge–Suez, Taïwan.</a:t>
-            </a:r>
-            <a:endParaRPr lang="en-US" sz="2800" dirty="0"/>
-          </a:p>
-        </p:txBody>
-      </p:sp>
-      <p:sp>
-        <p:nvSpPr>
-          <p:cNvPr id="6" name="Text 4"/>
-          <p:cNvSpPr/>
-          <p:nvPr/>
-        </p:nvSpPr>
-        <p:spPr>
-          <a:xfrm>
-            <a:off x="1133856" y="3602736"/>
-            <a:ext cx="9409176" cy="786384"/>
+              <a:t>Standard</a:t>
+            </a:r>
+            <a:endParaRPr lang="en-US" sz="2600" dirty="0"/>
+          </a:p>
+        </p:txBody>
+      </p:sp>
+      <p:sp>
+        <p:nvSpPr>
+          <p:cNvPr id="12" name="Text 10"/>
+          <p:cNvSpPr/>
+          <p:nvPr/>
+        </p:nvSpPr>
+        <p:spPr>
+          <a:xfrm>
+            <a:off x="4703064" y="3762756"/>
+            <a:ext cx="2782824" cy="365760"/>
+          </a:xfrm>
+          <a:prstGeom prst="rect">
+            <a:avLst/>
+          </a:prstGeom>
+          <a:noFill/>
+          <a:ln/>
+        </p:spPr>
+        <p:txBody>
+          <a:bodyPr wrap="square" lIns="0" tIns="0" rIns="0" bIns="0" rtlCol="0" anchor="ctr"/>
+          <a:lstStyle/>
+          <a:p>
+            <a:pPr indent="0" marL="0">
+              <a:buNone/>
+            </a:pPr>
+            <a:r>
+              <a:rPr lang="en-US" sz="1500" b="1" dirty="0">
+                <a:solidFill>
+                  <a:srgbClr val="0F3C4E"/>
+                </a:solidFill>
+                <a:latin typeface="IBM Plex Mono" pitchFamily="34" charset="0"/>
+                <a:ea typeface="IBM Plex Mono" pitchFamily="34" charset="-122"/>
+                <a:cs typeface="IBM Plex Mono" pitchFamily="34" charset="-120"/>
+              </a:rPr>
+              <a:t>199–799 €/mois</a:t>
+            </a:r>
+            <a:endParaRPr lang="en-US" sz="1500" dirty="0"/>
+          </a:p>
+        </p:txBody>
+      </p:sp>
+      <p:sp>
+        <p:nvSpPr>
+          <p:cNvPr id="13" name="Text 11"/>
+          <p:cNvSpPr/>
+          <p:nvPr/>
+        </p:nvSpPr>
+        <p:spPr>
+          <a:xfrm>
+            <a:off x="4703064" y="4274820"/>
+            <a:ext cx="2782824" cy="914400"/>
           </a:xfrm>
           <a:prstGeom prst="rect">
             <a:avLst/>
@@ -3318,7 +4532,7 @@
               <a:buNone/>
             </a:pPr>
             <a:r>
-              <a:rPr lang="en-US" sz="1500" dirty="0">
+              <a:rPr lang="en-US" sz="1300" dirty="0">
                 <a:solidFill>
                   <a:srgbClr val="5C6875"/>
                 </a:solidFill>
@@ -3326,22 +4540,47 @@
                 <a:ea typeface="Inter" pitchFamily="34" charset="-122"/>
                 <a:cs typeface="Inter" pitchFamily="34" charset="-120"/>
               </a:rPr>
-              <a:t>Fiches rédigées et sourcées, en cours de validation humaine — elles ne sont pas encore publiées. L’Atlas s’ouvre corridor par corridor, jamais avant que les gates soient tenues.</a:t>
-            </a:r>
-            <a:endParaRPr lang="en-US" sz="1500" dirty="0"/>
-          </a:p>
-        </p:txBody>
-      </p:sp>
-      <p:sp>
-        <p:nvSpPr>
-          <p:cNvPr id="7" name="Text 5"/>
-          <p:cNvSpPr/>
-          <p:nvPr/>
-        </p:nvSpPr>
-        <p:spPr>
-          <a:xfrm>
-            <a:off x="10433304" y="6144768"/>
-            <a:ext cx="1097280" cy="274320"/>
+              <a:t>Suivre les signaux, les scores et les évolutions.</a:t>
+            </a:r>
+            <a:endParaRPr lang="en-US" sz="1300" dirty="0"/>
+          </a:p>
+        </p:txBody>
+      </p:sp>
+      <p:sp>
+        <p:nvSpPr>
+          <p:cNvPr id="14" name="Shape 12"/>
+          <p:cNvSpPr/>
+          <p:nvPr/>
+        </p:nvSpPr>
+        <p:spPr>
+          <a:xfrm>
+            <a:off x="8125968" y="2446020"/>
+            <a:ext cx="3404616" cy="3063240"/>
+          </a:xfrm>
+          <a:prstGeom prst="rect">
+            <a:avLst/>
+          </a:prstGeom>
+          <a:solidFill>
+            <a:srgbClr val="F4F6F8"/>
+          </a:solidFill>
+          <a:ln w="12700">
+            <a:solidFill>
+              <a:srgbClr val="D3DBE1"/>
+            </a:solidFill>
+            <a:prstDash val="solid"/>
+          </a:ln>
+        </p:spPr>
+      </p:sp>
+      <p:sp>
+        <p:nvSpPr>
+          <p:cNvPr id="15" name="Text 13"/>
+          <p:cNvSpPr/>
+          <p:nvPr/>
+        </p:nvSpPr>
+        <p:spPr>
+          <a:xfrm>
+            <a:off x="8436864" y="2756916"/>
+            <a:ext cx="2782824" cy="237744"/>
           </a:xfrm>
           <a:prstGeom prst="rect">
             <a:avLst/>
@@ -3353,11 +4592,11 @@
           <a:bodyPr wrap="square" lIns="0" tIns="0" rIns="0" bIns="0" rtlCol="0" anchor="ctr"/>
           <a:lstStyle/>
           <a:p>
-            <a:pPr algn="r" indent="0" marL="0">
+            <a:pPr indent="0" marL="0">
               <a:buNone/>
             </a:pPr>
             <a:r>
-              <a:rPr lang="en-US" sz="1000" dirty="0">
+              <a:rPr lang="en-US" sz="1000" spc="140" kern="0" dirty="0">
                 <a:solidFill>
                   <a:srgbClr val="5C6875"/>
                 </a:solidFill>
@@ -3365,529 +4604,22 @@
                 <a:ea typeface="IBM Plex Mono" pitchFamily="34" charset="-122"/>
                 <a:cs typeface="IBM Plex Mono" pitchFamily="34" charset="-120"/>
               </a:rPr>
-              <a:t>11 / 16</a:t>
+              <a:t>ARBITRER</a:t>
             </a:r>
             <a:endParaRPr lang="en-US" sz="1000" dirty="0"/>
           </a:p>
         </p:txBody>
       </p:sp>
-    </p:spTree>
-  </p:cSld>
-  <p:clrMapOvr>
-    <a:masterClrMapping/>
-  </p:clrMapOvr>
-</p:sld>
-</file>
-
-<file path=ppt/slides/slide12.xml><?xml version="1.0" encoding="utf-8"?>
-<p:sld xmlns:a="http://schemas.openxmlformats.org/drawingml/2006/main" xmlns:r="http://schemas.openxmlformats.org/officeDocument/2006/relationships" xmlns:p="http://schemas.openxmlformats.org/presentationml/2006/main">
-  <p:cSld name="Slide 12">
-    <p:bg>
-      <p:bgPr>
-        <a:solidFill>
-          <a:srgbClr val="0F3C4E"/>
-        </a:solidFill>
-      </p:bgPr>
-    </p:bg>
-    <p:spTree>
-      <p:nvGrpSpPr>
-        <p:cNvPr id="1" name=""/>
-        <p:cNvGrpSpPr/>
-        <p:nvPr/>
-      </p:nvGrpSpPr>
-      <p:grpSpPr>
-        <a:xfrm>
-          <a:off x="0" y="0"/>
-          <a:ext cx="0" cy="0"/>
-          <a:chOff x="0" y="0"/>
-          <a:chExt cx="0" cy="0"/>
-        </a:xfrm>
-      </p:grpSpPr>
-      <p:sp>
-        <p:nvSpPr>
-          <p:cNvPr id="2" name="Shape 0"/>
-          <p:cNvSpPr/>
-          <p:nvPr/>
-        </p:nvSpPr>
-        <p:spPr>
-          <a:xfrm>
-            <a:off x="914400" y="0"/>
-            <a:ext cx="0" cy="6858000"/>
-          </a:xfrm>
-          <a:prstGeom prst="line">
-            <a:avLst/>
-          </a:prstGeom>
-          <a:noFill/>
-          <a:ln w="6350">
-            <a:solidFill>
-              <a:srgbClr val="F4F6F8">
-                <a:alpha val="22000"/>
-              </a:srgbClr>
-            </a:solidFill>
-            <a:prstDash val="solid"/>
-          </a:ln>
-        </p:spPr>
-      </p:sp>
-      <p:sp>
-        <p:nvSpPr>
-          <p:cNvPr id="3" name="Shape 1"/>
-          <p:cNvSpPr/>
-          <p:nvPr/>
-        </p:nvSpPr>
-        <p:spPr>
-          <a:xfrm>
-            <a:off x="1828800" y="0"/>
-            <a:ext cx="0" cy="6858000"/>
-          </a:xfrm>
-          <a:prstGeom prst="line">
-            <a:avLst/>
-          </a:prstGeom>
-          <a:noFill/>
-          <a:ln w="6350">
-            <a:solidFill>
-              <a:srgbClr val="F4F6F8">
-                <a:alpha val="22000"/>
-              </a:srgbClr>
-            </a:solidFill>
-            <a:prstDash val="solid"/>
-          </a:ln>
-        </p:spPr>
-      </p:sp>
-      <p:sp>
-        <p:nvSpPr>
-          <p:cNvPr id="4" name="Shape 2"/>
-          <p:cNvSpPr/>
-          <p:nvPr/>
-        </p:nvSpPr>
-        <p:spPr>
-          <a:xfrm>
-            <a:off x="2743200" y="0"/>
-            <a:ext cx="0" cy="6858000"/>
-          </a:xfrm>
-          <a:prstGeom prst="line">
-            <a:avLst/>
-          </a:prstGeom>
-          <a:noFill/>
-          <a:ln w="6350">
-            <a:solidFill>
-              <a:srgbClr val="F4F6F8">
-                <a:alpha val="22000"/>
-              </a:srgbClr>
-            </a:solidFill>
-            <a:prstDash val="solid"/>
-          </a:ln>
-        </p:spPr>
-      </p:sp>
-      <p:sp>
-        <p:nvSpPr>
-          <p:cNvPr id="5" name="Shape 3"/>
-          <p:cNvSpPr/>
-          <p:nvPr/>
-        </p:nvSpPr>
-        <p:spPr>
-          <a:xfrm>
-            <a:off x="3657600" y="0"/>
-            <a:ext cx="0" cy="6858000"/>
-          </a:xfrm>
-          <a:prstGeom prst="line">
-            <a:avLst/>
-          </a:prstGeom>
-          <a:noFill/>
-          <a:ln w="6350">
-            <a:solidFill>
-              <a:srgbClr val="F4F6F8">
-                <a:alpha val="22000"/>
-              </a:srgbClr>
-            </a:solidFill>
-            <a:prstDash val="solid"/>
-          </a:ln>
-        </p:spPr>
-      </p:sp>
-      <p:sp>
-        <p:nvSpPr>
-          <p:cNvPr id="6" name="Shape 4"/>
-          <p:cNvSpPr/>
-          <p:nvPr/>
-        </p:nvSpPr>
-        <p:spPr>
-          <a:xfrm>
-            <a:off x="4572000" y="0"/>
-            <a:ext cx="0" cy="6858000"/>
-          </a:xfrm>
-          <a:prstGeom prst="line">
-            <a:avLst/>
-          </a:prstGeom>
-          <a:noFill/>
-          <a:ln w="6350">
-            <a:solidFill>
-              <a:srgbClr val="F4F6F8">
-                <a:alpha val="22000"/>
-              </a:srgbClr>
-            </a:solidFill>
-            <a:prstDash val="solid"/>
-          </a:ln>
-        </p:spPr>
-      </p:sp>
-      <p:sp>
-        <p:nvSpPr>
-          <p:cNvPr id="7" name="Shape 5"/>
-          <p:cNvSpPr/>
-          <p:nvPr/>
-        </p:nvSpPr>
-        <p:spPr>
-          <a:xfrm>
-            <a:off x="5486400" y="0"/>
-            <a:ext cx="0" cy="6858000"/>
-          </a:xfrm>
-          <a:prstGeom prst="line">
-            <a:avLst/>
-          </a:prstGeom>
-          <a:noFill/>
-          <a:ln w="6350">
-            <a:solidFill>
-              <a:srgbClr val="F4F6F8">
-                <a:alpha val="22000"/>
-              </a:srgbClr>
-            </a:solidFill>
-            <a:prstDash val="solid"/>
-          </a:ln>
-        </p:spPr>
-      </p:sp>
-      <p:sp>
-        <p:nvSpPr>
-          <p:cNvPr id="8" name="Shape 6"/>
-          <p:cNvSpPr/>
-          <p:nvPr/>
-        </p:nvSpPr>
-        <p:spPr>
-          <a:xfrm>
-            <a:off x="6400800" y="0"/>
-            <a:ext cx="0" cy="6858000"/>
-          </a:xfrm>
-          <a:prstGeom prst="line">
-            <a:avLst/>
-          </a:prstGeom>
-          <a:noFill/>
-          <a:ln w="6350">
-            <a:solidFill>
-              <a:srgbClr val="F4F6F8">
-                <a:alpha val="22000"/>
-              </a:srgbClr>
-            </a:solidFill>
-            <a:prstDash val="solid"/>
-          </a:ln>
-        </p:spPr>
-      </p:sp>
-      <p:sp>
-        <p:nvSpPr>
-          <p:cNvPr id="9" name="Shape 7"/>
-          <p:cNvSpPr/>
-          <p:nvPr/>
-        </p:nvSpPr>
-        <p:spPr>
-          <a:xfrm>
-            <a:off x="7315200" y="0"/>
-            <a:ext cx="0" cy="6858000"/>
-          </a:xfrm>
-          <a:prstGeom prst="line">
-            <a:avLst/>
-          </a:prstGeom>
-          <a:noFill/>
-          <a:ln w="6350">
-            <a:solidFill>
-              <a:srgbClr val="F4F6F8">
-                <a:alpha val="22000"/>
-              </a:srgbClr>
-            </a:solidFill>
-            <a:prstDash val="solid"/>
-          </a:ln>
-        </p:spPr>
-      </p:sp>
-      <p:sp>
-        <p:nvSpPr>
-          <p:cNvPr id="10" name="Shape 8"/>
-          <p:cNvSpPr/>
-          <p:nvPr/>
-        </p:nvSpPr>
-        <p:spPr>
-          <a:xfrm>
-            <a:off x="8229600" y="0"/>
-            <a:ext cx="0" cy="6858000"/>
-          </a:xfrm>
-          <a:prstGeom prst="line">
-            <a:avLst/>
-          </a:prstGeom>
-          <a:noFill/>
-          <a:ln w="6350">
-            <a:solidFill>
-              <a:srgbClr val="F4F6F8">
-                <a:alpha val="22000"/>
-              </a:srgbClr>
-            </a:solidFill>
-            <a:prstDash val="solid"/>
-          </a:ln>
-        </p:spPr>
-      </p:sp>
-      <p:sp>
-        <p:nvSpPr>
-          <p:cNvPr id="11" name="Shape 9"/>
-          <p:cNvSpPr/>
-          <p:nvPr/>
-        </p:nvSpPr>
-        <p:spPr>
-          <a:xfrm>
-            <a:off x="9144000" y="0"/>
-            <a:ext cx="0" cy="6858000"/>
-          </a:xfrm>
-          <a:prstGeom prst="line">
-            <a:avLst/>
-          </a:prstGeom>
-          <a:noFill/>
-          <a:ln w="6350">
-            <a:solidFill>
-              <a:srgbClr val="F4F6F8">
-                <a:alpha val="22000"/>
-              </a:srgbClr>
-            </a:solidFill>
-            <a:prstDash val="solid"/>
-          </a:ln>
-        </p:spPr>
-      </p:sp>
-      <p:sp>
-        <p:nvSpPr>
-          <p:cNvPr id="12" name="Shape 10"/>
-          <p:cNvSpPr/>
-          <p:nvPr/>
-        </p:nvSpPr>
-        <p:spPr>
-          <a:xfrm>
-            <a:off x="10058400" y="0"/>
-            <a:ext cx="0" cy="6858000"/>
-          </a:xfrm>
-          <a:prstGeom prst="line">
-            <a:avLst/>
-          </a:prstGeom>
-          <a:noFill/>
-          <a:ln w="6350">
-            <a:solidFill>
-              <a:srgbClr val="F4F6F8">
-                <a:alpha val="22000"/>
-              </a:srgbClr>
-            </a:solidFill>
-            <a:prstDash val="solid"/>
-          </a:ln>
-        </p:spPr>
-      </p:sp>
-      <p:sp>
-        <p:nvSpPr>
-          <p:cNvPr id="13" name="Shape 11"/>
-          <p:cNvSpPr/>
-          <p:nvPr/>
-        </p:nvSpPr>
-        <p:spPr>
-          <a:xfrm>
-            <a:off x="10972800" y="0"/>
-            <a:ext cx="0" cy="6858000"/>
-          </a:xfrm>
-          <a:prstGeom prst="line">
-            <a:avLst/>
-          </a:prstGeom>
-          <a:noFill/>
-          <a:ln w="6350">
-            <a:solidFill>
-              <a:srgbClr val="F4F6F8">
-                <a:alpha val="22000"/>
-              </a:srgbClr>
-            </a:solidFill>
-            <a:prstDash val="solid"/>
-          </a:ln>
-        </p:spPr>
-      </p:sp>
-      <p:sp>
-        <p:nvSpPr>
-          <p:cNvPr id="14" name="Shape 12"/>
-          <p:cNvSpPr/>
-          <p:nvPr/>
-        </p:nvSpPr>
-        <p:spPr>
-          <a:xfrm>
-            <a:off x="0" y="914400"/>
-            <a:ext cx="12188952" cy="0"/>
-          </a:xfrm>
-          <a:prstGeom prst="line">
-            <a:avLst/>
-          </a:prstGeom>
-          <a:noFill/>
-          <a:ln w="6350">
-            <a:solidFill>
-              <a:srgbClr val="F4F6F8">
-                <a:alpha val="22000"/>
-              </a:srgbClr>
-            </a:solidFill>
-            <a:prstDash val="solid"/>
-          </a:ln>
-        </p:spPr>
-      </p:sp>
-      <p:sp>
-        <p:nvSpPr>
-          <p:cNvPr id="15" name="Shape 13"/>
-          <p:cNvSpPr/>
-          <p:nvPr/>
-        </p:nvSpPr>
-        <p:spPr>
-          <a:xfrm>
-            <a:off x="0" y="1828800"/>
-            <a:ext cx="12188952" cy="0"/>
-          </a:xfrm>
-          <a:prstGeom prst="line">
-            <a:avLst/>
-          </a:prstGeom>
-          <a:noFill/>
-          <a:ln w="6350">
-            <a:solidFill>
-              <a:srgbClr val="F4F6F8">
-                <a:alpha val="22000"/>
-              </a:srgbClr>
-            </a:solidFill>
-            <a:prstDash val="solid"/>
-          </a:ln>
-        </p:spPr>
-      </p:sp>
-      <p:sp>
-        <p:nvSpPr>
-          <p:cNvPr id="16" name="Shape 14"/>
-          <p:cNvSpPr/>
-          <p:nvPr/>
-        </p:nvSpPr>
-        <p:spPr>
-          <a:xfrm>
-            <a:off x="0" y="2743200"/>
-            <a:ext cx="12188952" cy="0"/>
-          </a:xfrm>
-          <a:prstGeom prst="line">
-            <a:avLst/>
-          </a:prstGeom>
-          <a:noFill/>
-          <a:ln w="6350">
-            <a:solidFill>
-              <a:srgbClr val="F4F6F8">
-                <a:alpha val="22000"/>
-              </a:srgbClr>
-            </a:solidFill>
-            <a:prstDash val="solid"/>
-          </a:ln>
-        </p:spPr>
-      </p:sp>
-      <p:sp>
-        <p:nvSpPr>
-          <p:cNvPr id="17" name="Shape 15"/>
-          <p:cNvSpPr/>
-          <p:nvPr/>
-        </p:nvSpPr>
-        <p:spPr>
-          <a:xfrm>
-            <a:off x="0" y="3657600"/>
-            <a:ext cx="12188952" cy="0"/>
-          </a:xfrm>
-          <a:prstGeom prst="line">
-            <a:avLst/>
-          </a:prstGeom>
-          <a:noFill/>
-          <a:ln w="6350">
-            <a:solidFill>
-              <a:srgbClr val="F4F6F8">
-                <a:alpha val="22000"/>
-              </a:srgbClr>
-            </a:solidFill>
-            <a:prstDash val="solid"/>
-          </a:ln>
-        </p:spPr>
-      </p:sp>
-      <p:sp>
-        <p:nvSpPr>
-          <p:cNvPr id="18" name="Shape 16"/>
-          <p:cNvSpPr/>
-          <p:nvPr/>
-        </p:nvSpPr>
-        <p:spPr>
-          <a:xfrm>
-            <a:off x="0" y="4572000"/>
-            <a:ext cx="12188952" cy="0"/>
-          </a:xfrm>
-          <a:prstGeom prst="line">
-            <a:avLst/>
-          </a:prstGeom>
-          <a:noFill/>
-          <a:ln w="6350">
-            <a:solidFill>
-              <a:srgbClr val="F4F6F8">
-                <a:alpha val="22000"/>
-              </a:srgbClr>
-            </a:solidFill>
-            <a:prstDash val="solid"/>
-          </a:ln>
-        </p:spPr>
-      </p:sp>
-      <p:sp>
-        <p:nvSpPr>
-          <p:cNvPr id="19" name="Shape 17"/>
-          <p:cNvSpPr/>
-          <p:nvPr/>
-        </p:nvSpPr>
-        <p:spPr>
-          <a:xfrm>
-            <a:off x="0" y="5486400"/>
-            <a:ext cx="12188952" cy="0"/>
-          </a:xfrm>
-          <a:prstGeom prst="line">
-            <a:avLst/>
-          </a:prstGeom>
-          <a:noFill/>
-          <a:ln w="6350">
-            <a:solidFill>
-              <a:srgbClr val="F4F6F8">
-                <a:alpha val="22000"/>
-              </a:srgbClr>
-            </a:solidFill>
-            <a:prstDash val="solid"/>
-          </a:ln>
-        </p:spPr>
-      </p:sp>
-      <p:sp>
-        <p:nvSpPr>
-          <p:cNvPr id="20" name="Shape 18"/>
-          <p:cNvSpPr/>
-          <p:nvPr/>
-        </p:nvSpPr>
-        <p:spPr>
-          <a:xfrm>
-            <a:off x="0" y="6400800"/>
-            <a:ext cx="12188952" cy="0"/>
-          </a:xfrm>
-          <a:prstGeom prst="line">
-            <a:avLst/>
-          </a:prstGeom>
-          <a:noFill/>
-          <a:ln w="6350">
-            <a:solidFill>
-              <a:srgbClr val="F4F6F8">
-                <a:alpha val="22000"/>
-              </a:srgbClr>
-            </a:solidFill>
-            <a:prstDash val="solid"/>
-          </a:ln>
-        </p:spPr>
-      </p:sp>
-      <p:sp>
-        <p:nvSpPr>
-          <p:cNvPr id="21" name="Text 19"/>
-          <p:cNvSpPr/>
-          <p:nvPr/>
-        </p:nvSpPr>
-        <p:spPr>
-          <a:xfrm>
-            <a:off x="658368" y="2121408"/>
-            <a:ext cx="1828800" cy="365760"/>
+      <p:sp>
+        <p:nvSpPr>
+          <p:cNvPr id="16" name="Text 14"/>
+          <p:cNvSpPr/>
+          <p:nvPr/>
+        </p:nvSpPr>
+        <p:spPr>
+          <a:xfrm>
+            <a:off x="8436864" y="3086100"/>
+            <a:ext cx="2782824" cy="548640"/>
           </a:xfrm>
           <a:prstGeom prst="rect">
             <a:avLst/>
@@ -3896,76 +4628,76 @@
           <a:ln/>
         </p:spPr>
         <p:txBody>
-          <a:bodyPr wrap="square" lIns="0" tIns="0" rIns="0" bIns="0" rtlCol="0" anchor="ctr"/>
+          <a:bodyPr wrap="square" lIns="0" tIns="0" rIns="0" bIns="0" rtlCol="0" anchor="t"/>
           <a:lstStyle/>
           <a:p>
             <a:pPr indent="0" marL="0">
               <a:buNone/>
             </a:pPr>
             <a:r>
-              <a:rPr lang="en-US" sz="1300" spc="300" kern="0" dirty="0">
-                <a:solidFill>
-                  <a:srgbClr val="C8282C"/>
+              <a:rPr lang="en-US" sz="2600" b="1" dirty="0">
+                <a:solidFill>
+                  <a:srgbClr val="141C26"/>
+                </a:solidFill>
+                <a:latin typeface="Fraunces" pitchFamily="34" charset="0"/>
+                <a:ea typeface="Fraunces" pitchFamily="34" charset="-122"/>
+                <a:cs typeface="Fraunces" pitchFamily="34" charset="-120"/>
+              </a:rPr>
+              <a:t>Premium</a:t>
+            </a:r>
+            <a:endParaRPr lang="en-US" sz="2600" dirty="0"/>
+          </a:p>
+        </p:txBody>
+      </p:sp>
+      <p:sp>
+        <p:nvSpPr>
+          <p:cNvPr id="17" name="Text 15"/>
+          <p:cNvSpPr/>
+          <p:nvPr/>
+        </p:nvSpPr>
+        <p:spPr>
+          <a:xfrm>
+            <a:off x="8436864" y="3762756"/>
+            <a:ext cx="2782824" cy="365760"/>
+          </a:xfrm>
+          <a:prstGeom prst="rect">
+            <a:avLst/>
+          </a:prstGeom>
+          <a:noFill/>
+          <a:ln/>
+        </p:spPr>
+        <p:txBody>
+          <a:bodyPr wrap="square" lIns="0" tIns="0" rIns="0" bIns="0" rtlCol="0" anchor="ctr"/>
+          <a:lstStyle/>
+          <a:p>
+            <a:pPr indent="0" marL="0">
+              <a:buNone/>
+            </a:pPr>
+            <a:r>
+              <a:rPr lang="en-US" sz="1500" b="1" dirty="0">
+                <a:solidFill>
+                  <a:srgbClr val="0F3C4E"/>
                 </a:solidFill>
                 <a:latin typeface="IBM Plex Mono" pitchFamily="34" charset="0"/>
                 <a:ea typeface="IBM Plex Mono" pitchFamily="34" charset="-122"/>
                 <a:cs typeface="IBM Plex Mono" pitchFamily="34" charset="-120"/>
               </a:rPr>
-              <a:t>II</a:t>
-            </a:r>
-            <a:endParaRPr lang="en-US" sz="1300" dirty="0"/>
-          </a:p>
-        </p:txBody>
-      </p:sp>
-      <p:sp>
-        <p:nvSpPr>
-          <p:cNvPr id="22" name="Text 20"/>
-          <p:cNvSpPr/>
-          <p:nvPr/>
-        </p:nvSpPr>
-        <p:spPr>
-          <a:xfrm>
-            <a:off x="658368" y="2615184"/>
-            <a:ext cx="8778240" cy="1097280"/>
-          </a:xfrm>
-          <a:prstGeom prst="rect">
-            <a:avLst/>
-          </a:prstGeom>
-          <a:noFill/>
-          <a:ln/>
-        </p:spPr>
-        <p:txBody>
-          <a:bodyPr wrap="square" lIns="0" tIns="0" rIns="0" bIns="0" rtlCol="0" anchor="t"/>
-          <a:lstStyle/>
-          <a:p>
-            <a:pPr indent="0" marL="0">
-              <a:buNone/>
-            </a:pPr>
-            <a:r>
-              <a:rPr lang="en-US" sz="4000" b="1" dirty="0">
-                <a:solidFill>
-                  <a:srgbClr val="F4F6F8"/>
-                </a:solidFill>
-                <a:latin typeface="Fraunces" pitchFamily="34" charset="0"/>
-                <a:ea typeface="Fraunces" pitchFamily="34" charset="-122"/>
-                <a:cs typeface="Fraunces" pitchFamily="34" charset="-120"/>
-              </a:rPr>
-              <a:t>Trois niveaux de lecture</a:t>
-            </a:r>
-            <a:endParaRPr lang="en-US" sz="4000" dirty="0"/>
-          </a:p>
-        </p:txBody>
-      </p:sp>
-      <p:sp>
-        <p:nvSpPr>
-          <p:cNvPr id="23" name="Text 21"/>
-          <p:cNvSpPr/>
-          <p:nvPr/>
-        </p:nvSpPr>
-        <p:spPr>
-          <a:xfrm>
-            <a:off x="658368" y="3822192"/>
-            <a:ext cx="7680960" cy="1097280"/>
+              <a:t>3 000–15 000 €+</a:t>
+            </a:r>
+            <a:endParaRPr lang="en-US" sz="1500" dirty="0"/>
+          </a:p>
+        </p:txBody>
+      </p:sp>
+      <p:sp>
+        <p:nvSpPr>
+          <p:cNvPr id="18" name="Text 16"/>
+          <p:cNvSpPr/>
+          <p:nvPr/>
+        </p:nvSpPr>
+        <p:spPr>
+          <a:xfrm>
+            <a:off x="8436864" y="4274820"/>
+            <a:ext cx="2782824" cy="914400"/>
           </a:xfrm>
           <a:prstGeom prst="rect">
             <a:avLst/>
@@ -3979,28 +4711,67 @@
           <a:p>
             <a:pPr indent="0" marL="0">
               <a:lnSpc>
-                <a:spcPct val="130000"/>
+                <a:spcPct val="125000"/>
               </a:lnSpc>
               <a:buNone/>
             </a:pPr>
             <a:r>
-              <a:rPr lang="en-US" sz="1600" dirty="0">
-                <a:solidFill>
-                  <a:srgbClr val="D3DBE1"/>
+              <a:rPr lang="en-US" sz="1300" dirty="0">
+                <a:solidFill>
+                  <a:srgbClr val="5C6875"/>
                 </a:solidFill>
                 <a:latin typeface="Inter" pitchFamily="34" charset="0"/>
                 <a:ea typeface="Inter" pitchFamily="34" charset="-122"/>
                 <a:cs typeface="Inter" pitchFamily="34" charset="-120"/>
               </a:rPr>
-              <a:t>Informer, surveiller, arbitrer. Trois engagements différents, annoncés avec leurs plafonds.</a:t>
-            </a:r>
-            <a:endParaRPr lang="en-US" sz="1600" dirty="0"/>
-          </a:p>
-        </p:txBody>
-      </p:sp>
-      <p:sp>
-        <p:nvSpPr>
-          <p:cNvPr id="24" name="Text 22"/>
+              <a:t>Scénarios, seuils de bascule et arbitrage contextualisé.</a:t>
+            </a:r>
+            <a:endParaRPr lang="en-US" sz="1300" dirty="0"/>
+          </a:p>
+        </p:txBody>
+      </p:sp>
+      <p:sp>
+        <p:nvSpPr>
+          <p:cNvPr id="19" name="Text 17"/>
+          <p:cNvSpPr/>
+          <p:nvPr/>
+        </p:nvSpPr>
+        <p:spPr>
+          <a:xfrm>
+            <a:off x="658368" y="5815584"/>
+            <a:ext cx="9774936" cy="548640"/>
+          </a:xfrm>
+          <a:prstGeom prst="rect">
+            <a:avLst/>
+          </a:prstGeom>
+          <a:noFill/>
+          <a:ln/>
+        </p:spPr>
+        <p:txBody>
+          <a:bodyPr wrap="square" lIns="0" tIns="0" rIns="0" bIns="0" rtlCol="0" anchor="b"/>
+          <a:lstStyle/>
+          <a:p>
+            <a:pPr indent="0" marL="0">
+              <a:buNone/>
+            </a:pPr>
+            <a:r>
+              <a:rPr lang="en-US" sz="1000" i="1" dirty="0">
+                <a:solidFill>
+                  <a:srgbClr val="5C6875"/>
+                </a:solidFill>
+                <a:latin typeface="Inter" pitchFamily="34" charset="0"/>
+                <a:ea typeface="Inter" pitchFamily="34" charset="-122"/>
+                <a:cs typeface="Inter" pitchFamily="34" charset="-120"/>
+              </a:rPr>
+              <a:t>Basic informe. Standard surveille. Premium aide à arbitrer.</a:t>
+            </a:r>
+            <a:endParaRPr lang="en-US" sz="1000" dirty="0"/>
+          </a:p>
+        </p:txBody>
+      </p:sp>
+      <p:sp>
+        <p:nvSpPr>
+          <p:cNvPr id="20" name="Text 18"/>
           <p:cNvSpPr/>
           <p:nvPr/>
         </p:nvSpPr>
@@ -4025,13 +4796,13 @@
             <a:r>
               <a:rPr lang="en-US" sz="1000" dirty="0">
                 <a:solidFill>
-                  <a:srgbClr val="BFCAD3"/>
+                  <a:srgbClr val="5C6875"/>
                 </a:solidFill>
                 <a:latin typeface="IBM Plex Mono" pitchFamily="34" charset="0"/>
                 <a:ea typeface="IBM Plex Mono" pitchFamily="34" charset="-122"/>
                 <a:cs typeface="IBM Plex Mono" pitchFamily="34" charset="-120"/>
               </a:rPr>
-              <a:t>12 / 16</a:t>
+              <a:t>12 / 15</a:t>
             </a:r>
             <a:endParaRPr lang="en-US" sz="1000" dirty="0"/>
           </a:p>
@@ -4144,749 +4915,6 @@
                 <a:ea typeface="Fraunces" pitchFamily="34" charset="-122"/>
                 <a:cs typeface="Fraunces" pitchFamily="34" charset="-120"/>
               </a:rPr>
-              <a:t>Trois niveaux de lecture</a:t>
-            </a:r>
-            <a:endParaRPr lang="en-US" sz="3400" dirty="0"/>
-          </a:p>
-        </p:txBody>
-      </p:sp>
-      <p:sp>
-        <p:nvSpPr>
-          <p:cNvPr id="4" name="Shape 2"/>
-          <p:cNvSpPr/>
-          <p:nvPr/>
-        </p:nvSpPr>
-        <p:spPr>
-          <a:xfrm>
-            <a:off x="658368" y="2446020"/>
-            <a:ext cx="3404616" cy="3063240"/>
-          </a:xfrm>
-          <a:prstGeom prst="rect">
-            <a:avLst/>
-          </a:prstGeom>
-          <a:solidFill>
-            <a:srgbClr val="F4F6F8"/>
-          </a:solidFill>
-          <a:ln w="12700">
-            <a:solidFill>
-              <a:srgbClr val="D3DBE1"/>
-            </a:solidFill>
-            <a:prstDash val="solid"/>
-          </a:ln>
-        </p:spPr>
-      </p:sp>
-      <p:sp>
-        <p:nvSpPr>
-          <p:cNvPr id="5" name="Text 3"/>
-          <p:cNvSpPr/>
-          <p:nvPr/>
-        </p:nvSpPr>
-        <p:spPr>
-          <a:xfrm>
-            <a:off x="969264" y="2756916"/>
-            <a:ext cx="2782824" cy="237744"/>
-          </a:xfrm>
-          <a:prstGeom prst="rect">
-            <a:avLst/>
-          </a:prstGeom>
-          <a:noFill/>
-          <a:ln/>
-        </p:spPr>
-        <p:txBody>
-          <a:bodyPr wrap="square" lIns="0" tIns="0" rIns="0" bIns="0" rtlCol="0" anchor="ctr"/>
-          <a:lstStyle/>
-          <a:p>
-            <a:pPr indent="0" marL="0">
-              <a:buNone/>
-            </a:pPr>
-            <a:r>
-              <a:rPr lang="en-US" sz="1000" spc="140" kern="0" dirty="0">
-                <a:solidFill>
-                  <a:srgbClr val="5C6875"/>
-                </a:solidFill>
-                <a:latin typeface="IBM Plex Mono" pitchFamily="34" charset="0"/>
-                <a:ea typeface="IBM Plex Mono" pitchFamily="34" charset="-122"/>
-                <a:cs typeface="IBM Plex Mono" pitchFamily="34" charset="-120"/>
-              </a:rPr>
-              <a:t>INFORMER</a:t>
-            </a:r>
-            <a:endParaRPr lang="en-US" sz="1000" dirty="0"/>
-          </a:p>
-        </p:txBody>
-      </p:sp>
-      <p:sp>
-        <p:nvSpPr>
-          <p:cNvPr id="6" name="Text 4"/>
-          <p:cNvSpPr/>
-          <p:nvPr/>
-        </p:nvSpPr>
-        <p:spPr>
-          <a:xfrm>
-            <a:off x="969264" y="3086100"/>
-            <a:ext cx="2782824" cy="548640"/>
-          </a:xfrm>
-          <a:prstGeom prst="rect">
-            <a:avLst/>
-          </a:prstGeom>
-          <a:noFill/>
-          <a:ln/>
-        </p:spPr>
-        <p:txBody>
-          <a:bodyPr wrap="square" lIns="0" tIns="0" rIns="0" bIns="0" rtlCol="0" anchor="t"/>
-          <a:lstStyle/>
-          <a:p>
-            <a:pPr indent="0" marL="0">
-              <a:buNone/>
-            </a:pPr>
-            <a:r>
-              <a:rPr lang="en-US" sz="2600" b="1" dirty="0">
-                <a:solidFill>
-                  <a:srgbClr val="141C26"/>
-                </a:solidFill>
-                <a:latin typeface="Fraunces" pitchFamily="34" charset="0"/>
-                <a:ea typeface="Fraunces" pitchFamily="34" charset="-122"/>
-                <a:cs typeface="Fraunces" pitchFamily="34" charset="-120"/>
-              </a:rPr>
-              <a:t>Basic</a:t>
-            </a:r>
-            <a:endParaRPr lang="en-US" sz="2600" dirty="0"/>
-          </a:p>
-        </p:txBody>
-      </p:sp>
-      <p:sp>
-        <p:nvSpPr>
-          <p:cNvPr id="7" name="Text 5"/>
-          <p:cNvSpPr/>
-          <p:nvPr/>
-        </p:nvSpPr>
-        <p:spPr>
-          <a:xfrm>
-            <a:off x="969264" y="3762756"/>
-            <a:ext cx="2782824" cy="365760"/>
-          </a:xfrm>
-          <a:prstGeom prst="rect">
-            <a:avLst/>
-          </a:prstGeom>
-          <a:noFill/>
-          <a:ln/>
-        </p:spPr>
-        <p:txBody>
-          <a:bodyPr wrap="square" lIns="0" tIns="0" rIns="0" bIns="0" rtlCol="0" anchor="ctr"/>
-          <a:lstStyle/>
-          <a:p>
-            <a:pPr indent="0" marL="0">
-              <a:buNone/>
-            </a:pPr>
-            <a:r>
-              <a:rPr lang="en-US" sz="1500" b="1" dirty="0">
-                <a:solidFill>
-                  <a:srgbClr val="0F3C4E"/>
-                </a:solidFill>
-                <a:latin typeface="IBM Plex Mono" pitchFamily="34" charset="0"/>
-                <a:ea typeface="IBM Plex Mono" pitchFamily="34" charset="-122"/>
-                <a:cs typeface="IBM Plex Mono" pitchFamily="34" charset="-120"/>
-              </a:rPr>
-              <a:t>19–49 €/mois</a:t>
-            </a:r>
-            <a:endParaRPr lang="en-US" sz="1500" dirty="0"/>
-          </a:p>
-        </p:txBody>
-      </p:sp>
-      <p:sp>
-        <p:nvSpPr>
-          <p:cNvPr id="8" name="Text 6"/>
-          <p:cNvSpPr/>
-          <p:nvPr/>
-        </p:nvSpPr>
-        <p:spPr>
-          <a:xfrm>
-            <a:off x="969264" y="4274820"/>
-            <a:ext cx="2782824" cy="914400"/>
-          </a:xfrm>
-          <a:prstGeom prst="rect">
-            <a:avLst/>
-          </a:prstGeom>
-          <a:noFill/>
-          <a:ln/>
-        </p:spPr>
-        <p:txBody>
-          <a:bodyPr wrap="square" lIns="0" tIns="0" rIns="0" bIns="0" rtlCol="0" anchor="t"/>
-          <a:lstStyle/>
-          <a:p>
-            <a:pPr indent="0" marL="0">
-              <a:lnSpc>
-                <a:spcPct val="125000"/>
-              </a:lnSpc>
-              <a:buNone/>
-            </a:pPr>
-            <a:r>
-              <a:rPr lang="en-US" sz="1300" dirty="0">
-                <a:solidFill>
-                  <a:srgbClr val="5C6875"/>
-                </a:solidFill>
-                <a:latin typeface="Inter" pitchFamily="34" charset="0"/>
-                <a:ea typeface="Inter" pitchFamily="34" charset="-122"/>
-                <a:cs typeface="Inter" pitchFamily="34" charset="-120"/>
-              </a:rPr>
-              <a:t>Comprendre les corridors, les flux et les vulnérabilités.</a:t>
-            </a:r>
-            <a:endParaRPr lang="en-US" sz="1300" dirty="0"/>
-          </a:p>
-        </p:txBody>
-      </p:sp>
-      <p:sp>
-        <p:nvSpPr>
-          <p:cNvPr id="9" name="Shape 7"/>
-          <p:cNvSpPr/>
-          <p:nvPr/>
-        </p:nvSpPr>
-        <p:spPr>
-          <a:xfrm>
-            <a:off x="4392168" y="2446020"/>
-            <a:ext cx="3404616" cy="3063240"/>
-          </a:xfrm>
-          <a:prstGeom prst="rect">
-            <a:avLst/>
-          </a:prstGeom>
-          <a:solidFill>
-            <a:srgbClr val="FCFDFE"/>
-          </a:solidFill>
-          <a:ln w="22225">
-            <a:solidFill>
-              <a:srgbClr val="0F3C4E"/>
-            </a:solidFill>
-            <a:prstDash val="solid"/>
-          </a:ln>
-        </p:spPr>
-      </p:sp>
-      <p:sp>
-        <p:nvSpPr>
-          <p:cNvPr id="10" name="Text 8"/>
-          <p:cNvSpPr/>
-          <p:nvPr/>
-        </p:nvSpPr>
-        <p:spPr>
-          <a:xfrm>
-            <a:off x="4703064" y="2756916"/>
-            <a:ext cx="2782824" cy="237744"/>
-          </a:xfrm>
-          <a:prstGeom prst="rect">
-            <a:avLst/>
-          </a:prstGeom>
-          <a:noFill/>
-          <a:ln/>
-        </p:spPr>
-        <p:txBody>
-          <a:bodyPr wrap="square" lIns="0" tIns="0" rIns="0" bIns="0" rtlCol="0" anchor="ctr"/>
-          <a:lstStyle/>
-          <a:p>
-            <a:pPr indent="0" marL="0">
-              <a:buNone/>
-            </a:pPr>
-            <a:r>
-              <a:rPr lang="en-US" sz="1000" spc="140" kern="0" dirty="0">
-                <a:solidFill>
-                  <a:srgbClr val="C8282C"/>
-                </a:solidFill>
-                <a:latin typeface="IBM Plex Mono" pitchFamily="34" charset="0"/>
-                <a:ea typeface="IBM Plex Mono" pitchFamily="34" charset="-122"/>
-                <a:cs typeface="IBM Plex Mono" pitchFamily="34" charset="-120"/>
-              </a:rPr>
-              <a:t>SURVEILLER</a:t>
-            </a:r>
-            <a:endParaRPr lang="en-US" sz="1000" dirty="0"/>
-          </a:p>
-        </p:txBody>
-      </p:sp>
-      <p:sp>
-        <p:nvSpPr>
-          <p:cNvPr id="11" name="Text 9"/>
-          <p:cNvSpPr/>
-          <p:nvPr/>
-        </p:nvSpPr>
-        <p:spPr>
-          <a:xfrm>
-            <a:off x="4703064" y="3086100"/>
-            <a:ext cx="2782824" cy="548640"/>
-          </a:xfrm>
-          <a:prstGeom prst="rect">
-            <a:avLst/>
-          </a:prstGeom>
-          <a:noFill/>
-          <a:ln/>
-        </p:spPr>
-        <p:txBody>
-          <a:bodyPr wrap="square" lIns="0" tIns="0" rIns="0" bIns="0" rtlCol="0" anchor="t"/>
-          <a:lstStyle/>
-          <a:p>
-            <a:pPr indent="0" marL="0">
-              <a:buNone/>
-            </a:pPr>
-            <a:r>
-              <a:rPr lang="en-US" sz="2600" b="1" dirty="0">
-                <a:solidFill>
-                  <a:srgbClr val="141C26"/>
-                </a:solidFill>
-                <a:latin typeface="Fraunces" pitchFamily="34" charset="0"/>
-                <a:ea typeface="Fraunces" pitchFamily="34" charset="-122"/>
-                <a:cs typeface="Fraunces" pitchFamily="34" charset="-120"/>
-              </a:rPr>
-              <a:t>Standard</a:t>
-            </a:r>
-            <a:endParaRPr lang="en-US" sz="2600" dirty="0"/>
-          </a:p>
-        </p:txBody>
-      </p:sp>
-      <p:sp>
-        <p:nvSpPr>
-          <p:cNvPr id="12" name="Text 10"/>
-          <p:cNvSpPr/>
-          <p:nvPr/>
-        </p:nvSpPr>
-        <p:spPr>
-          <a:xfrm>
-            <a:off x="4703064" y="3762756"/>
-            <a:ext cx="2782824" cy="365760"/>
-          </a:xfrm>
-          <a:prstGeom prst="rect">
-            <a:avLst/>
-          </a:prstGeom>
-          <a:noFill/>
-          <a:ln/>
-        </p:spPr>
-        <p:txBody>
-          <a:bodyPr wrap="square" lIns="0" tIns="0" rIns="0" bIns="0" rtlCol="0" anchor="ctr"/>
-          <a:lstStyle/>
-          <a:p>
-            <a:pPr indent="0" marL="0">
-              <a:buNone/>
-            </a:pPr>
-            <a:r>
-              <a:rPr lang="en-US" sz="1500" b="1" dirty="0">
-                <a:solidFill>
-                  <a:srgbClr val="0F3C4E"/>
-                </a:solidFill>
-                <a:latin typeface="IBM Plex Mono" pitchFamily="34" charset="0"/>
-                <a:ea typeface="IBM Plex Mono" pitchFamily="34" charset="-122"/>
-                <a:cs typeface="IBM Plex Mono" pitchFamily="34" charset="-120"/>
-              </a:rPr>
-              <a:t>199–799 €/mois</a:t>
-            </a:r>
-            <a:endParaRPr lang="en-US" sz="1500" dirty="0"/>
-          </a:p>
-        </p:txBody>
-      </p:sp>
-      <p:sp>
-        <p:nvSpPr>
-          <p:cNvPr id="13" name="Text 11"/>
-          <p:cNvSpPr/>
-          <p:nvPr/>
-        </p:nvSpPr>
-        <p:spPr>
-          <a:xfrm>
-            <a:off x="4703064" y="4274820"/>
-            <a:ext cx="2782824" cy="914400"/>
-          </a:xfrm>
-          <a:prstGeom prst="rect">
-            <a:avLst/>
-          </a:prstGeom>
-          <a:noFill/>
-          <a:ln/>
-        </p:spPr>
-        <p:txBody>
-          <a:bodyPr wrap="square" lIns="0" tIns="0" rIns="0" bIns="0" rtlCol="0" anchor="t"/>
-          <a:lstStyle/>
-          <a:p>
-            <a:pPr indent="0" marL="0">
-              <a:lnSpc>
-                <a:spcPct val="125000"/>
-              </a:lnSpc>
-              <a:buNone/>
-            </a:pPr>
-            <a:r>
-              <a:rPr lang="en-US" sz="1300" dirty="0">
-                <a:solidFill>
-                  <a:srgbClr val="5C6875"/>
-                </a:solidFill>
-                <a:latin typeface="Inter" pitchFamily="34" charset="0"/>
-                <a:ea typeface="Inter" pitchFamily="34" charset="-122"/>
-                <a:cs typeface="Inter" pitchFamily="34" charset="-120"/>
-              </a:rPr>
-              <a:t>Suivre les signaux, les scores et les évolutions.</a:t>
-            </a:r>
-            <a:endParaRPr lang="en-US" sz="1300" dirty="0"/>
-          </a:p>
-        </p:txBody>
-      </p:sp>
-      <p:sp>
-        <p:nvSpPr>
-          <p:cNvPr id="14" name="Shape 12"/>
-          <p:cNvSpPr/>
-          <p:nvPr/>
-        </p:nvSpPr>
-        <p:spPr>
-          <a:xfrm>
-            <a:off x="8125968" y="2446020"/>
-            <a:ext cx="3404616" cy="3063240"/>
-          </a:xfrm>
-          <a:prstGeom prst="rect">
-            <a:avLst/>
-          </a:prstGeom>
-          <a:solidFill>
-            <a:srgbClr val="F4F6F8"/>
-          </a:solidFill>
-          <a:ln w="12700">
-            <a:solidFill>
-              <a:srgbClr val="D3DBE1"/>
-            </a:solidFill>
-            <a:prstDash val="solid"/>
-          </a:ln>
-        </p:spPr>
-      </p:sp>
-      <p:sp>
-        <p:nvSpPr>
-          <p:cNvPr id="15" name="Text 13"/>
-          <p:cNvSpPr/>
-          <p:nvPr/>
-        </p:nvSpPr>
-        <p:spPr>
-          <a:xfrm>
-            <a:off x="8436864" y="2756916"/>
-            <a:ext cx="2782824" cy="237744"/>
-          </a:xfrm>
-          <a:prstGeom prst="rect">
-            <a:avLst/>
-          </a:prstGeom>
-          <a:noFill/>
-          <a:ln/>
-        </p:spPr>
-        <p:txBody>
-          <a:bodyPr wrap="square" lIns="0" tIns="0" rIns="0" bIns="0" rtlCol="0" anchor="ctr"/>
-          <a:lstStyle/>
-          <a:p>
-            <a:pPr indent="0" marL="0">
-              <a:buNone/>
-            </a:pPr>
-            <a:r>
-              <a:rPr lang="en-US" sz="1000" spc="140" kern="0" dirty="0">
-                <a:solidFill>
-                  <a:srgbClr val="5C6875"/>
-                </a:solidFill>
-                <a:latin typeface="IBM Plex Mono" pitchFamily="34" charset="0"/>
-                <a:ea typeface="IBM Plex Mono" pitchFamily="34" charset="-122"/>
-                <a:cs typeface="IBM Plex Mono" pitchFamily="34" charset="-120"/>
-              </a:rPr>
-              <a:t>ARBITRER</a:t>
-            </a:r>
-            <a:endParaRPr lang="en-US" sz="1000" dirty="0"/>
-          </a:p>
-        </p:txBody>
-      </p:sp>
-      <p:sp>
-        <p:nvSpPr>
-          <p:cNvPr id="16" name="Text 14"/>
-          <p:cNvSpPr/>
-          <p:nvPr/>
-        </p:nvSpPr>
-        <p:spPr>
-          <a:xfrm>
-            <a:off x="8436864" y="3086100"/>
-            <a:ext cx="2782824" cy="548640"/>
-          </a:xfrm>
-          <a:prstGeom prst="rect">
-            <a:avLst/>
-          </a:prstGeom>
-          <a:noFill/>
-          <a:ln/>
-        </p:spPr>
-        <p:txBody>
-          <a:bodyPr wrap="square" lIns="0" tIns="0" rIns="0" bIns="0" rtlCol="0" anchor="t"/>
-          <a:lstStyle/>
-          <a:p>
-            <a:pPr indent="0" marL="0">
-              <a:buNone/>
-            </a:pPr>
-            <a:r>
-              <a:rPr lang="en-US" sz="2600" b="1" dirty="0">
-                <a:solidFill>
-                  <a:srgbClr val="141C26"/>
-                </a:solidFill>
-                <a:latin typeface="Fraunces" pitchFamily="34" charset="0"/>
-                <a:ea typeface="Fraunces" pitchFamily="34" charset="-122"/>
-                <a:cs typeface="Fraunces" pitchFamily="34" charset="-120"/>
-              </a:rPr>
-              <a:t>Premium</a:t>
-            </a:r>
-            <a:endParaRPr lang="en-US" sz="2600" dirty="0"/>
-          </a:p>
-        </p:txBody>
-      </p:sp>
-      <p:sp>
-        <p:nvSpPr>
-          <p:cNvPr id="17" name="Text 15"/>
-          <p:cNvSpPr/>
-          <p:nvPr/>
-        </p:nvSpPr>
-        <p:spPr>
-          <a:xfrm>
-            <a:off x="8436864" y="3762756"/>
-            <a:ext cx="2782824" cy="365760"/>
-          </a:xfrm>
-          <a:prstGeom prst="rect">
-            <a:avLst/>
-          </a:prstGeom>
-          <a:noFill/>
-          <a:ln/>
-        </p:spPr>
-        <p:txBody>
-          <a:bodyPr wrap="square" lIns="0" tIns="0" rIns="0" bIns="0" rtlCol="0" anchor="ctr"/>
-          <a:lstStyle/>
-          <a:p>
-            <a:pPr indent="0" marL="0">
-              <a:buNone/>
-            </a:pPr>
-            <a:r>
-              <a:rPr lang="en-US" sz="1500" b="1" dirty="0">
-                <a:solidFill>
-                  <a:srgbClr val="0F3C4E"/>
-                </a:solidFill>
-                <a:latin typeface="IBM Plex Mono" pitchFamily="34" charset="0"/>
-                <a:ea typeface="IBM Plex Mono" pitchFamily="34" charset="-122"/>
-                <a:cs typeface="IBM Plex Mono" pitchFamily="34" charset="-120"/>
-              </a:rPr>
-              <a:t>3 000–15 000 €+</a:t>
-            </a:r>
-            <a:endParaRPr lang="en-US" sz="1500" dirty="0"/>
-          </a:p>
-        </p:txBody>
-      </p:sp>
-      <p:sp>
-        <p:nvSpPr>
-          <p:cNvPr id="18" name="Text 16"/>
-          <p:cNvSpPr/>
-          <p:nvPr/>
-        </p:nvSpPr>
-        <p:spPr>
-          <a:xfrm>
-            <a:off x="8436864" y="4274820"/>
-            <a:ext cx="2782824" cy="914400"/>
-          </a:xfrm>
-          <a:prstGeom prst="rect">
-            <a:avLst/>
-          </a:prstGeom>
-          <a:noFill/>
-          <a:ln/>
-        </p:spPr>
-        <p:txBody>
-          <a:bodyPr wrap="square" lIns="0" tIns="0" rIns="0" bIns="0" rtlCol="0" anchor="t"/>
-          <a:lstStyle/>
-          <a:p>
-            <a:pPr indent="0" marL="0">
-              <a:lnSpc>
-                <a:spcPct val="125000"/>
-              </a:lnSpc>
-              <a:buNone/>
-            </a:pPr>
-            <a:r>
-              <a:rPr lang="en-US" sz="1300" dirty="0">
-                <a:solidFill>
-                  <a:srgbClr val="5C6875"/>
-                </a:solidFill>
-                <a:latin typeface="Inter" pitchFamily="34" charset="0"/>
-                <a:ea typeface="Inter" pitchFamily="34" charset="-122"/>
-                <a:cs typeface="Inter" pitchFamily="34" charset="-120"/>
-              </a:rPr>
-              <a:t>Scénarios, seuils de bascule et arbitrage contextualisé.</a:t>
-            </a:r>
-            <a:endParaRPr lang="en-US" sz="1300" dirty="0"/>
-          </a:p>
-        </p:txBody>
-      </p:sp>
-      <p:sp>
-        <p:nvSpPr>
-          <p:cNvPr id="19" name="Text 17"/>
-          <p:cNvSpPr/>
-          <p:nvPr/>
-        </p:nvSpPr>
-        <p:spPr>
-          <a:xfrm>
-            <a:off x="658368" y="5815584"/>
-            <a:ext cx="9774936" cy="548640"/>
-          </a:xfrm>
-          <a:prstGeom prst="rect">
-            <a:avLst/>
-          </a:prstGeom>
-          <a:noFill/>
-          <a:ln/>
-        </p:spPr>
-        <p:txBody>
-          <a:bodyPr wrap="square" lIns="0" tIns="0" rIns="0" bIns="0" rtlCol="0" anchor="b"/>
-          <a:lstStyle/>
-          <a:p>
-            <a:pPr indent="0" marL="0">
-              <a:buNone/>
-            </a:pPr>
-            <a:r>
-              <a:rPr lang="en-US" sz="1000" i="1" dirty="0">
-                <a:solidFill>
-                  <a:srgbClr val="5C6875"/>
-                </a:solidFill>
-                <a:latin typeface="Inter" pitchFamily="34" charset="0"/>
-                <a:ea typeface="Inter" pitchFamily="34" charset="-122"/>
-                <a:cs typeface="Inter" pitchFamily="34" charset="-120"/>
-              </a:rPr>
-              <a:t>Basic informe. Standard surveille. Premium aide à arbitrer.</a:t>
-            </a:r>
-            <a:endParaRPr lang="en-US" sz="1000" dirty="0"/>
-          </a:p>
-        </p:txBody>
-      </p:sp>
-      <p:sp>
-        <p:nvSpPr>
-          <p:cNvPr id="20" name="Text 18"/>
-          <p:cNvSpPr/>
-          <p:nvPr/>
-        </p:nvSpPr>
-        <p:spPr>
-          <a:xfrm>
-            <a:off x="10433304" y="6144768"/>
-            <a:ext cx="1097280" cy="274320"/>
-          </a:xfrm>
-          <a:prstGeom prst="rect">
-            <a:avLst/>
-          </a:prstGeom>
-          <a:noFill/>
-          <a:ln/>
-        </p:spPr>
-        <p:txBody>
-          <a:bodyPr wrap="square" lIns="0" tIns="0" rIns="0" bIns="0" rtlCol="0" anchor="ctr"/>
-          <a:lstStyle/>
-          <a:p>
-            <a:pPr algn="r" indent="0" marL="0">
-              <a:buNone/>
-            </a:pPr>
-            <a:r>
-              <a:rPr lang="en-US" sz="1000" dirty="0">
-                <a:solidFill>
-                  <a:srgbClr val="5C6875"/>
-                </a:solidFill>
-                <a:latin typeface="IBM Plex Mono" pitchFamily="34" charset="0"/>
-                <a:ea typeface="IBM Plex Mono" pitchFamily="34" charset="-122"/>
-                <a:cs typeface="IBM Plex Mono" pitchFamily="34" charset="-120"/>
-              </a:rPr>
-              <a:t>13 / 16</a:t>
-            </a:r>
-            <a:endParaRPr lang="en-US" sz="1000" dirty="0"/>
-          </a:p>
-        </p:txBody>
-      </p:sp>
-    </p:spTree>
-  </p:cSld>
-  <p:clrMapOvr>
-    <a:masterClrMapping/>
-  </p:clrMapOvr>
-</p:sld>
-</file>
-
-<file path=ppt/slides/slide14.xml><?xml version="1.0" encoding="utf-8"?>
-<p:sld xmlns:a="http://schemas.openxmlformats.org/drawingml/2006/main" xmlns:r="http://schemas.openxmlformats.org/officeDocument/2006/relationships" xmlns:p="http://schemas.openxmlformats.org/presentationml/2006/main">
-  <p:cSld name="Slide 14">
-    <p:bg>
-      <p:bgPr>
-        <a:solidFill>
-          <a:srgbClr val="F4F6F8"/>
-        </a:solidFill>
-      </p:bgPr>
-    </p:bg>
-    <p:spTree>
-      <p:nvGrpSpPr>
-        <p:cNvPr id="1" name=""/>
-        <p:cNvGrpSpPr/>
-        <p:nvPr/>
-      </p:nvGrpSpPr>
-      <p:grpSpPr>
-        <a:xfrm>
-          <a:off x="0" y="0"/>
-          <a:ext cx="0" cy="0"/>
-          <a:chOff x="0" y="0"/>
-          <a:chExt cx="0" cy="0"/>
-        </a:xfrm>
-      </p:grpSpPr>
-      <p:sp>
-        <p:nvSpPr>
-          <p:cNvPr id="2" name="Text 0"/>
-          <p:cNvSpPr/>
-          <p:nvPr/>
-        </p:nvSpPr>
-        <p:spPr>
-          <a:xfrm>
-            <a:off x="658368" y="475488"/>
-            <a:ext cx="10872216" cy="237744"/>
-          </a:xfrm>
-          <a:prstGeom prst="rect">
-            <a:avLst/>
-          </a:prstGeom>
-          <a:noFill/>
-          <a:ln/>
-        </p:spPr>
-        <p:txBody>
-          <a:bodyPr wrap="square" lIns="0" tIns="0" rIns="0" bIns="0" rtlCol="0" anchor="ctr"/>
-          <a:lstStyle/>
-          <a:p>
-            <a:pPr indent="0" marL="0">
-              <a:buNone/>
-            </a:pPr>
-            <a:r>
-              <a:rPr lang="en-US" sz="1000" spc="160" kern="0" dirty="0">
-                <a:solidFill>
-                  <a:srgbClr val="5C6875"/>
-                </a:solidFill>
-                <a:latin typeface="IBM Plex Mono" pitchFamily="34" charset="0"/>
-                <a:ea typeface="IBM Plex Mono" pitchFamily="34" charset="-122"/>
-                <a:cs typeface="IBM Plex Mono" pitchFamily="34" charset="-120"/>
-              </a:rPr>
-              <a:t>OFFRES</a:t>
-            </a:r>
-            <a:endParaRPr lang="en-US" sz="1000" dirty="0"/>
-          </a:p>
-        </p:txBody>
-      </p:sp>
-      <p:sp>
-        <p:nvSpPr>
-          <p:cNvPr id="3" name="Text 1"/>
-          <p:cNvSpPr/>
-          <p:nvPr/>
-        </p:nvSpPr>
-        <p:spPr>
-          <a:xfrm>
-            <a:off x="658368" y="786384"/>
-            <a:ext cx="10872216" cy="1207008"/>
-          </a:xfrm>
-          <a:prstGeom prst="rect">
-            <a:avLst/>
-          </a:prstGeom>
-          <a:noFill/>
-          <a:ln/>
-        </p:spPr>
-        <p:txBody>
-          <a:bodyPr wrap="square" lIns="0" tIns="0" rIns="0" bIns="0" rtlCol="0" anchor="t"/>
-          <a:lstStyle/>
-          <a:p>
-            <a:pPr indent="0" marL="0">
-              <a:lnSpc>
-                <a:spcPct val="105000"/>
-              </a:lnSpc>
-              <a:buNone/>
-            </a:pPr>
-            <a:r>
-              <a:rPr lang="en-US" sz="3400" b="1" dirty="0">
-                <a:solidFill>
-                  <a:srgbClr val="141C26"/>
-                </a:solidFill>
-                <a:latin typeface="Fraunces" pitchFamily="34" charset="0"/>
-                <a:ea typeface="Fraunces" pitchFamily="34" charset="-122"/>
-                <a:cs typeface="Fraunces" pitchFamily="34" charset="-120"/>
-              </a:rPr>
               <a:t>Ce que chaque niveau ouvre</a:t>
             </a:r>
             <a:endParaRPr lang="en-US" sz="3400" dirty="0"/>
@@ -4895,7 +4923,7 @@
       </p:sp>
       <p:graphicFrame>
         <p:nvGraphicFramePr>
-          <p:cNvPr id="15" name="Table 0"/>
+          <p:cNvPr id="14" name="Table 0"/>
           <p:cNvGraphicFramePr>
             <a:graphicFrameLocks noGrp="1"/>
           </p:cNvGraphicFramePr>
@@ -7452,7 +7480,7 @@
                 <a:ea typeface="IBM Plex Mono" pitchFamily="34" charset="-122"/>
                 <a:cs typeface="IBM Plex Mono" pitchFamily="34" charset="-120"/>
               </a:rPr>
-              <a:t>14 / 16</a:t>
+              <a:t>13 / 15</a:t>
             </a:r>
             <a:endParaRPr lang="en-US" sz="1000" dirty="0"/>
           </a:p>
@@ -7466,9 +7494,9 @@
 </p:sld>
 </file>
 
-<file path=ppt/slides/slide15.xml><?xml version="1.0" encoding="utf-8"?>
+<file path=ppt/slides/slide14.xml><?xml version="1.0" encoding="utf-8"?>
 <p:sld xmlns:a="http://schemas.openxmlformats.org/drawingml/2006/main" xmlns:r="http://schemas.openxmlformats.org/officeDocument/2006/relationships" xmlns:p="http://schemas.openxmlformats.org/presentationml/2006/main">
-  <p:cSld name="Slide 15">
+  <p:cSld name="Slide 14">
     <p:bg>
       <p:bgPr>
         <a:solidFill>
@@ -7770,7 +7798,7 @@
                 <a:ea typeface="IBM Plex Mono" pitchFamily="34" charset="-122"/>
                 <a:cs typeface="IBM Plex Mono" pitchFamily="34" charset="-120"/>
               </a:rPr>
-              <a:t>15 / 16</a:t>
+              <a:t>14 / 15</a:t>
             </a:r>
             <a:endParaRPr lang="en-US" sz="1000" dirty="0"/>
           </a:p>
@@ -7784,9 +7812,9 @@
 </p:sld>
 </file>
 
-<file path=ppt/slides/slide16.xml><?xml version="1.0" encoding="utf-8"?>
+<file path=ppt/slides/slide15.xml><?xml version="1.0" encoding="utf-8"?>
 <p:sld xmlns:a="http://schemas.openxmlformats.org/drawingml/2006/main" xmlns:r="http://schemas.openxmlformats.org/officeDocument/2006/relationships" xmlns:p="http://schemas.openxmlformats.org/presentationml/2006/main">
-  <p:cSld name="Slide 16">
+  <p:cSld name="Slide 15">
     <p:bg>
       <p:bgPr>
         <a:solidFill>
@@ -8513,7 +8541,7 @@
                 <a:ea typeface="IBM Plex Mono" pitchFamily="34" charset="-122"/>
                 <a:cs typeface="IBM Plex Mono" pitchFamily="34" charset="-120"/>
               </a:rPr>
-              <a:t>16 / 16</a:t>
+              <a:t>15 / 15</a:t>
             </a:r>
             <a:endParaRPr lang="en-US" sz="1000" dirty="0"/>
           </a:p>
@@ -8718,7 +8746,7 @@
                 <a:ea typeface="Inter" pitchFamily="34" charset="-122"/>
                 <a:cs typeface="Inter" pitchFamily="34" charset="-120"/>
               </a:rPr>
-              <a:t>La dépendance déclarée est contractuelle et lisible. La dépendance réelle passe par des points de passage, des juridictions et des assureurs que personne n’a inscrits au registre des risques.</a:t>
+              <a:t>La dépendance déclarée est contractuelle et lisible. La dépendance réelle passe par des points de passage, des juridictions et des assureurs que personne n’a inscrits au registre des risques — un détroit, un régulateur, une usine unique. Ce qui casse une activité est presque toujours à ce second rang.</a:t>
             </a:r>
             <a:endParaRPr lang="en-US" sz="1500" dirty="0"/>
           </a:p>
@@ -8757,7 +8785,7 @@
                 <a:ea typeface="IBM Plex Mono" pitchFamily="34" charset="-122"/>
                 <a:cs typeface="IBM Plex Mono" pitchFamily="34" charset="-120"/>
               </a:rPr>
-              <a:t>02 / 16</a:t>
+              <a:t>02 / 15</a:t>
             </a:r>
             <a:endParaRPr lang="en-US" sz="1000" dirty="0"/>
           </a:p>
@@ -9694,7 +9722,7 @@
                 <a:ea typeface="IBM Plex Mono" pitchFamily="34" charset="-122"/>
                 <a:cs typeface="IBM Plex Mono" pitchFamily="34" charset="-120"/>
               </a:rPr>
-              <a:t>03 / 16</a:t>
+              <a:t>03 / 15</a:t>
             </a:r>
             <a:endParaRPr lang="en-US" sz="1000" dirty="0"/>
           </a:p>
@@ -9711,6 +9739,672 @@
 <file path=ppt/slides/slide4.xml><?xml version="1.0" encoding="utf-8"?>
 <p:sld xmlns:a="http://schemas.openxmlformats.org/drawingml/2006/main" xmlns:r="http://schemas.openxmlformats.org/officeDocument/2006/relationships" xmlns:p="http://schemas.openxmlformats.org/presentationml/2006/main">
   <p:cSld name="Slide 4">
+    <p:bg>
+      <p:bgPr>
+        <a:solidFill>
+          <a:srgbClr val="0F3C4E"/>
+        </a:solidFill>
+      </p:bgPr>
+    </p:bg>
+    <p:spTree>
+      <p:nvGrpSpPr>
+        <p:cNvPr id="1" name=""/>
+        <p:cNvGrpSpPr/>
+        <p:nvPr/>
+      </p:nvGrpSpPr>
+      <p:grpSpPr>
+        <a:xfrm>
+          <a:off x="0" y="0"/>
+          <a:ext cx="0" cy="0"/>
+          <a:chOff x="0" y="0"/>
+          <a:chExt cx="0" cy="0"/>
+        </a:xfrm>
+      </p:grpSpPr>
+      <p:sp>
+        <p:nvSpPr>
+          <p:cNvPr id="2" name="Shape 0"/>
+          <p:cNvSpPr/>
+          <p:nvPr/>
+        </p:nvSpPr>
+        <p:spPr>
+          <a:xfrm>
+            <a:off x="914400" y="0"/>
+            <a:ext cx="0" cy="6858000"/>
+          </a:xfrm>
+          <a:prstGeom prst="line">
+            <a:avLst/>
+          </a:prstGeom>
+          <a:noFill/>
+          <a:ln w="6350">
+            <a:solidFill>
+              <a:srgbClr val="F4F6F8">
+                <a:alpha val="22000"/>
+              </a:srgbClr>
+            </a:solidFill>
+            <a:prstDash val="solid"/>
+          </a:ln>
+        </p:spPr>
+      </p:sp>
+      <p:sp>
+        <p:nvSpPr>
+          <p:cNvPr id="3" name="Shape 1"/>
+          <p:cNvSpPr/>
+          <p:nvPr/>
+        </p:nvSpPr>
+        <p:spPr>
+          <a:xfrm>
+            <a:off x="1828800" y="0"/>
+            <a:ext cx="0" cy="6858000"/>
+          </a:xfrm>
+          <a:prstGeom prst="line">
+            <a:avLst/>
+          </a:prstGeom>
+          <a:noFill/>
+          <a:ln w="6350">
+            <a:solidFill>
+              <a:srgbClr val="F4F6F8">
+                <a:alpha val="22000"/>
+              </a:srgbClr>
+            </a:solidFill>
+            <a:prstDash val="solid"/>
+          </a:ln>
+        </p:spPr>
+      </p:sp>
+      <p:sp>
+        <p:nvSpPr>
+          <p:cNvPr id="4" name="Shape 2"/>
+          <p:cNvSpPr/>
+          <p:nvPr/>
+        </p:nvSpPr>
+        <p:spPr>
+          <a:xfrm>
+            <a:off x="2743200" y="0"/>
+            <a:ext cx="0" cy="6858000"/>
+          </a:xfrm>
+          <a:prstGeom prst="line">
+            <a:avLst/>
+          </a:prstGeom>
+          <a:noFill/>
+          <a:ln w="6350">
+            <a:solidFill>
+              <a:srgbClr val="F4F6F8">
+                <a:alpha val="22000"/>
+              </a:srgbClr>
+            </a:solidFill>
+            <a:prstDash val="solid"/>
+          </a:ln>
+        </p:spPr>
+      </p:sp>
+      <p:sp>
+        <p:nvSpPr>
+          <p:cNvPr id="5" name="Shape 3"/>
+          <p:cNvSpPr/>
+          <p:nvPr/>
+        </p:nvSpPr>
+        <p:spPr>
+          <a:xfrm>
+            <a:off x="3657600" y="0"/>
+            <a:ext cx="0" cy="6858000"/>
+          </a:xfrm>
+          <a:prstGeom prst="line">
+            <a:avLst/>
+          </a:prstGeom>
+          <a:noFill/>
+          <a:ln w="6350">
+            <a:solidFill>
+              <a:srgbClr val="F4F6F8">
+                <a:alpha val="22000"/>
+              </a:srgbClr>
+            </a:solidFill>
+            <a:prstDash val="solid"/>
+          </a:ln>
+        </p:spPr>
+      </p:sp>
+      <p:sp>
+        <p:nvSpPr>
+          <p:cNvPr id="6" name="Shape 4"/>
+          <p:cNvSpPr/>
+          <p:nvPr/>
+        </p:nvSpPr>
+        <p:spPr>
+          <a:xfrm>
+            <a:off x="4572000" y="0"/>
+            <a:ext cx="0" cy="6858000"/>
+          </a:xfrm>
+          <a:prstGeom prst="line">
+            <a:avLst/>
+          </a:prstGeom>
+          <a:noFill/>
+          <a:ln w="6350">
+            <a:solidFill>
+              <a:srgbClr val="F4F6F8">
+                <a:alpha val="22000"/>
+              </a:srgbClr>
+            </a:solidFill>
+            <a:prstDash val="solid"/>
+          </a:ln>
+        </p:spPr>
+      </p:sp>
+      <p:sp>
+        <p:nvSpPr>
+          <p:cNvPr id="7" name="Shape 5"/>
+          <p:cNvSpPr/>
+          <p:nvPr/>
+        </p:nvSpPr>
+        <p:spPr>
+          <a:xfrm>
+            <a:off x="5486400" y="0"/>
+            <a:ext cx="0" cy="6858000"/>
+          </a:xfrm>
+          <a:prstGeom prst="line">
+            <a:avLst/>
+          </a:prstGeom>
+          <a:noFill/>
+          <a:ln w="6350">
+            <a:solidFill>
+              <a:srgbClr val="F4F6F8">
+                <a:alpha val="22000"/>
+              </a:srgbClr>
+            </a:solidFill>
+            <a:prstDash val="solid"/>
+          </a:ln>
+        </p:spPr>
+      </p:sp>
+      <p:sp>
+        <p:nvSpPr>
+          <p:cNvPr id="8" name="Shape 6"/>
+          <p:cNvSpPr/>
+          <p:nvPr/>
+        </p:nvSpPr>
+        <p:spPr>
+          <a:xfrm>
+            <a:off x="6400800" y="0"/>
+            <a:ext cx="0" cy="6858000"/>
+          </a:xfrm>
+          <a:prstGeom prst="line">
+            <a:avLst/>
+          </a:prstGeom>
+          <a:noFill/>
+          <a:ln w="6350">
+            <a:solidFill>
+              <a:srgbClr val="F4F6F8">
+                <a:alpha val="22000"/>
+              </a:srgbClr>
+            </a:solidFill>
+            <a:prstDash val="solid"/>
+          </a:ln>
+        </p:spPr>
+      </p:sp>
+      <p:sp>
+        <p:nvSpPr>
+          <p:cNvPr id="9" name="Shape 7"/>
+          <p:cNvSpPr/>
+          <p:nvPr/>
+        </p:nvSpPr>
+        <p:spPr>
+          <a:xfrm>
+            <a:off x="7315200" y="0"/>
+            <a:ext cx="0" cy="6858000"/>
+          </a:xfrm>
+          <a:prstGeom prst="line">
+            <a:avLst/>
+          </a:prstGeom>
+          <a:noFill/>
+          <a:ln w="6350">
+            <a:solidFill>
+              <a:srgbClr val="F4F6F8">
+                <a:alpha val="22000"/>
+              </a:srgbClr>
+            </a:solidFill>
+            <a:prstDash val="solid"/>
+          </a:ln>
+        </p:spPr>
+      </p:sp>
+      <p:sp>
+        <p:nvSpPr>
+          <p:cNvPr id="10" name="Shape 8"/>
+          <p:cNvSpPr/>
+          <p:nvPr/>
+        </p:nvSpPr>
+        <p:spPr>
+          <a:xfrm>
+            <a:off x="8229600" y="0"/>
+            <a:ext cx="0" cy="6858000"/>
+          </a:xfrm>
+          <a:prstGeom prst="line">
+            <a:avLst/>
+          </a:prstGeom>
+          <a:noFill/>
+          <a:ln w="6350">
+            <a:solidFill>
+              <a:srgbClr val="F4F6F8">
+                <a:alpha val="22000"/>
+              </a:srgbClr>
+            </a:solidFill>
+            <a:prstDash val="solid"/>
+          </a:ln>
+        </p:spPr>
+      </p:sp>
+      <p:sp>
+        <p:nvSpPr>
+          <p:cNvPr id="11" name="Shape 9"/>
+          <p:cNvSpPr/>
+          <p:nvPr/>
+        </p:nvSpPr>
+        <p:spPr>
+          <a:xfrm>
+            <a:off x="9144000" y="0"/>
+            <a:ext cx="0" cy="6858000"/>
+          </a:xfrm>
+          <a:prstGeom prst="line">
+            <a:avLst/>
+          </a:prstGeom>
+          <a:noFill/>
+          <a:ln w="6350">
+            <a:solidFill>
+              <a:srgbClr val="F4F6F8">
+                <a:alpha val="22000"/>
+              </a:srgbClr>
+            </a:solidFill>
+            <a:prstDash val="solid"/>
+          </a:ln>
+        </p:spPr>
+      </p:sp>
+      <p:sp>
+        <p:nvSpPr>
+          <p:cNvPr id="12" name="Shape 10"/>
+          <p:cNvSpPr/>
+          <p:nvPr/>
+        </p:nvSpPr>
+        <p:spPr>
+          <a:xfrm>
+            <a:off x="10058400" y="0"/>
+            <a:ext cx="0" cy="6858000"/>
+          </a:xfrm>
+          <a:prstGeom prst="line">
+            <a:avLst/>
+          </a:prstGeom>
+          <a:noFill/>
+          <a:ln w="6350">
+            <a:solidFill>
+              <a:srgbClr val="F4F6F8">
+                <a:alpha val="22000"/>
+              </a:srgbClr>
+            </a:solidFill>
+            <a:prstDash val="solid"/>
+          </a:ln>
+        </p:spPr>
+      </p:sp>
+      <p:sp>
+        <p:nvSpPr>
+          <p:cNvPr id="13" name="Shape 11"/>
+          <p:cNvSpPr/>
+          <p:nvPr/>
+        </p:nvSpPr>
+        <p:spPr>
+          <a:xfrm>
+            <a:off x="10972800" y="0"/>
+            <a:ext cx="0" cy="6858000"/>
+          </a:xfrm>
+          <a:prstGeom prst="line">
+            <a:avLst/>
+          </a:prstGeom>
+          <a:noFill/>
+          <a:ln w="6350">
+            <a:solidFill>
+              <a:srgbClr val="F4F6F8">
+                <a:alpha val="22000"/>
+              </a:srgbClr>
+            </a:solidFill>
+            <a:prstDash val="solid"/>
+          </a:ln>
+        </p:spPr>
+      </p:sp>
+      <p:sp>
+        <p:nvSpPr>
+          <p:cNvPr id="14" name="Shape 12"/>
+          <p:cNvSpPr/>
+          <p:nvPr/>
+        </p:nvSpPr>
+        <p:spPr>
+          <a:xfrm>
+            <a:off x="0" y="914400"/>
+            <a:ext cx="12188952" cy="0"/>
+          </a:xfrm>
+          <a:prstGeom prst="line">
+            <a:avLst/>
+          </a:prstGeom>
+          <a:noFill/>
+          <a:ln w="6350">
+            <a:solidFill>
+              <a:srgbClr val="F4F6F8">
+                <a:alpha val="22000"/>
+              </a:srgbClr>
+            </a:solidFill>
+            <a:prstDash val="solid"/>
+          </a:ln>
+        </p:spPr>
+      </p:sp>
+      <p:sp>
+        <p:nvSpPr>
+          <p:cNvPr id="15" name="Shape 13"/>
+          <p:cNvSpPr/>
+          <p:nvPr/>
+        </p:nvSpPr>
+        <p:spPr>
+          <a:xfrm>
+            <a:off x="0" y="1828800"/>
+            <a:ext cx="12188952" cy="0"/>
+          </a:xfrm>
+          <a:prstGeom prst="line">
+            <a:avLst/>
+          </a:prstGeom>
+          <a:noFill/>
+          <a:ln w="6350">
+            <a:solidFill>
+              <a:srgbClr val="F4F6F8">
+                <a:alpha val="22000"/>
+              </a:srgbClr>
+            </a:solidFill>
+            <a:prstDash val="solid"/>
+          </a:ln>
+        </p:spPr>
+      </p:sp>
+      <p:sp>
+        <p:nvSpPr>
+          <p:cNvPr id="16" name="Shape 14"/>
+          <p:cNvSpPr/>
+          <p:nvPr/>
+        </p:nvSpPr>
+        <p:spPr>
+          <a:xfrm>
+            <a:off x="0" y="2743200"/>
+            <a:ext cx="12188952" cy="0"/>
+          </a:xfrm>
+          <a:prstGeom prst="line">
+            <a:avLst/>
+          </a:prstGeom>
+          <a:noFill/>
+          <a:ln w="6350">
+            <a:solidFill>
+              <a:srgbClr val="F4F6F8">
+                <a:alpha val="22000"/>
+              </a:srgbClr>
+            </a:solidFill>
+            <a:prstDash val="solid"/>
+          </a:ln>
+        </p:spPr>
+      </p:sp>
+      <p:sp>
+        <p:nvSpPr>
+          <p:cNvPr id="17" name="Shape 15"/>
+          <p:cNvSpPr/>
+          <p:nvPr/>
+        </p:nvSpPr>
+        <p:spPr>
+          <a:xfrm>
+            <a:off x="0" y="3657600"/>
+            <a:ext cx="12188952" cy="0"/>
+          </a:xfrm>
+          <a:prstGeom prst="line">
+            <a:avLst/>
+          </a:prstGeom>
+          <a:noFill/>
+          <a:ln w="6350">
+            <a:solidFill>
+              <a:srgbClr val="F4F6F8">
+                <a:alpha val="22000"/>
+              </a:srgbClr>
+            </a:solidFill>
+            <a:prstDash val="solid"/>
+          </a:ln>
+        </p:spPr>
+      </p:sp>
+      <p:sp>
+        <p:nvSpPr>
+          <p:cNvPr id="18" name="Shape 16"/>
+          <p:cNvSpPr/>
+          <p:nvPr/>
+        </p:nvSpPr>
+        <p:spPr>
+          <a:xfrm>
+            <a:off x="0" y="4572000"/>
+            <a:ext cx="12188952" cy="0"/>
+          </a:xfrm>
+          <a:prstGeom prst="line">
+            <a:avLst/>
+          </a:prstGeom>
+          <a:noFill/>
+          <a:ln w="6350">
+            <a:solidFill>
+              <a:srgbClr val="F4F6F8">
+                <a:alpha val="22000"/>
+              </a:srgbClr>
+            </a:solidFill>
+            <a:prstDash val="solid"/>
+          </a:ln>
+        </p:spPr>
+      </p:sp>
+      <p:sp>
+        <p:nvSpPr>
+          <p:cNvPr id="19" name="Shape 17"/>
+          <p:cNvSpPr/>
+          <p:nvPr/>
+        </p:nvSpPr>
+        <p:spPr>
+          <a:xfrm>
+            <a:off x="0" y="5486400"/>
+            <a:ext cx="12188952" cy="0"/>
+          </a:xfrm>
+          <a:prstGeom prst="line">
+            <a:avLst/>
+          </a:prstGeom>
+          <a:noFill/>
+          <a:ln w="6350">
+            <a:solidFill>
+              <a:srgbClr val="F4F6F8">
+                <a:alpha val="22000"/>
+              </a:srgbClr>
+            </a:solidFill>
+            <a:prstDash val="solid"/>
+          </a:ln>
+        </p:spPr>
+      </p:sp>
+      <p:sp>
+        <p:nvSpPr>
+          <p:cNvPr id="20" name="Shape 18"/>
+          <p:cNvSpPr/>
+          <p:nvPr/>
+        </p:nvSpPr>
+        <p:spPr>
+          <a:xfrm>
+            <a:off x="0" y="6400800"/>
+            <a:ext cx="12188952" cy="0"/>
+          </a:xfrm>
+          <a:prstGeom prst="line">
+            <a:avLst/>
+          </a:prstGeom>
+          <a:noFill/>
+          <a:ln w="6350">
+            <a:solidFill>
+              <a:srgbClr val="F4F6F8">
+                <a:alpha val="22000"/>
+              </a:srgbClr>
+            </a:solidFill>
+            <a:prstDash val="solid"/>
+          </a:ln>
+        </p:spPr>
+      </p:sp>
+      <p:sp>
+        <p:nvSpPr>
+          <p:cNvPr id="21" name="Text 19"/>
+          <p:cNvSpPr/>
+          <p:nvPr/>
+        </p:nvSpPr>
+        <p:spPr>
+          <a:xfrm>
+            <a:off x="658368" y="2121408"/>
+            <a:ext cx="1828800" cy="365760"/>
+          </a:xfrm>
+          <a:prstGeom prst="rect">
+            <a:avLst/>
+          </a:prstGeom>
+          <a:noFill/>
+          <a:ln/>
+        </p:spPr>
+        <p:txBody>
+          <a:bodyPr wrap="square" lIns="0" tIns="0" rIns="0" bIns="0" rtlCol="0" anchor="ctr"/>
+          <a:lstStyle/>
+          <a:p>
+            <a:pPr indent="0" marL="0">
+              <a:buNone/>
+            </a:pPr>
+            <a:r>
+              <a:rPr lang="en-US" sz="1300" spc="300" kern="0" dirty="0">
+                <a:solidFill>
+                  <a:srgbClr val="C8282C"/>
+                </a:solidFill>
+                <a:latin typeface="IBM Plex Mono" pitchFamily="34" charset="0"/>
+                <a:ea typeface="IBM Plex Mono" pitchFamily="34" charset="-122"/>
+                <a:cs typeface="IBM Plex Mono" pitchFamily="34" charset="-120"/>
+              </a:rPr>
+              <a:t>I</a:t>
+            </a:r>
+            <a:endParaRPr lang="en-US" sz="1300" dirty="0"/>
+          </a:p>
+        </p:txBody>
+      </p:sp>
+      <p:sp>
+        <p:nvSpPr>
+          <p:cNvPr id="22" name="Text 20"/>
+          <p:cNvSpPr/>
+          <p:nvPr/>
+        </p:nvSpPr>
+        <p:spPr>
+          <a:xfrm>
+            <a:off x="658368" y="2615184"/>
+            <a:ext cx="8778240" cy="1097280"/>
+          </a:xfrm>
+          <a:prstGeom prst="rect">
+            <a:avLst/>
+          </a:prstGeom>
+          <a:noFill/>
+          <a:ln/>
+        </p:spPr>
+        <p:txBody>
+          <a:bodyPr wrap="square" lIns="0" tIns="0" rIns="0" bIns="0" rtlCol="0" anchor="t"/>
+          <a:lstStyle/>
+          <a:p>
+            <a:pPr indent="0" marL="0">
+              <a:buNone/>
+            </a:pPr>
+            <a:r>
+              <a:rPr lang="en-US" sz="4000" b="1" dirty="0">
+                <a:solidFill>
+                  <a:srgbClr val="F4F6F8"/>
+                </a:solidFill>
+                <a:latin typeface="Fraunces" pitchFamily="34" charset="0"/>
+                <a:ea typeface="Fraunces" pitchFamily="34" charset="-122"/>
+                <a:cs typeface="Fraunces" pitchFamily="34" charset="-120"/>
+              </a:rPr>
+              <a:t>Ce sur quoi cela repose</a:t>
+            </a:r>
+            <a:endParaRPr lang="en-US" sz="4000" dirty="0"/>
+          </a:p>
+        </p:txBody>
+      </p:sp>
+      <p:sp>
+        <p:nvSpPr>
+          <p:cNvPr id="23" name="Text 21"/>
+          <p:cNvSpPr/>
+          <p:nvPr/>
+        </p:nvSpPr>
+        <p:spPr>
+          <a:xfrm>
+            <a:off x="658368" y="3822192"/>
+            <a:ext cx="7680960" cy="1097280"/>
+          </a:xfrm>
+          <a:prstGeom prst="rect">
+            <a:avLst/>
+          </a:prstGeom>
+          <a:noFill/>
+          <a:ln/>
+        </p:spPr>
+        <p:txBody>
+          <a:bodyPr wrap="square" lIns="0" tIns="0" rIns="0" bIns="0" rtlCol="0" anchor="t"/>
+          <a:lstStyle/>
+          <a:p>
+            <a:pPr indent="0" marL="0">
+              <a:lnSpc>
+                <a:spcPct val="130000"/>
+              </a:lnSpc>
+              <a:buNone/>
+            </a:pPr>
+            <a:r>
+              <a:rPr lang="en-US" sz="1600" dirty="0">
+                <a:solidFill>
+                  <a:srgbClr val="D3DBE1"/>
+                </a:solidFill>
+                <a:latin typeface="Inter" pitchFamily="34" charset="0"/>
+                <a:ea typeface="Inter" pitchFamily="34" charset="-122"/>
+                <a:cs typeface="Inter" pitchFamily="34" charset="-120"/>
+              </a:rPr>
+              <a:t>Pas un cabinet qui recommence sa recherche à chaque dossier : une base de corridors que nous tenons, et des méthodes qui s’y appliquent.</a:t>
+            </a:r>
+            <a:endParaRPr lang="en-US" sz="1600" dirty="0"/>
+          </a:p>
+        </p:txBody>
+      </p:sp>
+      <p:sp>
+        <p:nvSpPr>
+          <p:cNvPr id="24" name="Text 22"/>
+          <p:cNvSpPr/>
+          <p:nvPr/>
+        </p:nvSpPr>
+        <p:spPr>
+          <a:xfrm>
+            <a:off x="10433304" y="6144768"/>
+            <a:ext cx="1097280" cy="274320"/>
+          </a:xfrm>
+          <a:prstGeom prst="rect">
+            <a:avLst/>
+          </a:prstGeom>
+          <a:noFill/>
+          <a:ln/>
+        </p:spPr>
+        <p:txBody>
+          <a:bodyPr wrap="square" lIns="0" tIns="0" rIns="0" bIns="0" rtlCol="0" anchor="ctr"/>
+          <a:lstStyle/>
+          <a:p>
+            <a:pPr algn="r" indent="0" marL="0">
+              <a:buNone/>
+            </a:pPr>
+            <a:r>
+              <a:rPr lang="en-US" sz="1000" dirty="0">
+                <a:solidFill>
+                  <a:srgbClr val="BFCAD3"/>
+                </a:solidFill>
+                <a:latin typeface="IBM Plex Mono" pitchFamily="34" charset="0"/>
+                <a:ea typeface="IBM Plex Mono" pitchFamily="34" charset="-122"/>
+                <a:cs typeface="IBM Plex Mono" pitchFamily="34" charset="-120"/>
+              </a:rPr>
+              <a:t>04 / 15</a:t>
+            </a:r>
+            <a:endParaRPr lang="en-US" sz="1000" dirty="0"/>
+          </a:p>
+        </p:txBody>
+      </p:sp>
+    </p:spTree>
+  </p:cSld>
+  <p:clrMapOvr>
+    <a:masterClrMapping/>
+  </p:clrMapOvr>
+</p:sld>
+</file>
+
+<file path=ppt/slides/slide5.xml><?xml version="1.0" encoding="utf-8"?>
+<p:sld xmlns:a="http://schemas.openxmlformats.org/drawingml/2006/main" xmlns:r="http://schemas.openxmlformats.org/officeDocument/2006/relationships" xmlns:p="http://schemas.openxmlformats.org/presentationml/2006/main">
+  <p:cSld name="Slide 5">
     <p:bg>
       <p:bgPr>
         <a:solidFill>
@@ -9759,13 +10453,13 @@
             <a:r>
               <a:rPr lang="en-US" sz="1000" spc="160" kern="0" dirty="0">
                 <a:solidFill>
-                  <a:srgbClr val="C8282C"/>
+                  <a:srgbClr val="5C6875"/>
                 </a:solidFill>
                 <a:latin typeface="IBM Plex Mono" pitchFamily="34" charset="0"/>
                 <a:ea typeface="IBM Plex Mono" pitchFamily="34" charset="-122"/>
                 <a:cs typeface="IBM Plex Mono" pitchFamily="34" charset="-120"/>
               </a:rPr>
-              <a:t>LE DÉPLACEMENT</a:t>
+              <a:t>LE SOCLE</a:t>
             </a:r>
             <a:endParaRPr lang="en-US" sz="1000" dirty="0"/>
           </a:p>
@@ -9773,24 +10467,64 @@
       </p:sp>
       <p:sp>
         <p:nvSpPr>
-          <p:cNvPr id="3" name="Shape 1"/>
-          <p:cNvSpPr/>
-          <p:nvPr/>
-        </p:nvSpPr>
-        <p:spPr>
-          <a:xfrm>
-            <a:off x="658368" y="1371600"/>
-            <a:ext cx="10872216" cy="3200400"/>
-          </a:xfrm>
-          <a:prstGeom prst="rect">
-            <a:avLst/>
-          </a:prstGeom>
-          <a:solidFill>
-            <a:srgbClr val="FCFDFE"/>
-          </a:solidFill>
+          <p:cNvPr id="3" name="Text 1"/>
+          <p:cNvSpPr/>
+          <p:nvPr/>
+        </p:nvSpPr>
+        <p:spPr>
+          <a:xfrm>
+            <a:off x="658368" y="786384"/>
+            <a:ext cx="10872216" cy="1207008"/>
+          </a:xfrm>
+          <a:prstGeom prst="rect">
+            <a:avLst/>
+          </a:prstGeom>
+          <a:noFill/>
+          <a:ln/>
+        </p:spPr>
+        <p:txBody>
+          <a:bodyPr wrap="square" lIns="0" tIns="0" rIns="0" bIns="0" rtlCol="0" anchor="t"/>
+          <a:lstStyle/>
+          <a:p>
+            <a:pPr indent="0" marL="0">
+              <a:lnSpc>
+                <a:spcPct val="105000"/>
+              </a:lnSpc>
+              <a:buNone/>
+            </a:pPr>
+            <a:r>
+              <a:rPr lang="en-US" sz="3400" b="1" dirty="0">
+                <a:solidFill>
+                  <a:srgbClr val="141C26"/>
+                </a:solidFill>
+                <a:latin typeface="Fraunces" pitchFamily="34" charset="0"/>
+                <a:ea typeface="Fraunces" pitchFamily="34" charset="-122"/>
+                <a:cs typeface="Fraunces" pitchFamily="34" charset="-120"/>
+              </a:rPr>
+              <a:t>Une base de données, pas une veille</a:t>
+            </a:r>
+            <a:endParaRPr lang="en-US" sz="3400" dirty="0"/>
+          </a:p>
+        </p:txBody>
+      </p:sp>
+      <p:sp>
+        <p:nvSpPr>
+          <p:cNvPr id="4" name="Shape 2"/>
+          <p:cNvSpPr/>
+          <p:nvPr/>
+        </p:nvSpPr>
+        <p:spPr>
+          <a:xfrm>
+            <a:off x="658368" y="2926080"/>
+            <a:ext cx="3380232" cy="0"/>
+          </a:xfrm>
+          <a:prstGeom prst="line">
+            <a:avLst/>
+          </a:prstGeom>
+          <a:noFill/>
           <a:ln w="12700">
             <a:solidFill>
-              <a:srgbClr val="D3DBE1"/>
+              <a:srgbClr val="BFCAD3"/>
             </a:solidFill>
             <a:prstDash val="solid"/>
           </a:ln>
@@ -9798,24 +10532,100 @@
       </p:sp>
       <p:sp>
         <p:nvSpPr>
-          <p:cNvPr id="4" name="Shape 2"/>
-          <p:cNvSpPr/>
-          <p:nvPr/>
-        </p:nvSpPr>
-        <p:spPr>
-          <a:xfrm>
-            <a:off x="1133856" y="1828800"/>
-            <a:ext cx="155448" cy="155448"/>
-          </a:xfrm>
-          <a:prstGeom prst="diamond">
-            <a:avLst/>
-          </a:prstGeom>
-          <a:solidFill>
-            <a:srgbClr val="0F3C4E"/>
-          </a:solidFill>
+          <p:cNvPr id="5" name="Text 3"/>
+          <p:cNvSpPr/>
+          <p:nvPr/>
+        </p:nvSpPr>
+        <p:spPr>
+          <a:xfrm>
+            <a:off x="658368" y="3145536"/>
+            <a:ext cx="3380232" cy="1051560"/>
+          </a:xfrm>
+          <a:prstGeom prst="rect">
+            <a:avLst/>
+          </a:prstGeom>
+          <a:noFill/>
+          <a:ln/>
+        </p:spPr>
+        <p:txBody>
+          <a:bodyPr wrap="square" lIns="0" tIns="0" rIns="0" bIns="0" rtlCol="0" anchor="t"/>
+          <a:lstStyle/>
+          <a:p>
+            <a:pPr indent="0" marL="0">
+              <a:buNone/>
+            </a:pPr>
+            <a:r>
+              <a:rPr lang="en-US" sz="5400" b="1" dirty="0">
+                <a:solidFill>
+                  <a:srgbClr val="0F3C4E"/>
+                </a:solidFill>
+                <a:latin typeface="Fraunces" pitchFamily="34" charset="0"/>
+                <a:ea typeface="Fraunces" pitchFamily="34" charset="-122"/>
+                <a:cs typeface="Fraunces" pitchFamily="34" charset="-120"/>
+              </a:rPr>
+              <a:t>313</a:t>
+            </a:r>
+            <a:endParaRPr lang="en-US" sz="5400" dirty="0"/>
+          </a:p>
+        </p:txBody>
+      </p:sp>
+      <p:sp>
+        <p:nvSpPr>
+          <p:cNvPr id="6" name="Text 4"/>
+          <p:cNvSpPr/>
+          <p:nvPr/>
+        </p:nvSpPr>
+        <p:spPr>
+          <a:xfrm>
+            <a:off x="658368" y="4242816"/>
+            <a:ext cx="3380232" cy="274320"/>
+          </a:xfrm>
+          <a:prstGeom prst="rect">
+            <a:avLst/>
+          </a:prstGeom>
+          <a:noFill/>
+          <a:ln/>
+        </p:spPr>
+        <p:txBody>
+          <a:bodyPr wrap="square" lIns="0" tIns="0" rIns="0" bIns="0" rtlCol="0" anchor="ctr"/>
+          <a:lstStyle/>
+          <a:p>
+            <a:pPr indent="0" marL="0">
+              <a:buNone/>
+            </a:pPr>
+            <a:r>
+              <a:rPr lang="en-US" sz="1000" spc="140" kern="0" dirty="0">
+                <a:solidFill>
+                  <a:srgbClr val="C8282C"/>
+                </a:solidFill>
+                <a:latin typeface="IBM Plex Mono" pitchFamily="34" charset="0"/>
+                <a:ea typeface="IBM Plex Mono" pitchFamily="34" charset="-122"/>
+                <a:cs typeface="IBM Plex Mono" pitchFamily="34" charset="-120"/>
+              </a:rPr>
+              <a:t>OBJETS RECENSÉS</a:t>
+            </a:r>
+            <a:endParaRPr lang="en-US" sz="1000" dirty="0"/>
+          </a:p>
+        </p:txBody>
+      </p:sp>
+      <p:sp>
+        <p:nvSpPr>
+          <p:cNvPr id="7" name="Shape 5"/>
+          <p:cNvSpPr/>
+          <p:nvPr/>
+        </p:nvSpPr>
+        <p:spPr>
+          <a:xfrm>
+            <a:off x="4404360" y="2926080"/>
+            <a:ext cx="3380232" cy="0"/>
+          </a:xfrm>
+          <a:prstGeom prst="line">
+            <a:avLst/>
+          </a:prstGeom>
+          <a:noFill/>
           <a:ln w="12700">
             <a:solidFill>
-              <a:srgbClr val="0F3C4E"/>
+              <a:srgbClr val="BFCAD3"/>
             </a:solidFill>
             <a:prstDash val="solid"/>
           </a:ln>
@@ -9823,14 +10633,14 @@
       </p:sp>
       <p:sp>
         <p:nvSpPr>
-          <p:cNvPr id="5" name="Text 3"/>
-          <p:cNvSpPr/>
-          <p:nvPr/>
-        </p:nvSpPr>
-        <p:spPr>
-          <a:xfrm>
-            <a:off x="1133856" y="2212848"/>
-            <a:ext cx="9409176" cy="1371600"/>
+          <p:cNvPr id="8" name="Text 6"/>
+          <p:cNvSpPr/>
+          <p:nvPr/>
+        </p:nvSpPr>
+        <p:spPr>
+          <a:xfrm>
+            <a:off x="4404360" y="3145536"/>
+            <a:ext cx="3380232" cy="1051560"/>
           </a:xfrm>
           <a:prstGeom prst="rect">
             <a:avLst/>
@@ -9843,36 +10653,33 @@
           <a:lstStyle/>
           <a:p>
             <a:pPr indent="0" marL="0">
-              <a:lnSpc>
-                <a:spcPct val="112000"/>
-              </a:lnSpc>
               <a:buNone/>
             </a:pPr>
             <a:r>
-              <a:rPr lang="en-US" sz="2800" b="1" dirty="0">
-                <a:solidFill>
-                  <a:srgbClr val="141C26"/>
+              <a:rPr lang="en-US" sz="5400" b="1" dirty="0">
+                <a:solidFill>
+                  <a:srgbClr val="0F3C4E"/>
                 </a:solidFill>
                 <a:latin typeface="Fraunces" pitchFamily="34" charset="0"/>
                 <a:ea typeface="Fraunces" pitchFamily="34" charset="-122"/>
                 <a:cs typeface="Fraunces" pitchFamily="34" charset="-120"/>
               </a:rPr>
-              <a:t>Dépendance visible n’est pas dépendance critique. Ce qui casse une activité est presque toujours au second rang.</a:t>
-            </a:r>
-            <a:endParaRPr lang="en-US" sz="2800" dirty="0"/>
-          </a:p>
-        </p:txBody>
-      </p:sp>
-      <p:sp>
-        <p:nvSpPr>
-          <p:cNvPr id="6" name="Text 4"/>
-          <p:cNvSpPr/>
-          <p:nvPr/>
-        </p:nvSpPr>
-        <p:spPr>
-          <a:xfrm>
-            <a:off x="1133856" y="3602736"/>
-            <a:ext cx="9409176" cy="786384"/>
+              <a:t>190</a:t>
+            </a:r>
+            <a:endParaRPr lang="en-US" sz="5400" dirty="0"/>
+          </a:p>
+        </p:txBody>
+      </p:sp>
+      <p:sp>
+        <p:nvSpPr>
+          <p:cNvPr id="9" name="Text 7"/>
+          <p:cNvSpPr/>
+          <p:nvPr/>
+        </p:nvSpPr>
+        <p:spPr>
+          <a:xfrm>
+            <a:off x="4404360" y="4242816"/>
+            <a:ext cx="3380232" cy="274320"/>
           </a:xfrm>
           <a:prstGeom prst="rect">
             <a:avLst/>
@@ -9881,17 +10688,154 @@
           <a:ln/>
         </p:spPr>
         <p:txBody>
+          <a:bodyPr wrap="square" lIns="0" tIns="0" rIns="0" bIns="0" rtlCol="0" anchor="ctr"/>
+          <a:lstStyle/>
+          <a:p>
+            <a:pPr indent="0" marL="0">
+              <a:buNone/>
+            </a:pPr>
+            <a:r>
+              <a:rPr lang="en-US" sz="1000" spc="140" kern="0" dirty="0">
+                <a:solidFill>
+                  <a:srgbClr val="C8282C"/>
+                </a:solidFill>
+                <a:latin typeface="IBM Plex Mono" pitchFamily="34" charset="0"/>
+                <a:ea typeface="IBM Plex Mono" pitchFamily="34" charset="-122"/>
+                <a:cs typeface="IBM Plex Mono" pitchFamily="34" charset="-120"/>
+              </a:rPr>
+              <a:t>SOURCES AU REGISTRE</a:t>
+            </a:r>
+            <a:endParaRPr lang="en-US" sz="1000" dirty="0"/>
+          </a:p>
+        </p:txBody>
+      </p:sp>
+      <p:sp>
+        <p:nvSpPr>
+          <p:cNvPr id="10" name="Shape 8"/>
+          <p:cNvSpPr/>
+          <p:nvPr/>
+        </p:nvSpPr>
+        <p:spPr>
+          <a:xfrm>
+            <a:off x="8150352" y="2926080"/>
+            <a:ext cx="3380232" cy="0"/>
+          </a:xfrm>
+          <a:prstGeom prst="line">
+            <a:avLst/>
+          </a:prstGeom>
+          <a:noFill/>
+          <a:ln w="12700">
+            <a:solidFill>
+              <a:srgbClr val="BFCAD3"/>
+            </a:solidFill>
+            <a:prstDash val="solid"/>
+          </a:ln>
+        </p:spPr>
+      </p:sp>
+      <p:sp>
+        <p:nvSpPr>
+          <p:cNvPr id="11" name="Text 9"/>
+          <p:cNvSpPr/>
+          <p:nvPr/>
+        </p:nvSpPr>
+        <p:spPr>
+          <a:xfrm>
+            <a:off x="8150352" y="3145536"/>
+            <a:ext cx="3380232" cy="1051560"/>
+          </a:xfrm>
+          <a:prstGeom prst="rect">
+            <a:avLst/>
+          </a:prstGeom>
+          <a:noFill/>
+          <a:ln/>
+        </p:spPr>
+        <p:txBody>
           <a:bodyPr wrap="square" lIns="0" tIns="0" rIns="0" bIns="0" rtlCol="0" anchor="t"/>
           <a:lstStyle/>
           <a:p>
             <a:pPr indent="0" marL="0">
-              <a:lnSpc>
-                <a:spcPct val="125000"/>
-              </a:lnSpc>
               <a:buNone/>
             </a:pPr>
             <a:r>
-              <a:rPr lang="en-US" sz="1500" dirty="0">
+              <a:rPr lang="en-US" sz="5400" b="1" dirty="0">
+                <a:solidFill>
+                  <a:srgbClr val="0F3C4E"/>
+                </a:solidFill>
+                <a:latin typeface="Fraunces" pitchFamily="34" charset="0"/>
+                <a:ea typeface="Fraunces" pitchFamily="34" charset="-122"/>
+                <a:cs typeface="Fraunces" pitchFamily="34" charset="-120"/>
+              </a:rPr>
+              <a:t>15</a:t>
+            </a:r>
+            <a:endParaRPr lang="en-US" sz="5400" dirty="0"/>
+          </a:p>
+        </p:txBody>
+      </p:sp>
+      <p:sp>
+        <p:nvSpPr>
+          <p:cNvPr id="12" name="Text 10"/>
+          <p:cNvSpPr/>
+          <p:nvPr/>
+        </p:nvSpPr>
+        <p:spPr>
+          <a:xfrm>
+            <a:off x="8150352" y="4242816"/>
+            <a:ext cx="3380232" cy="274320"/>
+          </a:xfrm>
+          <a:prstGeom prst="rect">
+            <a:avLst/>
+          </a:prstGeom>
+          <a:noFill/>
+          <a:ln/>
+        </p:spPr>
+        <p:txBody>
+          <a:bodyPr wrap="square" lIns="0" tIns="0" rIns="0" bIns="0" rtlCol="0" anchor="ctr"/>
+          <a:lstStyle/>
+          <a:p>
+            <a:pPr indent="0" marL="0">
+              <a:buNone/>
+            </a:pPr>
+            <a:r>
+              <a:rPr lang="en-US" sz="1000" spc="140" kern="0" dirty="0">
+                <a:solidFill>
+                  <a:srgbClr val="C8282C"/>
+                </a:solidFill>
+                <a:latin typeface="IBM Plex Mono" pitchFamily="34" charset="0"/>
+                <a:ea typeface="IBM Plex Mono" pitchFamily="34" charset="-122"/>
+                <a:cs typeface="IBM Plex Mono" pitchFamily="34" charset="-120"/>
+              </a:rPr>
+              <a:t>MOTEURS DÉRIVÉS</a:t>
+            </a:r>
+            <a:endParaRPr lang="en-US" sz="1000" dirty="0"/>
+          </a:p>
+        </p:txBody>
+      </p:sp>
+      <p:sp>
+        <p:nvSpPr>
+          <p:cNvPr id="13" name="Text 11"/>
+          <p:cNvSpPr/>
+          <p:nvPr/>
+        </p:nvSpPr>
+        <p:spPr>
+          <a:xfrm>
+            <a:off x="658368" y="5815584"/>
+            <a:ext cx="9774936" cy="548640"/>
+          </a:xfrm>
+          <a:prstGeom prst="rect">
+            <a:avLst/>
+          </a:prstGeom>
+          <a:noFill/>
+          <a:ln/>
+        </p:spPr>
+        <p:txBody>
+          <a:bodyPr wrap="square" lIns="0" tIns="0" rIns="0" bIns="0" rtlCol="0" anchor="b"/>
+          <a:lstStyle/>
+          <a:p>
+            <a:pPr indent="0" marL="0">
+              <a:buNone/>
+            </a:pPr>
+            <a:r>
+              <a:rPr lang="en-US" sz="1000" i="1" dirty="0">
                 <a:solidFill>
                   <a:srgbClr val="5C6875"/>
                 </a:solidFill>
@@ -9899,15 +10843,15 @@
                 <a:ea typeface="Inter" pitchFamily="34" charset="-122"/>
                 <a:cs typeface="Inter" pitchFamily="34" charset="-120"/>
               </a:rPr>
-              <a:t>Le fournisseur déclaré est rarement le nœud contraignant. Derrière lui : un détroit, un régulateur, un assureur, une usine unique — et c’est là que se joue la rupture.</a:t>
-            </a:r>
-            <a:endParaRPr lang="en-US" sz="1500" dirty="0"/>
-          </a:p>
-        </p:txBody>
-      </p:sp>
-      <p:sp>
-        <p:nvSpPr>
-          <p:cNvPr id="7" name="Text 5"/>
+              <a:t>Recensé n’est pas validé : la promotion en priorité P0 exige des preuves sourcées et une validation humaine. Le détail de la méthode fait l’objet d’une plaquette dédiée.</a:t>
+            </a:r>
+            <a:endParaRPr lang="en-US" sz="1000" dirty="0"/>
+          </a:p>
+        </p:txBody>
+      </p:sp>
+      <p:sp>
+        <p:nvSpPr>
+          <p:cNvPr id="14" name="Text 12"/>
           <p:cNvSpPr/>
           <p:nvPr/>
         </p:nvSpPr>
@@ -9938,673 +10882,7 @@
                 <a:ea typeface="IBM Plex Mono" pitchFamily="34" charset="-122"/>
                 <a:cs typeface="IBM Plex Mono" pitchFamily="34" charset="-120"/>
               </a:rPr>
-              <a:t>04 / 16</a:t>
-            </a:r>
-            <a:endParaRPr lang="en-US" sz="1000" dirty="0"/>
-          </a:p>
-        </p:txBody>
-      </p:sp>
-    </p:spTree>
-  </p:cSld>
-  <p:clrMapOvr>
-    <a:masterClrMapping/>
-  </p:clrMapOvr>
-</p:sld>
-</file>
-
-<file path=ppt/slides/slide5.xml><?xml version="1.0" encoding="utf-8"?>
-<p:sld xmlns:a="http://schemas.openxmlformats.org/drawingml/2006/main" xmlns:r="http://schemas.openxmlformats.org/officeDocument/2006/relationships" xmlns:p="http://schemas.openxmlformats.org/presentationml/2006/main">
-  <p:cSld name="Slide 5">
-    <p:bg>
-      <p:bgPr>
-        <a:solidFill>
-          <a:srgbClr val="0F3C4E"/>
-        </a:solidFill>
-      </p:bgPr>
-    </p:bg>
-    <p:spTree>
-      <p:nvGrpSpPr>
-        <p:cNvPr id="1" name=""/>
-        <p:cNvGrpSpPr/>
-        <p:nvPr/>
-      </p:nvGrpSpPr>
-      <p:grpSpPr>
-        <a:xfrm>
-          <a:off x="0" y="0"/>
-          <a:ext cx="0" cy="0"/>
-          <a:chOff x="0" y="0"/>
-          <a:chExt cx="0" cy="0"/>
-        </a:xfrm>
-      </p:grpSpPr>
-      <p:sp>
-        <p:nvSpPr>
-          <p:cNvPr id="2" name="Shape 0"/>
-          <p:cNvSpPr/>
-          <p:nvPr/>
-        </p:nvSpPr>
-        <p:spPr>
-          <a:xfrm>
-            <a:off x="914400" y="0"/>
-            <a:ext cx="0" cy="6858000"/>
-          </a:xfrm>
-          <a:prstGeom prst="line">
-            <a:avLst/>
-          </a:prstGeom>
-          <a:noFill/>
-          <a:ln w="6350">
-            <a:solidFill>
-              <a:srgbClr val="F4F6F8">
-                <a:alpha val="22000"/>
-              </a:srgbClr>
-            </a:solidFill>
-            <a:prstDash val="solid"/>
-          </a:ln>
-        </p:spPr>
-      </p:sp>
-      <p:sp>
-        <p:nvSpPr>
-          <p:cNvPr id="3" name="Shape 1"/>
-          <p:cNvSpPr/>
-          <p:nvPr/>
-        </p:nvSpPr>
-        <p:spPr>
-          <a:xfrm>
-            <a:off x="1828800" y="0"/>
-            <a:ext cx="0" cy="6858000"/>
-          </a:xfrm>
-          <a:prstGeom prst="line">
-            <a:avLst/>
-          </a:prstGeom>
-          <a:noFill/>
-          <a:ln w="6350">
-            <a:solidFill>
-              <a:srgbClr val="F4F6F8">
-                <a:alpha val="22000"/>
-              </a:srgbClr>
-            </a:solidFill>
-            <a:prstDash val="solid"/>
-          </a:ln>
-        </p:spPr>
-      </p:sp>
-      <p:sp>
-        <p:nvSpPr>
-          <p:cNvPr id="4" name="Shape 2"/>
-          <p:cNvSpPr/>
-          <p:nvPr/>
-        </p:nvSpPr>
-        <p:spPr>
-          <a:xfrm>
-            <a:off x="2743200" y="0"/>
-            <a:ext cx="0" cy="6858000"/>
-          </a:xfrm>
-          <a:prstGeom prst="line">
-            <a:avLst/>
-          </a:prstGeom>
-          <a:noFill/>
-          <a:ln w="6350">
-            <a:solidFill>
-              <a:srgbClr val="F4F6F8">
-                <a:alpha val="22000"/>
-              </a:srgbClr>
-            </a:solidFill>
-            <a:prstDash val="solid"/>
-          </a:ln>
-        </p:spPr>
-      </p:sp>
-      <p:sp>
-        <p:nvSpPr>
-          <p:cNvPr id="5" name="Shape 3"/>
-          <p:cNvSpPr/>
-          <p:nvPr/>
-        </p:nvSpPr>
-        <p:spPr>
-          <a:xfrm>
-            <a:off x="3657600" y="0"/>
-            <a:ext cx="0" cy="6858000"/>
-          </a:xfrm>
-          <a:prstGeom prst="line">
-            <a:avLst/>
-          </a:prstGeom>
-          <a:noFill/>
-          <a:ln w="6350">
-            <a:solidFill>
-              <a:srgbClr val="F4F6F8">
-                <a:alpha val="22000"/>
-              </a:srgbClr>
-            </a:solidFill>
-            <a:prstDash val="solid"/>
-          </a:ln>
-        </p:spPr>
-      </p:sp>
-      <p:sp>
-        <p:nvSpPr>
-          <p:cNvPr id="6" name="Shape 4"/>
-          <p:cNvSpPr/>
-          <p:nvPr/>
-        </p:nvSpPr>
-        <p:spPr>
-          <a:xfrm>
-            <a:off x="4572000" y="0"/>
-            <a:ext cx="0" cy="6858000"/>
-          </a:xfrm>
-          <a:prstGeom prst="line">
-            <a:avLst/>
-          </a:prstGeom>
-          <a:noFill/>
-          <a:ln w="6350">
-            <a:solidFill>
-              <a:srgbClr val="F4F6F8">
-                <a:alpha val="22000"/>
-              </a:srgbClr>
-            </a:solidFill>
-            <a:prstDash val="solid"/>
-          </a:ln>
-        </p:spPr>
-      </p:sp>
-      <p:sp>
-        <p:nvSpPr>
-          <p:cNvPr id="7" name="Shape 5"/>
-          <p:cNvSpPr/>
-          <p:nvPr/>
-        </p:nvSpPr>
-        <p:spPr>
-          <a:xfrm>
-            <a:off x="5486400" y="0"/>
-            <a:ext cx="0" cy="6858000"/>
-          </a:xfrm>
-          <a:prstGeom prst="line">
-            <a:avLst/>
-          </a:prstGeom>
-          <a:noFill/>
-          <a:ln w="6350">
-            <a:solidFill>
-              <a:srgbClr val="F4F6F8">
-                <a:alpha val="22000"/>
-              </a:srgbClr>
-            </a:solidFill>
-            <a:prstDash val="solid"/>
-          </a:ln>
-        </p:spPr>
-      </p:sp>
-      <p:sp>
-        <p:nvSpPr>
-          <p:cNvPr id="8" name="Shape 6"/>
-          <p:cNvSpPr/>
-          <p:nvPr/>
-        </p:nvSpPr>
-        <p:spPr>
-          <a:xfrm>
-            <a:off x="6400800" y="0"/>
-            <a:ext cx="0" cy="6858000"/>
-          </a:xfrm>
-          <a:prstGeom prst="line">
-            <a:avLst/>
-          </a:prstGeom>
-          <a:noFill/>
-          <a:ln w="6350">
-            <a:solidFill>
-              <a:srgbClr val="F4F6F8">
-                <a:alpha val="22000"/>
-              </a:srgbClr>
-            </a:solidFill>
-            <a:prstDash val="solid"/>
-          </a:ln>
-        </p:spPr>
-      </p:sp>
-      <p:sp>
-        <p:nvSpPr>
-          <p:cNvPr id="9" name="Shape 7"/>
-          <p:cNvSpPr/>
-          <p:nvPr/>
-        </p:nvSpPr>
-        <p:spPr>
-          <a:xfrm>
-            <a:off x="7315200" y="0"/>
-            <a:ext cx="0" cy="6858000"/>
-          </a:xfrm>
-          <a:prstGeom prst="line">
-            <a:avLst/>
-          </a:prstGeom>
-          <a:noFill/>
-          <a:ln w="6350">
-            <a:solidFill>
-              <a:srgbClr val="F4F6F8">
-                <a:alpha val="22000"/>
-              </a:srgbClr>
-            </a:solidFill>
-            <a:prstDash val="solid"/>
-          </a:ln>
-        </p:spPr>
-      </p:sp>
-      <p:sp>
-        <p:nvSpPr>
-          <p:cNvPr id="10" name="Shape 8"/>
-          <p:cNvSpPr/>
-          <p:nvPr/>
-        </p:nvSpPr>
-        <p:spPr>
-          <a:xfrm>
-            <a:off x="8229600" y="0"/>
-            <a:ext cx="0" cy="6858000"/>
-          </a:xfrm>
-          <a:prstGeom prst="line">
-            <a:avLst/>
-          </a:prstGeom>
-          <a:noFill/>
-          <a:ln w="6350">
-            <a:solidFill>
-              <a:srgbClr val="F4F6F8">
-                <a:alpha val="22000"/>
-              </a:srgbClr>
-            </a:solidFill>
-            <a:prstDash val="solid"/>
-          </a:ln>
-        </p:spPr>
-      </p:sp>
-      <p:sp>
-        <p:nvSpPr>
-          <p:cNvPr id="11" name="Shape 9"/>
-          <p:cNvSpPr/>
-          <p:nvPr/>
-        </p:nvSpPr>
-        <p:spPr>
-          <a:xfrm>
-            <a:off x="9144000" y="0"/>
-            <a:ext cx="0" cy="6858000"/>
-          </a:xfrm>
-          <a:prstGeom prst="line">
-            <a:avLst/>
-          </a:prstGeom>
-          <a:noFill/>
-          <a:ln w="6350">
-            <a:solidFill>
-              <a:srgbClr val="F4F6F8">
-                <a:alpha val="22000"/>
-              </a:srgbClr>
-            </a:solidFill>
-            <a:prstDash val="solid"/>
-          </a:ln>
-        </p:spPr>
-      </p:sp>
-      <p:sp>
-        <p:nvSpPr>
-          <p:cNvPr id="12" name="Shape 10"/>
-          <p:cNvSpPr/>
-          <p:nvPr/>
-        </p:nvSpPr>
-        <p:spPr>
-          <a:xfrm>
-            <a:off x="10058400" y="0"/>
-            <a:ext cx="0" cy="6858000"/>
-          </a:xfrm>
-          <a:prstGeom prst="line">
-            <a:avLst/>
-          </a:prstGeom>
-          <a:noFill/>
-          <a:ln w="6350">
-            <a:solidFill>
-              <a:srgbClr val="F4F6F8">
-                <a:alpha val="22000"/>
-              </a:srgbClr>
-            </a:solidFill>
-            <a:prstDash val="solid"/>
-          </a:ln>
-        </p:spPr>
-      </p:sp>
-      <p:sp>
-        <p:nvSpPr>
-          <p:cNvPr id="13" name="Shape 11"/>
-          <p:cNvSpPr/>
-          <p:nvPr/>
-        </p:nvSpPr>
-        <p:spPr>
-          <a:xfrm>
-            <a:off x="10972800" y="0"/>
-            <a:ext cx="0" cy="6858000"/>
-          </a:xfrm>
-          <a:prstGeom prst="line">
-            <a:avLst/>
-          </a:prstGeom>
-          <a:noFill/>
-          <a:ln w="6350">
-            <a:solidFill>
-              <a:srgbClr val="F4F6F8">
-                <a:alpha val="22000"/>
-              </a:srgbClr>
-            </a:solidFill>
-            <a:prstDash val="solid"/>
-          </a:ln>
-        </p:spPr>
-      </p:sp>
-      <p:sp>
-        <p:nvSpPr>
-          <p:cNvPr id="14" name="Shape 12"/>
-          <p:cNvSpPr/>
-          <p:nvPr/>
-        </p:nvSpPr>
-        <p:spPr>
-          <a:xfrm>
-            <a:off x="0" y="914400"/>
-            <a:ext cx="12188952" cy="0"/>
-          </a:xfrm>
-          <a:prstGeom prst="line">
-            <a:avLst/>
-          </a:prstGeom>
-          <a:noFill/>
-          <a:ln w="6350">
-            <a:solidFill>
-              <a:srgbClr val="F4F6F8">
-                <a:alpha val="22000"/>
-              </a:srgbClr>
-            </a:solidFill>
-            <a:prstDash val="solid"/>
-          </a:ln>
-        </p:spPr>
-      </p:sp>
-      <p:sp>
-        <p:nvSpPr>
-          <p:cNvPr id="15" name="Shape 13"/>
-          <p:cNvSpPr/>
-          <p:nvPr/>
-        </p:nvSpPr>
-        <p:spPr>
-          <a:xfrm>
-            <a:off x="0" y="1828800"/>
-            <a:ext cx="12188952" cy="0"/>
-          </a:xfrm>
-          <a:prstGeom prst="line">
-            <a:avLst/>
-          </a:prstGeom>
-          <a:noFill/>
-          <a:ln w="6350">
-            <a:solidFill>
-              <a:srgbClr val="F4F6F8">
-                <a:alpha val="22000"/>
-              </a:srgbClr>
-            </a:solidFill>
-            <a:prstDash val="solid"/>
-          </a:ln>
-        </p:spPr>
-      </p:sp>
-      <p:sp>
-        <p:nvSpPr>
-          <p:cNvPr id="16" name="Shape 14"/>
-          <p:cNvSpPr/>
-          <p:nvPr/>
-        </p:nvSpPr>
-        <p:spPr>
-          <a:xfrm>
-            <a:off x="0" y="2743200"/>
-            <a:ext cx="12188952" cy="0"/>
-          </a:xfrm>
-          <a:prstGeom prst="line">
-            <a:avLst/>
-          </a:prstGeom>
-          <a:noFill/>
-          <a:ln w="6350">
-            <a:solidFill>
-              <a:srgbClr val="F4F6F8">
-                <a:alpha val="22000"/>
-              </a:srgbClr>
-            </a:solidFill>
-            <a:prstDash val="solid"/>
-          </a:ln>
-        </p:spPr>
-      </p:sp>
-      <p:sp>
-        <p:nvSpPr>
-          <p:cNvPr id="17" name="Shape 15"/>
-          <p:cNvSpPr/>
-          <p:nvPr/>
-        </p:nvSpPr>
-        <p:spPr>
-          <a:xfrm>
-            <a:off x="0" y="3657600"/>
-            <a:ext cx="12188952" cy="0"/>
-          </a:xfrm>
-          <a:prstGeom prst="line">
-            <a:avLst/>
-          </a:prstGeom>
-          <a:noFill/>
-          <a:ln w="6350">
-            <a:solidFill>
-              <a:srgbClr val="F4F6F8">
-                <a:alpha val="22000"/>
-              </a:srgbClr>
-            </a:solidFill>
-            <a:prstDash val="solid"/>
-          </a:ln>
-        </p:spPr>
-      </p:sp>
-      <p:sp>
-        <p:nvSpPr>
-          <p:cNvPr id="18" name="Shape 16"/>
-          <p:cNvSpPr/>
-          <p:nvPr/>
-        </p:nvSpPr>
-        <p:spPr>
-          <a:xfrm>
-            <a:off x="0" y="4572000"/>
-            <a:ext cx="12188952" cy="0"/>
-          </a:xfrm>
-          <a:prstGeom prst="line">
-            <a:avLst/>
-          </a:prstGeom>
-          <a:noFill/>
-          <a:ln w="6350">
-            <a:solidFill>
-              <a:srgbClr val="F4F6F8">
-                <a:alpha val="22000"/>
-              </a:srgbClr>
-            </a:solidFill>
-            <a:prstDash val="solid"/>
-          </a:ln>
-        </p:spPr>
-      </p:sp>
-      <p:sp>
-        <p:nvSpPr>
-          <p:cNvPr id="19" name="Shape 17"/>
-          <p:cNvSpPr/>
-          <p:nvPr/>
-        </p:nvSpPr>
-        <p:spPr>
-          <a:xfrm>
-            <a:off x="0" y="5486400"/>
-            <a:ext cx="12188952" cy="0"/>
-          </a:xfrm>
-          <a:prstGeom prst="line">
-            <a:avLst/>
-          </a:prstGeom>
-          <a:noFill/>
-          <a:ln w="6350">
-            <a:solidFill>
-              <a:srgbClr val="F4F6F8">
-                <a:alpha val="22000"/>
-              </a:srgbClr>
-            </a:solidFill>
-            <a:prstDash val="solid"/>
-          </a:ln>
-        </p:spPr>
-      </p:sp>
-      <p:sp>
-        <p:nvSpPr>
-          <p:cNvPr id="20" name="Shape 18"/>
-          <p:cNvSpPr/>
-          <p:nvPr/>
-        </p:nvSpPr>
-        <p:spPr>
-          <a:xfrm>
-            <a:off x="0" y="6400800"/>
-            <a:ext cx="12188952" cy="0"/>
-          </a:xfrm>
-          <a:prstGeom prst="line">
-            <a:avLst/>
-          </a:prstGeom>
-          <a:noFill/>
-          <a:ln w="6350">
-            <a:solidFill>
-              <a:srgbClr val="F4F6F8">
-                <a:alpha val="22000"/>
-              </a:srgbClr>
-            </a:solidFill>
-            <a:prstDash val="solid"/>
-          </a:ln>
-        </p:spPr>
-      </p:sp>
-      <p:sp>
-        <p:nvSpPr>
-          <p:cNvPr id="21" name="Text 19"/>
-          <p:cNvSpPr/>
-          <p:nvPr/>
-        </p:nvSpPr>
-        <p:spPr>
-          <a:xfrm>
-            <a:off x="658368" y="2121408"/>
-            <a:ext cx="1828800" cy="365760"/>
-          </a:xfrm>
-          <a:prstGeom prst="rect">
-            <a:avLst/>
-          </a:prstGeom>
-          <a:noFill/>
-          <a:ln/>
-        </p:spPr>
-        <p:txBody>
-          <a:bodyPr wrap="square" lIns="0" tIns="0" rIns="0" bIns="0" rtlCol="0" anchor="ctr"/>
-          <a:lstStyle/>
-          <a:p>
-            <a:pPr indent="0" marL="0">
-              <a:buNone/>
-            </a:pPr>
-            <a:r>
-              <a:rPr lang="en-US" sz="1300" spc="300" kern="0" dirty="0">
-                <a:solidFill>
-                  <a:srgbClr val="C8282C"/>
-                </a:solidFill>
-                <a:latin typeface="IBM Plex Mono" pitchFamily="34" charset="0"/>
-                <a:ea typeface="IBM Plex Mono" pitchFamily="34" charset="-122"/>
-                <a:cs typeface="IBM Plex Mono" pitchFamily="34" charset="-120"/>
-              </a:rPr>
-              <a:t>I</a:t>
-            </a:r>
-            <a:endParaRPr lang="en-US" sz="1300" dirty="0"/>
-          </a:p>
-        </p:txBody>
-      </p:sp>
-      <p:sp>
-        <p:nvSpPr>
-          <p:cNvPr id="22" name="Text 20"/>
-          <p:cNvSpPr/>
-          <p:nvPr/>
-        </p:nvSpPr>
-        <p:spPr>
-          <a:xfrm>
-            <a:off x="658368" y="2615184"/>
-            <a:ext cx="8778240" cy="1097280"/>
-          </a:xfrm>
-          <a:prstGeom prst="rect">
-            <a:avLst/>
-          </a:prstGeom>
-          <a:noFill/>
-          <a:ln/>
-        </p:spPr>
-        <p:txBody>
-          <a:bodyPr wrap="square" lIns="0" tIns="0" rIns="0" bIns="0" rtlCol="0" anchor="t"/>
-          <a:lstStyle/>
-          <a:p>
-            <a:pPr indent="0" marL="0">
-              <a:buNone/>
-            </a:pPr>
-            <a:r>
-              <a:rPr lang="en-US" sz="4000" b="1" dirty="0">
-                <a:solidFill>
-                  <a:srgbClr val="F4F6F8"/>
-                </a:solidFill>
-                <a:latin typeface="Fraunces" pitchFamily="34" charset="0"/>
-                <a:ea typeface="Fraunces" pitchFamily="34" charset="-122"/>
-                <a:cs typeface="Fraunces" pitchFamily="34" charset="-120"/>
-              </a:rPr>
-              <a:t>Ce sur quoi cela repose</a:t>
-            </a:r>
-            <a:endParaRPr lang="en-US" sz="4000" dirty="0"/>
-          </a:p>
-        </p:txBody>
-      </p:sp>
-      <p:sp>
-        <p:nvSpPr>
-          <p:cNvPr id="23" name="Text 21"/>
-          <p:cNvSpPr/>
-          <p:nvPr/>
-        </p:nvSpPr>
-        <p:spPr>
-          <a:xfrm>
-            <a:off x="658368" y="3822192"/>
-            <a:ext cx="7680960" cy="1097280"/>
-          </a:xfrm>
-          <a:prstGeom prst="rect">
-            <a:avLst/>
-          </a:prstGeom>
-          <a:noFill/>
-          <a:ln/>
-        </p:spPr>
-        <p:txBody>
-          <a:bodyPr wrap="square" lIns="0" tIns="0" rIns="0" bIns="0" rtlCol="0" anchor="t"/>
-          <a:lstStyle/>
-          <a:p>
-            <a:pPr indent="0" marL="0">
-              <a:lnSpc>
-                <a:spcPct val="130000"/>
-              </a:lnSpc>
-              <a:buNone/>
-            </a:pPr>
-            <a:r>
-              <a:rPr lang="en-US" sz="1600" dirty="0">
-                <a:solidFill>
-                  <a:srgbClr val="D3DBE1"/>
-                </a:solidFill>
-                <a:latin typeface="Inter" pitchFamily="34" charset="0"/>
-                <a:ea typeface="Inter" pitchFamily="34" charset="-122"/>
-                <a:cs typeface="Inter" pitchFamily="34" charset="-120"/>
-              </a:rPr>
-              <a:t>Pas un cabinet qui recommence sa recherche à chaque dossier : une base de corridors que nous tenons, et des méthodes qui s’y appliquent.</a:t>
-            </a:r>
-            <a:endParaRPr lang="en-US" sz="1600" dirty="0"/>
-          </a:p>
-        </p:txBody>
-      </p:sp>
-      <p:sp>
-        <p:nvSpPr>
-          <p:cNvPr id="24" name="Text 22"/>
-          <p:cNvSpPr/>
-          <p:nvPr/>
-        </p:nvSpPr>
-        <p:spPr>
-          <a:xfrm>
-            <a:off x="10433304" y="6144768"/>
-            <a:ext cx="1097280" cy="274320"/>
-          </a:xfrm>
-          <a:prstGeom prst="rect">
-            <a:avLst/>
-          </a:prstGeom>
-          <a:noFill/>
-          <a:ln/>
-        </p:spPr>
-        <p:txBody>
-          <a:bodyPr wrap="square" lIns="0" tIns="0" rIns="0" bIns="0" rtlCol="0" anchor="ctr"/>
-          <a:lstStyle/>
-          <a:p>
-            <a:pPr algn="r" indent="0" marL="0">
-              <a:buNone/>
-            </a:pPr>
-            <a:r>
-              <a:rPr lang="en-US" sz="1000" dirty="0">
-                <a:solidFill>
-                  <a:srgbClr val="BFCAD3"/>
-                </a:solidFill>
-                <a:latin typeface="IBM Plex Mono" pitchFamily="34" charset="0"/>
-                <a:ea typeface="IBM Plex Mono" pitchFamily="34" charset="-122"/>
-                <a:cs typeface="IBM Plex Mono" pitchFamily="34" charset="-120"/>
-              </a:rPr>
-              <a:t>05 / 16</a:t>
+              <a:t>05 / 15</a:t>
             </a:r>
             <a:endParaRPr lang="en-US" sz="1000" dirty="0"/>
           </a:p>
@@ -10675,7 +10953,7 @@
                 <a:ea typeface="IBM Plex Mono" pitchFamily="34" charset="-122"/>
                 <a:cs typeface="IBM Plex Mono" pitchFamily="34" charset="-120"/>
               </a:rPr>
-              <a:t>LE SOCLE</a:t>
+              <a:t>MÉTHODE CVI</a:t>
             </a:r>
             <a:endParaRPr lang="en-US" sz="1000" dirty="0"/>
           </a:p>
@@ -10717,7 +10995,7 @@
                 <a:ea typeface="Fraunces" pitchFamily="34" charset="-122"/>
                 <a:cs typeface="Fraunces" pitchFamily="34" charset="-120"/>
               </a:rPr>
-              <a:t>Une base de données, pas une veille</a:t>
+              <a:t>Mesurer une vulnérabilité, sans illusion de précision</a:t>
             </a:r>
             <a:endParaRPr lang="en-US" sz="3400" dirty="0"/>
           </a:p>
@@ -10731,14 +11009,16 @@
         </p:nvSpPr>
         <p:spPr>
           <a:xfrm>
-            <a:off x="658368" y="2926080"/>
-            <a:ext cx="3380232" cy="0"/>
-          </a:xfrm>
-          <a:prstGeom prst="line">
-            <a:avLst/>
-          </a:prstGeom>
-          <a:noFill/>
-          <a:ln w="12700">
+            <a:off x="658368" y="2478024"/>
+            <a:ext cx="384048" cy="274320"/>
+          </a:xfrm>
+          <a:prstGeom prst="rect">
+            <a:avLst/>
+          </a:prstGeom>
+          <a:solidFill>
+            <a:srgbClr val="167858"/>
+          </a:solidFill>
+          <a:ln w="9525">
             <a:solidFill>
               <a:srgbClr val="BFCAD3"/>
             </a:solidFill>
@@ -10748,98 +11028,22 @@
       </p:sp>
       <p:sp>
         <p:nvSpPr>
-          <p:cNvPr id="5" name="Text 3"/>
-          <p:cNvSpPr/>
-          <p:nvPr/>
-        </p:nvSpPr>
-        <p:spPr>
-          <a:xfrm>
-            <a:off x="658368" y="3145536"/>
-            <a:ext cx="3380232" cy="1051560"/>
-          </a:xfrm>
-          <a:prstGeom prst="rect">
-            <a:avLst/>
-          </a:prstGeom>
-          <a:noFill/>
-          <a:ln/>
-        </p:spPr>
-        <p:txBody>
-          <a:bodyPr wrap="square" lIns="0" tIns="0" rIns="0" bIns="0" rtlCol="0" anchor="t"/>
-          <a:lstStyle/>
-          <a:p>
-            <a:pPr indent="0" marL="0">
-              <a:buNone/>
-            </a:pPr>
-            <a:r>
-              <a:rPr lang="en-US" sz="5400" b="1" dirty="0">
-                <a:solidFill>
-                  <a:srgbClr val="0F3C4E"/>
-                </a:solidFill>
-                <a:latin typeface="Fraunces" pitchFamily="34" charset="0"/>
-                <a:ea typeface="Fraunces" pitchFamily="34" charset="-122"/>
-                <a:cs typeface="Fraunces" pitchFamily="34" charset="-120"/>
-              </a:rPr>
-              <a:t>313</a:t>
-            </a:r>
-            <a:endParaRPr lang="en-US" sz="5400" dirty="0"/>
-          </a:p>
-        </p:txBody>
-      </p:sp>
-      <p:sp>
-        <p:nvSpPr>
-          <p:cNvPr id="6" name="Text 4"/>
-          <p:cNvSpPr/>
-          <p:nvPr/>
-        </p:nvSpPr>
-        <p:spPr>
-          <a:xfrm>
-            <a:off x="658368" y="4242816"/>
-            <a:ext cx="3380232" cy="274320"/>
-          </a:xfrm>
-          <a:prstGeom prst="rect">
-            <a:avLst/>
-          </a:prstGeom>
-          <a:noFill/>
-          <a:ln/>
-        </p:spPr>
-        <p:txBody>
-          <a:bodyPr wrap="square" lIns="0" tIns="0" rIns="0" bIns="0" rtlCol="0" anchor="ctr"/>
-          <a:lstStyle/>
-          <a:p>
-            <a:pPr indent="0" marL="0">
-              <a:buNone/>
-            </a:pPr>
-            <a:r>
-              <a:rPr lang="en-US" sz="1000" spc="140" kern="0" dirty="0">
-                <a:solidFill>
-                  <a:srgbClr val="C8282C"/>
-                </a:solidFill>
-                <a:latin typeface="IBM Plex Mono" pitchFamily="34" charset="0"/>
-                <a:ea typeface="IBM Plex Mono" pitchFamily="34" charset="-122"/>
-                <a:cs typeface="IBM Plex Mono" pitchFamily="34" charset="-120"/>
-              </a:rPr>
-              <a:t>OBJETS RECENSÉS</a:t>
-            </a:r>
-            <a:endParaRPr lang="en-US" sz="1000" dirty="0"/>
-          </a:p>
-        </p:txBody>
-      </p:sp>
-      <p:sp>
-        <p:nvSpPr>
-          <p:cNvPr id="7" name="Shape 5"/>
-          <p:cNvSpPr/>
-          <p:nvPr/>
-        </p:nvSpPr>
-        <p:spPr>
-          <a:xfrm>
-            <a:off x="4404360" y="2926080"/>
-            <a:ext cx="3380232" cy="0"/>
-          </a:xfrm>
-          <a:prstGeom prst="line">
-            <a:avLst/>
-          </a:prstGeom>
-          <a:noFill/>
-          <a:ln w="12700">
+          <p:cNvPr id="5" name="Shape 3"/>
+          <p:cNvSpPr/>
+          <p:nvPr/>
+        </p:nvSpPr>
+        <p:spPr>
+          <a:xfrm>
+            <a:off x="1042416" y="2478024"/>
+            <a:ext cx="384048" cy="274320"/>
+          </a:xfrm>
+          <a:prstGeom prst="rect">
+            <a:avLst/>
+          </a:prstGeom>
+          <a:solidFill>
+            <a:srgbClr val="EAEEF2"/>
+          </a:solidFill>
+          <a:ln w="9525">
             <a:solidFill>
               <a:srgbClr val="BFCAD3"/>
             </a:solidFill>
@@ -10849,98 +11053,22 @@
       </p:sp>
       <p:sp>
         <p:nvSpPr>
-          <p:cNvPr id="8" name="Text 6"/>
-          <p:cNvSpPr/>
-          <p:nvPr/>
-        </p:nvSpPr>
-        <p:spPr>
-          <a:xfrm>
-            <a:off x="4404360" y="3145536"/>
-            <a:ext cx="3380232" cy="1051560"/>
-          </a:xfrm>
-          <a:prstGeom prst="rect">
-            <a:avLst/>
-          </a:prstGeom>
-          <a:noFill/>
-          <a:ln/>
-        </p:spPr>
-        <p:txBody>
-          <a:bodyPr wrap="square" lIns="0" tIns="0" rIns="0" bIns="0" rtlCol="0" anchor="t"/>
-          <a:lstStyle/>
-          <a:p>
-            <a:pPr indent="0" marL="0">
-              <a:buNone/>
-            </a:pPr>
-            <a:r>
-              <a:rPr lang="en-US" sz="5400" b="1" dirty="0">
-                <a:solidFill>
-                  <a:srgbClr val="0F3C4E"/>
-                </a:solidFill>
-                <a:latin typeface="Fraunces" pitchFamily="34" charset="0"/>
-                <a:ea typeface="Fraunces" pitchFamily="34" charset="-122"/>
-                <a:cs typeface="Fraunces" pitchFamily="34" charset="-120"/>
-              </a:rPr>
-              <a:t>190</a:t>
-            </a:r>
-            <a:endParaRPr lang="en-US" sz="5400" dirty="0"/>
-          </a:p>
-        </p:txBody>
-      </p:sp>
-      <p:sp>
-        <p:nvSpPr>
-          <p:cNvPr id="9" name="Text 7"/>
-          <p:cNvSpPr/>
-          <p:nvPr/>
-        </p:nvSpPr>
-        <p:spPr>
-          <a:xfrm>
-            <a:off x="4404360" y="4242816"/>
-            <a:ext cx="3380232" cy="274320"/>
-          </a:xfrm>
-          <a:prstGeom prst="rect">
-            <a:avLst/>
-          </a:prstGeom>
-          <a:noFill/>
-          <a:ln/>
-        </p:spPr>
-        <p:txBody>
-          <a:bodyPr wrap="square" lIns="0" tIns="0" rIns="0" bIns="0" rtlCol="0" anchor="ctr"/>
-          <a:lstStyle/>
-          <a:p>
-            <a:pPr indent="0" marL="0">
-              <a:buNone/>
-            </a:pPr>
-            <a:r>
-              <a:rPr lang="en-US" sz="1000" spc="140" kern="0" dirty="0">
-                <a:solidFill>
-                  <a:srgbClr val="C8282C"/>
-                </a:solidFill>
-                <a:latin typeface="IBM Plex Mono" pitchFamily="34" charset="0"/>
-                <a:ea typeface="IBM Plex Mono" pitchFamily="34" charset="-122"/>
-                <a:cs typeface="IBM Plex Mono" pitchFamily="34" charset="-120"/>
-              </a:rPr>
-              <a:t>SOURCES AU REGISTRE</a:t>
-            </a:r>
-            <a:endParaRPr lang="en-US" sz="1000" dirty="0"/>
-          </a:p>
-        </p:txBody>
-      </p:sp>
-      <p:sp>
-        <p:nvSpPr>
-          <p:cNvPr id="10" name="Shape 8"/>
-          <p:cNvSpPr/>
-          <p:nvPr/>
-        </p:nvSpPr>
-        <p:spPr>
-          <a:xfrm>
-            <a:off x="8150352" y="2926080"/>
-            <a:ext cx="3380232" cy="0"/>
-          </a:xfrm>
-          <a:prstGeom prst="line">
-            <a:avLst/>
-          </a:prstGeom>
-          <a:noFill/>
-          <a:ln w="12700">
+          <p:cNvPr id="6" name="Shape 4"/>
+          <p:cNvSpPr/>
+          <p:nvPr/>
+        </p:nvSpPr>
+        <p:spPr>
+          <a:xfrm>
+            <a:off x="1426464" y="2478024"/>
+            <a:ext cx="384048" cy="274320"/>
+          </a:xfrm>
+          <a:prstGeom prst="rect">
+            <a:avLst/>
+          </a:prstGeom>
+          <a:solidFill>
+            <a:srgbClr val="EAEEF2"/>
+          </a:solidFill>
+          <a:ln w="9525">
             <a:solidFill>
               <a:srgbClr val="BFCAD3"/>
             </a:solidFill>
@@ -10950,14 +11078,39 @@
       </p:sp>
       <p:sp>
         <p:nvSpPr>
-          <p:cNvPr id="11" name="Text 9"/>
-          <p:cNvSpPr/>
-          <p:nvPr/>
-        </p:nvSpPr>
-        <p:spPr>
-          <a:xfrm>
-            <a:off x="8150352" y="3145536"/>
-            <a:ext cx="3380232" cy="1051560"/>
+          <p:cNvPr id="7" name="Shape 5"/>
+          <p:cNvSpPr/>
+          <p:nvPr/>
+        </p:nvSpPr>
+        <p:spPr>
+          <a:xfrm>
+            <a:off x="1810512" y="2478024"/>
+            <a:ext cx="384048" cy="274320"/>
+          </a:xfrm>
+          <a:prstGeom prst="rect">
+            <a:avLst/>
+          </a:prstGeom>
+          <a:solidFill>
+            <a:srgbClr val="EAEEF2"/>
+          </a:solidFill>
+          <a:ln w="9525">
+            <a:solidFill>
+              <a:srgbClr val="BFCAD3"/>
+            </a:solidFill>
+            <a:prstDash val="solid"/>
+          </a:ln>
+        </p:spPr>
+      </p:sp>
+      <p:sp>
+        <p:nvSpPr>
+          <p:cNvPr id="8" name="Text 6"/>
+          <p:cNvSpPr/>
+          <p:nvPr/>
+        </p:nvSpPr>
+        <p:spPr>
+          <a:xfrm>
+            <a:off x="2505456" y="2478024"/>
+            <a:ext cx="1554480" cy="274320"/>
           </a:xfrm>
           <a:prstGeom prst="rect">
             <a:avLst/>
@@ -10966,76 +11119,37 @@
           <a:ln/>
         </p:spPr>
         <p:txBody>
-          <a:bodyPr wrap="square" lIns="0" tIns="0" rIns="0" bIns="0" rtlCol="0" anchor="t"/>
+          <a:bodyPr wrap="square" lIns="0" tIns="0" rIns="0" bIns="0" rtlCol="0" anchor="ctr"/>
           <a:lstStyle/>
           <a:p>
             <a:pPr indent="0" marL="0">
               <a:buNone/>
             </a:pPr>
             <a:r>
-              <a:rPr lang="en-US" sz="5400" b="1" dirty="0">
-                <a:solidFill>
-                  <a:srgbClr val="0F3C4E"/>
-                </a:solidFill>
-                <a:latin typeface="Fraunces" pitchFamily="34" charset="0"/>
-                <a:ea typeface="Fraunces" pitchFamily="34" charset="-122"/>
-                <a:cs typeface="Fraunces" pitchFamily="34" charset="-120"/>
-              </a:rPr>
-              <a:t>15</a:t>
-            </a:r>
-            <a:endParaRPr lang="en-US" sz="5400" dirty="0"/>
-          </a:p>
-        </p:txBody>
-      </p:sp>
-      <p:sp>
-        <p:nvSpPr>
-          <p:cNvPr id="12" name="Text 10"/>
-          <p:cNvSpPr/>
-          <p:nvPr/>
-        </p:nvSpPr>
-        <p:spPr>
-          <a:xfrm>
-            <a:off x="8150352" y="4242816"/>
-            <a:ext cx="3380232" cy="274320"/>
-          </a:xfrm>
-          <a:prstGeom prst="rect">
-            <a:avLst/>
-          </a:prstGeom>
-          <a:noFill/>
-          <a:ln/>
-        </p:spPr>
-        <p:txBody>
-          <a:bodyPr wrap="square" lIns="0" tIns="0" rIns="0" bIns="0" rtlCol="0" anchor="ctr"/>
-          <a:lstStyle/>
-          <a:p>
-            <a:pPr indent="0" marL="0">
-              <a:buNone/>
-            </a:pPr>
-            <a:r>
-              <a:rPr lang="en-US" sz="1000" spc="140" kern="0" dirty="0">
-                <a:solidFill>
-                  <a:srgbClr val="C8282C"/>
+              <a:rPr lang="en-US" sz="1200" b="1" spc="100" kern="0" dirty="0">
+                <a:solidFill>
+                  <a:srgbClr val="167858"/>
                 </a:solidFill>
                 <a:latin typeface="IBM Plex Mono" pitchFamily="34" charset="0"/>
                 <a:ea typeface="IBM Plex Mono" pitchFamily="34" charset="-122"/>
                 <a:cs typeface="IBM Plex Mono" pitchFamily="34" charset="-120"/>
               </a:rPr>
-              <a:t>MOTEURS DÉRIVÉS</a:t>
-            </a:r>
-            <a:endParaRPr lang="en-US" sz="1000" dirty="0"/>
-          </a:p>
-        </p:txBody>
-      </p:sp>
-      <p:sp>
-        <p:nvSpPr>
-          <p:cNvPr id="13" name="Text 11"/>
-          <p:cNvSpPr/>
-          <p:nvPr/>
-        </p:nvSpPr>
-        <p:spPr>
-          <a:xfrm>
-            <a:off x="658368" y="5815584"/>
-            <a:ext cx="9774936" cy="548640"/>
+              <a:t>BAS</a:t>
+            </a:r>
+            <a:endParaRPr lang="en-US" sz="1200" dirty="0"/>
+          </a:p>
+        </p:txBody>
+      </p:sp>
+      <p:sp>
+        <p:nvSpPr>
+          <p:cNvPr id="9" name="Text 7"/>
+          <p:cNvSpPr/>
+          <p:nvPr/>
+        </p:nvSpPr>
+        <p:spPr>
+          <a:xfrm>
+            <a:off x="4169664" y="2478024"/>
+            <a:ext cx="7360920" cy="274320"/>
           </a:xfrm>
           <a:prstGeom prst="rect">
             <a:avLst/>
@@ -11044,26 +11158,126 @@
           <a:ln/>
         </p:spPr>
         <p:txBody>
-          <a:bodyPr wrap="square" lIns="0" tIns="0" rIns="0" bIns="0" rtlCol="0" anchor="b"/>
+          <a:bodyPr wrap="square" lIns="0" tIns="0" rIns="0" bIns="0" rtlCol="0" anchor="ctr"/>
           <a:lstStyle/>
           <a:p>
             <a:pPr indent="0" marL="0">
               <a:buNone/>
             </a:pPr>
             <a:r>
-              <a:rPr lang="en-US" sz="1000" i="1" dirty="0">
-                <a:solidFill>
-                  <a:srgbClr val="5C6875"/>
+              <a:rPr lang="en-US" sz="1500" dirty="0">
+                <a:solidFill>
+                  <a:srgbClr val="141C26"/>
                 </a:solidFill>
                 <a:latin typeface="Inter" pitchFamily="34" charset="0"/>
                 <a:ea typeface="Inter" pitchFamily="34" charset="-122"/>
                 <a:cs typeface="Inter" pitchFamily="34" charset="-120"/>
               </a:rPr>
-              <a:t>Recensé n’est pas validé : la promotion en priorité P0 exige des preuves sourcées et une validation humaine. Le détail de la méthode fait l’objet d’une plaquette dédiée.</a:t>
-            </a:r>
-            <a:endParaRPr lang="en-US" sz="1000" dirty="0"/>
-          </a:p>
-        </p:txBody>
+              <a:t>Alternatives crédibles, faible exposition.</a:t>
+            </a:r>
+            <a:endParaRPr lang="en-US" sz="1500" dirty="0"/>
+          </a:p>
+        </p:txBody>
+      </p:sp>
+      <p:sp>
+        <p:nvSpPr>
+          <p:cNvPr id="10" name="Shape 8"/>
+          <p:cNvSpPr/>
+          <p:nvPr/>
+        </p:nvSpPr>
+        <p:spPr>
+          <a:xfrm>
+            <a:off x="658368" y="3227832"/>
+            <a:ext cx="384048" cy="274320"/>
+          </a:xfrm>
+          <a:prstGeom prst="rect">
+            <a:avLst/>
+          </a:prstGeom>
+          <a:solidFill>
+            <a:srgbClr val="167858"/>
+          </a:solidFill>
+          <a:ln w="9525">
+            <a:solidFill>
+              <a:srgbClr val="BFCAD3"/>
+            </a:solidFill>
+            <a:prstDash val="solid"/>
+          </a:ln>
+        </p:spPr>
+      </p:sp>
+      <p:sp>
+        <p:nvSpPr>
+          <p:cNvPr id="11" name="Shape 9"/>
+          <p:cNvSpPr/>
+          <p:nvPr/>
+        </p:nvSpPr>
+        <p:spPr>
+          <a:xfrm>
+            <a:off x="1042416" y="3227832"/>
+            <a:ext cx="384048" cy="274320"/>
+          </a:xfrm>
+          <a:prstGeom prst="rect">
+            <a:avLst/>
+          </a:prstGeom>
+          <a:solidFill>
+            <a:srgbClr val="A8740E"/>
+          </a:solidFill>
+          <a:ln w="9525">
+            <a:solidFill>
+              <a:srgbClr val="BFCAD3"/>
+            </a:solidFill>
+            <a:prstDash val="solid"/>
+          </a:ln>
+        </p:spPr>
+      </p:sp>
+      <p:sp>
+        <p:nvSpPr>
+          <p:cNvPr id="12" name="Shape 10"/>
+          <p:cNvSpPr/>
+          <p:nvPr/>
+        </p:nvSpPr>
+        <p:spPr>
+          <a:xfrm>
+            <a:off x="1426464" y="3227832"/>
+            <a:ext cx="384048" cy="274320"/>
+          </a:xfrm>
+          <a:prstGeom prst="rect">
+            <a:avLst/>
+          </a:prstGeom>
+          <a:solidFill>
+            <a:srgbClr val="EAEEF2"/>
+          </a:solidFill>
+          <a:ln w="9525">
+            <a:solidFill>
+              <a:srgbClr val="BFCAD3"/>
+            </a:solidFill>
+            <a:prstDash val="solid"/>
+          </a:ln>
+        </p:spPr>
+      </p:sp>
+      <p:sp>
+        <p:nvSpPr>
+          <p:cNvPr id="13" name="Shape 11"/>
+          <p:cNvSpPr/>
+          <p:nvPr/>
+        </p:nvSpPr>
+        <p:spPr>
+          <a:xfrm>
+            <a:off x="1810512" y="3227832"/>
+            <a:ext cx="384048" cy="274320"/>
+          </a:xfrm>
+          <a:prstGeom prst="rect">
+            <a:avLst/>
+          </a:prstGeom>
+          <a:solidFill>
+            <a:srgbClr val="EAEEF2"/>
+          </a:solidFill>
+          <a:ln w="9525">
+            <a:solidFill>
+              <a:srgbClr val="BFCAD3"/>
+            </a:solidFill>
+            <a:prstDash val="solid"/>
+          </a:ln>
+        </p:spPr>
       </p:sp>
       <p:sp>
         <p:nvSpPr>
@@ -11073,8 +11287,8 @@
         </p:nvSpPr>
         <p:spPr>
           <a:xfrm>
-            <a:off x="10433304" y="6144768"/>
-            <a:ext cx="1097280" cy="274320"/>
+            <a:off x="2505456" y="3227832"/>
+            <a:ext cx="1554480" cy="274320"/>
           </a:xfrm>
           <a:prstGeom prst="rect">
             <a:avLst/>
@@ -11086,19 +11300,492 @@
           <a:bodyPr wrap="square" lIns="0" tIns="0" rIns="0" bIns="0" rtlCol="0" anchor="ctr"/>
           <a:lstStyle/>
           <a:p>
-            <a:pPr algn="r" indent="0" marL="0">
+            <a:pPr indent="0" marL="0">
               <a:buNone/>
             </a:pPr>
             <a:r>
-              <a:rPr lang="en-US" sz="1000" dirty="0">
-                <a:solidFill>
-                  <a:srgbClr val="5C6875"/>
+              <a:rPr lang="en-US" sz="1200" b="1" spc="100" kern="0" dirty="0">
+                <a:solidFill>
+                  <a:srgbClr val="A8740E"/>
                 </a:solidFill>
                 <a:latin typeface="IBM Plex Mono" pitchFamily="34" charset="0"/>
                 <a:ea typeface="IBM Plex Mono" pitchFamily="34" charset="-122"/>
                 <a:cs typeface="IBM Plex Mono" pitchFamily="34" charset="-120"/>
               </a:rPr>
-              <a:t>06 / 16</a:t>
+              <a:t>MODÉRÉ</a:t>
+            </a:r>
+            <a:endParaRPr lang="en-US" sz="1200" dirty="0"/>
+          </a:p>
+        </p:txBody>
+      </p:sp>
+      <p:sp>
+        <p:nvSpPr>
+          <p:cNvPr id="15" name="Text 13"/>
+          <p:cNvSpPr/>
+          <p:nvPr/>
+        </p:nvSpPr>
+        <p:spPr>
+          <a:xfrm>
+            <a:off x="4169664" y="3227832"/>
+            <a:ext cx="7360920" cy="274320"/>
+          </a:xfrm>
+          <a:prstGeom prst="rect">
+            <a:avLst/>
+          </a:prstGeom>
+          <a:noFill/>
+          <a:ln/>
+        </p:spPr>
+        <p:txBody>
+          <a:bodyPr wrap="square" lIns="0" tIns="0" rIns="0" bIns="0" rtlCol="0" anchor="ctr"/>
+          <a:lstStyle/>
+          <a:p>
+            <a:pPr indent="0" marL="0">
+              <a:buNone/>
+            </a:pPr>
+            <a:r>
+              <a:rPr lang="en-US" sz="1500" dirty="0">
+                <a:solidFill>
+                  <a:srgbClr val="141C26"/>
+                </a:solidFill>
+                <a:latin typeface="Inter" pitchFamily="34" charset="0"/>
+                <a:ea typeface="Inter" pitchFamily="34" charset="-122"/>
+                <a:cs typeface="Inter" pitchFamily="34" charset="-120"/>
+              </a:rPr>
+              <a:t>Dépendance réelle, contournement coûteux.</a:t>
+            </a:r>
+            <a:endParaRPr lang="en-US" sz="1500" dirty="0"/>
+          </a:p>
+        </p:txBody>
+      </p:sp>
+      <p:sp>
+        <p:nvSpPr>
+          <p:cNvPr id="16" name="Shape 14"/>
+          <p:cNvSpPr/>
+          <p:nvPr/>
+        </p:nvSpPr>
+        <p:spPr>
+          <a:xfrm>
+            <a:off x="658368" y="3977640"/>
+            <a:ext cx="384048" cy="274320"/>
+          </a:xfrm>
+          <a:prstGeom prst="rect">
+            <a:avLst/>
+          </a:prstGeom>
+          <a:solidFill>
+            <a:srgbClr val="167858"/>
+          </a:solidFill>
+          <a:ln w="9525">
+            <a:solidFill>
+              <a:srgbClr val="BFCAD3"/>
+            </a:solidFill>
+            <a:prstDash val="solid"/>
+          </a:ln>
+        </p:spPr>
+      </p:sp>
+      <p:sp>
+        <p:nvSpPr>
+          <p:cNvPr id="17" name="Shape 15"/>
+          <p:cNvSpPr/>
+          <p:nvPr/>
+        </p:nvSpPr>
+        <p:spPr>
+          <a:xfrm>
+            <a:off x="1042416" y="3977640"/>
+            <a:ext cx="384048" cy="274320"/>
+          </a:xfrm>
+          <a:prstGeom prst="rect">
+            <a:avLst/>
+          </a:prstGeom>
+          <a:solidFill>
+            <a:srgbClr val="A8740E"/>
+          </a:solidFill>
+          <a:ln w="9525">
+            <a:solidFill>
+              <a:srgbClr val="BFCAD3"/>
+            </a:solidFill>
+            <a:prstDash val="solid"/>
+          </a:ln>
+        </p:spPr>
+      </p:sp>
+      <p:sp>
+        <p:nvSpPr>
+          <p:cNvPr id="18" name="Shape 16"/>
+          <p:cNvSpPr/>
+          <p:nvPr/>
+        </p:nvSpPr>
+        <p:spPr>
+          <a:xfrm>
+            <a:off x="1426464" y="3977640"/>
+            <a:ext cx="384048" cy="274320"/>
+          </a:xfrm>
+          <a:prstGeom prst="rect">
+            <a:avLst/>
+          </a:prstGeom>
+          <a:solidFill>
+            <a:srgbClr val="C24E12"/>
+          </a:solidFill>
+          <a:ln w="9525">
+            <a:solidFill>
+              <a:srgbClr val="BFCAD3"/>
+            </a:solidFill>
+            <a:prstDash val="solid"/>
+          </a:ln>
+        </p:spPr>
+      </p:sp>
+      <p:sp>
+        <p:nvSpPr>
+          <p:cNvPr id="19" name="Shape 17"/>
+          <p:cNvSpPr/>
+          <p:nvPr/>
+        </p:nvSpPr>
+        <p:spPr>
+          <a:xfrm>
+            <a:off x="1810512" y="3977640"/>
+            <a:ext cx="384048" cy="274320"/>
+          </a:xfrm>
+          <a:prstGeom prst="rect">
+            <a:avLst/>
+          </a:prstGeom>
+          <a:solidFill>
+            <a:srgbClr val="EAEEF2"/>
+          </a:solidFill>
+          <a:ln w="9525">
+            <a:solidFill>
+              <a:srgbClr val="BFCAD3"/>
+            </a:solidFill>
+            <a:prstDash val="solid"/>
+          </a:ln>
+        </p:spPr>
+      </p:sp>
+      <p:sp>
+        <p:nvSpPr>
+          <p:cNvPr id="20" name="Text 18"/>
+          <p:cNvSpPr/>
+          <p:nvPr/>
+        </p:nvSpPr>
+        <p:spPr>
+          <a:xfrm>
+            <a:off x="2505456" y="3977640"/>
+            <a:ext cx="1554480" cy="274320"/>
+          </a:xfrm>
+          <a:prstGeom prst="rect">
+            <a:avLst/>
+          </a:prstGeom>
+          <a:noFill/>
+          <a:ln/>
+        </p:spPr>
+        <p:txBody>
+          <a:bodyPr wrap="square" lIns="0" tIns="0" rIns="0" bIns="0" rtlCol="0" anchor="ctr"/>
+          <a:lstStyle/>
+          <a:p>
+            <a:pPr indent="0" marL="0">
+              <a:buNone/>
+            </a:pPr>
+            <a:r>
+              <a:rPr lang="en-US" sz="1200" b="1" spc="100" kern="0" dirty="0">
+                <a:solidFill>
+                  <a:srgbClr val="C24E12"/>
+                </a:solidFill>
+                <a:latin typeface="IBM Plex Mono" pitchFamily="34" charset="0"/>
+                <a:ea typeface="IBM Plex Mono" pitchFamily="34" charset="-122"/>
+                <a:cs typeface="IBM Plex Mono" pitchFamily="34" charset="-120"/>
+              </a:rPr>
+              <a:t>ÉLEVÉ</a:t>
+            </a:r>
+            <a:endParaRPr lang="en-US" sz="1200" dirty="0"/>
+          </a:p>
+        </p:txBody>
+      </p:sp>
+      <p:sp>
+        <p:nvSpPr>
+          <p:cNvPr id="21" name="Text 19"/>
+          <p:cNvSpPr/>
+          <p:nvPr/>
+        </p:nvSpPr>
+        <p:spPr>
+          <a:xfrm>
+            <a:off x="4169664" y="3977640"/>
+            <a:ext cx="7360920" cy="274320"/>
+          </a:xfrm>
+          <a:prstGeom prst="rect">
+            <a:avLst/>
+          </a:prstGeom>
+          <a:noFill/>
+          <a:ln/>
+        </p:spPr>
+        <p:txBody>
+          <a:bodyPr wrap="square" lIns="0" tIns="0" rIns="0" bIns="0" rtlCol="0" anchor="ctr"/>
+          <a:lstStyle/>
+          <a:p>
+            <a:pPr indent="0" marL="0">
+              <a:buNone/>
+            </a:pPr>
+            <a:r>
+              <a:rPr lang="en-US" sz="1500" dirty="0">
+                <a:solidFill>
+                  <a:srgbClr val="141C26"/>
+                </a:solidFill>
+                <a:latin typeface="Inter" pitchFamily="34" charset="0"/>
+                <a:ea typeface="Inter" pitchFamily="34" charset="-122"/>
+                <a:cs typeface="Inter" pitchFamily="34" charset="-120"/>
+              </a:rPr>
+              <a:t>Peu d’alternatives, seuils proches.</a:t>
+            </a:r>
+            <a:endParaRPr lang="en-US" sz="1500" dirty="0"/>
+          </a:p>
+        </p:txBody>
+      </p:sp>
+      <p:sp>
+        <p:nvSpPr>
+          <p:cNvPr id="22" name="Shape 20"/>
+          <p:cNvSpPr/>
+          <p:nvPr/>
+        </p:nvSpPr>
+        <p:spPr>
+          <a:xfrm>
+            <a:off x="658368" y="4727448"/>
+            <a:ext cx="384048" cy="274320"/>
+          </a:xfrm>
+          <a:prstGeom prst="rect">
+            <a:avLst/>
+          </a:prstGeom>
+          <a:solidFill>
+            <a:srgbClr val="167858"/>
+          </a:solidFill>
+          <a:ln w="9525">
+            <a:solidFill>
+              <a:srgbClr val="BFCAD3"/>
+            </a:solidFill>
+            <a:prstDash val="solid"/>
+          </a:ln>
+        </p:spPr>
+      </p:sp>
+      <p:sp>
+        <p:nvSpPr>
+          <p:cNvPr id="23" name="Shape 21"/>
+          <p:cNvSpPr/>
+          <p:nvPr/>
+        </p:nvSpPr>
+        <p:spPr>
+          <a:xfrm>
+            <a:off x="1042416" y="4727448"/>
+            <a:ext cx="384048" cy="274320"/>
+          </a:xfrm>
+          <a:prstGeom prst="rect">
+            <a:avLst/>
+          </a:prstGeom>
+          <a:solidFill>
+            <a:srgbClr val="A8740E"/>
+          </a:solidFill>
+          <a:ln w="9525">
+            <a:solidFill>
+              <a:srgbClr val="BFCAD3"/>
+            </a:solidFill>
+            <a:prstDash val="solid"/>
+          </a:ln>
+        </p:spPr>
+      </p:sp>
+      <p:sp>
+        <p:nvSpPr>
+          <p:cNvPr id="24" name="Shape 22"/>
+          <p:cNvSpPr/>
+          <p:nvPr/>
+        </p:nvSpPr>
+        <p:spPr>
+          <a:xfrm>
+            <a:off x="1426464" y="4727448"/>
+            <a:ext cx="384048" cy="274320"/>
+          </a:xfrm>
+          <a:prstGeom prst="rect">
+            <a:avLst/>
+          </a:prstGeom>
+          <a:solidFill>
+            <a:srgbClr val="C24E12"/>
+          </a:solidFill>
+          <a:ln w="9525">
+            <a:solidFill>
+              <a:srgbClr val="BFCAD3"/>
+            </a:solidFill>
+            <a:prstDash val="solid"/>
+          </a:ln>
+        </p:spPr>
+      </p:sp>
+      <p:sp>
+        <p:nvSpPr>
+          <p:cNvPr id="25" name="Shape 23"/>
+          <p:cNvSpPr/>
+          <p:nvPr/>
+        </p:nvSpPr>
+        <p:spPr>
+          <a:xfrm>
+            <a:off x="1810512" y="4727448"/>
+            <a:ext cx="384048" cy="274320"/>
+          </a:xfrm>
+          <a:prstGeom prst="rect">
+            <a:avLst/>
+          </a:prstGeom>
+          <a:solidFill>
+            <a:srgbClr val="B82622"/>
+          </a:solidFill>
+          <a:ln w="9525">
+            <a:solidFill>
+              <a:srgbClr val="BFCAD3"/>
+            </a:solidFill>
+            <a:prstDash val="solid"/>
+          </a:ln>
+        </p:spPr>
+      </p:sp>
+      <p:sp>
+        <p:nvSpPr>
+          <p:cNvPr id="26" name="Text 24"/>
+          <p:cNvSpPr/>
+          <p:nvPr/>
+        </p:nvSpPr>
+        <p:spPr>
+          <a:xfrm>
+            <a:off x="2505456" y="4727448"/>
+            <a:ext cx="1554480" cy="274320"/>
+          </a:xfrm>
+          <a:prstGeom prst="rect">
+            <a:avLst/>
+          </a:prstGeom>
+          <a:noFill/>
+          <a:ln/>
+        </p:spPr>
+        <p:txBody>
+          <a:bodyPr wrap="square" lIns="0" tIns="0" rIns="0" bIns="0" rtlCol="0" anchor="ctr"/>
+          <a:lstStyle/>
+          <a:p>
+            <a:pPr indent="0" marL="0">
+              <a:buNone/>
+            </a:pPr>
+            <a:r>
+              <a:rPr lang="en-US" sz="1200" b="1" spc="100" kern="0" dirty="0">
+                <a:solidFill>
+                  <a:srgbClr val="B82622"/>
+                </a:solidFill>
+                <a:latin typeface="IBM Plex Mono" pitchFamily="34" charset="0"/>
+                <a:ea typeface="IBM Plex Mono" pitchFamily="34" charset="-122"/>
+                <a:cs typeface="IBM Plex Mono" pitchFamily="34" charset="-120"/>
+              </a:rPr>
+              <a:t>CRITIQUE</a:t>
+            </a:r>
+            <a:endParaRPr lang="en-US" sz="1200" dirty="0"/>
+          </a:p>
+        </p:txBody>
+      </p:sp>
+      <p:sp>
+        <p:nvSpPr>
+          <p:cNvPr id="27" name="Text 25"/>
+          <p:cNvSpPr/>
+          <p:nvPr/>
+        </p:nvSpPr>
+        <p:spPr>
+          <a:xfrm>
+            <a:off x="4169664" y="4727448"/>
+            <a:ext cx="7360920" cy="274320"/>
+          </a:xfrm>
+          <a:prstGeom prst="rect">
+            <a:avLst/>
+          </a:prstGeom>
+          <a:noFill/>
+          <a:ln/>
+        </p:spPr>
+        <p:txBody>
+          <a:bodyPr wrap="square" lIns="0" tIns="0" rIns="0" bIns="0" rtlCol="0" anchor="ctr"/>
+          <a:lstStyle/>
+          <a:p>
+            <a:pPr indent="0" marL="0">
+              <a:buNone/>
+            </a:pPr>
+            <a:r>
+              <a:rPr lang="en-US" sz="1500" dirty="0">
+                <a:solidFill>
+                  <a:srgbClr val="141C26"/>
+                </a:solidFill>
+                <a:latin typeface="Inter" pitchFamily="34" charset="0"/>
+                <a:ea typeface="Inter" pitchFamily="34" charset="-122"/>
+                <a:cs typeface="Inter" pitchFamily="34" charset="-120"/>
+              </a:rPr>
+              <a:t>Concentration extrême, perturbation systémique.</a:t>
+            </a:r>
+            <a:endParaRPr lang="en-US" sz="1500" dirty="0"/>
+          </a:p>
+        </p:txBody>
+      </p:sp>
+      <p:sp>
+        <p:nvSpPr>
+          <p:cNvPr id="28" name="Text 26"/>
+          <p:cNvSpPr/>
+          <p:nvPr/>
+        </p:nvSpPr>
+        <p:spPr>
+          <a:xfrm>
+            <a:off x="658368" y="5815584"/>
+            <a:ext cx="9774936" cy="548640"/>
+          </a:xfrm>
+          <a:prstGeom prst="rect">
+            <a:avLst/>
+          </a:prstGeom>
+          <a:noFill/>
+          <a:ln/>
+        </p:spPr>
+        <p:txBody>
+          <a:bodyPr wrap="square" lIns="0" tIns="0" rIns="0" bIns="0" rtlCol="0" anchor="b"/>
+          <a:lstStyle/>
+          <a:p>
+            <a:pPr indent="0" marL="0">
+              <a:buNone/>
+            </a:pPr>
+            <a:r>
+              <a:rPr lang="en-US" sz="1000" i="1" dirty="0">
+                <a:solidFill>
+                  <a:srgbClr val="5C6875"/>
+                </a:solidFill>
+                <a:latin typeface="Inter" pitchFamily="34" charset="0"/>
+                <a:ea typeface="Inter" pitchFamily="34" charset="-122"/>
+                <a:cs typeface="Inter" pitchFamily="34" charset="-120"/>
+              </a:rPr>
+              <a:t>Huit dimensions. Chaque score affiche ses sources, sa date, son niveau de confiance et ses incertitudes. L’échelle dit ce que la grille peut établir, pas où en est la base : à cette date, les 313 corridors instruits sont tous en bande critique.</a:t>
+            </a:r>
+            <a:endParaRPr lang="en-US" sz="1000" dirty="0"/>
+          </a:p>
+        </p:txBody>
+      </p:sp>
+      <p:sp>
+        <p:nvSpPr>
+          <p:cNvPr id="29" name="Text 27"/>
+          <p:cNvSpPr/>
+          <p:nvPr/>
+        </p:nvSpPr>
+        <p:spPr>
+          <a:xfrm>
+            <a:off x="10433304" y="6144768"/>
+            <a:ext cx="1097280" cy="274320"/>
+          </a:xfrm>
+          <a:prstGeom prst="rect">
+            <a:avLst/>
+          </a:prstGeom>
+          <a:noFill/>
+          <a:ln/>
+        </p:spPr>
+        <p:txBody>
+          <a:bodyPr wrap="square" lIns="0" tIns="0" rIns="0" bIns="0" rtlCol="0" anchor="ctr"/>
+          <a:lstStyle/>
+          <a:p>
+            <a:pPr algn="r" indent="0" marL="0">
+              <a:buNone/>
+            </a:pPr>
+            <a:r>
+              <a:rPr lang="en-US" sz="1000" dirty="0">
+                <a:solidFill>
+                  <a:srgbClr val="5C6875"/>
+                </a:solidFill>
+                <a:latin typeface="IBM Plex Mono" pitchFamily="34" charset="0"/>
+                <a:ea typeface="IBM Plex Mono" pitchFamily="34" charset="-122"/>
+                <a:cs typeface="IBM Plex Mono" pitchFamily="34" charset="-120"/>
+              </a:rPr>
+              <a:t>06 / 15</a:t>
             </a:r>
             <a:endParaRPr lang="en-US" sz="1000" dirty="0"/>
           </a:p>
@@ -11211,7 +11898,7 @@
                 <a:ea typeface="Fraunces" pitchFamily="34" charset="-122"/>
                 <a:cs typeface="Fraunces" pitchFamily="34" charset="-120"/>
               </a:rPr>
-              <a:t>Mesurer une vulnérabilité, sans illusion de précision</a:t>
+              <a:t>Ce que le CVI établit</a:t>
             </a:r>
             <a:endParaRPr lang="en-US" sz="3400" dirty="0"/>
           </a:p>
@@ -11219,114 +11906,14 @@
       </p:sp>
       <p:sp>
         <p:nvSpPr>
-          <p:cNvPr id="4" name="Shape 2"/>
-          <p:cNvSpPr/>
-          <p:nvPr/>
-        </p:nvSpPr>
-        <p:spPr>
-          <a:xfrm>
-            <a:off x="658368" y="2478024"/>
-            <a:ext cx="384048" cy="274320"/>
-          </a:xfrm>
-          <a:prstGeom prst="rect">
-            <a:avLst/>
-          </a:prstGeom>
-          <a:solidFill>
-            <a:srgbClr val="167858"/>
-          </a:solidFill>
-          <a:ln w="9525">
-            <a:solidFill>
-              <a:srgbClr val="BFCAD3"/>
-            </a:solidFill>
-            <a:prstDash val="solid"/>
-          </a:ln>
-        </p:spPr>
-      </p:sp>
-      <p:sp>
-        <p:nvSpPr>
-          <p:cNvPr id="5" name="Shape 3"/>
-          <p:cNvSpPr/>
-          <p:nvPr/>
-        </p:nvSpPr>
-        <p:spPr>
-          <a:xfrm>
-            <a:off x="1042416" y="2478024"/>
-            <a:ext cx="384048" cy="274320"/>
-          </a:xfrm>
-          <a:prstGeom prst="rect">
-            <a:avLst/>
-          </a:prstGeom>
-          <a:solidFill>
-            <a:srgbClr val="EAEEF2"/>
-          </a:solidFill>
-          <a:ln w="9525">
-            <a:solidFill>
-              <a:srgbClr val="BFCAD3"/>
-            </a:solidFill>
-            <a:prstDash val="solid"/>
-          </a:ln>
-        </p:spPr>
-      </p:sp>
-      <p:sp>
-        <p:nvSpPr>
-          <p:cNvPr id="6" name="Shape 4"/>
-          <p:cNvSpPr/>
-          <p:nvPr/>
-        </p:nvSpPr>
-        <p:spPr>
-          <a:xfrm>
-            <a:off x="1426464" y="2478024"/>
-            <a:ext cx="384048" cy="274320"/>
-          </a:xfrm>
-          <a:prstGeom prst="rect">
-            <a:avLst/>
-          </a:prstGeom>
-          <a:solidFill>
-            <a:srgbClr val="EAEEF2"/>
-          </a:solidFill>
-          <a:ln w="9525">
-            <a:solidFill>
-              <a:srgbClr val="BFCAD3"/>
-            </a:solidFill>
-            <a:prstDash val="solid"/>
-          </a:ln>
-        </p:spPr>
-      </p:sp>
-      <p:sp>
-        <p:nvSpPr>
-          <p:cNvPr id="7" name="Shape 5"/>
-          <p:cNvSpPr/>
-          <p:nvPr/>
-        </p:nvSpPr>
-        <p:spPr>
-          <a:xfrm>
-            <a:off x="1810512" y="2478024"/>
-            <a:ext cx="384048" cy="274320"/>
-          </a:xfrm>
-          <a:prstGeom prst="rect">
-            <a:avLst/>
-          </a:prstGeom>
-          <a:solidFill>
-            <a:srgbClr val="EAEEF2"/>
-          </a:solidFill>
-          <a:ln w="9525">
-            <a:solidFill>
-              <a:srgbClr val="BFCAD3"/>
-            </a:solidFill>
-            <a:prstDash val="solid"/>
-          </a:ln>
-        </p:spPr>
-      </p:sp>
-      <p:sp>
-        <p:nvSpPr>
-          <p:cNvPr id="8" name="Text 6"/>
-          <p:cNvSpPr/>
-          <p:nvPr/>
-        </p:nvSpPr>
-        <p:spPr>
-          <a:xfrm>
-            <a:off x="2505456" y="2478024"/>
-            <a:ext cx="1554480" cy="274320"/>
+          <p:cNvPr id="4" name="Text 2"/>
+          <p:cNvSpPr/>
+          <p:nvPr/>
+        </p:nvSpPr>
+        <p:spPr>
+          <a:xfrm>
+            <a:off x="658368" y="2194560"/>
+            <a:ext cx="8778240" cy="3566160"/>
           </a:xfrm>
           <a:prstGeom prst="rect">
             <a:avLst/>
@@ -11335,673 +11922,251 @@
           <a:ln/>
         </p:spPr>
         <p:txBody>
-          <a:bodyPr wrap="square" lIns="0" tIns="0" rIns="0" bIns="0" rtlCol="0" anchor="ctr"/>
+          <a:bodyPr wrap="square" lIns="0" tIns="0" rIns="0" bIns="0" rtlCol="0" anchor="t"/>
+          <a:lstStyle/>
+          <a:p>
+            <a:pPr marL="279400" indent="-279400">
+              <a:spcAft>
+                <a:spcPts val="1100"/>
+              </a:spcAft>
+              <a:buSzPct val="100000"/>
+              <a:buChar char="◊"/>
+            </a:pPr>
+            <a:r>
+              <a:rPr lang="en-US" sz="1500" dirty="0">
+                <a:solidFill>
+                  <a:srgbClr val="141C26"/>
+                </a:solidFill>
+                <a:latin typeface="Inter" pitchFamily="34" charset="0"/>
+                <a:ea typeface="Inter" pitchFamily="34" charset="-122"/>
+                <a:cs typeface="Inter" pitchFamily="34" charset="-120"/>
+              </a:rPr>
+              <a:t>Huit dimensions, chacune adossée à une question précise : exposition, concentration, menace, capacité de perturbation, résilience, coût de contournement, gouvernance, incertitude.</a:t>
+            </a:r>
+            <a:endParaRPr lang="en-US" sz="1500" dirty="0"/>
+          </a:p>
+          <a:p>
+            <a:pPr marL="279400" indent="-279400">
+              <a:spcAft>
+                <a:spcPts val="1100"/>
+              </a:spcAft>
+              <a:buSzPct val="100000"/>
+              <a:buChar char="◊"/>
+            </a:pPr>
+            <a:r>
+              <a:rPr lang="en-US" sz="1500" dirty="0">
+                <a:solidFill>
+                  <a:srgbClr val="141C26"/>
+                </a:solidFill>
+                <a:latin typeface="Inter" pitchFamily="34" charset="0"/>
+                <a:ea typeface="Inter" pitchFamily="34" charset="-122"/>
+                <a:cs typeface="Inter" pitchFamily="34" charset="-120"/>
+              </a:rPr>
+              <a:t>La même grille appliquée de la même façon partout — deux corridors deviennent comparables, et un même corridor comparable à lui-même six mois plus tard.</a:t>
+            </a:r>
+            <a:endParaRPr lang="en-US" sz="1500" dirty="0"/>
+          </a:p>
+          <a:p>
+            <a:pPr marL="279400" indent="-279400">
+              <a:spcAft>
+                <a:spcPts val="1100"/>
+              </a:spcAft>
+              <a:buSzPct val="100000"/>
+              <a:buChar char="◊"/>
+            </a:pPr>
+            <a:r>
+              <a:rPr lang="en-US" sz="1500" dirty="0">
+                <a:solidFill>
+                  <a:srgbClr val="141C26"/>
+                </a:solidFill>
+                <a:latin typeface="Inter" pitchFamily="34" charset="0"/>
+                <a:ea typeface="Inter" pitchFamily="34" charset="-122"/>
+                <a:cs typeface="Inter" pitchFamily="34" charset="-120"/>
+              </a:rPr>
+              <a:t>Une échelle qui suit l’offre : qualitative de bas à critique, puis 0–5 par dimension. L’agrégat 0–100 attend sa documentation méthodologique : il n’est pas calculé, donc pas servi.</a:t>
+            </a:r>
+            <a:endParaRPr lang="en-US" sz="1500" dirty="0"/>
+          </a:p>
+          <a:p>
+            <a:pPr marL="279400" indent="-279400">
+              <a:spcAft>
+                <a:spcPts val="1100"/>
+              </a:spcAft>
+              <a:buSzPct val="100000"/>
+              <a:buChar char="◊"/>
+            </a:pPr>
+            <a:r>
+              <a:rPr lang="en-US" sz="1500" dirty="0">
+                <a:solidFill>
+                  <a:srgbClr val="141C26"/>
+                </a:solidFill>
+                <a:latin typeface="Inter" pitchFamily="34" charset="0"/>
+                <a:ea typeface="Inter" pitchFamily="34" charset="-122"/>
+                <a:cs typeface="Inter" pitchFamily="34" charset="-120"/>
+              </a:rPr>
+              <a:t>Chaque score affiche ses sources, sa date, son niveau de confiance et ses incertitudes.</a:t>
+            </a:r>
+            <a:endParaRPr lang="en-US" sz="1500" dirty="0"/>
+          </a:p>
+          <a:p>
+            <a:pPr marL="279400" indent="-279400">
+              <a:spcAft>
+                <a:spcPts val="800"/>
+              </a:spcAft>
+              <a:buSzPct val="100000"/>
+              <a:buChar char="—"/>
+            </a:pPr>
+            <a:r>
+              <a:rPr lang="en-US" sz="1200" dirty="0">
+                <a:solidFill>
+                  <a:srgbClr val="5C6875"/>
+                </a:solidFill>
+                <a:latin typeface="Inter" pitchFamily="34" charset="0"/>
+                <a:ea typeface="Inter" pitchFamily="34" charset="-122"/>
+                <a:cs typeface="Inter" pitchFamily="34" charset="-120"/>
+              </a:rPr>
+              <a:t>Pas de score global 0–100 sans documentation méthodologique publiée.</a:t>
+            </a:r>
+            <a:endParaRPr lang="en-US" sz="1500" dirty="0"/>
+          </a:p>
+          <a:p>
+            <a:pPr marL="279400" indent="-279400">
+              <a:spcAft>
+                <a:spcPts val="800"/>
+              </a:spcAft>
+              <a:buSzPct val="100000"/>
+              <a:buChar char="—"/>
+            </a:pPr>
+            <a:r>
+              <a:rPr lang="en-US" sz="1200" dirty="0">
+                <a:solidFill>
+                  <a:srgbClr val="5C6875"/>
+                </a:solidFill>
+                <a:latin typeface="Inter" pitchFamily="34" charset="0"/>
+                <a:ea typeface="Inter" pitchFamily="34" charset="-122"/>
+                <a:cs typeface="Inter" pitchFamily="34" charset="-120"/>
+              </a:rPr>
+              <a:t>Ni prédiction, ni probabilité de rupture — nous n’en produisons pas.</a:t>
+            </a:r>
+            <a:endParaRPr lang="en-US" sz="1500" dirty="0"/>
+          </a:p>
+          <a:p>
+            <a:pPr marL="279400" indent="-279400">
+              <a:spcAft>
+                <a:spcPts val="800"/>
+              </a:spcAft>
+              <a:buSzPct val="100000"/>
+              <a:buChar char="—"/>
+            </a:pPr>
+            <a:r>
+              <a:rPr lang="en-US" sz="1200" dirty="0">
+                <a:solidFill>
+                  <a:srgbClr val="5C6875"/>
+                </a:solidFill>
+                <a:latin typeface="Inter" pitchFamily="34" charset="0"/>
+                <a:ea typeface="Inter" pitchFamily="34" charset="-122"/>
+                <a:cs typeface="Inter" pitchFamily="34" charset="-120"/>
+              </a:rPr>
+              <a:t>Aucune valeur navigationnelle ni juridique dans la géométrie des cartes.</a:t>
+            </a:r>
+            <a:endParaRPr lang="en-US" sz="1500" dirty="0"/>
+          </a:p>
+          <a:p>
+            <a:pPr marL="279400" indent="-279400">
+              <a:spcAft>
+                <a:spcPts val="800"/>
+              </a:spcAft>
+              <a:buSzPct val="100000"/>
+              <a:buChar char="—"/>
+            </a:pPr>
+            <a:r>
+              <a:rPr lang="en-US" sz="1200" dirty="0">
+                <a:solidFill>
+                  <a:srgbClr val="5C6875"/>
+                </a:solidFill>
+                <a:latin typeface="Inter" pitchFamily="34" charset="0"/>
+                <a:ea typeface="Inter" pitchFamily="34" charset="-122"/>
+                <a:cs typeface="Inter" pitchFamily="34" charset="-120"/>
+              </a:rPr>
+              <a:t>À cette date, 6 corridors instruits sur 313 portent les huit dimensions, 268 n’en portent que trois. La grille est appliquée partout ; elle n’est pas partout renseignée.</a:t>
+            </a:r>
+            <a:endParaRPr lang="en-US" sz="1500" dirty="0"/>
+          </a:p>
+        </p:txBody>
+      </p:sp>
+      <p:sp>
+        <p:nvSpPr>
+          <p:cNvPr id="5" name="Text 3"/>
+          <p:cNvSpPr/>
+          <p:nvPr/>
+        </p:nvSpPr>
+        <p:spPr>
+          <a:xfrm>
+            <a:off x="658368" y="5815584"/>
+            <a:ext cx="9774936" cy="548640"/>
+          </a:xfrm>
+          <a:prstGeom prst="rect">
+            <a:avLst/>
+          </a:prstGeom>
+          <a:noFill/>
+          <a:ln/>
+        </p:spPr>
+        <p:txBody>
+          <a:bodyPr wrap="square" lIns="0" tIns="0" rIns="0" bIns="0" rtlCol="0" anchor="b"/>
           <a:lstStyle/>
           <a:p>
             <a:pPr indent="0" marL="0">
               <a:buNone/>
             </a:pPr>
             <a:r>
-              <a:rPr lang="en-US" sz="1200" b="1" spc="100" kern="0" dirty="0">
-                <a:solidFill>
-                  <a:srgbClr val="167858"/>
+              <a:rPr lang="en-US" sz="1000" i="1" dirty="0">
+                <a:solidFill>
+                  <a:srgbClr val="5C6875"/>
+                </a:solidFill>
+                <a:latin typeface="Inter" pitchFamily="34" charset="0"/>
+                <a:ea typeface="Inter" pitchFamily="34" charset="-122"/>
+                <a:cs typeface="Inter" pitchFamily="34" charset="-120"/>
+              </a:rPr>
+              <a:t>Les lignes du bas comptent autant que celles du haut : un indice qui ne dit pas ses limites n’est pas un indice, c’est une opinion chiffrée.</a:t>
+            </a:r>
+            <a:endParaRPr lang="en-US" sz="1000" dirty="0"/>
+          </a:p>
+        </p:txBody>
+      </p:sp>
+      <p:sp>
+        <p:nvSpPr>
+          <p:cNvPr id="6" name="Text 4"/>
+          <p:cNvSpPr/>
+          <p:nvPr/>
+        </p:nvSpPr>
+        <p:spPr>
+          <a:xfrm>
+            <a:off x="10433304" y="6144768"/>
+            <a:ext cx="1097280" cy="274320"/>
+          </a:xfrm>
+          <a:prstGeom prst="rect">
+            <a:avLst/>
+          </a:prstGeom>
+          <a:noFill/>
+          <a:ln/>
+        </p:spPr>
+        <p:txBody>
+          <a:bodyPr wrap="square" lIns="0" tIns="0" rIns="0" bIns="0" rtlCol="0" anchor="ctr"/>
+          <a:lstStyle/>
+          <a:p>
+            <a:pPr algn="r" indent="0" marL="0">
+              <a:buNone/>
+            </a:pPr>
+            <a:r>
+              <a:rPr lang="en-US" sz="1000" dirty="0">
+                <a:solidFill>
+                  <a:srgbClr val="5C6875"/>
                 </a:solidFill>
                 <a:latin typeface="IBM Plex Mono" pitchFamily="34" charset="0"/>
                 <a:ea typeface="IBM Plex Mono" pitchFamily="34" charset="-122"/>
                 <a:cs typeface="IBM Plex Mono" pitchFamily="34" charset="-120"/>
               </a:rPr>
-              <a:t>BAS</a:t>
-            </a:r>
-            <a:endParaRPr lang="en-US" sz="1200" dirty="0"/>
-          </a:p>
-        </p:txBody>
-      </p:sp>
-      <p:sp>
-        <p:nvSpPr>
-          <p:cNvPr id="9" name="Text 7"/>
-          <p:cNvSpPr/>
-          <p:nvPr/>
-        </p:nvSpPr>
-        <p:spPr>
-          <a:xfrm>
-            <a:off x="4169664" y="2478024"/>
-            <a:ext cx="7360920" cy="274320"/>
-          </a:xfrm>
-          <a:prstGeom prst="rect">
-            <a:avLst/>
-          </a:prstGeom>
-          <a:noFill/>
-          <a:ln/>
-        </p:spPr>
-        <p:txBody>
-          <a:bodyPr wrap="square" lIns="0" tIns="0" rIns="0" bIns="0" rtlCol="0" anchor="ctr"/>
-          <a:lstStyle/>
-          <a:p>
-            <a:pPr indent="0" marL="0">
-              <a:buNone/>
-            </a:pPr>
-            <a:r>
-              <a:rPr lang="en-US" sz="1500" dirty="0">
-                <a:solidFill>
-                  <a:srgbClr val="141C26"/>
-                </a:solidFill>
-                <a:latin typeface="Inter" pitchFamily="34" charset="0"/>
-                <a:ea typeface="Inter" pitchFamily="34" charset="-122"/>
-                <a:cs typeface="Inter" pitchFamily="34" charset="-120"/>
-              </a:rPr>
-              <a:t>Alternatives crédibles, faible exposition.</a:t>
-            </a:r>
-            <a:endParaRPr lang="en-US" sz="1500" dirty="0"/>
-          </a:p>
-        </p:txBody>
-      </p:sp>
-      <p:sp>
-        <p:nvSpPr>
-          <p:cNvPr id="10" name="Shape 8"/>
-          <p:cNvSpPr/>
-          <p:nvPr/>
-        </p:nvSpPr>
-        <p:spPr>
-          <a:xfrm>
-            <a:off x="658368" y="3227832"/>
-            <a:ext cx="384048" cy="274320"/>
-          </a:xfrm>
-          <a:prstGeom prst="rect">
-            <a:avLst/>
-          </a:prstGeom>
-          <a:solidFill>
-            <a:srgbClr val="167858"/>
-          </a:solidFill>
-          <a:ln w="9525">
-            <a:solidFill>
-              <a:srgbClr val="BFCAD3"/>
-            </a:solidFill>
-            <a:prstDash val="solid"/>
-          </a:ln>
-        </p:spPr>
-      </p:sp>
-      <p:sp>
-        <p:nvSpPr>
-          <p:cNvPr id="11" name="Shape 9"/>
-          <p:cNvSpPr/>
-          <p:nvPr/>
-        </p:nvSpPr>
-        <p:spPr>
-          <a:xfrm>
-            <a:off x="1042416" y="3227832"/>
-            <a:ext cx="384048" cy="274320"/>
-          </a:xfrm>
-          <a:prstGeom prst="rect">
-            <a:avLst/>
-          </a:prstGeom>
-          <a:solidFill>
-            <a:srgbClr val="A8740E"/>
-          </a:solidFill>
-          <a:ln w="9525">
-            <a:solidFill>
-              <a:srgbClr val="BFCAD3"/>
-            </a:solidFill>
-            <a:prstDash val="solid"/>
-          </a:ln>
-        </p:spPr>
-      </p:sp>
-      <p:sp>
-        <p:nvSpPr>
-          <p:cNvPr id="12" name="Shape 10"/>
-          <p:cNvSpPr/>
-          <p:nvPr/>
-        </p:nvSpPr>
-        <p:spPr>
-          <a:xfrm>
-            <a:off x="1426464" y="3227832"/>
-            <a:ext cx="384048" cy="274320"/>
-          </a:xfrm>
-          <a:prstGeom prst="rect">
-            <a:avLst/>
-          </a:prstGeom>
-          <a:solidFill>
-            <a:srgbClr val="EAEEF2"/>
-          </a:solidFill>
-          <a:ln w="9525">
-            <a:solidFill>
-              <a:srgbClr val="BFCAD3"/>
-            </a:solidFill>
-            <a:prstDash val="solid"/>
-          </a:ln>
-        </p:spPr>
-      </p:sp>
-      <p:sp>
-        <p:nvSpPr>
-          <p:cNvPr id="13" name="Shape 11"/>
-          <p:cNvSpPr/>
-          <p:nvPr/>
-        </p:nvSpPr>
-        <p:spPr>
-          <a:xfrm>
-            <a:off x="1810512" y="3227832"/>
-            <a:ext cx="384048" cy="274320"/>
-          </a:xfrm>
-          <a:prstGeom prst="rect">
-            <a:avLst/>
-          </a:prstGeom>
-          <a:solidFill>
-            <a:srgbClr val="EAEEF2"/>
-          </a:solidFill>
-          <a:ln w="9525">
-            <a:solidFill>
-              <a:srgbClr val="BFCAD3"/>
-            </a:solidFill>
-            <a:prstDash val="solid"/>
-          </a:ln>
-        </p:spPr>
-      </p:sp>
-      <p:sp>
-        <p:nvSpPr>
-          <p:cNvPr id="14" name="Text 12"/>
-          <p:cNvSpPr/>
-          <p:nvPr/>
-        </p:nvSpPr>
-        <p:spPr>
-          <a:xfrm>
-            <a:off x="2505456" y="3227832"/>
-            <a:ext cx="1554480" cy="274320"/>
-          </a:xfrm>
-          <a:prstGeom prst="rect">
-            <a:avLst/>
-          </a:prstGeom>
-          <a:noFill/>
-          <a:ln/>
-        </p:spPr>
-        <p:txBody>
-          <a:bodyPr wrap="square" lIns="0" tIns="0" rIns="0" bIns="0" rtlCol="0" anchor="ctr"/>
-          <a:lstStyle/>
-          <a:p>
-            <a:pPr indent="0" marL="0">
-              <a:buNone/>
-            </a:pPr>
-            <a:r>
-              <a:rPr lang="en-US" sz="1200" b="1" spc="100" kern="0" dirty="0">
-                <a:solidFill>
-                  <a:srgbClr val="A8740E"/>
-                </a:solidFill>
-                <a:latin typeface="IBM Plex Mono" pitchFamily="34" charset="0"/>
-                <a:ea typeface="IBM Plex Mono" pitchFamily="34" charset="-122"/>
-                <a:cs typeface="IBM Plex Mono" pitchFamily="34" charset="-120"/>
-              </a:rPr>
-              <a:t>MODÉRÉ</a:t>
-            </a:r>
-            <a:endParaRPr lang="en-US" sz="1200" dirty="0"/>
-          </a:p>
-        </p:txBody>
-      </p:sp>
-      <p:sp>
-        <p:nvSpPr>
-          <p:cNvPr id="15" name="Text 13"/>
-          <p:cNvSpPr/>
-          <p:nvPr/>
-        </p:nvSpPr>
-        <p:spPr>
-          <a:xfrm>
-            <a:off x="4169664" y="3227832"/>
-            <a:ext cx="7360920" cy="274320"/>
-          </a:xfrm>
-          <a:prstGeom prst="rect">
-            <a:avLst/>
-          </a:prstGeom>
-          <a:noFill/>
-          <a:ln/>
-        </p:spPr>
-        <p:txBody>
-          <a:bodyPr wrap="square" lIns="0" tIns="0" rIns="0" bIns="0" rtlCol="0" anchor="ctr"/>
-          <a:lstStyle/>
-          <a:p>
-            <a:pPr indent="0" marL="0">
-              <a:buNone/>
-            </a:pPr>
-            <a:r>
-              <a:rPr lang="en-US" sz="1500" dirty="0">
-                <a:solidFill>
-                  <a:srgbClr val="141C26"/>
-                </a:solidFill>
-                <a:latin typeface="Inter" pitchFamily="34" charset="0"/>
-                <a:ea typeface="Inter" pitchFamily="34" charset="-122"/>
-                <a:cs typeface="Inter" pitchFamily="34" charset="-120"/>
-              </a:rPr>
-              <a:t>Dépendance réelle, contournement coûteux.</a:t>
-            </a:r>
-            <a:endParaRPr lang="en-US" sz="1500" dirty="0"/>
-          </a:p>
-        </p:txBody>
-      </p:sp>
-      <p:sp>
-        <p:nvSpPr>
-          <p:cNvPr id="16" name="Shape 14"/>
-          <p:cNvSpPr/>
-          <p:nvPr/>
-        </p:nvSpPr>
-        <p:spPr>
-          <a:xfrm>
-            <a:off x="658368" y="3977640"/>
-            <a:ext cx="384048" cy="274320"/>
-          </a:xfrm>
-          <a:prstGeom prst="rect">
-            <a:avLst/>
-          </a:prstGeom>
-          <a:solidFill>
-            <a:srgbClr val="167858"/>
-          </a:solidFill>
-          <a:ln w="9525">
-            <a:solidFill>
-              <a:srgbClr val="BFCAD3"/>
-            </a:solidFill>
-            <a:prstDash val="solid"/>
-          </a:ln>
-        </p:spPr>
-      </p:sp>
-      <p:sp>
-        <p:nvSpPr>
-          <p:cNvPr id="17" name="Shape 15"/>
-          <p:cNvSpPr/>
-          <p:nvPr/>
-        </p:nvSpPr>
-        <p:spPr>
-          <a:xfrm>
-            <a:off x="1042416" y="3977640"/>
-            <a:ext cx="384048" cy="274320"/>
-          </a:xfrm>
-          <a:prstGeom prst="rect">
-            <a:avLst/>
-          </a:prstGeom>
-          <a:solidFill>
-            <a:srgbClr val="A8740E"/>
-          </a:solidFill>
-          <a:ln w="9525">
-            <a:solidFill>
-              <a:srgbClr val="BFCAD3"/>
-            </a:solidFill>
-            <a:prstDash val="solid"/>
-          </a:ln>
-        </p:spPr>
-      </p:sp>
-      <p:sp>
-        <p:nvSpPr>
-          <p:cNvPr id="18" name="Shape 16"/>
-          <p:cNvSpPr/>
-          <p:nvPr/>
-        </p:nvSpPr>
-        <p:spPr>
-          <a:xfrm>
-            <a:off x="1426464" y="3977640"/>
-            <a:ext cx="384048" cy="274320"/>
-          </a:xfrm>
-          <a:prstGeom prst="rect">
-            <a:avLst/>
-          </a:prstGeom>
-          <a:solidFill>
-            <a:srgbClr val="C24E12"/>
-          </a:solidFill>
-          <a:ln w="9525">
-            <a:solidFill>
-              <a:srgbClr val="BFCAD3"/>
-            </a:solidFill>
-            <a:prstDash val="solid"/>
-          </a:ln>
-        </p:spPr>
-      </p:sp>
-      <p:sp>
-        <p:nvSpPr>
-          <p:cNvPr id="19" name="Shape 17"/>
-          <p:cNvSpPr/>
-          <p:nvPr/>
-        </p:nvSpPr>
-        <p:spPr>
-          <a:xfrm>
-            <a:off x="1810512" y="3977640"/>
-            <a:ext cx="384048" cy="274320"/>
-          </a:xfrm>
-          <a:prstGeom prst="rect">
-            <a:avLst/>
-          </a:prstGeom>
-          <a:solidFill>
-            <a:srgbClr val="EAEEF2"/>
-          </a:solidFill>
-          <a:ln w="9525">
-            <a:solidFill>
-              <a:srgbClr val="BFCAD3"/>
-            </a:solidFill>
-            <a:prstDash val="solid"/>
-          </a:ln>
-        </p:spPr>
-      </p:sp>
-      <p:sp>
-        <p:nvSpPr>
-          <p:cNvPr id="20" name="Text 18"/>
-          <p:cNvSpPr/>
-          <p:nvPr/>
-        </p:nvSpPr>
-        <p:spPr>
-          <a:xfrm>
-            <a:off x="2505456" y="3977640"/>
-            <a:ext cx="1554480" cy="274320"/>
-          </a:xfrm>
-          <a:prstGeom prst="rect">
-            <a:avLst/>
-          </a:prstGeom>
-          <a:noFill/>
-          <a:ln/>
-        </p:spPr>
-        <p:txBody>
-          <a:bodyPr wrap="square" lIns="0" tIns="0" rIns="0" bIns="0" rtlCol="0" anchor="ctr"/>
-          <a:lstStyle/>
-          <a:p>
-            <a:pPr indent="0" marL="0">
-              <a:buNone/>
-            </a:pPr>
-            <a:r>
-              <a:rPr lang="en-US" sz="1200" b="1" spc="100" kern="0" dirty="0">
-                <a:solidFill>
-                  <a:srgbClr val="C24E12"/>
-                </a:solidFill>
-                <a:latin typeface="IBM Plex Mono" pitchFamily="34" charset="0"/>
-                <a:ea typeface="IBM Plex Mono" pitchFamily="34" charset="-122"/>
-                <a:cs typeface="IBM Plex Mono" pitchFamily="34" charset="-120"/>
-              </a:rPr>
-              <a:t>ÉLEVÉ</a:t>
-            </a:r>
-            <a:endParaRPr lang="en-US" sz="1200" dirty="0"/>
-          </a:p>
-        </p:txBody>
-      </p:sp>
-      <p:sp>
-        <p:nvSpPr>
-          <p:cNvPr id="21" name="Text 19"/>
-          <p:cNvSpPr/>
-          <p:nvPr/>
-        </p:nvSpPr>
-        <p:spPr>
-          <a:xfrm>
-            <a:off x="4169664" y="3977640"/>
-            <a:ext cx="7360920" cy="274320"/>
-          </a:xfrm>
-          <a:prstGeom prst="rect">
-            <a:avLst/>
-          </a:prstGeom>
-          <a:noFill/>
-          <a:ln/>
-        </p:spPr>
-        <p:txBody>
-          <a:bodyPr wrap="square" lIns="0" tIns="0" rIns="0" bIns="0" rtlCol="0" anchor="ctr"/>
-          <a:lstStyle/>
-          <a:p>
-            <a:pPr indent="0" marL="0">
-              <a:buNone/>
-            </a:pPr>
-            <a:r>
-              <a:rPr lang="en-US" sz="1500" dirty="0">
-                <a:solidFill>
-                  <a:srgbClr val="141C26"/>
-                </a:solidFill>
-                <a:latin typeface="Inter" pitchFamily="34" charset="0"/>
-                <a:ea typeface="Inter" pitchFamily="34" charset="-122"/>
-                <a:cs typeface="Inter" pitchFamily="34" charset="-120"/>
-              </a:rPr>
-              <a:t>Peu d’alternatives, seuils proches.</a:t>
-            </a:r>
-            <a:endParaRPr lang="en-US" sz="1500" dirty="0"/>
-          </a:p>
-        </p:txBody>
-      </p:sp>
-      <p:sp>
-        <p:nvSpPr>
-          <p:cNvPr id="22" name="Shape 20"/>
-          <p:cNvSpPr/>
-          <p:nvPr/>
-        </p:nvSpPr>
-        <p:spPr>
-          <a:xfrm>
-            <a:off x="658368" y="4727448"/>
-            <a:ext cx="384048" cy="274320"/>
-          </a:xfrm>
-          <a:prstGeom prst="rect">
-            <a:avLst/>
-          </a:prstGeom>
-          <a:solidFill>
-            <a:srgbClr val="167858"/>
-          </a:solidFill>
-          <a:ln w="9525">
-            <a:solidFill>
-              <a:srgbClr val="BFCAD3"/>
-            </a:solidFill>
-            <a:prstDash val="solid"/>
-          </a:ln>
-        </p:spPr>
-      </p:sp>
-      <p:sp>
-        <p:nvSpPr>
-          <p:cNvPr id="23" name="Shape 21"/>
-          <p:cNvSpPr/>
-          <p:nvPr/>
-        </p:nvSpPr>
-        <p:spPr>
-          <a:xfrm>
-            <a:off x="1042416" y="4727448"/>
-            <a:ext cx="384048" cy="274320"/>
-          </a:xfrm>
-          <a:prstGeom prst="rect">
-            <a:avLst/>
-          </a:prstGeom>
-          <a:solidFill>
-            <a:srgbClr val="A8740E"/>
-          </a:solidFill>
-          <a:ln w="9525">
-            <a:solidFill>
-              <a:srgbClr val="BFCAD3"/>
-            </a:solidFill>
-            <a:prstDash val="solid"/>
-          </a:ln>
-        </p:spPr>
-      </p:sp>
-      <p:sp>
-        <p:nvSpPr>
-          <p:cNvPr id="24" name="Shape 22"/>
-          <p:cNvSpPr/>
-          <p:nvPr/>
-        </p:nvSpPr>
-        <p:spPr>
-          <a:xfrm>
-            <a:off x="1426464" y="4727448"/>
-            <a:ext cx="384048" cy="274320"/>
-          </a:xfrm>
-          <a:prstGeom prst="rect">
-            <a:avLst/>
-          </a:prstGeom>
-          <a:solidFill>
-            <a:srgbClr val="C24E12"/>
-          </a:solidFill>
-          <a:ln w="9525">
-            <a:solidFill>
-              <a:srgbClr val="BFCAD3"/>
-            </a:solidFill>
-            <a:prstDash val="solid"/>
-          </a:ln>
-        </p:spPr>
-      </p:sp>
-      <p:sp>
-        <p:nvSpPr>
-          <p:cNvPr id="25" name="Shape 23"/>
-          <p:cNvSpPr/>
-          <p:nvPr/>
-        </p:nvSpPr>
-        <p:spPr>
-          <a:xfrm>
-            <a:off x="1810512" y="4727448"/>
-            <a:ext cx="384048" cy="274320"/>
-          </a:xfrm>
-          <a:prstGeom prst="rect">
-            <a:avLst/>
-          </a:prstGeom>
-          <a:solidFill>
-            <a:srgbClr val="B82622"/>
-          </a:solidFill>
-          <a:ln w="9525">
-            <a:solidFill>
-              <a:srgbClr val="BFCAD3"/>
-            </a:solidFill>
-            <a:prstDash val="solid"/>
-          </a:ln>
-        </p:spPr>
-      </p:sp>
-      <p:sp>
-        <p:nvSpPr>
-          <p:cNvPr id="26" name="Text 24"/>
-          <p:cNvSpPr/>
-          <p:nvPr/>
-        </p:nvSpPr>
-        <p:spPr>
-          <a:xfrm>
-            <a:off x="2505456" y="4727448"/>
-            <a:ext cx="1554480" cy="274320"/>
-          </a:xfrm>
-          <a:prstGeom prst="rect">
-            <a:avLst/>
-          </a:prstGeom>
-          <a:noFill/>
-          <a:ln/>
-        </p:spPr>
-        <p:txBody>
-          <a:bodyPr wrap="square" lIns="0" tIns="0" rIns="0" bIns="0" rtlCol="0" anchor="ctr"/>
-          <a:lstStyle/>
-          <a:p>
-            <a:pPr indent="0" marL="0">
-              <a:buNone/>
-            </a:pPr>
-            <a:r>
-              <a:rPr lang="en-US" sz="1200" b="1" spc="100" kern="0" dirty="0">
-                <a:solidFill>
-                  <a:srgbClr val="B82622"/>
-                </a:solidFill>
-                <a:latin typeface="IBM Plex Mono" pitchFamily="34" charset="0"/>
-                <a:ea typeface="IBM Plex Mono" pitchFamily="34" charset="-122"/>
-                <a:cs typeface="IBM Plex Mono" pitchFamily="34" charset="-120"/>
-              </a:rPr>
-              <a:t>CRITIQUE</a:t>
-            </a:r>
-            <a:endParaRPr lang="en-US" sz="1200" dirty="0"/>
-          </a:p>
-        </p:txBody>
-      </p:sp>
-      <p:sp>
-        <p:nvSpPr>
-          <p:cNvPr id="27" name="Text 25"/>
-          <p:cNvSpPr/>
-          <p:nvPr/>
-        </p:nvSpPr>
-        <p:spPr>
-          <a:xfrm>
-            <a:off x="4169664" y="4727448"/>
-            <a:ext cx="7360920" cy="274320"/>
-          </a:xfrm>
-          <a:prstGeom prst="rect">
-            <a:avLst/>
-          </a:prstGeom>
-          <a:noFill/>
-          <a:ln/>
-        </p:spPr>
-        <p:txBody>
-          <a:bodyPr wrap="square" lIns="0" tIns="0" rIns="0" bIns="0" rtlCol="0" anchor="ctr"/>
-          <a:lstStyle/>
-          <a:p>
-            <a:pPr indent="0" marL="0">
-              <a:buNone/>
-            </a:pPr>
-            <a:r>
-              <a:rPr lang="en-US" sz="1500" dirty="0">
-                <a:solidFill>
-                  <a:srgbClr val="141C26"/>
-                </a:solidFill>
-                <a:latin typeface="Inter" pitchFamily="34" charset="0"/>
-                <a:ea typeface="Inter" pitchFamily="34" charset="-122"/>
-                <a:cs typeface="Inter" pitchFamily="34" charset="-120"/>
-              </a:rPr>
-              <a:t>Concentration extrême, perturbation systémique.</a:t>
-            </a:r>
-            <a:endParaRPr lang="en-US" sz="1500" dirty="0"/>
-          </a:p>
-        </p:txBody>
-      </p:sp>
-      <p:sp>
-        <p:nvSpPr>
-          <p:cNvPr id="28" name="Text 26"/>
-          <p:cNvSpPr/>
-          <p:nvPr/>
-        </p:nvSpPr>
-        <p:spPr>
-          <a:xfrm>
-            <a:off x="658368" y="5815584"/>
-            <a:ext cx="9774936" cy="548640"/>
-          </a:xfrm>
-          <a:prstGeom prst="rect">
-            <a:avLst/>
-          </a:prstGeom>
-          <a:noFill/>
-          <a:ln/>
-        </p:spPr>
-        <p:txBody>
-          <a:bodyPr wrap="square" lIns="0" tIns="0" rIns="0" bIns="0" rtlCol="0" anchor="b"/>
-          <a:lstStyle/>
-          <a:p>
-            <a:pPr indent="0" marL="0">
-              <a:buNone/>
-            </a:pPr>
-            <a:r>
-              <a:rPr lang="en-US" sz="1000" i="1" dirty="0">
-                <a:solidFill>
-                  <a:srgbClr val="5C6875"/>
-                </a:solidFill>
-                <a:latin typeface="Inter" pitchFamily="34" charset="0"/>
-                <a:ea typeface="Inter" pitchFamily="34" charset="-122"/>
-                <a:cs typeface="Inter" pitchFamily="34" charset="-120"/>
-              </a:rPr>
-              <a:t>Huit dimensions. Chaque score affiche ses sources, sa date, son niveau de confiance et ses incertitudes.</a:t>
-            </a:r>
-            <a:endParaRPr lang="en-US" sz="1000" dirty="0"/>
-          </a:p>
-        </p:txBody>
-      </p:sp>
-      <p:sp>
-        <p:nvSpPr>
-          <p:cNvPr id="29" name="Text 27"/>
-          <p:cNvSpPr/>
-          <p:nvPr/>
-        </p:nvSpPr>
-        <p:spPr>
-          <a:xfrm>
-            <a:off x="10433304" y="6144768"/>
-            <a:ext cx="1097280" cy="274320"/>
-          </a:xfrm>
-          <a:prstGeom prst="rect">
-            <a:avLst/>
-          </a:prstGeom>
-          <a:noFill/>
-          <a:ln/>
-        </p:spPr>
-        <p:txBody>
-          <a:bodyPr wrap="square" lIns="0" tIns="0" rIns="0" bIns="0" rtlCol="0" anchor="ctr"/>
-          <a:lstStyle/>
-          <a:p>
-            <a:pPr algn="r" indent="0" marL="0">
-              <a:buNone/>
-            </a:pPr>
-            <a:r>
-              <a:rPr lang="en-US" sz="1000" dirty="0">
-                <a:solidFill>
-                  <a:srgbClr val="5C6875"/>
-                </a:solidFill>
-                <a:latin typeface="IBM Plex Mono" pitchFamily="34" charset="0"/>
-                <a:ea typeface="IBM Plex Mono" pitchFamily="34" charset="-122"/>
-                <a:cs typeface="IBM Plex Mono" pitchFamily="34" charset="-120"/>
-              </a:rPr>
-              <a:t>07 / 16</a:t>
+              <a:t>07 / 15</a:t>
             </a:r>
             <a:endParaRPr lang="en-US" sz="1000" dirty="0"/>
           </a:p>
@@ -12072,7 +12237,7 @@
                 <a:ea typeface="IBM Plex Mono" pitchFamily="34" charset="-122"/>
                 <a:cs typeface="IBM Plex Mono" pitchFamily="34" charset="-120"/>
               </a:rPr>
-              <a:t>MÉTHODE CVI</a:t>
+              <a:t>HDDE</a:t>
             </a:r>
             <a:endParaRPr lang="en-US" sz="1000" dirty="0"/>
           </a:p>
@@ -12114,7 +12279,7 @@
                 <a:ea typeface="Fraunces" pitchFamily="34" charset="-122"/>
                 <a:cs typeface="Fraunces" pitchFamily="34" charset="-120"/>
               </a:rPr>
-              <a:t>Ce que le CVI établit</a:t>
+              <a:t>Révéler les dépendances cachées d’une entreprise</a:t>
             </a:r>
             <a:endParaRPr lang="en-US" sz="3400" dirty="0"/>
           </a:p>
@@ -12157,7 +12322,7 @@
                 <a:ea typeface="Inter" pitchFamily="34" charset="-122"/>
                 <a:cs typeface="Inter" pitchFamily="34" charset="-120"/>
               </a:rPr>
-              <a:t>Huit dimensions, chacune adossée à une question précise : exposition, concentration, menace, capacité de perturbation, résilience, coût de contournement, gouvernance, incertitude.</a:t>
+              <a:t>Entretien guidé en onze temps, du cadrage du cas à la synthèse traçable.</a:t>
             </a:r>
             <a:endParaRPr lang="en-US" sz="1500" dirty="0"/>
           </a:p>
@@ -12178,7 +12343,7 @@
                 <a:ea typeface="Inter" pitchFamily="34" charset="-122"/>
                 <a:cs typeface="Inter" pitchFamily="34" charset="-120"/>
               </a:rPr>
-              <a:t>La même grille appliquée de la même façon partout — deux corridors deviennent comparables, et un même corridor comparable à lui-même six mois plus tard.</a:t>
+              <a:t>Neuf dimensions de diagnostic notées 0–5, de la dépendance cachée à la préparation décisionnelle.</a:t>
             </a:r>
             <a:endParaRPr lang="en-US" sz="1500" dirty="0"/>
           </a:p>
@@ -12199,7 +12364,7 @@
                 <a:ea typeface="Inter" pitchFamily="34" charset="-122"/>
                 <a:cs typeface="Inter" pitchFamily="34" charset="-120"/>
               </a:rPr>
-              <a:t>Une échelle qui suit l’offre : qualitative de bas à critique, puis 0–5 par dimension, puis agrégée.</a:t>
+              <a:t>Échelle de preuve 0–5 : une source officielle vaut 5, une suggestion LLM vaut 1 et n’est pas recevable.</a:t>
             </a:r>
             <a:endParaRPr lang="en-US" sz="1500" dirty="0"/>
           </a:p>
@@ -12220,20 +12385,38 @@
                 <a:ea typeface="Inter" pitchFamily="34" charset="-122"/>
                 <a:cs typeface="Inter" pitchFamily="34" charset="-120"/>
               </a:rPr>
-              <a:t>Chaque score affiche ses sources, sa date, son niveau de confiance et ses incertitudes.</a:t>
+              <a:t>Red team contradictoire avant conclusion, puis packet de diagnostic, source par source.</a:t>
             </a:r>
             <a:endParaRPr lang="en-US" sz="1500" dirty="0"/>
           </a:p>
-          <a:p>
-            <a:pPr marL="279400" indent="-279400">
-              <a:spcAft>
-                <a:spcPts val="800"/>
-              </a:spcAft>
-              <a:buSzPct val="100000"/>
-              <a:buChar char="—"/>
-            </a:pPr>
-            <a:r>
-              <a:rPr lang="en-US" sz="1200" dirty="0">
+        </p:txBody>
+      </p:sp>
+      <p:sp>
+        <p:nvSpPr>
+          <p:cNvPr id="5" name="Text 3"/>
+          <p:cNvSpPr/>
+          <p:nvPr/>
+        </p:nvSpPr>
+        <p:spPr>
+          <a:xfrm>
+            <a:off x="658368" y="5815584"/>
+            <a:ext cx="9774936" cy="548640"/>
+          </a:xfrm>
+          <a:prstGeom prst="rect">
+            <a:avLst/>
+          </a:prstGeom>
+          <a:noFill/>
+          <a:ln/>
+        </p:spPr>
+        <p:txBody>
+          <a:bodyPr wrap="square" lIns="0" tIns="0" rIns="0" bIns="0" rtlCol="0" anchor="b"/>
+          <a:lstStyle/>
+          <a:p>
+            <a:pPr indent="0" marL="0">
+              <a:buNone/>
+            </a:pPr>
+            <a:r>
+              <a:rPr lang="en-US" sz="1000" i="1" dirty="0">
                 <a:solidFill>
                   <a:srgbClr val="5C6875"/>
                 </a:solidFill>
@@ -12241,88 +12424,7 @@
                 <a:ea typeface="Inter" pitchFamily="34" charset="-122"/>
                 <a:cs typeface="Inter" pitchFamily="34" charset="-120"/>
               </a:rPr>
-              <a:t>Pas de score global 0–100 sans documentation méthodologique publiée.</a:t>
-            </a:r>
-            <a:endParaRPr lang="en-US" sz="1500" dirty="0"/>
-          </a:p>
-          <a:p>
-            <a:pPr marL="279400" indent="-279400">
-              <a:spcAft>
-                <a:spcPts val="800"/>
-              </a:spcAft>
-              <a:buSzPct val="100000"/>
-              <a:buChar char="—"/>
-            </a:pPr>
-            <a:r>
-              <a:rPr lang="en-US" sz="1200" dirty="0">
-                <a:solidFill>
-                  <a:srgbClr val="5C6875"/>
-                </a:solidFill>
-                <a:latin typeface="Inter" pitchFamily="34" charset="0"/>
-                <a:ea typeface="Inter" pitchFamily="34" charset="-122"/>
-                <a:cs typeface="Inter" pitchFamily="34" charset="-120"/>
-              </a:rPr>
-              <a:t>Ni prédiction, ni probabilité de rupture — nous n’en produisons pas.</a:t>
-            </a:r>
-            <a:endParaRPr lang="en-US" sz="1500" dirty="0"/>
-          </a:p>
-          <a:p>
-            <a:pPr marL="279400" indent="-279400">
-              <a:spcAft>
-                <a:spcPts val="800"/>
-              </a:spcAft>
-              <a:buSzPct val="100000"/>
-              <a:buChar char="—"/>
-            </a:pPr>
-            <a:r>
-              <a:rPr lang="en-US" sz="1200" dirty="0">
-                <a:solidFill>
-                  <a:srgbClr val="5C6875"/>
-                </a:solidFill>
-                <a:latin typeface="Inter" pitchFamily="34" charset="0"/>
-                <a:ea typeface="Inter" pitchFamily="34" charset="-122"/>
-                <a:cs typeface="Inter" pitchFamily="34" charset="-120"/>
-              </a:rPr>
-              <a:t>Aucune valeur navigationnelle ni juridique dans la géométrie des cartes.</a:t>
-            </a:r>
-            <a:endParaRPr lang="en-US" sz="1500" dirty="0"/>
-          </a:p>
-        </p:txBody>
-      </p:sp>
-      <p:sp>
-        <p:nvSpPr>
-          <p:cNvPr id="5" name="Text 3"/>
-          <p:cNvSpPr/>
-          <p:nvPr/>
-        </p:nvSpPr>
-        <p:spPr>
-          <a:xfrm>
-            <a:off x="658368" y="5815584"/>
-            <a:ext cx="9774936" cy="548640"/>
-          </a:xfrm>
-          <a:prstGeom prst="rect">
-            <a:avLst/>
-          </a:prstGeom>
-          <a:noFill/>
-          <a:ln/>
-        </p:spPr>
-        <p:txBody>
-          <a:bodyPr wrap="square" lIns="0" tIns="0" rIns="0" bIns="0" rtlCol="0" anchor="b"/>
-          <a:lstStyle/>
-          <a:p>
-            <a:pPr indent="0" marL="0">
-              <a:buNone/>
-            </a:pPr>
-            <a:r>
-              <a:rPr lang="en-US" sz="1000" i="1" dirty="0">
-                <a:solidFill>
-                  <a:srgbClr val="5C6875"/>
-                </a:solidFill>
-                <a:latin typeface="Inter" pitchFamily="34" charset="0"/>
-                <a:ea typeface="Inter" pitchFamily="34" charset="-122"/>
-                <a:cs typeface="Inter" pitchFamily="34" charset="-120"/>
-              </a:rPr>
-              <a:t>Les trois dernières lignes comptent autant que les quatre premières : un indice qui ne dit pas ses limites n’est pas un indice, c’est une opinion chiffrée.</a:t>
+              <a:t>Cockpit d’entretien accessible par compte analyste, exports FR/EN.</a:t>
             </a:r>
             <a:endParaRPr lang="en-US" sz="1000" dirty="0"/>
           </a:p>
@@ -12361,7 +12463,7 @@
                 <a:ea typeface="IBM Plex Mono" pitchFamily="34" charset="-122"/>
                 <a:cs typeface="IBM Plex Mono" pitchFamily="34" charset="-120"/>
               </a:rPr>
-              <a:t>08 / 16</a:t>
+              <a:t>08 / 15</a:t>
             </a:r>
             <a:endParaRPr lang="en-US" sz="1000" dirty="0"/>
           </a:p>
@@ -12432,7 +12534,7 @@
                 <a:ea typeface="IBM Plex Mono" pitchFamily="34" charset="-122"/>
                 <a:cs typeface="IBM Plex Mono" pitchFamily="34" charset="-120"/>
               </a:rPr>
-              <a:t>HDDE</a:t>
+              <a:t>VERDICT — OFFRE PREMIUM</a:t>
             </a:r>
             <a:endParaRPr lang="en-US" sz="1000" dirty="0"/>
           </a:p>
@@ -12474,7 +12576,7 @@
                 <a:ea typeface="Fraunces" pitchFamily="34" charset="-122"/>
                 <a:cs typeface="Fraunces" pitchFamily="34" charset="-120"/>
               </a:rPr>
-              <a:t>Révéler les dépendances cachées d’une entreprise</a:t>
+              <a:t>Passer du diagnostic à l’arbitrage</a:t>
             </a:r>
             <a:endParaRPr lang="en-US" sz="3400" dirty="0"/>
           </a:p>
@@ -12517,7 +12619,7 @@
                 <a:ea typeface="Inter" pitchFamily="34" charset="-122"/>
                 <a:cs typeface="Inter" pitchFamily="34" charset="-120"/>
               </a:rPr>
-              <a:t>Entretien guidé en onze temps, du cadrage du cas à la synthèse traçable.</a:t>
+              <a:t>Sept temps V·E·R·D·I·C·T, de « voir la situation réelle » à la décision tenue.</a:t>
             </a:r>
             <a:endParaRPr lang="en-US" sz="1500" dirty="0"/>
           </a:p>
@@ -12538,7 +12640,7 @@
                 <a:ea typeface="Inter" pitchFamily="34" charset="-122"/>
                 <a:cs typeface="Inter" pitchFamily="34" charset="-120"/>
               </a:rPr>
-              <a:t>Neuf dimensions de diagnostic notées 0–5, de la dépendance cachée à la préparation décisionnelle.</a:t>
+              <a:t>Au moins trois options obligatoires : la principale, une alternative minimale, et l’opposée ou la non-action.</a:t>
             </a:r>
             <a:endParaRPr lang="en-US" sz="1500" dirty="0"/>
           </a:p>
@@ -12559,7 +12661,7 @@
                 <a:ea typeface="Inter" pitchFamily="34" charset="-122"/>
                 <a:cs typeface="Inter" pitchFamily="34" charset="-120"/>
               </a:rPr>
-              <a:t>Échelle de preuve 0–5 : une source officielle vaut 5, une suggestion LLM vaut 1 et n’est pas recevable.</a:t>
+              <a:t>Sept critères pondérés sur 100, échelle de preuve 0–5, audit des vetos durs.</a:t>
             </a:r>
             <a:endParaRPr lang="en-US" sz="1500" dirty="0"/>
           </a:p>
@@ -12580,7 +12682,7 @@
                 <a:ea typeface="Inter" pitchFamily="34" charset="-122"/>
                 <a:cs typeface="Inter" pitchFamily="34" charset="-120"/>
               </a:rPr>
-              <a:t>Red team contradictoire avant conclusion, puis packet de diagnostic, source par source.</a:t>
+              <a:t>Quatre verdicts possibles : FAIRE, TESTER, DIFFÉRER, ABANDONNER.</a:t>
             </a:r>
             <a:endParaRPr lang="en-US" sz="1500" dirty="0"/>
           </a:p>
@@ -12619,7 +12721,7 @@
                 <a:ea typeface="Inter" pitchFamily="34" charset="-122"/>
                 <a:cs typeface="Inter" pitchFamily="34" charset="-120"/>
               </a:rPr>
-              <a:t>Cockpit d’entretien accessible par compte analyste, exports FR/EN.</a:t>
+              <a:t>PESTEL, SWOT et Business Model Canvas y sont transformés pour la décision, pas juxtaposés. Le score n’est pas la décision.</a:t>
             </a:r>
             <a:endParaRPr lang="en-US" sz="1000" dirty="0"/>
           </a:p>
@@ -12658,7 +12760,7 @@
                 <a:ea typeface="IBM Plex Mono" pitchFamily="34" charset="-122"/>
                 <a:cs typeface="IBM Plex Mono" pitchFamily="34" charset="-120"/>
               </a:rPr>
-              <a:t>09 / 16</a:t>
+              <a:t>09 / 15</a:t>
             </a:r>
             <a:endParaRPr lang="en-US" sz="1000" dirty="0"/>
           </a:p>

--- a/presentations/commercial/fr/commercial.fr.pptx
+++ b/presentations/commercial/fr/commercial.fr.pptx
@@ -2735,7 +2735,7 @@
                 <a:ea typeface="IBM Plex Mono" pitchFamily="34" charset="-122"/>
                 <a:cs typeface="IBM Plex Mono" pitchFamily="34" charset="-120"/>
               </a:rPr>
-              <a:t>PLAQUETTE · FR · 2026-08-10</a:t>
+              <a:t>PLAQUETTE · FR · 2026-08-21</a:t>
             </a:r>
             <a:endParaRPr lang="en-US" sz="1000" dirty="0"/>
           </a:p>
@@ -10563,7 +10563,7 @@
                 <a:ea typeface="Fraunces" pitchFamily="34" charset="-122"/>
                 <a:cs typeface="Fraunces" pitchFamily="34" charset="-120"/>
               </a:rPr>
-              <a:t>313</a:t>
+              <a:t>334</a:t>
             </a:r>
             <a:endParaRPr lang="en-US" sz="5400" dirty="0"/>
           </a:p>
@@ -10664,7 +10664,7 @@
                 <a:ea typeface="Fraunces" pitchFamily="34" charset="-122"/>
                 <a:cs typeface="Fraunces" pitchFamily="34" charset="-120"/>
               </a:rPr>
-              <a:t>190</a:t>
+              <a:t>330</a:t>
             </a:r>
             <a:endParaRPr lang="en-US" sz="5400" dirty="0"/>
           </a:p>
@@ -11746,7 +11746,7 @@
                 <a:ea typeface="Inter" pitchFamily="34" charset="-122"/>
                 <a:cs typeface="Inter" pitchFamily="34" charset="-120"/>
               </a:rPr>
-              <a:t>Huit dimensions. Chaque score affiche ses sources, sa date, son niveau de confiance et ses incertitudes. L’échelle dit ce que la grille peut établir, pas où en est la base : à cette date, les 313 corridors instruits sont tous en bande critique.</a:t>
+              <a:t>Huit dimensions. Chaque score affiche ses sources, sa date, son niveau de confiance et ses incertitudes. L’échelle dit ce que la grille peut établir, pas où en est la base : à cette date, les 334 corridors instruits se répartissent sur les quatre bandes — 127 critique, 137 élevé, 65 modéré, 5 bas.</a:t>
             </a:r>
             <a:endParaRPr lang="en-US" sz="1000" dirty="0"/>
           </a:p>
@@ -12088,7 +12088,7 @@
                 <a:ea typeface="Inter" pitchFamily="34" charset="-122"/>
                 <a:cs typeface="Inter" pitchFamily="34" charset="-120"/>
               </a:rPr>
-              <a:t>À cette date, 6 corridors instruits sur 313 portent les huit dimensions, 268 n’en portent que trois. La grille est appliquée partout ; elle n’est pas partout renseignée.</a:t>
+              <a:t>À cette date, 5 corridors instruits sur 334 portent les huit dimensions ; 275 n’en portent que deux. La grille est appliquée partout ; elle n’est pas partout renseignée.</a:t>
             </a:r>
             <a:endParaRPr lang="en-US" sz="1500" dirty="0"/>
           </a:p>
